--- a/output/wordlabs-teach-3day.pptx
+++ b/output/wordlabs-teach-3day.pptx
@@ -4240,7 +4240,7 @@
                 <a:ea typeface="Calibri" pitchFamily="34" charset="-122"/>
                 <a:cs typeface="Calibri" pitchFamily="34" charset="-120"/>
               </a:rPr>
-              <a:t>"to show or instruct others"</a:t>
+              <a:t>"to show or instruct"</a:t>
             </a:r>
             <a:endParaRPr lang="en-US" sz="2200" dirty="0"/>
           </a:p>
@@ -4279,7 +4279,7 @@
                 <a:ea typeface="Calibri" pitchFamily="34" charset="-122"/>
                 <a:cs typeface="Calibri" pitchFamily="34" charset="-120"/>
               </a:rPr>
-              <a:t>Origin: Latin: docere</a:t>
+              <a:t>Origin: Old English: tæcan</a:t>
             </a:r>
             <a:endParaRPr lang="en-US" sz="1300" dirty="0"/>
           </a:p>
@@ -5288,7 +5288,7 @@
                 <a:ea typeface="Calibri" pitchFamily="34" charset="-122"/>
                 <a:cs typeface="Calibri" pitchFamily="34" charset="-120"/>
               </a:rPr>
-              <a:t>Word Labs  •  wordlabs.app  •  Root: 'teach' = to show or instruct others</a:t>
+              <a:t>Word Labs  •  wordlabs.app  •  Root: 'teach' = to show or instruct</a:t>
             </a:r>
             <a:endParaRPr lang="en-US" sz="800" dirty="0"/>
           </a:p>
@@ -5928,7 +5928,7 @@
                 <a:ea typeface="Calibri" pitchFamily="34" charset="-122"/>
                 <a:cs typeface="Calibri" pitchFamily="34" charset="-120"/>
               </a:rPr>
-              <a:t>Word Labs  •  wordlabs.app  •  Root: 'teach' = to show or instruct others</a:t>
+              <a:t>Word Labs  •  wordlabs.app  •  Root: 'teach' = to show or instruct</a:t>
             </a:r>
             <a:endParaRPr lang="en-US" sz="800" dirty="0"/>
           </a:p>
@@ -6040,7 +6040,7 @@
                 <a:ea typeface="Calibri" pitchFamily="34" charset="-122"/>
                 <a:cs typeface="Calibri" pitchFamily="34" charset="-120"/>
               </a:rPr>
-              <a:t>The </a:t>
+              <a:t>Our </a:t>
             </a:r>
             <a:pPr algn="l" indent="0" marL="0">
               <a:buNone/>
@@ -6057,7 +6057,7 @@
                 <a:ea typeface="Calibri" pitchFamily="34" charset="-122"/>
                 <a:cs typeface="Calibri" pitchFamily="34" charset="-120"/>
               </a:rPr>
-              <a:t>teaching</a:t>
+              <a:t>teacher</a:t>
             </a:r>
             <a:pPr algn="l" indent="0" marL="0">
               <a:buNone/>
@@ -6071,7 +6071,7 @@
                 <a:ea typeface="Calibri" pitchFamily="34" charset="-122"/>
                 <a:cs typeface="Calibri" pitchFamily="34" charset="-120"/>
               </a:rPr>
-              <a:t> was so clear that even the most difficult ideas felt </a:t>
+              <a:t> said that </a:t>
             </a:r>
             <a:pPr algn="l" indent="0" marL="0">
               <a:buNone/>
@@ -6088,7 +6088,7 @@
                 <a:ea typeface="Calibri" pitchFamily="34" charset="-122"/>
                 <a:cs typeface="Calibri" pitchFamily="34" charset="-120"/>
               </a:rPr>
-              <a:t>teachable</a:t>
+              <a:t>reteaching</a:t>
             </a:r>
             <a:pPr algn="l" indent="0" marL="0">
               <a:buNone/>
@@ -6102,7 +6102,7 @@
                 <a:ea typeface="Calibri" pitchFamily="34" charset="-122"/>
                 <a:cs typeface="Calibri" pitchFamily="34" charset="-120"/>
               </a:rPr>
-              <a:t>.</a:t>
+              <a:t> the lesson would help everyone understand.</a:t>
             </a:r>
             <a:endParaRPr lang="en-US" sz="1800" dirty="0"/>
           </a:p>
@@ -6257,7 +6257,7 @@
                 <a:ea typeface="Trebuchet MS" pitchFamily="34" charset="-122"/>
                 <a:cs typeface="Trebuchet MS" pitchFamily="34" charset="-120"/>
               </a:rPr>
-              <a:t>teaching</a:t>
+              <a:t>teacher</a:t>
             </a:r>
             <a:endParaRPr lang="en-US" sz="1400" dirty="0"/>
           </a:p>
@@ -6385,7 +6385,7 @@
                 <a:ea typeface="Trebuchet MS" pitchFamily="34" charset="-122"/>
                 <a:cs typeface="Trebuchet MS" pitchFamily="34" charset="-120"/>
               </a:rPr>
-              <a:t>teachable</a:t>
+              <a:t>reteaching</a:t>
             </a:r>
             <a:endParaRPr lang="en-US" sz="1400" dirty="0"/>
           </a:p>
@@ -6716,7 +6716,7 @@
                 <a:ea typeface="Calibri" pitchFamily="34" charset="-122"/>
                 <a:cs typeface="Calibri" pitchFamily="34" charset="-120"/>
               </a:rPr>
-              <a:t>Word Labs  •  wordlabs.app  •  Root: 'teach' = to show or instruct others</a:t>
+              <a:t>Word Labs  •  wordlabs.app  •  Root: 'teach' = to show or instruct</a:t>
             </a:r>
             <a:endParaRPr lang="en-US" sz="800" dirty="0"/>
           </a:p>
@@ -6855,7 +6855,7 @@
                 <a:ea typeface="Trebuchet MS" pitchFamily="34" charset="-122"/>
                 <a:cs typeface="Trebuchet MS" pitchFamily="34" charset="-120"/>
               </a:rPr>
-              <a:t>teaching</a:t>
+              <a:t>teacher</a:t>
             </a:r>
             <a:endParaRPr lang="en-US" sz="2800" dirty="0"/>
           </a:p>
@@ -7543,7 +7543,7 @@
                 <a:ea typeface="Calibri" pitchFamily="34" charset="-122"/>
                 <a:cs typeface="Calibri" pitchFamily="34" charset="-120"/>
               </a:rPr>
-              <a:t>Word Labs  •  wordlabs.app  •  Root: 'teach' = to show or instruct others</a:t>
+              <a:t>Word Labs  •  wordlabs.app  •  Root: 'teach' = to show or instruct</a:t>
             </a:r>
             <a:endParaRPr lang="en-US" sz="800" dirty="0"/>
           </a:p>
@@ -7682,7 +7682,7 @@
                 <a:ea typeface="Trebuchet MS" pitchFamily="34" charset="-122"/>
                 <a:cs typeface="Trebuchet MS" pitchFamily="34" charset="-120"/>
               </a:rPr>
-              <a:t>teaching</a:t>
+              <a:t>teacher</a:t>
             </a:r>
             <a:endParaRPr lang="en-US" sz="2800" dirty="0"/>
           </a:p>
@@ -7860,7 +7860,7 @@
                 <a:ea typeface="Calibri" pitchFamily="34" charset="-122"/>
                 <a:cs typeface="Calibri" pitchFamily="34" charset="-120"/>
               </a:rPr>
-              <a:t>to instruct or show</a:t>
+              <a:t>to show or instruct</a:t>
             </a:r>
             <a:endParaRPr lang="en-US" sz="850" dirty="0"/>
           </a:p>
@@ -7933,7 +7933,7 @@
                 <a:ea typeface="Trebuchet MS" pitchFamily="34" charset="-122"/>
                 <a:cs typeface="Trebuchet MS" pitchFamily="34" charset="-120"/>
               </a:rPr>
-              <a:t>ing</a:t>
+              <a:t>er</a:t>
             </a:r>
             <a:endParaRPr lang="en-US" sz="1300" dirty="0"/>
           </a:p>
@@ -7972,7 +7972,7 @@
                 <a:ea typeface="Calibri" pitchFamily="34" charset="-122"/>
                 <a:cs typeface="Calibri" pitchFamily="34" charset="-120"/>
               </a:rPr>
-              <a:t>action or process</a:t>
+              <a:t>a person who does something</a:t>
             </a:r>
             <a:endParaRPr lang="en-US" sz="850" dirty="0"/>
           </a:p>
@@ -8528,7 +8528,7 @@
                 <a:ea typeface="Calibri" pitchFamily="34" charset="-122"/>
                 <a:cs typeface="Calibri" pitchFamily="34" charset="-120"/>
               </a:rPr>
-              <a:t>Word Labs  •  wordlabs.app  •  Root: 'teach' = to show or instruct others</a:t>
+              <a:t>Word Labs  •  wordlabs.app  •  Root: 'teach' = to show or instruct</a:t>
             </a:r>
             <a:endParaRPr lang="en-US" sz="800" dirty="0"/>
           </a:p>
@@ -8667,7 +8667,7 @@
                 <a:ea typeface="Trebuchet MS" pitchFamily="34" charset="-122"/>
                 <a:cs typeface="Trebuchet MS" pitchFamily="34" charset="-120"/>
               </a:rPr>
-              <a:t>teaching</a:t>
+              <a:t>teacher</a:t>
             </a:r>
             <a:endParaRPr lang="en-US" sz="2800" dirty="0"/>
           </a:p>
@@ -8845,7 +8845,7 @@
                 <a:ea typeface="Calibri" pitchFamily="34" charset="-122"/>
                 <a:cs typeface="Calibri" pitchFamily="34" charset="-120"/>
               </a:rPr>
-              <a:t>to instruct or show</a:t>
+              <a:t>to show or instruct</a:t>
             </a:r>
             <a:endParaRPr lang="en-US" sz="850" dirty="0"/>
           </a:p>
@@ -8918,7 +8918,7 @@
                 <a:ea typeface="Trebuchet MS" pitchFamily="34" charset="-122"/>
                 <a:cs typeface="Trebuchet MS" pitchFamily="34" charset="-120"/>
               </a:rPr>
-              <a:t>ing</a:t>
+              <a:t>er</a:t>
             </a:r>
             <a:endParaRPr lang="en-US" sz="1300" dirty="0"/>
           </a:p>
@@ -8957,7 +8957,7 @@
                 <a:ea typeface="Calibri" pitchFamily="34" charset="-122"/>
                 <a:cs typeface="Calibri" pitchFamily="34" charset="-120"/>
               </a:rPr>
-              <a:t>action or process</a:t>
+              <a:t>a person who does something</a:t>
             </a:r>
             <a:endParaRPr lang="en-US" sz="850" dirty="0"/>
           </a:p>
@@ -9221,7 +9221,7 @@
                 <a:ea typeface="Trebuchet MS" pitchFamily="34" charset="-122"/>
                 <a:cs typeface="Trebuchet MS" pitchFamily="34" charset="-120"/>
               </a:rPr>
-              <a:t>ing</a:t>
+              <a:t>er</a:t>
             </a:r>
             <a:endParaRPr lang="en-US" sz="1400" dirty="0"/>
           </a:p>
@@ -9645,7 +9645,7 @@
                 <a:ea typeface="Calibri" pitchFamily="34" charset="-122"/>
                 <a:cs typeface="Calibri" pitchFamily="34" charset="-120"/>
               </a:rPr>
-              <a:t>Word Labs  •  wordlabs.app  •  Root: 'teach' = to show or instruct others</a:t>
+              <a:t>Word Labs  •  wordlabs.app  •  Root: 'teach' = to show or instruct</a:t>
             </a:r>
             <a:endParaRPr lang="en-US" sz="800" dirty="0"/>
           </a:p>
@@ -9784,7 +9784,7 @@
                 <a:ea typeface="Trebuchet MS" pitchFamily="34" charset="-122"/>
                 <a:cs typeface="Trebuchet MS" pitchFamily="34" charset="-120"/>
               </a:rPr>
-              <a:t>teaching</a:t>
+              <a:t>teacher</a:t>
             </a:r>
             <a:endParaRPr lang="en-US" sz="2800" dirty="0"/>
           </a:p>
@@ -9962,7 +9962,7 @@
                 <a:ea typeface="Calibri" pitchFamily="34" charset="-122"/>
                 <a:cs typeface="Calibri" pitchFamily="34" charset="-120"/>
               </a:rPr>
-              <a:t>to instruct or show</a:t>
+              <a:t>to show or instruct</a:t>
             </a:r>
             <a:endParaRPr lang="en-US" sz="850" dirty="0"/>
           </a:p>
@@ -10035,7 +10035,7 @@
                 <a:ea typeface="Trebuchet MS" pitchFamily="34" charset="-122"/>
                 <a:cs typeface="Trebuchet MS" pitchFamily="34" charset="-120"/>
               </a:rPr>
-              <a:t>ing</a:t>
+              <a:t>er</a:t>
             </a:r>
             <a:endParaRPr lang="en-US" sz="1300" dirty="0"/>
           </a:p>
@@ -10074,7 +10074,7 @@
                 <a:ea typeface="Calibri" pitchFamily="34" charset="-122"/>
                 <a:cs typeface="Calibri" pitchFamily="34" charset="-120"/>
               </a:rPr>
-              <a:t>action or process</a:t>
+              <a:t>a person who does something</a:t>
             </a:r>
             <a:endParaRPr lang="en-US" sz="850" dirty="0"/>
           </a:p>
@@ -10338,7 +10338,7 @@
                 <a:ea typeface="Trebuchet MS" pitchFamily="34" charset="-122"/>
                 <a:cs typeface="Trebuchet MS" pitchFamily="34" charset="-120"/>
               </a:rPr>
-              <a:t>ing</a:t>
+              <a:t>er</a:t>
             </a:r>
             <a:endParaRPr lang="en-US" sz="1400" dirty="0"/>
           </a:p>
@@ -10445,7 +10445,7 @@
         </p:nvSpPr>
         <p:spPr>
           <a:xfrm>
-            <a:off x="2427732" y="4169664"/>
+            <a:off x="2670048" y="4169664"/>
             <a:ext cx="685800" cy="475488"/>
           </a:xfrm>
           <a:prstGeom prst="rect">
@@ -10472,7 +10472,7 @@
         </p:nvSpPr>
         <p:spPr>
           <a:xfrm>
-            <a:off x="2427732" y="4169664"/>
+            <a:off x="2670048" y="4169664"/>
             <a:ext cx="685800" cy="475488"/>
           </a:xfrm>
           <a:prstGeom prst="rect">
@@ -10511,7 +10511,7 @@
         </p:nvSpPr>
         <p:spPr>
           <a:xfrm>
-            <a:off x="3639312" y="4169664"/>
+            <a:off x="4123944" y="4169664"/>
             <a:ext cx="685800" cy="475488"/>
           </a:xfrm>
           <a:prstGeom prst="rect">
@@ -10538,7 +10538,7 @@
         </p:nvSpPr>
         <p:spPr>
           <a:xfrm>
-            <a:off x="3639312" y="4169664"/>
+            <a:off x="4123944" y="4169664"/>
             <a:ext cx="685800" cy="475488"/>
           </a:xfrm>
           <a:prstGeom prst="rect">
@@ -10577,7 +10577,7 @@
         </p:nvSpPr>
         <p:spPr>
           <a:xfrm>
-            <a:off x="4850892" y="4169664"/>
+            <a:off x="5577840" y="4169664"/>
             <a:ext cx="685800" cy="475488"/>
           </a:xfrm>
           <a:prstGeom prst="rect">
@@ -10604,7 +10604,7 @@
         </p:nvSpPr>
         <p:spPr>
           <a:xfrm>
-            <a:off x="4850892" y="4169664"/>
+            <a:off x="5577840" y="4169664"/>
             <a:ext cx="685800" cy="475488"/>
           </a:xfrm>
           <a:prstGeom prst="rect">
@@ -10643,7 +10643,7 @@
         </p:nvSpPr>
         <p:spPr>
           <a:xfrm>
-            <a:off x="6062472" y="4169664"/>
+            <a:off x="7031736" y="4169664"/>
             <a:ext cx="685800" cy="475488"/>
           </a:xfrm>
           <a:prstGeom prst="rect">
@@ -10670,7 +10670,7 @@
         </p:nvSpPr>
         <p:spPr>
           <a:xfrm>
-            <a:off x="6062472" y="4169664"/>
+            <a:off x="7031736" y="4169664"/>
             <a:ext cx="685800" cy="475488"/>
           </a:xfrm>
           <a:prstGeom prst="rect">
@@ -10695,73 +10695,7 @@
                 <a:ea typeface="Trebuchet MS" pitchFamily="34" charset="-122"/>
                 <a:cs typeface="Trebuchet MS" pitchFamily="34" charset="-120"/>
               </a:rPr>
-              <a:t>i</a:t>
-            </a:r>
-            <a:endParaRPr lang="en-US" sz="900" dirty="0"/>
-          </a:p>
-        </p:txBody>
-      </p:sp>
-      <p:sp>
-        <p:nvSpPr>
-          <p:cNvPr id="41" name="Shape 39"/>
-          <p:cNvSpPr/>
-          <p:nvPr/>
-        </p:nvSpPr>
-        <p:spPr>
-          <a:xfrm>
-            <a:off x="7274052" y="4169664"/>
-            <a:ext cx="685800" cy="475488"/>
-          </a:xfrm>
-          <a:prstGeom prst="rect">
-            <a:avLst>
-              <a:gd name="adj" fmla="val 7692"/>
-            </a:avLst>
-          </a:prstGeom>
-          <a:solidFill>
-            <a:srgbClr val="FFFFFF"/>
-          </a:solidFill>
-          <a:ln w="12700">
-            <a:solidFill>
-              <a:srgbClr val="DB2777"/>
-            </a:solidFill>
-            <a:prstDash val="solid"/>
-          </a:ln>
-        </p:spPr>
-      </p:sp>
-      <p:sp>
-        <p:nvSpPr>
-          <p:cNvPr id="42" name="Text 40"/>
-          <p:cNvSpPr/>
-          <p:nvPr/>
-        </p:nvSpPr>
-        <p:spPr>
-          <a:xfrm>
-            <a:off x="7274052" y="4169664"/>
-            <a:ext cx="685800" cy="475488"/>
-          </a:xfrm>
-          <a:prstGeom prst="rect">
-            <a:avLst/>
-          </a:prstGeom>
-          <a:noFill/>
-          <a:ln/>
-        </p:spPr>
-        <p:txBody>
-          <a:bodyPr wrap="square" lIns="0" tIns="0" rIns="0" bIns="0" rtlCol="0" anchor="ctr"/>
-          <a:lstStyle/>
-          <a:p>
-            <a:pPr algn="ctr" indent="0" marL="0">
-              <a:buNone/>
-            </a:pPr>
-            <a:r>
-              <a:rPr lang="en-US" sz="900" b="1" dirty="0">
-                <a:solidFill>
-                  <a:srgbClr val="9D174D"/>
-                </a:solidFill>
-                <a:latin typeface="Trebuchet MS" pitchFamily="34" charset="0"/>
-                <a:ea typeface="Trebuchet MS" pitchFamily="34" charset="-122"/>
-                <a:cs typeface="Trebuchet MS" pitchFamily="34" charset="-120"/>
-              </a:rPr>
-              <a:t>ng</a:t>
+              <a:t>er</a:t>
             </a:r>
             <a:endParaRPr lang="en-US" sz="900" dirty="0"/>
           </a:p>
@@ -11053,7 +10987,7 @@
                 <a:ea typeface="Calibri" pitchFamily="34" charset="-122"/>
                 <a:cs typeface="Calibri" pitchFamily="34" charset="-120"/>
               </a:rPr>
-              <a:t>Word Labs  •  wordlabs.app  •  Root: 'teach' = to show or instruct others</a:t>
+              <a:t>Word Labs  •  wordlabs.app  •  Root: 'teach' = to show or instruct</a:t>
             </a:r>
             <a:endParaRPr lang="en-US" sz="800" dirty="0"/>
           </a:p>
@@ -11192,7 +11126,7 @@
                 <a:ea typeface="Trebuchet MS" pitchFamily="34" charset="-122"/>
                 <a:cs typeface="Trebuchet MS" pitchFamily="34" charset="-120"/>
               </a:rPr>
-              <a:t>teachable</a:t>
+              <a:t>reteaching</a:t>
             </a:r>
             <a:endParaRPr lang="en-US" sz="2800" dirty="0"/>
           </a:p>
@@ -11880,7 +11814,7 @@
                 <a:ea typeface="Calibri" pitchFamily="34" charset="-122"/>
                 <a:cs typeface="Calibri" pitchFamily="34" charset="-120"/>
               </a:rPr>
-              <a:t>Word Labs  •  wordlabs.app  •  Root: 'teach' = to show or instruct others</a:t>
+              <a:t>Word Labs  •  wordlabs.app  •  Root: 'teach' = to show or instruct</a:t>
             </a:r>
             <a:endParaRPr lang="en-US" sz="800" dirty="0"/>
           </a:p>
@@ -12019,7 +11953,7 @@
                 <a:ea typeface="Trebuchet MS" pitchFamily="34" charset="-122"/>
                 <a:cs typeface="Trebuchet MS" pitchFamily="34" charset="-120"/>
               </a:rPr>
-              <a:t>teachable</a:t>
+              <a:t>reteaching</a:t>
             </a:r>
             <a:endParaRPr lang="en-US" sz="2800" dirty="0"/>
           </a:p>
@@ -12099,7 +12033,7 @@
         </p:nvSpPr>
         <p:spPr>
           <a:xfrm>
-            <a:off x="2938272" y="2258568"/>
+            <a:off x="2221992" y="2258568"/>
             <a:ext cx="1828800" cy="292608"/>
           </a:xfrm>
           <a:prstGeom prst="rect">
@@ -12108,11 +12042,11 @@
             </a:avLst>
           </a:prstGeom>
           <a:solidFill>
-            <a:srgbClr val="CCFBF1"/>
+            <a:srgbClr val="DDD6FE"/>
           </a:solidFill>
           <a:ln w="19050">
             <a:solidFill>
-              <a:srgbClr val="0D9488"/>
+              <a:srgbClr val="7C3AED"/>
             </a:solidFill>
             <a:prstDash val="solid"/>
           </a:ln>
@@ -12133,7 +12067,7 @@
         </p:nvSpPr>
         <p:spPr>
           <a:xfrm>
-            <a:off x="2938272" y="2258568"/>
+            <a:off x="2221992" y="2258568"/>
             <a:ext cx="1828800" cy="292608"/>
           </a:xfrm>
           <a:prstGeom prst="rect">
@@ -12152,13 +12086,13 @@
             <a:r>
               <a:rPr lang="en-US" sz="1300" b="1" dirty="0">
                 <a:solidFill>
-                  <a:srgbClr val="0F766E"/>
+                  <a:srgbClr val="4C1D95"/>
                 </a:solidFill>
                 <a:latin typeface="Trebuchet MS" pitchFamily="34" charset="0"/>
                 <a:ea typeface="Trebuchet MS" pitchFamily="34" charset="-122"/>
                 <a:cs typeface="Trebuchet MS" pitchFamily="34" charset="-120"/>
               </a:rPr>
-              <a:t>teach</a:t>
+              <a:t>re</a:t>
             </a:r>
             <a:endParaRPr lang="en-US" sz="1300" dirty="0"/>
           </a:p>
@@ -12172,7 +12106,7 @@
         </p:nvSpPr>
         <p:spPr>
           <a:xfrm>
-            <a:off x="2938272" y="2569464"/>
+            <a:off x="2221992" y="2569464"/>
             <a:ext cx="1828800" cy="201168"/>
           </a:xfrm>
           <a:prstGeom prst="rect">
@@ -12197,7 +12131,7 @@
                 <a:ea typeface="Calibri" pitchFamily="34" charset="-122"/>
                 <a:cs typeface="Calibri" pitchFamily="34" charset="-120"/>
               </a:rPr>
-              <a:t>to instruct or show</a:t>
+              <a:t>again</a:t>
             </a:r>
             <a:endParaRPr lang="en-US" sz="850" dirty="0"/>
           </a:p>
@@ -12211,7 +12145,7 @@
         </p:nvSpPr>
         <p:spPr>
           <a:xfrm>
-            <a:off x="5803392" y="2258568"/>
+            <a:off x="4370832" y="2258568"/>
             <a:ext cx="1828800" cy="292608"/>
           </a:xfrm>
           <a:prstGeom prst="rect">
@@ -12220,11 +12154,11 @@
             </a:avLst>
           </a:prstGeom>
           <a:solidFill>
-            <a:srgbClr val="FCE7F3"/>
+            <a:srgbClr val="CCFBF1"/>
           </a:solidFill>
           <a:ln w="19050">
             <a:solidFill>
-              <a:srgbClr val="DB2777"/>
+              <a:srgbClr val="0D9488"/>
             </a:solidFill>
             <a:prstDash val="solid"/>
           </a:ln>
@@ -12245,7 +12179,7 @@
         </p:nvSpPr>
         <p:spPr>
           <a:xfrm>
-            <a:off x="5803392" y="2258568"/>
+            <a:off x="4370832" y="2258568"/>
             <a:ext cx="1828800" cy="292608"/>
           </a:xfrm>
           <a:prstGeom prst="rect">
@@ -12264,13 +12198,13 @@
             <a:r>
               <a:rPr lang="en-US" sz="1300" b="1" dirty="0">
                 <a:solidFill>
-                  <a:srgbClr val="9D174D"/>
+                  <a:srgbClr val="0F766E"/>
                 </a:solidFill>
                 <a:latin typeface="Trebuchet MS" pitchFamily="34" charset="0"/>
                 <a:ea typeface="Trebuchet MS" pitchFamily="34" charset="-122"/>
                 <a:cs typeface="Trebuchet MS" pitchFamily="34" charset="-120"/>
               </a:rPr>
-              <a:t>able</a:t>
+              <a:t>teach</a:t>
             </a:r>
             <a:endParaRPr lang="en-US" sz="1300" dirty="0"/>
           </a:p>
@@ -12284,7 +12218,7 @@
         </p:nvSpPr>
         <p:spPr>
           <a:xfrm>
-            <a:off x="5803392" y="2569464"/>
+            <a:off x="4370832" y="2569464"/>
             <a:ext cx="1828800" cy="201168"/>
           </a:xfrm>
           <a:prstGeom prst="rect">
@@ -12309,7 +12243,7 @@
                 <a:ea typeface="Calibri" pitchFamily="34" charset="-122"/>
                 <a:cs typeface="Calibri" pitchFamily="34" charset="-120"/>
               </a:rPr>
-              <a:t>able to be</a:t>
+              <a:t>to show or instruct</a:t>
             </a:r>
             <a:endParaRPr lang="en-US" sz="850" dirty="0"/>
           </a:p>
@@ -12318,6 +12252,118 @@
       <p:sp>
         <p:nvSpPr>
           <p:cNvPr id="22" name="Shape 20"/>
+          <p:cNvSpPr/>
+          <p:nvPr/>
+        </p:nvSpPr>
+        <p:spPr>
+          <a:xfrm>
+            <a:off x="6519672" y="2258568"/>
+            <a:ext cx="1828800" cy="292608"/>
+          </a:xfrm>
+          <a:prstGeom prst="rect">
+            <a:avLst>
+              <a:gd name="adj" fmla="val 25000"/>
+            </a:avLst>
+          </a:prstGeom>
+          <a:solidFill>
+            <a:srgbClr val="FCE7F3"/>
+          </a:solidFill>
+          <a:ln w="19050">
+            <a:solidFill>
+              <a:srgbClr val="DB2777"/>
+            </a:solidFill>
+            <a:prstDash val="solid"/>
+          </a:ln>
+          <a:effectLst>
+            <a:outerShdw sx="100000" sy="100000" kx="0" ky="0" algn="bl" rotWithShape="0" blurRad="101600" dist="38100" dir="8100000">
+              <a:srgbClr val="000000">
+                <a:alpha val="12000"/>
+              </a:srgbClr>
+            </a:outerShdw>
+          </a:effectLst>
+        </p:spPr>
+      </p:sp>
+      <p:sp>
+        <p:nvSpPr>
+          <p:cNvPr id="23" name="Text 21"/>
+          <p:cNvSpPr/>
+          <p:nvPr/>
+        </p:nvSpPr>
+        <p:spPr>
+          <a:xfrm>
+            <a:off x="6519672" y="2258568"/>
+            <a:ext cx="1828800" cy="292608"/>
+          </a:xfrm>
+          <a:prstGeom prst="rect">
+            <a:avLst/>
+          </a:prstGeom>
+          <a:noFill/>
+          <a:ln/>
+        </p:spPr>
+        <p:txBody>
+          <a:bodyPr wrap="square" lIns="0" tIns="0" rIns="0" bIns="0" rtlCol="0" anchor="ctr"/>
+          <a:lstStyle/>
+          <a:p>
+            <a:pPr algn="ctr" indent="0" marL="0">
+              <a:buNone/>
+            </a:pPr>
+            <a:r>
+              <a:rPr lang="en-US" sz="1300" b="1" dirty="0">
+                <a:solidFill>
+                  <a:srgbClr val="9D174D"/>
+                </a:solidFill>
+                <a:latin typeface="Trebuchet MS" pitchFamily="34" charset="0"/>
+                <a:ea typeface="Trebuchet MS" pitchFamily="34" charset="-122"/>
+                <a:cs typeface="Trebuchet MS" pitchFamily="34" charset="-120"/>
+              </a:rPr>
+              <a:t>ing</a:t>
+            </a:r>
+            <a:endParaRPr lang="en-US" sz="1300" dirty="0"/>
+          </a:p>
+        </p:txBody>
+      </p:sp>
+      <p:sp>
+        <p:nvSpPr>
+          <p:cNvPr id="24" name="Text 22"/>
+          <p:cNvSpPr/>
+          <p:nvPr/>
+        </p:nvSpPr>
+        <p:spPr>
+          <a:xfrm>
+            <a:off x="6519672" y="2569464"/>
+            <a:ext cx="1828800" cy="201168"/>
+          </a:xfrm>
+          <a:prstGeom prst="rect">
+            <a:avLst/>
+          </a:prstGeom>
+          <a:noFill/>
+          <a:ln/>
+        </p:spPr>
+        <p:txBody>
+          <a:bodyPr wrap="square" lIns="0" tIns="0" rIns="0" bIns="0" rtlCol="0" anchor="t"/>
+          <a:lstStyle/>
+          <a:p>
+            <a:pPr algn="ctr" indent="0" marL="0">
+              <a:buNone/>
+            </a:pPr>
+            <a:r>
+              <a:rPr lang="en-US" sz="850" dirty="0">
+                <a:solidFill>
+                  <a:srgbClr val="475569"/>
+                </a:solidFill>
+                <a:latin typeface="Calibri" pitchFamily="34" charset="0"/>
+                <a:ea typeface="Calibri" pitchFamily="34" charset="-122"/>
+                <a:cs typeface="Calibri" pitchFamily="34" charset="-120"/>
+              </a:rPr>
+              <a:t>ongoing action</a:t>
+            </a:r>
+            <a:endParaRPr lang="en-US" sz="850" dirty="0"/>
+          </a:p>
+        </p:txBody>
+      </p:sp>
+      <p:sp>
+        <p:nvSpPr>
+          <p:cNvPr id="25" name="Shape 23"/>
           <p:cNvSpPr/>
           <p:nvPr/>
         </p:nvSpPr>
@@ -12344,7 +12390,7 @@
       </p:sp>
       <p:sp>
         <p:nvSpPr>
-          <p:cNvPr id="23" name="Text 21"/>
+          <p:cNvPr id="26" name="Text 24"/>
           <p:cNvSpPr/>
           <p:nvPr/>
         </p:nvSpPr>
@@ -12383,7 +12429,7 @@
       </p:sp>
       <p:sp>
         <p:nvSpPr>
-          <p:cNvPr id="24" name="Shape 22"/>
+          <p:cNvPr id="27" name="Shape 25"/>
           <p:cNvSpPr/>
           <p:nvPr/>
         </p:nvSpPr>
@@ -12410,7 +12456,7 @@
       </p:sp>
       <p:sp>
         <p:nvSpPr>
-          <p:cNvPr id="25" name="Text 23"/>
+          <p:cNvPr id="28" name="Text 26"/>
           <p:cNvSpPr/>
           <p:nvPr/>
         </p:nvSpPr>
@@ -12449,7 +12495,7 @@
       </p:sp>
       <p:sp>
         <p:nvSpPr>
-          <p:cNvPr id="26" name="Shape 24"/>
+          <p:cNvPr id="29" name="Shape 27"/>
           <p:cNvSpPr/>
           <p:nvPr/>
         </p:nvSpPr>
@@ -12476,7 +12522,7 @@
       </p:sp>
       <p:sp>
         <p:nvSpPr>
-          <p:cNvPr id="27" name="Text 25"/>
+          <p:cNvPr id="30" name="Text 28"/>
           <p:cNvSpPr/>
           <p:nvPr/>
         </p:nvSpPr>
@@ -12515,7 +12561,7 @@
       </p:sp>
       <p:sp>
         <p:nvSpPr>
-          <p:cNvPr id="28" name="Shape 26"/>
+          <p:cNvPr id="31" name="Shape 29"/>
           <p:cNvSpPr/>
           <p:nvPr/>
         </p:nvSpPr>
@@ -12542,7 +12588,7 @@
       </p:sp>
       <p:sp>
         <p:nvSpPr>
-          <p:cNvPr id="29" name="Text 27"/>
+          <p:cNvPr id="32" name="Text 30"/>
           <p:cNvSpPr/>
           <p:nvPr/>
         </p:nvSpPr>
@@ -12865,7 +12911,7 @@
                 <a:ea typeface="Calibri" pitchFamily="34" charset="-122"/>
                 <a:cs typeface="Calibri" pitchFamily="34" charset="-120"/>
               </a:rPr>
-              <a:t>Word Labs  •  wordlabs.app  •  Root: 'teach' = to show or instruct others</a:t>
+              <a:t>Word Labs  •  wordlabs.app  •  Root: 'teach' = to show or instruct</a:t>
             </a:r>
             <a:endParaRPr lang="en-US" sz="800" dirty="0"/>
           </a:p>
@@ -13004,7 +13050,7 @@
                 <a:ea typeface="Trebuchet MS" pitchFamily="34" charset="-122"/>
                 <a:cs typeface="Trebuchet MS" pitchFamily="34" charset="-120"/>
               </a:rPr>
-              <a:t>teachable</a:t>
+              <a:t>reteaching</a:t>
             </a:r>
             <a:endParaRPr lang="en-US" sz="2800" dirty="0"/>
           </a:p>
@@ -13084,7 +13130,7 @@
         </p:nvSpPr>
         <p:spPr>
           <a:xfrm>
-            <a:off x="2938272" y="2258568"/>
+            <a:off x="2221992" y="2258568"/>
             <a:ext cx="1828800" cy="292608"/>
           </a:xfrm>
           <a:prstGeom prst="rect">
@@ -13093,11 +13139,11 @@
             </a:avLst>
           </a:prstGeom>
           <a:solidFill>
-            <a:srgbClr val="CCFBF1"/>
+            <a:srgbClr val="DDD6FE"/>
           </a:solidFill>
           <a:ln w="19050">
             <a:solidFill>
-              <a:srgbClr val="0D9488"/>
+              <a:srgbClr val="7C3AED"/>
             </a:solidFill>
             <a:prstDash val="solid"/>
           </a:ln>
@@ -13118,7 +13164,7 @@
         </p:nvSpPr>
         <p:spPr>
           <a:xfrm>
-            <a:off x="2938272" y="2258568"/>
+            <a:off x="2221992" y="2258568"/>
             <a:ext cx="1828800" cy="292608"/>
           </a:xfrm>
           <a:prstGeom prst="rect">
@@ -13137,13 +13183,13 @@
             <a:r>
               <a:rPr lang="en-US" sz="1300" b="1" dirty="0">
                 <a:solidFill>
-                  <a:srgbClr val="0F766E"/>
+                  <a:srgbClr val="4C1D95"/>
                 </a:solidFill>
                 <a:latin typeface="Trebuchet MS" pitchFamily="34" charset="0"/>
                 <a:ea typeface="Trebuchet MS" pitchFamily="34" charset="-122"/>
                 <a:cs typeface="Trebuchet MS" pitchFamily="34" charset="-120"/>
               </a:rPr>
-              <a:t>teach</a:t>
+              <a:t>re</a:t>
             </a:r>
             <a:endParaRPr lang="en-US" sz="1300" dirty="0"/>
           </a:p>
@@ -13157,7 +13203,7 @@
         </p:nvSpPr>
         <p:spPr>
           <a:xfrm>
-            <a:off x="2938272" y="2569464"/>
+            <a:off x="2221992" y="2569464"/>
             <a:ext cx="1828800" cy="201168"/>
           </a:xfrm>
           <a:prstGeom prst="rect">
@@ -13182,7 +13228,7 @@
                 <a:ea typeface="Calibri" pitchFamily="34" charset="-122"/>
                 <a:cs typeface="Calibri" pitchFamily="34" charset="-120"/>
               </a:rPr>
-              <a:t>to instruct or show</a:t>
+              <a:t>again</a:t>
             </a:r>
             <a:endParaRPr lang="en-US" sz="850" dirty="0"/>
           </a:p>
@@ -13196,7 +13242,7 @@
         </p:nvSpPr>
         <p:spPr>
           <a:xfrm>
-            <a:off x="5803392" y="2258568"/>
+            <a:off x="4370832" y="2258568"/>
             <a:ext cx="1828800" cy="292608"/>
           </a:xfrm>
           <a:prstGeom prst="rect">
@@ -13205,11 +13251,11 @@
             </a:avLst>
           </a:prstGeom>
           <a:solidFill>
-            <a:srgbClr val="FCE7F3"/>
+            <a:srgbClr val="CCFBF1"/>
           </a:solidFill>
           <a:ln w="19050">
             <a:solidFill>
-              <a:srgbClr val="DB2777"/>
+              <a:srgbClr val="0D9488"/>
             </a:solidFill>
             <a:prstDash val="solid"/>
           </a:ln>
@@ -13230,7 +13276,7 @@
         </p:nvSpPr>
         <p:spPr>
           <a:xfrm>
-            <a:off x="5803392" y="2258568"/>
+            <a:off x="4370832" y="2258568"/>
             <a:ext cx="1828800" cy="292608"/>
           </a:xfrm>
           <a:prstGeom prst="rect">
@@ -13249,13 +13295,13 @@
             <a:r>
               <a:rPr lang="en-US" sz="1300" b="1" dirty="0">
                 <a:solidFill>
-                  <a:srgbClr val="9D174D"/>
+                  <a:srgbClr val="0F766E"/>
                 </a:solidFill>
                 <a:latin typeface="Trebuchet MS" pitchFamily="34" charset="0"/>
                 <a:ea typeface="Trebuchet MS" pitchFamily="34" charset="-122"/>
                 <a:cs typeface="Trebuchet MS" pitchFamily="34" charset="-120"/>
               </a:rPr>
-              <a:t>able</a:t>
+              <a:t>teach</a:t>
             </a:r>
             <a:endParaRPr lang="en-US" sz="1300" dirty="0"/>
           </a:p>
@@ -13269,7 +13315,7 @@
         </p:nvSpPr>
         <p:spPr>
           <a:xfrm>
-            <a:off x="5803392" y="2569464"/>
+            <a:off x="4370832" y="2569464"/>
             <a:ext cx="1828800" cy="201168"/>
           </a:xfrm>
           <a:prstGeom prst="rect">
@@ -13294,7 +13340,7 @@
                 <a:ea typeface="Calibri" pitchFamily="34" charset="-122"/>
                 <a:cs typeface="Calibri" pitchFamily="34" charset="-120"/>
               </a:rPr>
-              <a:t>able to be</a:t>
+              <a:t>to show or instruct</a:t>
             </a:r>
             <a:endParaRPr lang="en-US" sz="850" dirty="0"/>
           </a:p>
@@ -13303,6 +13349,118 @@
       <p:sp>
         <p:nvSpPr>
           <p:cNvPr id="22" name="Shape 20"/>
+          <p:cNvSpPr/>
+          <p:nvPr/>
+        </p:nvSpPr>
+        <p:spPr>
+          <a:xfrm>
+            <a:off x="6519672" y="2258568"/>
+            <a:ext cx="1828800" cy="292608"/>
+          </a:xfrm>
+          <a:prstGeom prst="rect">
+            <a:avLst>
+              <a:gd name="adj" fmla="val 25000"/>
+            </a:avLst>
+          </a:prstGeom>
+          <a:solidFill>
+            <a:srgbClr val="FCE7F3"/>
+          </a:solidFill>
+          <a:ln w="19050">
+            <a:solidFill>
+              <a:srgbClr val="DB2777"/>
+            </a:solidFill>
+            <a:prstDash val="solid"/>
+          </a:ln>
+          <a:effectLst>
+            <a:outerShdw sx="100000" sy="100000" kx="0" ky="0" algn="bl" rotWithShape="0" blurRad="101600" dist="38100" dir="8100000">
+              <a:srgbClr val="000000">
+                <a:alpha val="12000"/>
+              </a:srgbClr>
+            </a:outerShdw>
+          </a:effectLst>
+        </p:spPr>
+      </p:sp>
+      <p:sp>
+        <p:nvSpPr>
+          <p:cNvPr id="23" name="Text 21"/>
+          <p:cNvSpPr/>
+          <p:nvPr/>
+        </p:nvSpPr>
+        <p:spPr>
+          <a:xfrm>
+            <a:off x="6519672" y="2258568"/>
+            <a:ext cx="1828800" cy="292608"/>
+          </a:xfrm>
+          <a:prstGeom prst="rect">
+            <a:avLst/>
+          </a:prstGeom>
+          <a:noFill/>
+          <a:ln/>
+        </p:spPr>
+        <p:txBody>
+          <a:bodyPr wrap="square" lIns="0" tIns="0" rIns="0" bIns="0" rtlCol="0" anchor="ctr"/>
+          <a:lstStyle/>
+          <a:p>
+            <a:pPr algn="ctr" indent="0" marL="0">
+              <a:buNone/>
+            </a:pPr>
+            <a:r>
+              <a:rPr lang="en-US" sz="1300" b="1" dirty="0">
+                <a:solidFill>
+                  <a:srgbClr val="9D174D"/>
+                </a:solidFill>
+                <a:latin typeface="Trebuchet MS" pitchFamily="34" charset="0"/>
+                <a:ea typeface="Trebuchet MS" pitchFamily="34" charset="-122"/>
+                <a:cs typeface="Trebuchet MS" pitchFamily="34" charset="-120"/>
+              </a:rPr>
+              <a:t>ing</a:t>
+            </a:r>
+            <a:endParaRPr lang="en-US" sz="1300" dirty="0"/>
+          </a:p>
+        </p:txBody>
+      </p:sp>
+      <p:sp>
+        <p:nvSpPr>
+          <p:cNvPr id="24" name="Text 22"/>
+          <p:cNvSpPr/>
+          <p:nvPr/>
+        </p:nvSpPr>
+        <p:spPr>
+          <a:xfrm>
+            <a:off x="6519672" y="2569464"/>
+            <a:ext cx="1828800" cy="201168"/>
+          </a:xfrm>
+          <a:prstGeom prst="rect">
+            <a:avLst/>
+          </a:prstGeom>
+          <a:noFill/>
+          <a:ln/>
+        </p:spPr>
+        <p:txBody>
+          <a:bodyPr wrap="square" lIns="0" tIns="0" rIns="0" bIns="0" rtlCol="0" anchor="t"/>
+          <a:lstStyle/>
+          <a:p>
+            <a:pPr algn="ctr" indent="0" marL="0">
+              <a:buNone/>
+            </a:pPr>
+            <a:r>
+              <a:rPr lang="en-US" sz="850" dirty="0">
+                <a:solidFill>
+                  <a:srgbClr val="475569"/>
+                </a:solidFill>
+                <a:latin typeface="Calibri" pitchFamily="34" charset="0"/>
+                <a:ea typeface="Calibri" pitchFamily="34" charset="-122"/>
+                <a:cs typeface="Calibri" pitchFamily="34" charset="-120"/>
+              </a:rPr>
+              <a:t>ongoing action</a:t>
+            </a:r>
+            <a:endParaRPr lang="en-US" sz="850" dirty="0"/>
+          </a:p>
+        </p:txBody>
+      </p:sp>
+      <p:sp>
+        <p:nvSpPr>
+          <p:cNvPr id="25" name="Shape 23"/>
           <p:cNvSpPr/>
           <p:nvPr/>
         </p:nvSpPr>
@@ -13329,7 +13487,7 @@
       </p:sp>
       <p:sp>
         <p:nvSpPr>
-          <p:cNvPr id="23" name="Text 21"/>
+          <p:cNvPr id="26" name="Text 24"/>
           <p:cNvSpPr/>
           <p:nvPr/>
         </p:nvSpPr>
@@ -13368,7 +13526,7 @@
       </p:sp>
       <p:sp>
         <p:nvSpPr>
-          <p:cNvPr id="24" name="Shape 22"/>
+          <p:cNvPr id="27" name="Shape 25"/>
           <p:cNvSpPr/>
           <p:nvPr/>
         </p:nvSpPr>
@@ -13395,7 +13553,7 @@
       </p:sp>
       <p:sp>
         <p:nvSpPr>
-          <p:cNvPr id="25" name="Shape 23"/>
+          <p:cNvPr id="28" name="Shape 26"/>
           <p:cNvSpPr/>
           <p:nvPr/>
         </p:nvSpPr>
@@ -13422,7 +13580,7 @@
       </p:sp>
       <p:sp>
         <p:nvSpPr>
-          <p:cNvPr id="26" name="Text 24"/>
+          <p:cNvPr id="29" name="Text 27"/>
           <p:cNvSpPr/>
           <p:nvPr/>
         </p:nvSpPr>
@@ -13453,7 +13611,7 @@
                 <a:ea typeface="Trebuchet MS" pitchFamily="34" charset="-122"/>
                 <a:cs typeface="Trebuchet MS" pitchFamily="34" charset="-120"/>
               </a:rPr>
-              <a:t>teach</a:t>
+              <a:t>re</a:t>
             </a:r>
             <a:endParaRPr lang="en-US" sz="1400" dirty="0"/>
           </a:p>
@@ -13461,7 +13619,7 @@
       </p:sp>
       <p:sp>
         <p:nvSpPr>
-          <p:cNvPr id="27" name="Text 25"/>
+          <p:cNvPr id="30" name="Text 28"/>
           <p:cNvSpPr/>
           <p:nvPr/>
         </p:nvSpPr>
@@ -13500,7 +13658,7 @@
       </p:sp>
       <p:sp>
         <p:nvSpPr>
-          <p:cNvPr id="28" name="Shape 26"/>
+          <p:cNvPr id="31" name="Shape 29"/>
           <p:cNvSpPr/>
           <p:nvPr/>
         </p:nvSpPr>
@@ -13527,7 +13685,7 @@
       </p:sp>
       <p:sp>
         <p:nvSpPr>
-          <p:cNvPr id="29" name="Text 27"/>
+          <p:cNvPr id="32" name="Text 30"/>
           <p:cNvSpPr/>
           <p:nvPr/>
         </p:nvSpPr>
@@ -13558,7 +13716,7 @@
                 <a:ea typeface="Trebuchet MS" pitchFamily="34" charset="-122"/>
                 <a:cs typeface="Trebuchet MS" pitchFamily="34" charset="-120"/>
               </a:rPr>
-              <a:t>a</a:t>
+              <a:t>teach</a:t>
             </a:r>
             <a:endParaRPr lang="en-US" sz="1400" dirty="0"/>
           </a:p>
@@ -13566,7 +13724,7 @@
       </p:sp>
       <p:sp>
         <p:nvSpPr>
-          <p:cNvPr id="30" name="Text 28"/>
+          <p:cNvPr id="33" name="Text 31"/>
           <p:cNvSpPr/>
           <p:nvPr/>
         </p:nvSpPr>
@@ -13605,7 +13763,7 @@
       </p:sp>
       <p:sp>
         <p:nvSpPr>
-          <p:cNvPr id="31" name="Shape 29"/>
+          <p:cNvPr id="34" name="Shape 32"/>
           <p:cNvSpPr/>
           <p:nvPr/>
         </p:nvSpPr>
@@ -13632,7 +13790,7 @@
       </p:sp>
       <p:sp>
         <p:nvSpPr>
-          <p:cNvPr id="32" name="Text 30"/>
+          <p:cNvPr id="35" name="Text 33"/>
           <p:cNvSpPr/>
           <p:nvPr/>
         </p:nvSpPr>
@@ -13663,7 +13821,7 @@
                 <a:ea typeface="Trebuchet MS" pitchFamily="34" charset="-122"/>
                 <a:cs typeface="Trebuchet MS" pitchFamily="34" charset="-120"/>
               </a:rPr>
-              <a:t>ble</a:t>
+              <a:t>ing</a:t>
             </a:r>
             <a:endParaRPr lang="en-US" sz="1400" dirty="0"/>
           </a:p>
@@ -13671,7 +13829,7 @@
       </p:sp>
       <p:sp>
         <p:nvSpPr>
-          <p:cNvPr id="33" name="Shape 31"/>
+          <p:cNvPr id="36" name="Shape 34"/>
           <p:cNvSpPr/>
           <p:nvPr/>
         </p:nvSpPr>
@@ -13698,7 +13856,7 @@
       </p:sp>
       <p:sp>
         <p:nvSpPr>
-          <p:cNvPr id="34" name="Text 32"/>
+          <p:cNvPr id="37" name="Text 35"/>
           <p:cNvSpPr/>
           <p:nvPr/>
         </p:nvSpPr>
@@ -13737,7 +13895,7 @@
       </p:sp>
       <p:sp>
         <p:nvSpPr>
-          <p:cNvPr id="35" name="Shape 33"/>
+          <p:cNvPr id="38" name="Shape 36"/>
           <p:cNvSpPr/>
           <p:nvPr/>
         </p:nvSpPr>
@@ -13764,7 +13922,7 @@
       </p:sp>
       <p:sp>
         <p:nvSpPr>
-          <p:cNvPr id="36" name="Text 34"/>
+          <p:cNvPr id="39" name="Text 37"/>
           <p:cNvSpPr/>
           <p:nvPr/>
         </p:nvSpPr>
@@ -13996,7 +14154,7 @@
                 <a:ea typeface="Calibri" pitchFamily="34" charset="-122"/>
                 <a:cs typeface="Calibri" pitchFamily="34" charset="-120"/>
               </a:rPr>
-              <a:t>Root 'teach' — to show or instruct others</a:t>
+              <a:t>Root 'teach' — to show or instruct</a:t>
             </a:r>
             <a:endParaRPr lang="en-US" sz="1600" dirty="0"/>
           </a:p>
@@ -14352,7 +14510,7 @@
                 <a:ea typeface="Calibri" pitchFamily="34" charset="-122"/>
                 <a:cs typeface="Calibri" pitchFamily="34" charset="-120"/>
               </a:rPr>
-              <a:t>Word Labs  •  wordlabs.app  •  Root: 'teach' = to show or instruct others</a:t>
+              <a:t>Word Labs  •  wordlabs.app  •  Root: 'teach' = to show or instruct</a:t>
             </a:r>
             <a:endParaRPr lang="en-US" sz="800" dirty="0"/>
           </a:p>
@@ -14491,7 +14649,7 @@
                 <a:ea typeface="Trebuchet MS" pitchFamily="34" charset="-122"/>
                 <a:cs typeface="Trebuchet MS" pitchFamily="34" charset="-120"/>
               </a:rPr>
-              <a:t>teachable</a:t>
+              <a:t>reteaching</a:t>
             </a:r>
             <a:endParaRPr lang="en-US" sz="2800" dirty="0"/>
           </a:p>
@@ -14571,7 +14729,7 @@
         </p:nvSpPr>
         <p:spPr>
           <a:xfrm>
-            <a:off x="2938272" y="2258568"/>
+            <a:off x="2221992" y="2258568"/>
             <a:ext cx="1828800" cy="292608"/>
           </a:xfrm>
           <a:prstGeom prst="rect">
@@ -14580,11 +14738,11 @@
             </a:avLst>
           </a:prstGeom>
           <a:solidFill>
-            <a:srgbClr val="CCFBF1"/>
+            <a:srgbClr val="DDD6FE"/>
           </a:solidFill>
           <a:ln w="19050">
             <a:solidFill>
-              <a:srgbClr val="0D9488"/>
+              <a:srgbClr val="7C3AED"/>
             </a:solidFill>
             <a:prstDash val="solid"/>
           </a:ln>
@@ -14605,7 +14763,7 @@
         </p:nvSpPr>
         <p:spPr>
           <a:xfrm>
-            <a:off x="2938272" y="2258568"/>
+            <a:off x="2221992" y="2258568"/>
             <a:ext cx="1828800" cy="292608"/>
           </a:xfrm>
           <a:prstGeom prst="rect">
@@ -14624,13 +14782,13 @@
             <a:r>
               <a:rPr lang="en-US" sz="1300" b="1" dirty="0">
                 <a:solidFill>
-                  <a:srgbClr val="0F766E"/>
+                  <a:srgbClr val="4C1D95"/>
                 </a:solidFill>
                 <a:latin typeface="Trebuchet MS" pitchFamily="34" charset="0"/>
                 <a:ea typeface="Trebuchet MS" pitchFamily="34" charset="-122"/>
                 <a:cs typeface="Trebuchet MS" pitchFamily="34" charset="-120"/>
               </a:rPr>
-              <a:t>teach</a:t>
+              <a:t>re</a:t>
             </a:r>
             <a:endParaRPr lang="en-US" sz="1300" dirty="0"/>
           </a:p>
@@ -14644,7 +14802,7 @@
         </p:nvSpPr>
         <p:spPr>
           <a:xfrm>
-            <a:off x="2938272" y="2569464"/>
+            <a:off x="2221992" y="2569464"/>
             <a:ext cx="1828800" cy="201168"/>
           </a:xfrm>
           <a:prstGeom prst="rect">
@@ -14669,7 +14827,7 @@
                 <a:ea typeface="Calibri" pitchFamily="34" charset="-122"/>
                 <a:cs typeface="Calibri" pitchFamily="34" charset="-120"/>
               </a:rPr>
-              <a:t>to instruct or show</a:t>
+              <a:t>again</a:t>
             </a:r>
             <a:endParaRPr lang="en-US" sz="850" dirty="0"/>
           </a:p>
@@ -14683,7 +14841,7 @@
         </p:nvSpPr>
         <p:spPr>
           <a:xfrm>
-            <a:off x="5803392" y="2258568"/>
+            <a:off x="4370832" y="2258568"/>
             <a:ext cx="1828800" cy="292608"/>
           </a:xfrm>
           <a:prstGeom prst="rect">
@@ -14692,11 +14850,11 @@
             </a:avLst>
           </a:prstGeom>
           <a:solidFill>
-            <a:srgbClr val="FCE7F3"/>
+            <a:srgbClr val="CCFBF1"/>
           </a:solidFill>
           <a:ln w="19050">
             <a:solidFill>
-              <a:srgbClr val="DB2777"/>
+              <a:srgbClr val="0D9488"/>
             </a:solidFill>
             <a:prstDash val="solid"/>
           </a:ln>
@@ -14717,7 +14875,7 @@
         </p:nvSpPr>
         <p:spPr>
           <a:xfrm>
-            <a:off x="5803392" y="2258568"/>
+            <a:off x="4370832" y="2258568"/>
             <a:ext cx="1828800" cy="292608"/>
           </a:xfrm>
           <a:prstGeom prst="rect">
@@ -14736,13 +14894,13 @@
             <a:r>
               <a:rPr lang="en-US" sz="1300" b="1" dirty="0">
                 <a:solidFill>
-                  <a:srgbClr val="9D174D"/>
+                  <a:srgbClr val="0F766E"/>
                 </a:solidFill>
                 <a:latin typeface="Trebuchet MS" pitchFamily="34" charset="0"/>
                 <a:ea typeface="Trebuchet MS" pitchFamily="34" charset="-122"/>
                 <a:cs typeface="Trebuchet MS" pitchFamily="34" charset="-120"/>
               </a:rPr>
-              <a:t>able</a:t>
+              <a:t>teach</a:t>
             </a:r>
             <a:endParaRPr lang="en-US" sz="1300" dirty="0"/>
           </a:p>
@@ -14756,7 +14914,7 @@
         </p:nvSpPr>
         <p:spPr>
           <a:xfrm>
-            <a:off x="5803392" y="2569464"/>
+            <a:off x="4370832" y="2569464"/>
             <a:ext cx="1828800" cy="201168"/>
           </a:xfrm>
           <a:prstGeom prst="rect">
@@ -14781,7 +14939,7 @@
                 <a:ea typeface="Calibri" pitchFamily="34" charset="-122"/>
                 <a:cs typeface="Calibri" pitchFamily="34" charset="-120"/>
               </a:rPr>
-              <a:t>able to be</a:t>
+              <a:t>to show or instruct</a:t>
             </a:r>
             <a:endParaRPr lang="en-US" sz="850" dirty="0"/>
           </a:p>
@@ -14790,6 +14948,118 @@
       <p:sp>
         <p:nvSpPr>
           <p:cNvPr id="22" name="Shape 20"/>
+          <p:cNvSpPr/>
+          <p:nvPr/>
+        </p:nvSpPr>
+        <p:spPr>
+          <a:xfrm>
+            <a:off x="6519672" y="2258568"/>
+            <a:ext cx="1828800" cy="292608"/>
+          </a:xfrm>
+          <a:prstGeom prst="rect">
+            <a:avLst>
+              <a:gd name="adj" fmla="val 25000"/>
+            </a:avLst>
+          </a:prstGeom>
+          <a:solidFill>
+            <a:srgbClr val="FCE7F3"/>
+          </a:solidFill>
+          <a:ln w="19050">
+            <a:solidFill>
+              <a:srgbClr val="DB2777"/>
+            </a:solidFill>
+            <a:prstDash val="solid"/>
+          </a:ln>
+          <a:effectLst>
+            <a:outerShdw sx="100000" sy="100000" kx="0" ky="0" algn="bl" rotWithShape="0" blurRad="101600" dist="38100" dir="8100000">
+              <a:srgbClr val="000000">
+                <a:alpha val="12000"/>
+              </a:srgbClr>
+            </a:outerShdw>
+          </a:effectLst>
+        </p:spPr>
+      </p:sp>
+      <p:sp>
+        <p:nvSpPr>
+          <p:cNvPr id="23" name="Text 21"/>
+          <p:cNvSpPr/>
+          <p:nvPr/>
+        </p:nvSpPr>
+        <p:spPr>
+          <a:xfrm>
+            <a:off x="6519672" y="2258568"/>
+            <a:ext cx="1828800" cy="292608"/>
+          </a:xfrm>
+          <a:prstGeom prst="rect">
+            <a:avLst/>
+          </a:prstGeom>
+          <a:noFill/>
+          <a:ln/>
+        </p:spPr>
+        <p:txBody>
+          <a:bodyPr wrap="square" lIns="0" tIns="0" rIns="0" bIns="0" rtlCol="0" anchor="ctr"/>
+          <a:lstStyle/>
+          <a:p>
+            <a:pPr algn="ctr" indent="0" marL="0">
+              <a:buNone/>
+            </a:pPr>
+            <a:r>
+              <a:rPr lang="en-US" sz="1300" b="1" dirty="0">
+                <a:solidFill>
+                  <a:srgbClr val="9D174D"/>
+                </a:solidFill>
+                <a:latin typeface="Trebuchet MS" pitchFamily="34" charset="0"/>
+                <a:ea typeface="Trebuchet MS" pitchFamily="34" charset="-122"/>
+                <a:cs typeface="Trebuchet MS" pitchFamily="34" charset="-120"/>
+              </a:rPr>
+              <a:t>ing</a:t>
+            </a:r>
+            <a:endParaRPr lang="en-US" sz="1300" dirty="0"/>
+          </a:p>
+        </p:txBody>
+      </p:sp>
+      <p:sp>
+        <p:nvSpPr>
+          <p:cNvPr id="24" name="Text 22"/>
+          <p:cNvSpPr/>
+          <p:nvPr/>
+        </p:nvSpPr>
+        <p:spPr>
+          <a:xfrm>
+            <a:off x="6519672" y="2569464"/>
+            <a:ext cx="1828800" cy="201168"/>
+          </a:xfrm>
+          <a:prstGeom prst="rect">
+            <a:avLst/>
+          </a:prstGeom>
+          <a:noFill/>
+          <a:ln/>
+        </p:spPr>
+        <p:txBody>
+          <a:bodyPr wrap="square" lIns="0" tIns="0" rIns="0" bIns="0" rtlCol="0" anchor="t"/>
+          <a:lstStyle/>
+          <a:p>
+            <a:pPr algn="ctr" indent="0" marL="0">
+              <a:buNone/>
+            </a:pPr>
+            <a:r>
+              <a:rPr lang="en-US" sz="850" dirty="0">
+                <a:solidFill>
+                  <a:srgbClr val="475569"/>
+                </a:solidFill>
+                <a:latin typeface="Calibri" pitchFamily="34" charset="0"/>
+                <a:ea typeface="Calibri" pitchFamily="34" charset="-122"/>
+                <a:cs typeface="Calibri" pitchFamily="34" charset="-120"/>
+              </a:rPr>
+              <a:t>ongoing action</a:t>
+            </a:r>
+            <a:endParaRPr lang="en-US" sz="850" dirty="0"/>
+          </a:p>
+        </p:txBody>
+      </p:sp>
+      <p:sp>
+        <p:nvSpPr>
+          <p:cNvPr id="25" name="Shape 23"/>
           <p:cNvSpPr/>
           <p:nvPr/>
         </p:nvSpPr>
@@ -14816,7 +15086,7 @@
       </p:sp>
       <p:sp>
         <p:nvSpPr>
-          <p:cNvPr id="23" name="Text 21"/>
+          <p:cNvPr id="26" name="Text 24"/>
           <p:cNvSpPr/>
           <p:nvPr/>
         </p:nvSpPr>
@@ -14855,7 +15125,7 @@
       </p:sp>
       <p:sp>
         <p:nvSpPr>
-          <p:cNvPr id="24" name="Shape 22"/>
+          <p:cNvPr id="27" name="Shape 25"/>
           <p:cNvSpPr/>
           <p:nvPr/>
         </p:nvSpPr>
@@ -14882,7 +15152,7 @@
       </p:sp>
       <p:sp>
         <p:nvSpPr>
-          <p:cNvPr id="25" name="Shape 23"/>
+          <p:cNvPr id="28" name="Shape 26"/>
           <p:cNvSpPr/>
           <p:nvPr/>
         </p:nvSpPr>
@@ -14909,7 +15179,7 @@
       </p:sp>
       <p:sp>
         <p:nvSpPr>
-          <p:cNvPr id="26" name="Text 24"/>
+          <p:cNvPr id="29" name="Text 27"/>
           <p:cNvSpPr/>
           <p:nvPr/>
         </p:nvSpPr>
@@ -14940,7 +15210,7 @@
                 <a:ea typeface="Trebuchet MS" pitchFamily="34" charset="-122"/>
                 <a:cs typeface="Trebuchet MS" pitchFamily="34" charset="-120"/>
               </a:rPr>
-              <a:t>teach</a:t>
+              <a:t>re</a:t>
             </a:r>
             <a:endParaRPr lang="en-US" sz="1400" dirty="0"/>
           </a:p>
@@ -14948,7 +15218,7 @@
       </p:sp>
       <p:sp>
         <p:nvSpPr>
-          <p:cNvPr id="27" name="Text 25"/>
+          <p:cNvPr id="30" name="Text 28"/>
           <p:cNvSpPr/>
           <p:nvPr/>
         </p:nvSpPr>
@@ -14987,7 +15257,7 @@
       </p:sp>
       <p:sp>
         <p:nvSpPr>
-          <p:cNvPr id="28" name="Shape 26"/>
+          <p:cNvPr id="31" name="Shape 29"/>
           <p:cNvSpPr/>
           <p:nvPr/>
         </p:nvSpPr>
@@ -15014,7 +15284,7 @@
       </p:sp>
       <p:sp>
         <p:nvSpPr>
-          <p:cNvPr id="29" name="Text 27"/>
+          <p:cNvPr id="32" name="Text 30"/>
           <p:cNvSpPr/>
           <p:nvPr/>
         </p:nvSpPr>
@@ -15045,7 +15315,7 @@
                 <a:ea typeface="Trebuchet MS" pitchFamily="34" charset="-122"/>
                 <a:cs typeface="Trebuchet MS" pitchFamily="34" charset="-120"/>
               </a:rPr>
-              <a:t>a</a:t>
+              <a:t>teach</a:t>
             </a:r>
             <a:endParaRPr lang="en-US" sz="1400" dirty="0"/>
           </a:p>
@@ -15053,7 +15323,7 @@
       </p:sp>
       <p:sp>
         <p:nvSpPr>
-          <p:cNvPr id="30" name="Text 28"/>
+          <p:cNvPr id="33" name="Text 31"/>
           <p:cNvSpPr/>
           <p:nvPr/>
         </p:nvSpPr>
@@ -15092,7 +15362,7 @@
       </p:sp>
       <p:sp>
         <p:nvSpPr>
-          <p:cNvPr id="31" name="Shape 29"/>
+          <p:cNvPr id="34" name="Shape 32"/>
           <p:cNvSpPr/>
           <p:nvPr/>
         </p:nvSpPr>
@@ -15119,7 +15389,7 @@
       </p:sp>
       <p:sp>
         <p:nvSpPr>
-          <p:cNvPr id="32" name="Text 30"/>
+          <p:cNvPr id="35" name="Text 33"/>
           <p:cNvSpPr/>
           <p:nvPr/>
         </p:nvSpPr>
@@ -15150,7 +15420,7 @@
                 <a:ea typeface="Trebuchet MS" pitchFamily="34" charset="-122"/>
                 <a:cs typeface="Trebuchet MS" pitchFamily="34" charset="-120"/>
               </a:rPr>
-              <a:t>ble</a:t>
+              <a:t>ing</a:t>
             </a:r>
             <a:endParaRPr lang="en-US" sz="1400" dirty="0"/>
           </a:p>
@@ -15158,7 +15428,7 @@
       </p:sp>
       <p:sp>
         <p:nvSpPr>
-          <p:cNvPr id="33" name="Shape 31"/>
+          <p:cNvPr id="36" name="Shape 34"/>
           <p:cNvSpPr/>
           <p:nvPr/>
         </p:nvSpPr>
@@ -15185,7 +15455,7 @@
       </p:sp>
       <p:sp>
         <p:nvSpPr>
-          <p:cNvPr id="34" name="Text 32"/>
+          <p:cNvPr id="37" name="Text 35"/>
           <p:cNvSpPr/>
           <p:nvPr/>
         </p:nvSpPr>
@@ -15224,7 +15494,7 @@
       </p:sp>
       <p:sp>
         <p:nvSpPr>
-          <p:cNvPr id="35" name="Shape 33"/>
+          <p:cNvPr id="38" name="Shape 36"/>
           <p:cNvSpPr/>
           <p:nvPr/>
         </p:nvSpPr>
@@ -15251,13 +15521,13 @@
       </p:sp>
       <p:sp>
         <p:nvSpPr>
-          <p:cNvPr id="36" name="Shape 34"/>
-          <p:cNvSpPr/>
-          <p:nvPr/>
-        </p:nvSpPr>
-        <p:spPr>
-          <a:xfrm>
-            <a:off x="2254649" y="4169664"/>
+          <p:cNvPr id="39" name="Shape 37"/>
+          <p:cNvSpPr/>
+          <p:nvPr/>
+        </p:nvSpPr>
+        <p:spPr>
+          <a:xfrm>
+            <a:off x="2124837" y="4169664"/>
             <a:ext cx="685800" cy="475488"/>
           </a:xfrm>
           <a:prstGeom prst="rect">
@@ -15278,13 +15548,13 @@
       </p:sp>
       <p:sp>
         <p:nvSpPr>
-          <p:cNvPr id="37" name="Text 35"/>
-          <p:cNvSpPr/>
-          <p:nvPr/>
-        </p:nvSpPr>
-        <p:spPr>
-          <a:xfrm>
-            <a:off x="2254649" y="4169664"/>
+          <p:cNvPr id="40" name="Text 38"/>
+          <p:cNvSpPr/>
+          <p:nvPr/>
+        </p:nvSpPr>
+        <p:spPr>
+          <a:xfrm>
+            <a:off x="2124837" y="4169664"/>
             <a:ext cx="685800" cy="475488"/>
           </a:xfrm>
           <a:prstGeom prst="rect">
@@ -15309,7 +15579,7 @@
                 <a:ea typeface="Trebuchet MS" pitchFamily="34" charset="-122"/>
                 <a:cs typeface="Trebuchet MS" pitchFamily="34" charset="-120"/>
               </a:rPr>
-              <a:t>t</a:t>
+              <a:t>r</a:t>
             </a:r>
             <a:endParaRPr lang="en-US" sz="900" dirty="0"/>
           </a:p>
@@ -15317,13 +15587,13 @@
       </p:sp>
       <p:sp>
         <p:nvSpPr>
-          <p:cNvPr id="38" name="Shape 36"/>
-          <p:cNvSpPr/>
-          <p:nvPr/>
-        </p:nvSpPr>
-        <p:spPr>
-          <a:xfrm>
-            <a:off x="3293146" y="4169664"/>
+          <p:cNvPr id="41" name="Shape 39"/>
+          <p:cNvSpPr/>
+          <p:nvPr/>
+        </p:nvSpPr>
+        <p:spPr>
+          <a:xfrm>
+            <a:off x="3033522" y="4169664"/>
             <a:ext cx="685800" cy="475488"/>
           </a:xfrm>
           <a:prstGeom prst="rect">
@@ -15344,13 +15614,13 @@
       </p:sp>
       <p:sp>
         <p:nvSpPr>
-          <p:cNvPr id="39" name="Text 37"/>
-          <p:cNvSpPr/>
-          <p:nvPr/>
-        </p:nvSpPr>
-        <p:spPr>
-          <a:xfrm>
-            <a:off x="3293146" y="4169664"/>
+          <p:cNvPr id="42" name="Text 40"/>
+          <p:cNvSpPr/>
+          <p:nvPr/>
+        </p:nvSpPr>
+        <p:spPr>
+          <a:xfrm>
+            <a:off x="3033522" y="4169664"/>
             <a:ext cx="685800" cy="475488"/>
           </a:xfrm>
           <a:prstGeom prst="rect">
@@ -15375,7 +15645,7 @@
                 <a:ea typeface="Trebuchet MS" pitchFamily="34" charset="-122"/>
                 <a:cs typeface="Trebuchet MS" pitchFamily="34" charset="-120"/>
               </a:rPr>
-              <a:t>ea</a:t>
+              <a:t>e</a:t>
             </a:r>
             <a:endParaRPr lang="en-US" sz="900" dirty="0"/>
           </a:p>
@@ -15383,13 +15653,13 @@
       </p:sp>
       <p:sp>
         <p:nvSpPr>
-          <p:cNvPr id="40" name="Shape 38"/>
-          <p:cNvSpPr/>
-          <p:nvPr/>
-        </p:nvSpPr>
-        <p:spPr>
-          <a:xfrm>
-            <a:off x="4331643" y="4169664"/>
+          <p:cNvPr id="43" name="Shape 41"/>
+          <p:cNvSpPr/>
+          <p:nvPr/>
+        </p:nvSpPr>
+        <p:spPr>
+          <a:xfrm>
+            <a:off x="3942207" y="4169664"/>
             <a:ext cx="685800" cy="475488"/>
           </a:xfrm>
           <a:prstGeom prst="rect">
@@ -15410,13 +15680,13 @@
       </p:sp>
       <p:sp>
         <p:nvSpPr>
-          <p:cNvPr id="41" name="Text 39"/>
-          <p:cNvSpPr/>
-          <p:nvPr/>
-        </p:nvSpPr>
-        <p:spPr>
-          <a:xfrm>
-            <a:off x="4331643" y="4169664"/>
+          <p:cNvPr id="44" name="Text 42"/>
+          <p:cNvSpPr/>
+          <p:nvPr/>
+        </p:nvSpPr>
+        <p:spPr>
+          <a:xfrm>
+            <a:off x="3942207" y="4169664"/>
             <a:ext cx="685800" cy="475488"/>
           </a:xfrm>
           <a:prstGeom prst="rect">
@@ -15441,7 +15711,7 @@
                 <a:ea typeface="Trebuchet MS" pitchFamily="34" charset="-122"/>
                 <a:cs typeface="Trebuchet MS" pitchFamily="34" charset="-120"/>
               </a:rPr>
-              <a:t>ch</a:t>
+              <a:t>t</a:t>
             </a:r>
             <a:endParaRPr lang="en-US" sz="900" dirty="0"/>
           </a:p>
@@ -15449,13 +15719,13 @@
       </p:sp>
       <p:sp>
         <p:nvSpPr>
-          <p:cNvPr id="42" name="Shape 40"/>
-          <p:cNvSpPr/>
-          <p:nvPr/>
-        </p:nvSpPr>
-        <p:spPr>
-          <a:xfrm>
-            <a:off x="5370141" y="4169664"/>
+          <p:cNvPr id="45" name="Shape 43"/>
+          <p:cNvSpPr/>
+          <p:nvPr/>
+        </p:nvSpPr>
+        <p:spPr>
+          <a:xfrm>
+            <a:off x="4850892" y="4169664"/>
             <a:ext cx="685800" cy="475488"/>
           </a:xfrm>
           <a:prstGeom prst="rect">
@@ -15476,13 +15746,13 @@
       </p:sp>
       <p:sp>
         <p:nvSpPr>
-          <p:cNvPr id="43" name="Text 41"/>
-          <p:cNvSpPr/>
-          <p:nvPr/>
-        </p:nvSpPr>
-        <p:spPr>
-          <a:xfrm>
-            <a:off x="5370141" y="4169664"/>
+          <p:cNvPr id="46" name="Text 44"/>
+          <p:cNvSpPr/>
+          <p:nvPr/>
+        </p:nvSpPr>
+        <p:spPr>
+          <a:xfrm>
+            <a:off x="4850892" y="4169664"/>
             <a:ext cx="685800" cy="475488"/>
           </a:xfrm>
           <a:prstGeom prst="rect">
@@ -15507,7 +15777,7 @@
                 <a:ea typeface="Trebuchet MS" pitchFamily="34" charset="-122"/>
                 <a:cs typeface="Trebuchet MS" pitchFamily="34" charset="-120"/>
               </a:rPr>
-              <a:t>a</a:t>
+              <a:t>ea</a:t>
             </a:r>
             <a:endParaRPr lang="en-US" sz="900" dirty="0"/>
           </a:p>
@@ -15515,13 +15785,13 @@
       </p:sp>
       <p:sp>
         <p:nvSpPr>
-          <p:cNvPr id="44" name="Shape 42"/>
-          <p:cNvSpPr/>
-          <p:nvPr/>
-        </p:nvSpPr>
-        <p:spPr>
-          <a:xfrm>
-            <a:off x="6408638" y="4169664"/>
+          <p:cNvPr id="47" name="Shape 45"/>
+          <p:cNvSpPr/>
+          <p:nvPr/>
+        </p:nvSpPr>
+        <p:spPr>
+          <a:xfrm>
+            <a:off x="5759577" y="4169664"/>
             <a:ext cx="685800" cy="475488"/>
           </a:xfrm>
           <a:prstGeom prst="rect">
@@ -15542,13 +15812,13 @@
       </p:sp>
       <p:sp>
         <p:nvSpPr>
-          <p:cNvPr id="45" name="Text 43"/>
-          <p:cNvSpPr/>
-          <p:nvPr/>
-        </p:nvSpPr>
-        <p:spPr>
-          <a:xfrm>
-            <a:off x="6408638" y="4169664"/>
+          <p:cNvPr id="48" name="Text 46"/>
+          <p:cNvSpPr/>
+          <p:nvPr/>
+        </p:nvSpPr>
+        <p:spPr>
+          <a:xfrm>
+            <a:off x="5759577" y="4169664"/>
             <a:ext cx="685800" cy="475488"/>
           </a:xfrm>
           <a:prstGeom prst="rect">
@@ -15573,7 +15843,7 @@
                 <a:ea typeface="Trebuchet MS" pitchFamily="34" charset="-122"/>
                 <a:cs typeface="Trebuchet MS" pitchFamily="34" charset="-120"/>
               </a:rPr>
-              <a:t>b</a:t>
+              <a:t>ch</a:t>
             </a:r>
             <a:endParaRPr lang="en-US" sz="900" dirty="0"/>
           </a:p>
@@ -15581,13 +15851,13 @@
       </p:sp>
       <p:sp>
         <p:nvSpPr>
-          <p:cNvPr id="46" name="Shape 44"/>
-          <p:cNvSpPr/>
-          <p:nvPr/>
-        </p:nvSpPr>
-        <p:spPr>
-          <a:xfrm>
-            <a:off x="7447135" y="4169664"/>
+          <p:cNvPr id="49" name="Shape 47"/>
+          <p:cNvSpPr/>
+          <p:nvPr/>
+        </p:nvSpPr>
+        <p:spPr>
+          <a:xfrm>
+            <a:off x="6668262" y="4169664"/>
             <a:ext cx="685800" cy="475488"/>
           </a:xfrm>
           <a:prstGeom prst="rect">
@@ -15608,13 +15878,13 @@
       </p:sp>
       <p:sp>
         <p:nvSpPr>
-          <p:cNvPr id="47" name="Text 45"/>
-          <p:cNvSpPr/>
-          <p:nvPr/>
-        </p:nvSpPr>
-        <p:spPr>
-          <a:xfrm>
-            <a:off x="7447135" y="4169664"/>
+          <p:cNvPr id="50" name="Text 48"/>
+          <p:cNvSpPr/>
+          <p:nvPr/>
+        </p:nvSpPr>
+        <p:spPr>
+          <a:xfrm>
+            <a:off x="6668262" y="4169664"/>
             <a:ext cx="685800" cy="475488"/>
           </a:xfrm>
           <a:prstGeom prst="rect">
@@ -15639,7 +15909,73 @@
                 <a:ea typeface="Trebuchet MS" pitchFamily="34" charset="-122"/>
                 <a:cs typeface="Trebuchet MS" pitchFamily="34" charset="-120"/>
               </a:rPr>
-              <a:t>le</a:t>
+              <a:t>i</a:t>
+            </a:r>
+            <a:endParaRPr lang="en-US" sz="900" dirty="0"/>
+          </a:p>
+        </p:txBody>
+      </p:sp>
+      <p:sp>
+        <p:nvSpPr>
+          <p:cNvPr id="51" name="Shape 49"/>
+          <p:cNvSpPr/>
+          <p:nvPr/>
+        </p:nvSpPr>
+        <p:spPr>
+          <a:xfrm>
+            <a:off x="7576947" y="4169664"/>
+            <a:ext cx="685800" cy="475488"/>
+          </a:xfrm>
+          <a:prstGeom prst="rect">
+            <a:avLst>
+              <a:gd name="adj" fmla="val 7692"/>
+            </a:avLst>
+          </a:prstGeom>
+          <a:solidFill>
+            <a:srgbClr val="FFFFFF"/>
+          </a:solidFill>
+          <a:ln w="12700">
+            <a:solidFill>
+              <a:srgbClr val="DB2777"/>
+            </a:solidFill>
+            <a:prstDash val="solid"/>
+          </a:ln>
+        </p:spPr>
+      </p:sp>
+      <p:sp>
+        <p:nvSpPr>
+          <p:cNvPr id="52" name="Text 50"/>
+          <p:cNvSpPr/>
+          <p:nvPr/>
+        </p:nvSpPr>
+        <p:spPr>
+          <a:xfrm>
+            <a:off x="7576947" y="4169664"/>
+            <a:ext cx="685800" cy="475488"/>
+          </a:xfrm>
+          <a:prstGeom prst="rect">
+            <a:avLst/>
+          </a:prstGeom>
+          <a:noFill/>
+          <a:ln/>
+        </p:spPr>
+        <p:txBody>
+          <a:bodyPr wrap="square" lIns="0" tIns="0" rIns="0" bIns="0" rtlCol="0" anchor="ctr"/>
+          <a:lstStyle/>
+          <a:p>
+            <a:pPr algn="ctr" indent="0" marL="0">
+              <a:buNone/>
+            </a:pPr>
+            <a:r>
+              <a:rPr lang="en-US" sz="900" b="1" dirty="0">
+                <a:solidFill>
+                  <a:srgbClr val="9D174D"/>
+                </a:solidFill>
+                <a:latin typeface="Trebuchet MS" pitchFamily="34" charset="0"/>
+                <a:ea typeface="Trebuchet MS" pitchFamily="34" charset="-122"/>
+                <a:cs typeface="Trebuchet MS" pitchFamily="34" charset="-120"/>
+              </a:rPr>
+              <a:t>ng</a:t>
             </a:r>
             <a:endParaRPr lang="en-US" sz="900" dirty="0"/>
           </a:p>
@@ -16213,7 +16549,7 @@
                 <a:ea typeface="Calibri" pitchFamily="34" charset="-122"/>
                 <a:cs typeface="Calibri" pitchFamily="34" charset="-120"/>
               </a:rPr>
-              <a:t>Word Labs  •  wordlabs.app  •  Root: 'teach' = to show or instruct others</a:t>
+              <a:t>Word Labs  •  wordlabs.app  •  Root: 'teach' = to show or instruct</a:t>
             </a:r>
             <a:endParaRPr lang="en-US" sz="800" dirty="0"/>
           </a:p>
@@ -16547,7 +16883,7 @@
                 <a:ea typeface="Trebuchet MS" pitchFamily="34" charset="-122"/>
                 <a:cs typeface="Trebuchet MS" pitchFamily="34" charset="-120"/>
               </a:rPr>
-              <a:t>0</a:t>
+              <a:t>2</a:t>
             </a:r>
             <a:pPr algn="ctr" indent="0" marL="0">
               <a:buNone/>
@@ -16561,7 +16897,7 @@
                 <a:ea typeface="Trebuchet MS" pitchFamily="34" charset="-122"/>
                 <a:cs typeface="Trebuchet MS" pitchFamily="34" charset="-120"/>
               </a:rPr>
-              <a:t>  punctuation mark</a:t>
+              <a:t>  punctuation marks</a:t>
             </a:r>
             <a:endParaRPr lang="en-US" sz="2800" dirty="0"/>
           </a:p>
@@ -16853,7 +17189,7 @@
                 <a:ea typeface="Calibri" pitchFamily="34" charset="-122"/>
                 <a:cs typeface="Calibri" pitchFamily="34" charset="-120"/>
               </a:rPr>
-              <a:t>Word Labs  •  wordlabs.app  •  Root: 'teach' = to show or instruct others</a:t>
+              <a:t>Word Labs  •  wordlabs.app  •  Root: 'teach' = to show or instruct</a:t>
             </a:r>
             <a:endParaRPr lang="en-US" sz="800" dirty="0"/>
           </a:p>
@@ -16965,7 +17301,7 @@
                 <a:ea typeface="Calibri" pitchFamily="34" charset="-122"/>
                 <a:cs typeface="Calibri" pitchFamily="34" charset="-120"/>
               </a:rPr>
-              <a:t>Our </a:t>
+              <a:t>The </a:t>
             </a:r>
             <a:pPr algn="l" indent="0" marL="0">
               <a:buNone/>
@@ -16982,7 +17318,7 @@
                 <a:ea typeface="Calibri" pitchFamily="34" charset="-122"/>
                 <a:cs typeface="Calibri" pitchFamily="34" charset="-120"/>
               </a:rPr>
-              <a:t>teacher</a:t>
+              <a:t>coteacher</a:t>
             </a:r>
             <a:pPr algn="l" indent="0" marL="0">
               <a:buNone/>
@@ -16996,7 +17332,7 @@
                 <a:ea typeface="Calibri" pitchFamily="34" charset="-122"/>
                 <a:cs typeface="Calibri" pitchFamily="34" charset="-120"/>
               </a:rPr>
-              <a:t> said that </a:t>
+              <a:t> focused on </a:t>
             </a:r>
             <a:pPr algn="l" indent="0" marL="0">
               <a:buNone/>
@@ -17013,7 +17349,7 @@
                 <a:ea typeface="Calibri" pitchFamily="34" charset="-122"/>
                 <a:cs typeface="Calibri" pitchFamily="34" charset="-120"/>
               </a:rPr>
-              <a:t>reteaching</a:t>
+              <a:t>teachable</a:t>
             </a:r>
             <a:pPr algn="l" indent="0" marL="0">
               <a:buNone/>
@@ -17027,7 +17363,7 @@
                 <a:ea typeface="Calibri" pitchFamily="34" charset="-122"/>
                 <a:cs typeface="Calibri" pitchFamily="34" charset="-120"/>
               </a:rPr>
-              <a:t> a lesson helps make every student more </a:t>
+              <a:t> moments, while the </a:t>
             </a:r>
             <a:pPr algn="l" indent="0" marL="0">
               <a:buNone/>
@@ -17044,7 +17380,7 @@
                 <a:ea typeface="Calibri" pitchFamily="34" charset="-122"/>
                 <a:cs typeface="Calibri" pitchFamily="34" charset="-120"/>
               </a:rPr>
-              <a:t>teachable</a:t>
+              <a:t>teachings</a:t>
             </a:r>
             <a:pPr algn="l" indent="0" marL="0">
               <a:buNone/>
@@ -17058,7 +17394,7 @@
                 <a:ea typeface="Calibri" pitchFamily="34" charset="-122"/>
                 <a:cs typeface="Calibri" pitchFamily="34" charset="-120"/>
               </a:rPr>
-              <a:t>.</a:t>
+              <a:t> from last week were still fresh in our minds.</a:t>
             </a:r>
             <a:endParaRPr lang="en-US" sz="1800" dirty="0"/>
           </a:p>
@@ -17213,7 +17549,7 @@
                 <a:ea typeface="Trebuchet MS" pitchFamily="34" charset="-122"/>
                 <a:cs typeface="Trebuchet MS" pitchFamily="34" charset="-120"/>
               </a:rPr>
-              <a:t>teacher</a:t>
+              <a:t>coteacher</a:t>
             </a:r>
             <a:endParaRPr lang="en-US" sz="1400" dirty="0"/>
           </a:p>
@@ -17341,7 +17677,7 @@
                 <a:ea typeface="Trebuchet MS" pitchFamily="34" charset="-122"/>
                 <a:cs typeface="Trebuchet MS" pitchFamily="34" charset="-120"/>
               </a:rPr>
-              <a:t>reteaching</a:t>
+              <a:t>teachable</a:t>
             </a:r>
             <a:endParaRPr lang="en-US" sz="1400" dirty="0"/>
           </a:p>
@@ -17469,7 +17805,7 @@
                 <a:ea typeface="Trebuchet MS" pitchFamily="34" charset="-122"/>
                 <a:cs typeface="Trebuchet MS" pitchFamily="34" charset="-120"/>
               </a:rPr>
-              <a:t>teachable</a:t>
+              <a:t>teachings</a:t>
             </a:r>
             <a:endParaRPr lang="en-US" sz="1400" dirty="0"/>
           </a:p>
@@ -17800,7 +18136,7 @@
                 <a:ea typeface="Calibri" pitchFamily="34" charset="-122"/>
                 <a:cs typeface="Calibri" pitchFamily="34" charset="-120"/>
               </a:rPr>
-              <a:t>Word Labs  •  wordlabs.app  •  Root: 'teach' = to show or instruct others</a:t>
+              <a:t>Word Labs  •  wordlabs.app  •  Root: 'teach' = to show or instruct</a:t>
             </a:r>
             <a:endParaRPr lang="en-US" sz="800" dirty="0"/>
           </a:p>
@@ -17939,7 +18275,7 @@
                 <a:ea typeface="Trebuchet MS" pitchFamily="34" charset="-122"/>
                 <a:cs typeface="Trebuchet MS" pitchFamily="34" charset="-120"/>
               </a:rPr>
-              <a:t>teacher</a:t>
+              <a:t>coteacher</a:t>
             </a:r>
             <a:endParaRPr lang="en-US" sz="2800" dirty="0"/>
           </a:p>
@@ -18627,7 +18963,7 @@
                 <a:ea typeface="Calibri" pitchFamily="34" charset="-122"/>
                 <a:cs typeface="Calibri" pitchFamily="34" charset="-120"/>
               </a:rPr>
-              <a:t>Word Labs  •  wordlabs.app  •  Root: 'teach' = to show or instruct others</a:t>
+              <a:t>Word Labs  •  wordlabs.app  •  Root: 'teach' = to show or instruct</a:t>
             </a:r>
             <a:endParaRPr lang="en-US" sz="800" dirty="0"/>
           </a:p>
@@ -18766,7 +19102,7 @@
                 <a:ea typeface="Trebuchet MS" pitchFamily="34" charset="-122"/>
                 <a:cs typeface="Trebuchet MS" pitchFamily="34" charset="-120"/>
               </a:rPr>
-              <a:t>teacher</a:t>
+              <a:t>coteacher</a:t>
             </a:r>
             <a:endParaRPr lang="en-US" sz="2800" dirty="0"/>
           </a:p>
@@ -18846,7 +19182,7 @@
         </p:nvSpPr>
         <p:spPr>
           <a:xfrm>
-            <a:off x="2938272" y="2258568"/>
+            <a:off x="2221992" y="2258568"/>
             <a:ext cx="1828800" cy="292608"/>
           </a:xfrm>
           <a:prstGeom prst="rect">
@@ -18855,11 +19191,11 @@
             </a:avLst>
           </a:prstGeom>
           <a:solidFill>
-            <a:srgbClr val="CCFBF1"/>
+            <a:srgbClr val="DDD6FE"/>
           </a:solidFill>
           <a:ln w="19050">
             <a:solidFill>
-              <a:srgbClr val="0D9488"/>
+              <a:srgbClr val="7C3AED"/>
             </a:solidFill>
             <a:prstDash val="solid"/>
           </a:ln>
@@ -18880,7 +19216,7 @@
         </p:nvSpPr>
         <p:spPr>
           <a:xfrm>
-            <a:off x="2938272" y="2258568"/>
+            <a:off x="2221992" y="2258568"/>
             <a:ext cx="1828800" cy="292608"/>
           </a:xfrm>
           <a:prstGeom prst="rect">
@@ -18899,13 +19235,13 @@
             <a:r>
               <a:rPr lang="en-US" sz="1300" b="1" dirty="0">
                 <a:solidFill>
-                  <a:srgbClr val="0F766E"/>
+                  <a:srgbClr val="4C1D95"/>
                 </a:solidFill>
                 <a:latin typeface="Trebuchet MS" pitchFamily="34" charset="0"/>
                 <a:ea typeface="Trebuchet MS" pitchFamily="34" charset="-122"/>
                 <a:cs typeface="Trebuchet MS" pitchFamily="34" charset="-120"/>
               </a:rPr>
-              <a:t>teach</a:t>
+              <a:t>co</a:t>
             </a:r>
             <a:endParaRPr lang="en-US" sz="1300" dirty="0"/>
           </a:p>
@@ -18919,7 +19255,7 @@
         </p:nvSpPr>
         <p:spPr>
           <a:xfrm>
-            <a:off x="2938272" y="2569464"/>
+            <a:off x="2221992" y="2569464"/>
             <a:ext cx="1828800" cy="201168"/>
           </a:xfrm>
           <a:prstGeom prst="rect">
@@ -18944,7 +19280,7 @@
                 <a:ea typeface="Calibri" pitchFamily="34" charset="-122"/>
                 <a:cs typeface="Calibri" pitchFamily="34" charset="-120"/>
               </a:rPr>
-              <a:t>to instruct or show</a:t>
+              <a:t>together; with</a:t>
             </a:r>
             <a:endParaRPr lang="en-US" sz="850" dirty="0"/>
           </a:p>
@@ -18958,7 +19294,7 @@
         </p:nvSpPr>
         <p:spPr>
           <a:xfrm>
-            <a:off x="5803392" y="2258568"/>
+            <a:off x="4370832" y="2258568"/>
             <a:ext cx="1828800" cy="292608"/>
           </a:xfrm>
           <a:prstGeom prst="rect">
@@ -18967,11 +19303,11 @@
             </a:avLst>
           </a:prstGeom>
           <a:solidFill>
-            <a:srgbClr val="FCE7F3"/>
+            <a:srgbClr val="CCFBF1"/>
           </a:solidFill>
           <a:ln w="19050">
             <a:solidFill>
-              <a:srgbClr val="DB2777"/>
+              <a:srgbClr val="0D9488"/>
             </a:solidFill>
             <a:prstDash val="solid"/>
           </a:ln>
@@ -18992,7 +19328,7 @@
         </p:nvSpPr>
         <p:spPr>
           <a:xfrm>
-            <a:off x="5803392" y="2258568"/>
+            <a:off x="4370832" y="2258568"/>
             <a:ext cx="1828800" cy="292608"/>
           </a:xfrm>
           <a:prstGeom prst="rect">
@@ -19011,13 +19347,13 @@
             <a:r>
               <a:rPr lang="en-US" sz="1300" b="1" dirty="0">
                 <a:solidFill>
-                  <a:srgbClr val="9D174D"/>
+                  <a:srgbClr val="0F766E"/>
                 </a:solidFill>
                 <a:latin typeface="Trebuchet MS" pitchFamily="34" charset="0"/>
                 <a:ea typeface="Trebuchet MS" pitchFamily="34" charset="-122"/>
                 <a:cs typeface="Trebuchet MS" pitchFamily="34" charset="-120"/>
               </a:rPr>
-              <a:t>er</a:t>
+              <a:t>teach</a:t>
             </a:r>
             <a:endParaRPr lang="en-US" sz="1300" dirty="0"/>
           </a:p>
@@ -19031,7 +19367,7 @@
         </p:nvSpPr>
         <p:spPr>
           <a:xfrm>
-            <a:off x="5803392" y="2569464"/>
+            <a:off x="4370832" y="2569464"/>
             <a:ext cx="1828800" cy="201168"/>
           </a:xfrm>
           <a:prstGeom prst="rect">
@@ -19056,7 +19392,7 @@
                 <a:ea typeface="Calibri" pitchFamily="34" charset="-122"/>
                 <a:cs typeface="Calibri" pitchFamily="34" charset="-120"/>
               </a:rPr>
-              <a:t>one who does</a:t>
+              <a:t>to show or instruct</a:t>
             </a:r>
             <a:endParaRPr lang="en-US" sz="850" dirty="0"/>
           </a:p>
@@ -19065,6 +19401,118 @@
       <p:sp>
         <p:nvSpPr>
           <p:cNvPr id="22" name="Shape 20"/>
+          <p:cNvSpPr/>
+          <p:nvPr/>
+        </p:nvSpPr>
+        <p:spPr>
+          <a:xfrm>
+            <a:off x="6519672" y="2258568"/>
+            <a:ext cx="1828800" cy="292608"/>
+          </a:xfrm>
+          <a:prstGeom prst="rect">
+            <a:avLst>
+              <a:gd name="adj" fmla="val 25000"/>
+            </a:avLst>
+          </a:prstGeom>
+          <a:solidFill>
+            <a:srgbClr val="FCE7F3"/>
+          </a:solidFill>
+          <a:ln w="19050">
+            <a:solidFill>
+              <a:srgbClr val="DB2777"/>
+            </a:solidFill>
+            <a:prstDash val="solid"/>
+          </a:ln>
+          <a:effectLst>
+            <a:outerShdw sx="100000" sy="100000" kx="0" ky="0" algn="bl" rotWithShape="0" blurRad="101600" dist="38100" dir="8100000">
+              <a:srgbClr val="000000">
+                <a:alpha val="12000"/>
+              </a:srgbClr>
+            </a:outerShdw>
+          </a:effectLst>
+        </p:spPr>
+      </p:sp>
+      <p:sp>
+        <p:nvSpPr>
+          <p:cNvPr id="23" name="Text 21"/>
+          <p:cNvSpPr/>
+          <p:nvPr/>
+        </p:nvSpPr>
+        <p:spPr>
+          <a:xfrm>
+            <a:off x="6519672" y="2258568"/>
+            <a:ext cx="1828800" cy="292608"/>
+          </a:xfrm>
+          <a:prstGeom prst="rect">
+            <a:avLst/>
+          </a:prstGeom>
+          <a:noFill/>
+          <a:ln/>
+        </p:spPr>
+        <p:txBody>
+          <a:bodyPr wrap="square" lIns="0" tIns="0" rIns="0" bIns="0" rtlCol="0" anchor="ctr"/>
+          <a:lstStyle/>
+          <a:p>
+            <a:pPr algn="ctr" indent="0" marL="0">
+              <a:buNone/>
+            </a:pPr>
+            <a:r>
+              <a:rPr lang="en-US" sz="1300" b="1" dirty="0">
+                <a:solidFill>
+                  <a:srgbClr val="9D174D"/>
+                </a:solidFill>
+                <a:latin typeface="Trebuchet MS" pitchFamily="34" charset="0"/>
+                <a:ea typeface="Trebuchet MS" pitchFamily="34" charset="-122"/>
+                <a:cs typeface="Trebuchet MS" pitchFamily="34" charset="-120"/>
+              </a:rPr>
+              <a:t>er</a:t>
+            </a:r>
+            <a:endParaRPr lang="en-US" sz="1300" dirty="0"/>
+          </a:p>
+        </p:txBody>
+      </p:sp>
+      <p:sp>
+        <p:nvSpPr>
+          <p:cNvPr id="24" name="Text 22"/>
+          <p:cNvSpPr/>
+          <p:nvPr/>
+        </p:nvSpPr>
+        <p:spPr>
+          <a:xfrm>
+            <a:off x="6519672" y="2569464"/>
+            <a:ext cx="1828800" cy="201168"/>
+          </a:xfrm>
+          <a:prstGeom prst="rect">
+            <a:avLst/>
+          </a:prstGeom>
+          <a:noFill/>
+          <a:ln/>
+        </p:spPr>
+        <p:txBody>
+          <a:bodyPr wrap="square" lIns="0" tIns="0" rIns="0" bIns="0" rtlCol="0" anchor="t"/>
+          <a:lstStyle/>
+          <a:p>
+            <a:pPr algn="ctr" indent="0" marL="0">
+              <a:buNone/>
+            </a:pPr>
+            <a:r>
+              <a:rPr lang="en-US" sz="850" dirty="0">
+                <a:solidFill>
+                  <a:srgbClr val="475569"/>
+                </a:solidFill>
+                <a:latin typeface="Calibri" pitchFamily="34" charset="0"/>
+                <a:ea typeface="Calibri" pitchFamily="34" charset="-122"/>
+                <a:cs typeface="Calibri" pitchFamily="34" charset="-120"/>
+              </a:rPr>
+              <a:t>a person who does something</a:t>
+            </a:r>
+            <a:endParaRPr lang="en-US" sz="850" dirty="0"/>
+          </a:p>
+        </p:txBody>
+      </p:sp>
+      <p:sp>
+        <p:nvSpPr>
+          <p:cNvPr id="25" name="Shape 23"/>
           <p:cNvSpPr/>
           <p:nvPr/>
         </p:nvSpPr>
@@ -19091,7 +19539,7 @@
       </p:sp>
       <p:sp>
         <p:nvSpPr>
-          <p:cNvPr id="23" name="Text 21"/>
+          <p:cNvPr id="26" name="Text 24"/>
           <p:cNvSpPr/>
           <p:nvPr/>
         </p:nvSpPr>
@@ -19130,7 +19578,7 @@
       </p:sp>
       <p:sp>
         <p:nvSpPr>
-          <p:cNvPr id="24" name="Shape 22"/>
+          <p:cNvPr id="27" name="Shape 25"/>
           <p:cNvSpPr/>
           <p:nvPr/>
         </p:nvSpPr>
@@ -19157,7 +19605,7 @@
       </p:sp>
       <p:sp>
         <p:nvSpPr>
-          <p:cNvPr id="25" name="Text 23"/>
+          <p:cNvPr id="28" name="Text 26"/>
           <p:cNvSpPr/>
           <p:nvPr/>
         </p:nvSpPr>
@@ -19196,7 +19644,7 @@
       </p:sp>
       <p:sp>
         <p:nvSpPr>
-          <p:cNvPr id="26" name="Shape 24"/>
+          <p:cNvPr id="29" name="Shape 27"/>
           <p:cNvSpPr/>
           <p:nvPr/>
         </p:nvSpPr>
@@ -19223,7 +19671,7 @@
       </p:sp>
       <p:sp>
         <p:nvSpPr>
-          <p:cNvPr id="27" name="Text 25"/>
+          <p:cNvPr id="30" name="Text 28"/>
           <p:cNvSpPr/>
           <p:nvPr/>
         </p:nvSpPr>
@@ -19262,7 +19710,7 @@
       </p:sp>
       <p:sp>
         <p:nvSpPr>
-          <p:cNvPr id="28" name="Shape 26"/>
+          <p:cNvPr id="31" name="Shape 29"/>
           <p:cNvSpPr/>
           <p:nvPr/>
         </p:nvSpPr>
@@ -19289,7 +19737,7 @@
       </p:sp>
       <p:sp>
         <p:nvSpPr>
-          <p:cNvPr id="29" name="Text 27"/>
+          <p:cNvPr id="32" name="Text 30"/>
           <p:cNvSpPr/>
           <p:nvPr/>
         </p:nvSpPr>
@@ -19612,7 +20060,7 @@
                 <a:ea typeface="Calibri" pitchFamily="34" charset="-122"/>
                 <a:cs typeface="Calibri" pitchFamily="34" charset="-120"/>
               </a:rPr>
-              <a:t>Word Labs  •  wordlabs.app  •  Root: 'teach' = to show or instruct others</a:t>
+              <a:t>Word Labs  •  wordlabs.app  •  Root: 'teach' = to show or instruct</a:t>
             </a:r>
             <a:endParaRPr lang="en-US" sz="800" dirty="0"/>
           </a:p>
@@ -19751,7 +20199,7 @@
                 <a:ea typeface="Trebuchet MS" pitchFamily="34" charset="-122"/>
                 <a:cs typeface="Trebuchet MS" pitchFamily="34" charset="-120"/>
               </a:rPr>
-              <a:t>teacher</a:t>
+              <a:t>coteacher</a:t>
             </a:r>
             <a:endParaRPr lang="en-US" sz="2800" dirty="0"/>
           </a:p>
@@ -19831,7 +20279,7 @@
         </p:nvSpPr>
         <p:spPr>
           <a:xfrm>
-            <a:off x="2938272" y="2258568"/>
+            <a:off x="2221992" y="2258568"/>
             <a:ext cx="1828800" cy="292608"/>
           </a:xfrm>
           <a:prstGeom prst="rect">
@@ -19840,11 +20288,11 @@
             </a:avLst>
           </a:prstGeom>
           <a:solidFill>
-            <a:srgbClr val="CCFBF1"/>
+            <a:srgbClr val="DDD6FE"/>
           </a:solidFill>
           <a:ln w="19050">
             <a:solidFill>
-              <a:srgbClr val="0D9488"/>
+              <a:srgbClr val="7C3AED"/>
             </a:solidFill>
             <a:prstDash val="solid"/>
           </a:ln>
@@ -19865,7 +20313,7 @@
         </p:nvSpPr>
         <p:spPr>
           <a:xfrm>
-            <a:off x="2938272" y="2258568"/>
+            <a:off x="2221992" y="2258568"/>
             <a:ext cx="1828800" cy="292608"/>
           </a:xfrm>
           <a:prstGeom prst="rect">
@@ -19884,13 +20332,13 @@
             <a:r>
               <a:rPr lang="en-US" sz="1300" b="1" dirty="0">
                 <a:solidFill>
-                  <a:srgbClr val="0F766E"/>
+                  <a:srgbClr val="4C1D95"/>
                 </a:solidFill>
                 <a:latin typeface="Trebuchet MS" pitchFamily="34" charset="0"/>
                 <a:ea typeface="Trebuchet MS" pitchFamily="34" charset="-122"/>
                 <a:cs typeface="Trebuchet MS" pitchFamily="34" charset="-120"/>
               </a:rPr>
-              <a:t>teach</a:t>
+              <a:t>co</a:t>
             </a:r>
             <a:endParaRPr lang="en-US" sz="1300" dirty="0"/>
           </a:p>
@@ -19904,7 +20352,7 @@
         </p:nvSpPr>
         <p:spPr>
           <a:xfrm>
-            <a:off x="2938272" y="2569464"/>
+            <a:off x="2221992" y="2569464"/>
             <a:ext cx="1828800" cy="201168"/>
           </a:xfrm>
           <a:prstGeom prst="rect">
@@ -19929,7 +20377,7 @@
                 <a:ea typeface="Calibri" pitchFamily="34" charset="-122"/>
                 <a:cs typeface="Calibri" pitchFamily="34" charset="-120"/>
               </a:rPr>
-              <a:t>to instruct or show</a:t>
+              <a:t>together; with</a:t>
             </a:r>
             <a:endParaRPr lang="en-US" sz="850" dirty="0"/>
           </a:p>
@@ -19943,7 +20391,7 @@
         </p:nvSpPr>
         <p:spPr>
           <a:xfrm>
-            <a:off x="5803392" y="2258568"/>
+            <a:off x="4370832" y="2258568"/>
             <a:ext cx="1828800" cy="292608"/>
           </a:xfrm>
           <a:prstGeom prst="rect">
@@ -19952,11 +20400,11 @@
             </a:avLst>
           </a:prstGeom>
           <a:solidFill>
-            <a:srgbClr val="FCE7F3"/>
+            <a:srgbClr val="CCFBF1"/>
           </a:solidFill>
           <a:ln w="19050">
             <a:solidFill>
-              <a:srgbClr val="DB2777"/>
+              <a:srgbClr val="0D9488"/>
             </a:solidFill>
             <a:prstDash val="solid"/>
           </a:ln>
@@ -19977,7 +20425,7 @@
         </p:nvSpPr>
         <p:spPr>
           <a:xfrm>
-            <a:off x="5803392" y="2258568"/>
+            <a:off x="4370832" y="2258568"/>
             <a:ext cx="1828800" cy="292608"/>
           </a:xfrm>
           <a:prstGeom prst="rect">
@@ -19996,13 +20444,13 @@
             <a:r>
               <a:rPr lang="en-US" sz="1300" b="1" dirty="0">
                 <a:solidFill>
-                  <a:srgbClr val="9D174D"/>
+                  <a:srgbClr val="0F766E"/>
                 </a:solidFill>
                 <a:latin typeface="Trebuchet MS" pitchFamily="34" charset="0"/>
                 <a:ea typeface="Trebuchet MS" pitchFamily="34" charset="-122"/>
                 <a:cs typeface="Trebuchet MS" pitchFamily="34" charset="-120"/>
               </a:rPr>
-              <a:t>er</a:t>
+              <a:t>teach</a:t>
             </a:r>
             <a:endParaRPr lang="en-US" sz="1300" dirty="0"/>
           </a:p>
@@ -20016,7 +20464,7 @@
         </p:nvSpPr>
         <p:spPr>
           <a:xfrm>
-            <a:off x="5803392" y="2569464"/>
+            <a:off x="4370832" y="2569464"/>
             <a:ext cx="1828800" cy="201168"/>
           </a:xfrm>
           <a:prstGeom prst="rect">
@@ -20041,7 +20489,7 @@
                 <a:ea typeface="Calibri" pitchFamily="34" charset="-122"/>
                 <a:cs typeface="Calibri" pitchFamily="34" charset="-120"/>
               </a:rPr>
-              <a:t>one who does</a:t>
+              <a:t>to show or instruct</a:t>
             </a:r>
             <a:endParaRPr lang="en-US" sz="850" dirty="0"/>
           </a:p>
@@ -20050,6 +20498,118 @@
       <p:sp>
         <p:nvSpPr>
           <p:cNvPr id="22" name="Shape 20"/>
+          <p:cNvSpPr/>
+          <p:nvPr/>
+        </p:nvSpPr>
+        <p:spPr>
+          <a:xfrm>
+            <a:off x="6519672" y="2258568"/>
+            <a:ext cx="1828800" cy="292608"/>
+          </a:xfrm>
+          <a:prstGeom prst="rect">
+            <a:avLst>
+              <a:gd name="adj" fmla="val 25000"/>
+            </a:avLst>
+          </a:prstGeom>
+          <a:solidFill>
+            <a:srgbClr val="FCE7F3"/>
+          </a:solidFill>
+          <a:ln w="19050">
+            <a:solidFill>
+              <a:srgbClr val="DB2777"/>
+            </a:solidFill>
+            <a:prstDash val="solid"/>
+          </a:ln>
+          <a:effectLst>
+            <a:outerShdw sx="100000" sy="100000" kx="0" ky="0" algn="bl" rotWithShape="0" blurRad="101600" dist="38100" dir="8100000">
+              <a:srgbClr val="000000">
+                <a:alpha val="12000"/>
+              </a:srgbClr>
+            </a:outerShdw>
+          </a:effectLst>
+        </p:spPr>
+      </p:sp>
+      <p:sp>
+        <p:nvSpPr>
+          <p:cNvPr id="23" name="Text 21"/>
+          <p:cNvSpPr/>
+          <p:nvPr/>
+        </p:nvSpPr>
+        <p:spPr>
+          <a:xfrm>
+            <a:off x="6519672" y="2258568"/>
+            <a:ext cx="1828800" cy="292608"/>
+          </a:xfrm>
+          <a:prstGeom prst="rect">
+            <a:avLst/>
+          </a:prstGeom>
+          <a:noFill/>
+          <a:ln/>
+        </p:spPr>
+        <p:txBody>
+          <a:bodyPr wrap="square" lIns="0" tIns="0" rIns="0" bIns="0" rtlCol="0" anchor="ctr"/>
+          <a:lstStyle/>
+          <a:p>
+            <a:pPr algn="ctr" indent="0" marL="0">
+              <a:buNone/>
+            </a:pPr>
+            <a:r>
+              <a:rPr lang="en-US" sz="1300" b="1" dirty="0">
+                <a:solidFill>
+                  <a:srgbClr val="9D174D"/>
+                </a:solidFill>
+                <a:latin typeface="Trebuchet MS" pitchFamily="34" charset="0"/>
+                <a:ea typeface="Trebuchet MS" pitchFamily="34" charset="-122"/>
+                <a:cs typeface="Trebuchet MS" pitchFamily="34" charset="-120"/>
+              </a:rPr>
+              <a:t>er</a:t>
+            </a:r>
+            <a:endParaRPr lang="en-US" sz="1300" dirty="0"/>
+          </a:p>
+        </p:txBody>
+      </p:sp>
+      <p:sp>
+        <p:nvSpPr>
+          <p:cNvPr id="24" name="Text 22"/>
+          <p:cNvSpPr/>
+          <p:nvPr/>
+        </p:nvSpPr>
+        <p:spPr>
+          <a:xfrm>
+            <a:off x="6519672" y="2569464"/>
+            <a:ext cx="1828800" cy="201168"/>
+          </a:xfrm>
+          <a:prstGeom prst="rect">
+            <a:avLst/>
+          </a:prstGeom>
+          <a:noFill/>
+          <a:ln/>
+        </p:spPr>
+        <p:txBody>
+          <a:bodyPr wrap="square" lIns="0" tIns="0" rIns="0" bIns="0" rtlCol="0" anchor="t"/>
+          <a:lstStyle/>
+          <a:p>
+            <a:pPr algn="ctr" indent="0" marL="0">
+              <a:buNone/>
+            </a:pPr>
+            <a:r>
+              <a:rPr lang="en-US" sz="850" dirty="0">
+                <a:solidFill>
+                  <a:srgbClr val="475569"/>
+                </a:solidFill>
+                <a:latin typeface="Calibri" pitchFamily="34" charset="0"/>
+                <a:ea typeface="Calibri" pitchFamily="34" charset="-122"/>
+                <a:cs typeface="Calibri" pitchFamily="34" charset="-120"/>
+              </a:rPr>
+              <a:t>a person who does something</a:t>
+            </a:r>
+            <a:endParaRPr lang="en-US" sz="850" dirty="0"/>
+          </a:p>
+        </p:txBody>
+      </p:sp>
+      <p:sp>
+        <p:nvSpPr>
+          <p:cNvPr id="25" name="Shape 23"/>
           <p:cNvSpPr/>
           <p:nvPr/>
         </p:nvSpPr>
@@ -20076,7 +20636,7 @@
       </p:sp>
       <p:sp>
         <p:nvSpPr>
-          <p:cNvPr id="23" name="Text 21"/>
+          <p:cNvPr id="26" name="Text 24"/>
           <p:cNvSpPr/>
           <p:nvPr/>
         </p:nvSpPr>
@@ -20115,7 +20675,7 @@
       </p:sp>
       <p:sp>
         <p:nvSpPr>
-          <p:cNvPr id="24" name="Shape 22"/>
+          <p:cNvPr id="27" name="Shape 25"/>
           <p:cNvSpPr/>
           <p:nvPr/>
         </p:nvSpPr>
@@ -20142,13 +20702,13 @@
       </p:sp>
       <p:sp>
         <p:nvSpPr>
-          <p:cNvPr id="25" name="Shape 23"/>
-          <p:cNvSpPr/>
-          <p:nvPr/>
-        </p:nvSpPr>
-        <p:spPr>
-          <a:xfrm>
-            <a:off x="2999232" y="3364992"/>
+          <p:cNvPr id="28" name="Shape 26"/>
+          <p:cNvSpPr/>
+          <p:nvPr/>
+        </p:nvSpPr>
+        <p:spPr>
+          <a:xfrm>
+            <a:off x="2313432" y="3364992"/>
             <a:ext cx="1645920" cy="475488"/>
           </a:xfrm>
           <a:prstGeom prst="rect">
@@ -20169,13 +20729,13 @@
       </p:sp>
       <p:sp>
         <p:nvSpPr>
-          <p:cNvPr id="26" name="Text 24"/>
-          <p:cNvSpPr/>
-          <p:nvPr/>
-        </p:nvSpPr>
-        <p:spPr>
-          <a:xfrm>
-            <a:off x="2999232" y="3364992"/>
+          <p:cNvPr id="29" name="Text 27"/>
+          <p:cNvSpPr/>
+          <p:nvPr/>
+        </p:nvSpPr>
+        <p:spPr>
+          <a:xfrm>
+            <a:off x="2313432" y="3364992"/>
             <a:ext cx="1645920" cy="475488"/>
           </a:xfrm>
           <a:prstGeom prst="rect">
@@ -20200,7 +20760,7 @@
                 <a:ea typeface="Trebuchet MS" pitchFamily="34" charset="-122"/>
                 <a:cs typeface="Trebuchet MS" pitchFamily="34" charset="-120"/>
               </a:rPr>
-              <a:t>teach</a:t>
+              <a:t>co</a:t>
             </a:r>
             <a:endParaRPr lang="en-US" sz="1400" dirty="0"/>
           </a:p>
@@ -20208,14 +20768,14 @@
       </p:sp>
       <p:sp>
         <p:nvSpPr>
-          <p:cNvPr id="27" name="Text 25"/>
-          <p:cNvSpPr/>
-          <p:nvPr/>
-        </p:nvSpPr>
-        <p:spPr>
-          <a:xfrm>
-            <a:off x="4645152" y="3364992"/>
-            <a:ext cx="1097280" cy="475488"/>
+          <p:cNvPr id="30" name="Text 28"/>
+          <p:cNvSpPr/>
+          <p:nvPr/>
+        </p:nvSpPr>
+        <p:spPr>
+          <a:xfrm>
+            <a:off x="3959352" y="3364992"/>
+            <a:ext cx="411480" cy="475488"/>
           </a:xfrm>
           <a:prstGeom prst="rect">
             <a:avLst/>
@@ -20247,13 +20807,13 @@
       </p:sp>
       <p:sp>
         <p:nvSpPr>
-          <p:cNvPr id="28" name="Shape 26"/>
-          <p:cNvSpPr/>
-          <p:nvPr/>
-        </p:nvSpPr>
-        <p:spPr>
-          <a:xfrm>
-            <a:off x="5742432" y="3364992"/>
+          <p:cNvPr id="31" name="Shape 29"/>
+          <p:cNvSpPr/>
+          <p:nvPr/>
+        </p:nvSpPr>
+        <p:spPr>
+          <a:xfrm>
+            <a:off x="4370832" y="3364992"/>
             <a:ext cx="1645920" cy="475488"/>
           </a:xfrm>
           <a:prstGeom prst="rect">
@@ -20274,13 +20834,13 @@
       </p:sp>
       <p:sp>
         <p:nvSpPr>
-          <p:cNvPr id="29" name="Text 27"/>
-          <p:cNvSpPr/>
-          <p:nvPr/>
-        </p:nvSpPr>
-        <p:spPr>
-          <a:xfrm>
-            <a:off x="5742432" y="3364992"/>
+          <p:cNvPr id="32" name="Text 30"/>
+          <p:cNvSpPr/>
+          <p:nvPr/>
+        </p:nvSpPr>
+        <p:spPr>
+          <a:xfrm>
+            <a:off x="4370832" y="3364992"/>
             <a:ext cx="1645920" cy="475488"/>
           </a:xfrm>
           <a:prstGeom prst="rect">
@@ -20305,6 +20865,111 @@
                 <a:ea typeface="Trebuchet MS" pitchFamily="34" charset="-122"/>
                 <a:cs typeface="Trebuchet MS" pitchFamily="34" charset="-120"/>
               </a:rPr>
+              <a:t>teach</a:t>
+            </a:r>
+            <a:endParaRPr lang="en-US" sz="1400" dirty="0"/>
+          </a:p>
+        </p:txBody>
+      </p:sp>
+      <p:sp>
+        <p:nvSpPr>
+          <p:cNvPr id="33" name="Text 31"/>
+          <p:cNvSpPr/>
+          <p:nvPr/>
+        </p:nvSpPr>
+        <p:spPr>
+          <a:xfrm>
+            <a:off x="6016752" y="3364992"/>
+            <a:ext cx="411480" cy="475488"/>
+          </a:xfrm>
+          <a:prstGeom prst="rect">
+            <a:avLst/>
+          </a:prstGeom>
+          <a:noFill/>
+          <a:ln/>
+        </p:spPr>
+        <p:txBody>
+          <a:bodyPr wrap="square" lIns="0" tIns="0" rIns="0" bIns="0" rtlCol="0" anchor="ctr"/>
+          <a:lstStyle/>
+          <a:p>
+            <a:pPr algn="ctr" indent="0" marL="0">
+              <a:buNone/>
+            </a:pPr>
+            <a:r>
+              <a:rPr lang="en-US" sz="1600" b="1" dirty="0">
+                <a:solidFill>
+                  <a:srgbClr val="0D9488"/>
+                </a:solidFill>
+                <a:latin typeface="Trebuchet MS" pitchFamily="34" charset="0"/>
+                <a:ea typeface="Trebuchet MS" pitchFamily="34" charset="-122"/>
+                <a:cs typeface="Trebuchet MS" pitchFamily="34" charset="-120"/>
+              </a:rPr>
+              <a:t>·</a:t>
+            </a:r>
+            <a:endParaRPr lang="en-US" sz="1600" dirty="0"/>
+          </a:p>
+        </p:txBody>
+      </p:sp>
+      <p:sp>
+        <p:nvSpPr>
+          <p:cNvPr id="34" name="Shape 32"/>
+          <p:cNvSpPr/>
+          <p:nvPr/>
+        </p:nvSpPr>
+        <p:spPr>
+          <a:xfrm>
+            <a:off x="6428232" y="3364992"/>
+            <a:ext cx="1645920" cy="475488"/>
+          </a:xfrm>
+          <a:prstGeom prst="rect">
+            <a:avLst>
+              <a:gd name="adj" fmla="val 9615"/>
+            </a:avLst>
+          </a:prstGeom>
+          <a:solidFill>
+            <a:srgbClr val="FFFFFF"/>
+          </a:solidFill>
+          <a:ln w="12700">
+            <a:solidFill>
+              <a:srgbClr val="0D9488"/>
+            </a:solidFill>
+            <a:prstDash val="solid"/>
+          </a:ln>
+        </p:spPr>
+      </p:sp>
+      <p:sp>
+        <p:nvSpPr>
+          <p:cNvPr id="35" name="Text 33"/>
+          <p:cNvSpPr/>
+          <p:nvPr/>
+        </p:nvSpPr>
+        <p:spPr>
+          <a:xfrm>
+            <a:off x="6428232" y="3364992"/>
+            <a:ext cx="1645920" cy="475488"/>
+          </a:xfrm>
+          <a:prstGeom prst="rect">
+            <a:avLst/>
+          </a:prstGeom>
+          <a:noFill/>
+          <a:ln/>
+        </p:spPr>
+        <p:txBody>
+          <a:bodyPr wrap="square" lIns="0" tIns="0" rIns="0" bIns="0" rtlCol="0" anchor="ctr"/>
+          <a:lstStyle/>
+          <a:p>
+            <a:pPr algn="ctr" indent="0" marL="0">
+              <a:buNone/>
+            </a:pPr>
+            <a:r>
+              <a:rPr lang="en-US" sz="1400" b="1" dirty="0">
+                <a:solidFill>
+                  <a:srgbClr val="0D9488"/>
+                </a:solidFill>
+                <a:latin typeface="Trebuchet MS" pitchFamily="34" charset="0"/>
+                <a:ea typeface="Trebuchet MS" pitchFamily="34" charset="-122"/>
+                <a:cs typeface="Trebuchet MS" pitchFamily="34" charset="-120"/>
+              </a:rPr>
               <a:t>er</a:t>
             </a:r>
             <a:endParaRPr lang="en-US" sz="1400" dirty="0"/>
@@ -20313,7 +20978,7 @@
       </p:sp>
       <p:sp>
         <p:nvSpPr>
-          <p:cNvPr id="30" name="Shape 28"/>
+          <p:cNvPr id="36" name="Shape 34"/>
           <p:cNvSpPr/>
           <p:nvPr/>
         </p:nvSpPr>
@@ -20340,7 +21005,7 @@
       </p:sp>
       <p:sp>
         <p:nvSpPr>
-          <p:cNvPr id="31" name="Text 29"/>
+          <p:cNvPr id="37" name="Text 35"/>
           <p:cNvSpPr/>
           <p:nvPr/>
         </p:nvSpPr>
@@ -20379,7 +21044,7 @@
       </p:sp>
       <p:sp>
         <p:nvSpPr>
-          <p:cNvPr id="32" name="Shape 30"/>
+          <p:cNvPr id="38" name="Shape 36"/>
           <p:cNvSpPr/>
           <p:nvPr/>
         </p:nvSpPr>
@@ -20406,7 +21071,7 @@
       </p:sp>
       <p:sp>
         <p:nvSpPr>
-          <p:cNvPr id="33" name="Text 31"/>
+          <p:cNvPr id="39" name="Text 37"/>
           <p:cNvSpPr/>
           <p:nvPr/>
         </p:nvSpPr>
@@ -20729,7 +21394,7 @@
                 <a:ea typeface="Calibri" pitchFamily="34" charset="-122"/>
                 <a:cs typeface="Calibri" pitchFamily="34" charset="-120"/>
               </a:rPr>
-              <a:t>Word Labs  •  wordlabs.app  •  Root: 'teach' = to show or instruct others</a:t>
+              <a:t>Word Labs  •  wordlabs.app  •  Root: 'teach' = to show or instruct</a:t>
             </a:r>
             <a:endParaRPr lang="en-US" sz="800" dirty="0"/>
           </a:p>
@@ -20868,7 +21533,7 @@
                 <a:ea typeface="Trebuchet MS" pitchFamily="34" charset="-122"/>
                 <a:cs typeface="Trebuchet MS" pitchFamily="34" charset="-120"/>
               </a:rPr>
-              <a:t>teacher</a:t>
+              <a:t>coteacher</a:t>
             </a:r>
             <a:endParaRPr lang="en-US" sz="2800" dirty="0"/>
           </a:p>
@@ -20948,7 +21613,7 @@
         </p:nvSpPr>
         <p:spPr>
           <a:xfrm>
-            <a:off x="2938272" y="2258568"/>
+            <a:off x="2221992" y="2258568"/>
             <a:ext cx="1828800" cy="292608"/>
           </a:xfrm>
           <a:prstGeom prst="rect">
@@ -20957,11 +21622,11 @@
             </a:avLst>
           </a:prstGeom>
           <a:solidFill>
-            <a:srgbClr val="CCFBF1"/>
+            <a:srgbClr val="DDD6FE"/>
           </a:solidFill>
           <a:ln w="19050">
             <a:solidFill>
-              <a:srgbClr val="0D9488"/>
+              <a:srgbClr val="7C3AED"/>
             </a:solidFill>
             <a:prstDash val="solid"/>
           </a:ln>
@@ -20982,7 +21647,7 @@
         </p:nvSpPr>
         <p:spPr>
           <a:xfrm>
-            <a:off x="2938272" y="2258568"/>
+            <a:off x="2221992" y="2258568"/>
             <a:ext cx="1828800" cy="292608"/>
           </a:xfrm>
           <a:prstGeom prst="rect">
@@ -21001,13 +21666,13 @@
             <a:r>
               <a:rPr lang="en-US" sz="1300" b="1" dirty="0">
                 <a:solidFill>
-                  <a:srgbClr val="0F766E"/>
+                  <a:srgbClr val="4C1D95"/>
                 </a:solidFill>
                 <a:latin typeface="Trebuchet MS" pitchFamily="34" charset="0"/>
                 <a:ea typeface="Trebuchet MS" pitchFamily="34" charset="-122"/>
                 <a:cs typeface="Trebuchet MS" pitchFamily="34" charset="-120"/>
               </a:rPr>
-              <a:t>teach</a:t>
+              <a:t>co</a:t>
             </a:r>
             <a:endParaRPr lang="en-US" sz="1300" dirty="0"/>
           </a:p>
@@ -21021,7 +21686,7 @@
         </p:nvSpPr>
         <p:spPr>
           <a:xfrm>
-            <a:off x="2938272" y="2569464"/>
+            <a:off x="2221992" y="2569464"/>
             <a:ext cx="1828800" cy="201168"/>
           </a:xfrm>
           <a:prstGeom prst="rect">
@@ -21046,7 +21711,7 @@
                 <a:ea typeface="Calibri" pitchFamily="34" charset="-122"/>
                 <a:cs typeface="Calibri" pitchFamily="34" charset="-120"/>
               </a:rPr>
-              <a:t>to instruct or show</a:t>
+              <a:t>together; with</a:t>
             </a:r>
             <a:endParaRPr lang="en-US" sz="850" dirty="0"/>
           </a:p>
@@ -21060,7 +21725,7 @@
         </p:nvSpPr>
         <p:spPr>
           <a:xfrm>
-            <a:off x="5803392" y="2258568"/>
+            <a:off x="4370832" y="2258568"/>
             <a:ext cx="1828800" cy="292608"/>
           </a:xfrm>
           <a:prstGeom prst="rect">
@@ -21069,11 +21734,11 @@
             </a:avLst>
           </a:prstGeom>
           <a:solidFill>
-            <a:srgbClr val="FCE7F3"/>
+            <a:srgbClr val="CCFBF1"/>
           </a:solidFill>
           <a:ln w="19050">
             <a:solidFill>
-              <a:srgbClr val="DB2777"/>
+              <a:srgbClr val="0D9488"/>
             </a:solidFill>
             <a:prstDash val="solid"/>
           </a:ln>
@@ -21094,7 +21759,7 @@
         </p:nvSpPr>
         <p:spPr>
           <a:xfrm>
-            <a:off x="5803392" y="2258568"/>
+            <a:off x="4370832" y="2258568"/>
             <a:ext cx="1828800" cy="292608"/>
           </a:xfrm>
           <a:prstGeom prst="rect">
@@ -21113,13 +21778,13 @@
             <a:r>
               <a:rPr lang="en-US" sz="1300" b="1" dirty="0">
                 <a:solidFill>
-                  <a:srgbClr val="9D174D"/>
+                  <a:srgbClr val="0F766E"/>
                 </a:solidFill>
                 <a:latin typeface="Trebuchet MS" pitchFamily="34" charset="0"/>
                 <a:ea typeface="Trebuchet MS" pitchFamily="34" charset="-122"/>
                 <a:cs typeface="Trebuchet MS" pitchFamily="34" charset="-120"/>
               </a:rPr>
-              <a:t>er</a:t>
+              <a:t>teach</a:t>
             </a:r>
             <a:endParaRPr lang="en-US" sz="1300" dirty="0"/>
           </a:p>
@@ -21133,7 +21798,7 @@
         </p:nvSpPr>
         <p:spPr>
           <a:xfrm>
-            <a:off x="5803392" y="2569464"/>
+            <a:off x="4370832" y="2569464"/>
             <a:ext cx="1828800" cy="201168"/>
           </a:xfrm>
           <a:prstGeom prst="rect">
@@ -21158,7 +21823,7 @@
                 <a:ea typeface="Calibri" pitchFamily="34" charset="-122"/>
                 <a:cs typeface="Calibri" pitchFamily="34" charset="-120"/>
               </a:rPr>
-              <a:t>one who does</a:t>
+              <a:t>to show or instruct</a:t>
             </a:r>
             <a:endParaRPr lang="en-US" sz="850" dirty="0"/>
           </a:p>
@@ -21167,6 +21832,118 @@
       <p:sp>
         <p:nvSpPr>
           <p:cNvPr id="22" name="Shape 20"/>
+          <p:cNvSpPr/>
+          <p:nvPr/>
+        </p:nvSpPr>
+        <p:spPr>
+          <a:xfrm>
+            <a:off x="6519672" y="2258568"/>
+            <a:ext cx="1828800" cy="292608"/>
+          </a:xfrm>
+          <a:prstGeom prst="rect">
+            <a:avLst>
+              <a:gd name="adj" fmla="val 25000"/>
+            </a:avLst>
+          </a:prstGeom>
+          <a:solidFill>
+            <a:srgbClr val="FCE7F3"/>
+          </a:solidFill>
+          <a:ln w="19050">
+            <a:solidFill>
+              <a:srgbClr val="DB2777"/>
+            </a:solidFill>
+            <a:prstDash val="solid"/>
+          </a:ln>
+          <a:effectLst>
+            <a:outerShdw sx="100000" sy="100000" kx="0" ky="0" algn="bl" rotWithShape="0" blurRad="101600" dist="38100" dir="8100000">
+              <a:srgbClr val="000000">
+                <a:alpha val="12000"/>
+              </a:srgbClr>
+            </a:outerShdw>
+          </a:effectLst>
+        </p:spPr>
+      </p:sp>
+      <p:sp>
+        <p:nvSpPr>
+          <p:cNvPr id="23" name="Text 21"/>
+          <p:cNvSpPr/>
+          <p:nvPr/>
+        </p:nvSpPr>
+        <p:spPr>
+          <a:xfrm>
+            <a:off x="6519672" y="2258568"/>
+            <a:ext cx="1828800" cy="292608"/>
+          </a:xfrm>
+          <a:prstGeom prst="rect">
+            <a:avLst/>
+          </a:prstGeom>
+          <a:noFill/>
+          <a:ln/>
+        </p:spPr>
+        <p:txBody>
+          <a:bodyPr wrap="square" lIns="0" tIns="0" rIns="0" bIns="0" rtlCol="0" anchor="ctr"/>
+          <a:lstStyle/>
+          <a:p>
+            <a:pPr algn="ctr" indent="0" marL="0">
+              <a:buNone/>
+            </a:pPr>
+            <a:r>
+              <a:rPr lang="en-US" sz="1300" b="1" dirty="0">
+                <a:solidFill>
+                  <a:srgbClr val="9D174D"/>
+                </a:solidFill>
+                <a:latin typeface="Trebuchet MS" pitchFamily="34" charset="0"/>
+                <a:ea typeface="Trebuchet MS" pitchFamily="34" charset="-122"/>
+                <a:cs typeface="Trebuchet MS" pitchFamily="34" charset="-120"/>
+              </a:rPr>
+              <a:t>er</a:t>
+            </a:r>
+            <a:endParaRPr lang="en-US" sz="1300" dirty="0"/>
+          </a:p>
+        </p:txBody>
+      </p:sp>
+      <p:sp>
+        <p:nvSpPr>
+          <p:cNvPr id="24" name="Text 22"/>
+          <p:cNvSpPr/>
+          <p:nvPr/>
+        </p:nvSpPr>
+        <p:spPr>
+          <a:xfrm>
+            <a:off x="6519672" y="2569464"/>
+            <a:ext cx="1828800" cy="201168"/>
+          </a:xfrm>
+          <a:prstGeom prst="rect">
+            <a:avLst/>
+          </a:prstGeom>
+          <a:noFill/>
+          <a:ln/>
+        </p:spPr>
+        <p:txBody>
+          <a:bodyPr wrap="square" lIns="0" tIns="0" rIns="0" bIns="0" rtlCol="0" anchor="t"/>
+          <a:lstStyle/>
+          <a:p>
+            <a:pPr algn="ctr" indent="0" marL="0">
+              <a:buNone/>
+            </a:pPr>
+            <a:r>
+              <a:rPr lang="en-US" sz="850" dirty="0">
+                <a:solidFill>
+                  <a:srgbClr val="475569"/>
+                </a:solidFill>
+                <a:latin typeface="Calibri" pitchFamily="34" charset="0"/>
+                <a:ea typeface="Calibri" pitchFamily="34" charset="-122"/>
+                <a:cs typeface="Calibri" pitchFamily="34" charset="-120"/>
+              </a:rPr>
+              <a:t>a person who does something</a:t>
+            </a:r>
+            <a:endParaRPr lang="en-US" sz="850" dirty="0"/>
+          </a:p>
+        </p:txBody>
+      </p:sp>
+      <p:sp>
+        <p:nvSpPr>
+          <p:cNvPr id="25" name="Shape 23"/>
           <p:cNvSpPr/>
           <p:nvPr/>
         </p:nvSpPr>
@@ -21193,7 +21970,7 @@
       </p:sp>
       <p:sp>
         <p:nvSpPr>
-          <p:cNvPr id="23" name="Text 21"/>
+          <p:cNvPr id="26" name="Text 24"/>
           <p:cNvSpPr/>
           <p:nvPr/>
         </p:nvSpPr>
@@ -21232,7 +22009,7 @@
       </p:sp>
       <p:sp>
         <p:nvSpPr>
-          <p:cNvPr id="24" name="Shape 22"/>
+          <p:cNvPr id="27" name="Shape 25"/>
           <p:cNvSpPr/>
           <p:nvPr/>
         </p:nvSpPr>
@@ -21259,13 +22036,13 @@
       </p:sp>
       <p:sp>
         <p:nvSpPr>
-          <p:cNvPr id="25" name="Shape 23"/>
-          <p:cNvSpPr/>
-          <p:nvPr/>
-        </p:nvSpPr>
-        <p:spPr>
-          <a:xfrm>
-            <a:off x="2999232" y="3364992"/>
+          <p:cNvPr id="28" name="Shape 26"/>
+          <p:cNvSpPr/>
+          <p:nvPr/>
+        </p:nvSpPr>
+        <p:spPr>
+          <a:xfrm>
+            <a:off x="2313432" y="3364992"/>
             <a:ext cx="1645920" cy="475488"/>
           </a:xfrm>
           <a:prstGeom prst="rect">
@@ -21286,13 +22063,13 @@
       </p:sp>
       <p:sp>
         <p:nvSpPr>
-          <p:cNvPr id="26" name="Text 24"/>
-          <p:cNvSpPr/>
-          <p:nvPr/>
-        </p:nvSpPr>
-        <p:spPr>
-          <a:xfrm>
-            <a:off x="2999232" y="3364992"/>
+          <p:cNvPr id="29" name="Text 27"/>
+          <p:cNvSpPr/>
+          <p:nvPr/>
+        </p:nvSpPr>
+        <p:spPr>
+          <a:xfrm>
+            <a:off x="2313432" y="3364992"/>
             <a:ext cx="1645920" cy="475488"/>
           </a:xfrm>
           <a:prstGeom prst="rect">
@@ -21317,7 +22094,7 @@
                 <a:ea typeface="Trebuchet MS" pitchFamily="34" charset="-122"/>
                 <a:cs typeface="Trebuchet MS" pitchFamily="34" charset="-120"/>
               </a:rPr>
-              <a:t>teach</a:t>
+              <a:t>co</a:t>
             </a:r>
             <a:endParaRPr lang="en-US" sz="1400" dirty="0"/>
           </a:p>
@@ -21325,14 +22102,14 @@
       </p:sp>
       <p:sp>
         <p:nvSpPr>
-          <p:cNvPr id="27" name="Text 25"/>
-          <p:cNvSpPr/>
-          <p:nvPr/>
-        </p:nvSpPr>
-        <p:spPr>
-          <a:xfrm>
-            <a:off x="4645152" y="3364992"/>
-            <a:ext cx="1097280" cy="475488"/>
+          <p:cNvPr id="30" name="Text 28"/>
+          <p:cNvSpPr/>
+          <p:nvPr/>
+        </p:nvSpPr>
+        <p:spPr>
+          <a:xfrm>
+            <a:off x="3959352" y="3364992"/>
+            <a:ext cx="411480" cy="475488"/>
           </a:xfrm>
           <a:prstGeom prst="rect">
             <a:avLst/>
@@ -21364,13 +22141,13 @@
       </p:sp>
       <p:sp>
         <p:nvSpPr>
-          <p:cNvPr id="28" name="Shape 26"/>
-          <p:cNvSpPr/>
-          <p:nvPr/>
-        </p:nvSpPr>
-        <p:spPr>
-          <a:xfrm>
-            <a:off x="5742432" y="3364992"/>
+          <p:cNvPr id="31" name="Shape 29"/>
+          <p:cNvSpPr/>
+          <p:nvPr/>
+        </p:nvSpPr>
+        <p:spPr>
+          <a:xfrm>
+            <a:off x="4370832" y="3364992"/>
             <a:ext cx="1645920" cy="475488"/>
           </a:xfrm>
           <a:prstGeom prst="rect">
@@ -21391,13 +22168,13 @@
       </p:sp>
       <p:sp>
         <p:nvSpPr>
-          <p:cNvPr id="29" name="Text 27"/>
-          <p:cNvSpPr/>
-          <p:nvPr/>
-        </p:nvSpPr>
-        <p:spPr>
-          <a:xfrm>
-            <a:off x="5742432" y="3364992"/>
+          <p:cNvPr id="32" name="Text 30"/>
+          <p:cNvSpPr/>
+          <p:nvPr/>
+        </p:nvSpPr>
+        <p:spPr>
+          <a:xfrm>
+            <a:off x="4370832" y="3364992"/>
             <a:ext cx="1645920" cy="475488"/>
           </a:xfrm>
           <a:prstGeom prst="rect">
@@ -21422,6 +22199,111 @@
                 <a:ea typeface="Trebuchet MS" pitchFamily="34" charset="-122"/>
                 <a:cs typeface="Trebuchet MS" pitchFamily="34" charset="-120"/>
               </a:rPr>
+              <a:t>teach</a:t>
+            </a:r>
+            <a:endParaRPr lang="en-US" sz="1400" dirty="0"/>
+          </a:p>
+        </p:txBody>
+      </p:sp>
+      <p:sp>
+        <p:nvSpPr>
+          <p:cNvPr id="33" name="Text 31"/>
+          <p:cNvSpPr/>
+          <p:nvPr/>
+        </p:nvSpPr>
+        <p:spPr>
+          <a:xfrm>
+            <a:off x="6016752" y="3364992"/>
+            <a:ext cx="411480" cy="475488"/>
+          </a:xfrm>
+          <a:prstGeom prst="rect">
+            <a:avLst/>
+          </a:prstGeom>
+          <a:noFill/>
+          <a:ln/>
+        </p:spPr>
+        <p:txBody>
+          <a:bodyPr wrap="square" lIns="0" tIns="0" rIns="0" bIns="0" rtlCol="0" anchor="ctr"/>
+          <a:lstStyle/>
+          <a:p>
+            <a:pPr algn="ctr" indent="0" marL="0">
+              <a:buNone/>
+            </a:pPr>
+            <a:r>
+              <a:rPr lang="en-US" sz="1600" b="1" dirty="0">
+                <a:solidFill>
+                  <a:srgbClr val="0D9488"/>
+                </a:solidFill>
+                <a:latin typeface="Trebuchet MS" pitchFamily="34" charset="0"/>
+                <a:ea typeface="Trebuchet MS" pitchFamily="34" charset="-122"/>
+                <a:cs typeface="Trebuchet MS" pitchFamily="34" charset="-120"/>
+              </a:rPr>
+              <a:t>·</a:t>
+            </a:r>
+            <a:endParaRPr lang="en-US" sz="1600" dirty="0"/>
+          </a:p>
+        </p:txBody>
+      </p:sp>
+      <p:sp>
+        <p:nvSpPr>
+          <p:cNvPr id="34" name="Shape 32"/>
+          <p:cNvSpPr/>
+          <p:nvPr/>
+        </p:nvSpPr>
+        <p:spPr>
+          <a:xfrm>
+            <a:off x="6428232" y="3364992"/>
+            <a:ext cx="1645920" cy="475488"/>
+          </a:xfrm>
+          <a:prstGeom prst="rect">
+            <a:avLst>
+              <a:gd name="adj" fmla="val 9615"/>
+            </a:avLst>
+          </a:prstGeom>
+          <a:solidFill>
+            <a:srgbClr val="FFFFFF"/>
+          </a:solidFill>
+          <a:ln w="12700">
+            <a:solidFill>
+              <a:srgbClr val="0D9488"/>
+            </a:solidFill>
+            <a:prstDash val="solid"/>
+          </a:ln>
+        </p:spPr>
+      </p:sp>
+      <p:sp>
+        <p:nvSpPr>
+          <p:cNvPr id="35" name="Text 33"/>
+          <p:cNvSpPr/>
+          <p:nvPr/>
+        </p:nvSpPr>
+        <p:spPr>
+          <a:xfrm>
+            <a:off x="6428232" y="3364992"/>
+            <a:ext cx="1645920" cy="475488"/>
+          </a:xfrm>
+          <a:prstGeom prst="rect">
+            <a:avLst/>
+          </a:prstGeom>
+          <a:noFill/>
+          <a:ln/>
+        </p:spPr>
+        <p:txBody>
+          <a:bodyPr wrap="square" lIns="0" tIns="0" rIns="0" bIns="0" rtlCol="0" anchor="ctr"/>
+          <a:lstStyle/>
+          <a:p>
+            <a:pPr algn="ctr" indent="0" marL="0">
+              <a:buNone/>
+            </a:pPr>
+            <a:r>
+              <a:rPr lang="en-US" sz="1400" b="1" dirty="0">
+                <a:solidFill>
+                  <a:srgbClr val="0D9488"/>
+                </a:solidFill>
+                <a:latin typeface="Trebuchet MS" pitchFamily="34" charset="0"/>
+                <a:ea typeface="Trebuchet MS" pitchFamily="34" charset="-122"/>
+                <a:cs typeface="Trebuchet MS" pitchFamily="34" charset="-120"/>
+              </a:rPr>
               <a:t>er</a:t>
             </a:r>
             <a:endParaRPr lang="en-US" sz="1400" dirty="0"/>
@@ -21430,7 +22312,7 @@
       </p:sp>
       <p:sp>
         <p:nvSpPr>
-          <p:cNvPr id="30" name="Shape 28"/>
+          <p:cNvPr id="36" name="Shape 34"/>
           <p:cNvSpPr/>
           <p:nvPr/>
         </p:nvSpPr>
@@ -21457,7 +22339,7 @@
       </p:sp>
       <p:sp>
         <p:nvSpPr>
-          <p:cNvPr id="31" name="Text 29"/>
+          <p:cNvPr id="37" name="Text 35"/>
           <p:cNvSpPr/>
           <p:nvPr/>
         </p:nvSpPr>
@@ -21496,18 +22378,18 @@
       </p:sp>
       <p:sp>
         <p:nvSpPr>
-          <p:cNvPr id="32" name="Shape 30"/>
+          <p:cNvPr id="38" name="Shape 36"/>
           <p:cNvSpPr/>
           <p:nvPr/>
         </p:nvSpPr>
         <p:spPr>
           <a:xfrm>
             <a:off x="1874520" y="4096512"/>
-            <a:ext cx="6903720" cy="658368"/>
+            <a:ext cx="6903720" cy="804672"/>
           </a:xfrm>
           <a:prstGeom prst="rect">
             <a:avLst>
-              <a:gd name="adj" fmla="val 8333"/>
+              <a:gd name="adj" fmla="val 6818"/>
             </a:avLst>
           </a:prstGeom>
           <a:solidFill>
@@ -21523,18 +22405,18 @@
       </p:sp>
       <p:sp>
         <p:nvSpPr>
-          <p:cNvPr id="33" name="Shape 31"/>
-          <p:cNvSpPr/>
-          <p:nvPr/>
-        </p:nvSpPr>
-        <p:spPr>
-          <a:xfrm>
-            <a:off x="2670048" y="4169664"/>
-            <a:ext cx="685800" cy="475488"/>
+          <p:cNvPr id="39" name="Shape 37"/>
+          <p:cNvSpPr/>
+          <p:nvPr/>
+        </p:nvSpPr>
+        <p:spPr>
+          <a:xfrm>
+            <a:off x="2254649" y="4169664"/>
+            <a:ext cx="685800" cy="384048"/>
           </a:xfrm>
           <a:prstGeom prst="rect">
             <a:avLst>
-              <a:gd name="adj" fmla="val 7692"/>
+              <a:gd name="adj" fmla="val 9524"/>
             </a:avLst>
           </a:prstGeom>
           <a:solidFill>
@@ -21550,14 +22432,14 @@
       </p:sp>
       <p:sp>
         <p:nvSpPr>
-          <p:cNvPr id="34" name="Text 32"/>
-          <p:cNvSpPr/>
-          <p:nvPr/>
-        </p:nvSpPr>
-        <p:spPr>
-          <a:xfrm>
-            <a:off x="2670048" y="4169664"/>
-            <a:ext cx="685800" cy="475488"/>
+          <p:cNvPr id="40" name="Text 38"/>
+          <p:cNvSpPr/>
+          <p:nvPr/>
+        </p:nvSpPr>
+        <p:spPr>
+          <a:xfrm>
+            <a:off x="2254649" y="4169664"/>
+            <a:ext cx="685800" cy="384048"/>
           </a:xfrm>
           <a:prstGeom prst="rect">
             <a:avLst/>
@@ -21581,7 +22463,7 @@
                 <a:ea typeface="Trebuchet MS" pitchFamily="34" charset="-122"/>
                 <a:cs typeface="Trebuchet MS" pitchFamily="34" charset="-120"/>
               </a:rPr>
-              <a:t>t</a:t>
+              <a:t>c</a:t>
             </a:r>
             <a:endParaRPr lang="en-US" sz="900" dirty="0"/>
           </a:p>
@@ -21589,18 +22471,57 @@
       </p:sp>
       <p:sp>
         <p:nvSpPr>
-          <p:cNvPr id="35" name="Shape 33"/>
-          <p:cNvSpPr/>
-          <p:nvPr/>
-        </p:nvSpPr>
-        <p:spPr>
-          <a:xfrm>
-            <a:off x="4123944" y="4169664"/>
-            <a:ext cx="685800" cy="475488"/>
+          <p:cNvPr id="41" name="Text 39"/>
+          <p:cNvSpPr/>
+          <p:nvPr/>
+        </p:nvSpPr>
+        <p:spPr>
+          <a:xfrm>
+            <a:off x="2254649" y="4572000"/>
+            <a:ext cx="685800" cy="219456"/>
+          </a:xfrm>
+          <a:prstGeom prst="rect">
+            <a:avLst/>
+          </a:prstGeom>
+          <a:noFill/>
+          <a:ln/>
+        </p:spPr>
+        <p:txBody>
+          <a:bodyPr wrap="square" lIns="0" tIns="0" rIns="0" bIns="0" rtlCol="0" anchor="t"/>
+          <a:lstStyle/>
+          <a:p>
+            <a:pPr algn="ctr" indent="0" marL="0">
+              <a:buNone/>
+            </a:pPr>
+            <a:r>
+              <a:rPr lang="en-US" sz="750" i="1" dirty="0">
+                <a:solidFill>
+                  <a:srgbClr val="94A3B8"/>
+                </a:solidFill>
+                <a:latin typeface="Calibri" pitchFamily="34" charset="0"/>
+                <a:ea typeface="Calibri" pitchFamily="34" charset="-122"/>
+                <a:cs typeface="Calibri" pitchFamily="34" charset="-120"/>
+              </a:rPr>
+              <a:t>/k/</a:t>
+            </a:r>
+            <a:endParaRPr lang="en-US" sz="750" dirty="0"/>
+          </a:p>
+        </p:txBody>
+      </p:sp>
+      <p:sp>
+        <p:nvSpPr>
+          <p:cNvPr id="42" name="Shape 40"/>
+          <p:cNvSpPr/>
+          <p:nvPr/>
+        </p:nvSpPr>
+        <p:spPr>
+          <a:xfrm>
+            <a:off x="3293146" y="4169664"/>
+            <a:ext cx="685800" cy="384048"/>
           </a:xfrm>
           <a:prstGeom prst="rect">
             <a:avLst>
-              <a:gd name="adj" fmla="val 7692"/>
+              <a:gd name="adj" fmla="val 9524"/>
             </a:avLst>
           </a:prstGeom>
           <a:solidFill>
@@ -21616,14 +22537,14 @@
       </p:sp>
       <p:sp>
         <p:nvSpPr>
-          <p:cNvPr id="36" name="Text 34"/>
-          <p:cNvSpPr/>
-          <p:nvPr/>
-        </p:nvSpPr>
-        <p:spPr>
-          <a:xfrm>
-            <a:off x="4123944" y="4169664"/>
-            <a:ext cx="685800" cy="475488"/>
+          <p:cNvPr id="43" name="Text 41"/>
+          <p:cNvSpPr/>
+          <p:nvPr/>
+        </p:nvSpPr>
+        <p:spPr>
+          <a:xfrm>
+            <a:off x="3293146" y="4169664"/>
+            <a:ext cx="685800" cy="384048"/>
           </a:xfrm>
           <a:prstGeom prst="rect">
             <a:avLst/>
@@ -21647,7 +22568,7 @@
                 <a:ea typeface="Trebuchet MS" pitchFamily="34" charset="-122"/>
                 <a:cs typeface="Trebuchet MS" pitchFamily="34" charset="-120"/>
               </a:rPr>
-              <a:t>ea</a:t>
+              <a:t>o</a:t>
             </a:r>
             <a:endParaRPr lang="en-US" sz="900" dirty="0"/>
           </a:p>
@@ -21655,18 +22576,18 @@
       </p:sp>
       <p:sp>
         <p:nvSpPr>
-          <p:cNvPr id="37" name="Shape 35"/>
-          <p:cNvSpPr/>
-          <p:nvPr/>
-        </p:nvSpPr>
-        <p:spPr>
-          <a:xfrm>
-            <a:off x="5577840" y="4169664"/>
-            <a:ext cx="685800" cy="475488"/>
+          <p:cNvPr id="44" name="Shape 42"/>
+          <p:cNvSpPr/>
+          <p:nvPr/>
+        </p:nvSpPr>
+        <p:spPr>
+          <a:xfrm>
+            <a:off x="4331643" y="4169664"/>
+            <a:ext cx="685800" cy="384048"/>
           </a:xfrm>
           <a:prstGeom prst="rect">
             <a:avLst>
-              <a:gd name="adj" fmla="val 7692"/>
+              <a:gd name="adj" fmla="val 9524"/>
             </a:avLst>
           </a:prstGeom>
           <a:solidFill>
@@ -21682,14 +22603,14 @@
       </p:sp>
       <p:sp>
         <p:nvSpPr>
-          <p:cNvPr id="38" name="Text 36"/>
-          <p:cNvSpPr/>
-          <p:nvPr/>
-        </p:nvSpPr>
-        <p:spPr>
-          <a:xfrm>
-            <a:off x="5577840" y="4169664"/>
-            <a:ext cx="685800" cy="475488"/>
+          <p:cNvPr id="45" name="Text 43"/>
+          <p:cNvSpPr/>
+          <p:nvPr/>
+        </p:nvSpPr>
+        <p:spPr>
+          <a:xfrm>
+            <a:off x="4331643" y="4169664"/>
+            <a:ext cx="685800" cy="384048"/>
           </a:xfrm>
           <a:prstGeom prst="rect">
             <a:avLst/>
@@ -21713,6 +22634,138 @@
                 <a:ea typeface="Trebuchet MS" pitchFamily="34" charset="-122"/>
                 <a:cs typeface="Trebuchet MS" pitchFamily="34" charset="-120"/>
               </a:rPr>
+              <a:t>t</a:t>
+            </a:r>
+            <a:endParaRPr lang="en-US" sz="900" dirty="0"/>
+          </a:p>
+        </p:txBody>
+      </p:sp>
+      <p:sp>
+        <p:nvSpPr>
+          <p:cNvPr id="46" name="Shape 44"/>
+          <p:cNvSpPr/>
+          <p:nvPr/>
+        </p:nvSpPr>
+        <p:spPr>
+          <a:xfrm>
+            <a:off x="5370141" y="4169664"/>
+            <a:ext cx="685800" cy="384048"/>
+          </a:xfrm>
+          <a:prstGeom prst="rect">
+            <a:avLst>
+              <a:gd name="adj" fmla="val 9524"/>
+            </a:avLst>
+          </a:prstGeom>
+          <a:solidFill>
+            <a:srgbClr val="FFFFFF"/>
+          </a:solidFill>
+          <a:ln w="12700">
+            <a:solidFill>
+              <a:srgbClr val="DB2777"/>
+            </a:solidFill>
+            <a:prstDash val="solid"/>
+          </a:ln>
+        </p:spPr>
+      </p:sp>
+      <p:sp>
+        <p:nvSpPr>
+          <p:cNvPr id="47" name="Text 45"/>
+          <p:cNvSpPr/>
+          <p:nvPr/>
+        </p:nvSpPr>
+        <p:spPr>
+          <a:xfrm>
+            <a:off x="5370141" y="4169664"/>
+            <a:ext cx="685800" cy="384048"/>
+          </a:xfrm>
+          <a:prstGeom prst="rect">
+            <a:avLst/>
+          </a:prstGeom>
+          <a:noFill/>
+          <a:ln/>
+        </p:spPr>
+        <p:txBody>
+          <a:bodyPr wrap="square" lIns="0" tIns="0" rIns="0" bIns="0" rtlCol="0" anchor="ctr"/>
+          <a:lstStyle/>
+          <a:p>
+            <a:pPr algn="ctr" indent="0" marL="0">
+              <a:buNone/>
+            </a:pPr>
+            <a:r>
+              <a:rPr lang="en-US" sz="900" b="1" dirty="0">
+                <a:solidFill>
+                  <a:srgbClr val="9D174D"/>
+                </a:solidFill>
+                <a:latin typeface="Trebuchet MS" pitchFamily="34" charset="0"/>
+                <a:ea typeface="Trebuchet MS" pitchFamily="34" charset="-122"/>
+                <a:cs typeface="Trebuchet MS" pitchFamily="34" charset="-120"/>
+              </a:rPr>
+              <a:t>ea</a:t>
+            </a:r>
+            <a:endParaRPr lang="en-US" sz="900" dirty="0"/>
+          </a:p>
+        </p:txBody>
+      </p:sp>
+      <p:sp>
+        <p:nvSpPr>
+          <p:cNvPr id="48" name="Shape 46"/>
+          <p:cNvSpPr/>
+          <p:nvPr/>
+        </p:nvSpPr>
+        <p:spPr>
+          <a:xfrm>
+            <a:off x="6408638" y="4169664"/>
+            <a:ext cx="685800" cy="384048"/>
+          </a:xfrm>
+          <a:prstGeom prst="rect">
+            <a:avLst>
+              <a:gd name="adj" fmla="val 9524"/>
+            </a:avLst>
+          </a:prstGeom>
+          <a:solidFill>
+            <a:srgbClr val="FFFFFF"/>
+          </a:solidFill>
+          <a:ln w="12700">
+            <a:solidFill>
+              <a:srgbClr val="DB2777"/>
+            </a:solidFill>
+            <a:prstDash val="solid"/>
+          </a:ln>
+        </p:spPr>
+      </p:sp>
+      <p:sp>
+        <p:nvSpPr>
+          <p:cNvPr id="49" name="Text 47"/>
+          <p:cNvSpPr/>
+          <p:nvPr/>
+        </p:nvSpPr>
+        <p:spPr>
+          <a:xfrm>
+            <a:off x="6408638" y="4169664"/>
+            <a:ext cx="685800" cy="384048"/>
+          </a:xfrm>
+          <a:prstGeom prst="rect">
+            <a:avLst/>
+          </a:prstGeom>
+          <a:noFill/>
+          <a:ln/>
+        </p:spPr>
+        <p:txBody>
+          <a:bodyPr wrap="square" lIns="0" tIns="0" rIns="0" bIns="0" rtlCol="0" anchor="ctr"/>
+          <a:lstStyle/>
+          <a:p>
+            <a:pPr algn="ctr" indent="0" marL="0">
+              <a:buNone/>
+            </a:pPr>
+            <a:r>
+              <a:rPr lang="en-US" sz="900" b="1" dirty="0">
+                <a:solidFill>
+                  <a:srgbClr val="9D174D"/>
+                </a:solidFill>
+                <a:latin typeface="Trebuchet MS" pitchFamily="34" charset="0"/>
+                <a:ea typeface="Trebuchet MS" pitchFamily="34" charset="-122"/>
+                <a:cs typeface="Trebuchet MS" pitchFamily="34" charset="-120"/>
+              </a:rPr>
               <a:t>ch</a:t>
             </a:r>
             <a:endParaRPr lang="en-US" sz="900" dirty="0"/>
@@ -21721,18 +22774,18 @@
       </p:sp>
       <p:sp>
         <p:nvSpPr>
-          <p:cNvPr id="39" name="Shape 37"/>
-          <p:cNvSpPr/>
-          <p:nvPr/>
-        </p:nvSpPr>
-        <p:spPr>
-          <a:xfrm>
-            <a:off x="7031736" y="4169664"/>
-            <a:ext cx="685800" cy="475488"/>
+          <p:cNvPr id="50" name="Shape 48"/>
+          <p:cNvSpPr/>
+          <p:nvPr/>
+        </p:nvSpPr>
+        <p:spPr>
+          <a:xfrm>
+            <a:off x="7447135" y="4169664"/>
+            <a:ext cx="685800" cy="384048"/>
           </a:xfrm>
           <a:prstGeom prst="rect">
             <a:avLst>
-              <a:gd name="adj" fmla="val 7692"/>
+              <a:gd name="adj" fmla="val 9524"/>
             </a:avLst>
           </a:prstGeom>
           <a:solidFill>
@@ -21748,14 +22801,14 @@
       </p:sp>
       <p:sp>
         <p:nvSpPr>
-          <p:cNvPr id="40" name="Text 38"/>
-          <p:cNvSpPr/>
-          <p:nvPr/>
-        </p:nvSpPr>
-        <p:spPr>
-          <a:xfrm>
-            <a:off x="7031736" y="4169664"/>
-            <a:ext cx="685800" cy="475488"/>
+          <p:cNvPr id="51" name="Text 49"/>
+          <p:cNvSpPr/>
+          <p:nvPr/>
+        </p:nvSpPr>
+        <p:spPr>
+          <a:xfrm>
+            <a:off x="7447135" y="4169664"/>
+            <a:ext cx="685800" cy="384048"/>
           </a:xfrm>
           <a:prstGeom prst="rect">
             <a:avLst/>
@@ -22071,7 +23124,7 @@
                 <a:ea typeface="Calibri" pitchFamily="34" charset="-122"/>
                 <a:cs typeface="Calibri" pitchFamily="34" charset="-120"/>
               </a:rPr>
-              <a:t>Word Labs  •  wordlabs.app  •  Root: 'teach' = to show or instruct others</a:t>
+              <a:t>Word Labs  •  wordlabs.app  •  Root: 'teach' = to show or instruct</a:t>
             </a:r>
             <a:endParaRPr lang="en-US" sz="800" dirty="0"/>
           </a:p>
@@ -22210,7 +23263,7 @@
                 <a:ea typeface="Trebuchet MS" pitchFamily="34" charset="-122"/>
                 <a:cs typeface="Trebuchet MS" pitchFamily="34" charset="-120"/>
               </a:rPr>
-              <a:t>reteaching</a:t>
+              <a:t>teachable</a:t>
             </a:r>
             <a:endParaRPr lang="en-US" sz="2800" dirty="0"/>
           </a:p>
@@ -22898,7 +23951,7 @@
                 <a:ea typeface="Calibri" pitchFamily="34" charset="-122"/>
                 <a:cs typeface="Calibri" pitchFamily="34" charset="-120"/>
               </a:rPr>
-              <a:t>Word Labs  •  wordlabs.app  •  Root: 'teach' = to show or instruct others</a:t>
+              <a:t>Word Labs  •  wordlabs.app  •  Root: 'teach' = to show or instruct</a:t>
             </a:r>
             <a:endParaRPr lang="en-US" sz="800" dirty="0"/>
           </a:p>
@@ -23037,7 +24090,7 @@
                 <a:ea typeface="Trebuchet MS" pitchFamily="34" charset="-122"/>
                 <a:cs typeface="Trebuchet MS" pitchFamily="34" charset="-120"/>
               </a:rPr>
-              <a:t>reteaching</a:t>
+              <a:t>teachable</a:t>
             </a:r>
             <a:endParaRPr lang="en-US" sz="2800" dirty="0"/>
           </a:p>
@@ -23117,7 +24170,7 @@
         </p:nvSpPr>
         <p:spPr>
           <a:xfrm>
-            <a:off x="2221992" y="2258568"/>
+            <a:off x="2938272" y="2258568"/>
             <a:ext cx="1828800" cy="292608"/>
           </a:xfrm>
           <a:prstGeom prst="rect">
@@ -23126,11 +24179,11 @@
             </a:avLst>
           </a:prstGeom>
           <a:solidFill>
-            <a:srgbClr val="DDD6FE"/>
+            <a:srgbClr val="CCFBF1"/>
           </a:solidFill>
           <a:ln w="19050">
             <a:solidFill>
-              <a:srgbClr val="7C3AED"/>
+              <a:srgbClr val="0D9488"/>
             </a:solidFill>
             <a:prstDash val="solid"/>
           </a:ln>
@@ -23151,7 +24204,7 @@
         </p:nvSpPr>
         <p:spPr>
           <a:xfrm>
-            <a:off x="2221992" y="2258568"/>
+            <a:off x="2938272" y="2258568"/>
             <a:ext cx="1828800" cy="292608"/>
           </a:xfrm>
           <a:prstGeom prst="rect">
@@ -23170,13 +24223,13 @@
             <a:r>
               <a:rPr lang="en-US" sz="1300" b="1" dirty="0">
                 <a:solidFill>
-                  <a:srgbClr val="4C1D95"/>
+                  <a:srgbClr val="0F766E"/>
                 </a:solidFill>
                 <a:latin typeface="Trebuchet MS" pitchFamily="34" charset="0"/>
                 <a:ea typeface="Trebuchet MS" pitchFamily="34" charset="-122"/>
                 <a:cs typeface="Trebuchet MS" pitchFamily="34" charset="-120"/>
               </a:rPr>
-              <a:t>re</a:t>
+              <a:t>teach</a:t>
             </a:r>
             <a:endParaRPr lang="en-US" sz="1300" dirty="0"/>
           </a:p>
@@ -23190,7 +24243,7 @@
         </p:nvSpPr>
         <p:spPr>
           <a:xfrm>
-            <a:off x="2221992" y="2569464"/>
+            <a:off x="2938272" y="2569464"/>
             <a:ext cx="1828800" cy="201168"/>
           </a:xfrm>
           <a:prstGeom prst="rect">
@@ -23215,7 +24268,7 @@
                 <a:ea typeface="Calibri" pitchFamily="34" charset="-122"/>
                 <a:cs typeface="Calibri" pitchFamily="34" charset="-120"/>
               </a:rPr>
-              <a:t>again</a:t>
+              <a:t>to show or instruct</a:t>
             </a:r>
             <a:endParaRPr lang="en-US" sz="850" dirty="0"/>
           </a:p>
@@ -23229,7 +24282,7 @@
         </p:nvSpPr>
         <p:spPr>
           <a:xfrm>
-            <a:off x="4370832" y="2258568"/>
+            <a:off x="5803392" y="2258568"/>
             <a:ext cx="1828800" cy="292608"/>
           </a:xfrm>
           <a:prstGeom prst="rect">
@@ -23238,11 +24291,11 @@
             </a:avLst>
           </a:prstGeom>
           <a:solidFill>
-            <a:srgbClr val="CCFBF1"/>
+            <a:srgbClr val="FCE7F3"/>
           </a:solidFill>
           <a:ln w="19050">
             <a:solidFill>
-              <a:srgbClr val="0D9488"/>
+              <a:srgbClr val="DB2777"/>
             </a:solidFill>
             <a:prstDash val="solid"/>
           </a:ln>
@@ -23263,7 +24316,7 @@
         </p:nvSpPr>
         <p:spPr>
           <a:xfrm>
-            <a:off x="4370832" y="2258568"/>
+            <a:off x="5803392" y="2258568"/>
             <a:ext cx="1828800" cy="292608"/>
           </a:xfrm>
           <a:prstGeom prst="rect">
@@ -23282,13 +24335,13 @@
             <a:r>
               <a:rPr lang="en-US" sz="1300" b="1" dirty="0">
                 <a:solidFill>
-                  <a:srgbClr val="0F766E"/>
+                  <a:srgbClr val="9D174D"/>
                 </a:solidFill>
                 <a:latin typeface="Trebuchet MS" pitchFamily="34" charset="0"/>
                 <a:ea typeface="Trebuchet MS" pitchFamily="34" charset="-122"/>
                 <a:cs typeface="Trebuchet MS" pitchFamily="34" charset="-120"/>
               </a:rPr>
-              <a:t>teach</a:t>
+              <a:t>able</a:t>
             </a:r>
             <a:endParaRPr lang="en-US" sz="1300" dirty="0"/>
           </a:p>
@@ -23302,7 +24355,7 @@
         </p:nvSpPr>
         <p:spPr>
           <a:xfrm>
-            <a:off x="4370832" y="2569464"/>
+            <a:off x="5803392" y="2569464"/>
             <a:ext cx="1828800" cy="201168"/>
           </a:xfrm>
           <a:prstGeom prst="rect">
@@ -23327,7 +24380,7 @@
                 <a:ea typeface="Calibri" pitchFamily="34" charset="-122"/>
                 <a:cs typeface="Calibri" pitchFamily="34" charset="-120"/>
               </a:rPr>
-              <a:t>to instruct or show</a:t>
+              <a:t>able to be; capable of</a:t>
             </a:r>
             <a:endParaRPr lang="en-US" sz="850" dirty="0"/>
           </a:p>
@@ -23341,30 +24394,23 @@
         </p:nvSpPr>
         <p:spPr>
           <a:xfrm>
-            <a:off x="6519672" y="2258568"/>
-            <a:ext cx="1828800" cy="292608"/>
+            <a:off x="365760" y="3273552"/>
+            <a:ext cx="1371600" cy="658368"/>
           </a:xfrm>
           <a:prstGeom prst="rect">
             <a:avLst>
-              <a:gd name="adj" fmla="val 25000"/>
+              <a:gd name="adj" fmla="val 8333"/>
             </a:avLst>
           </a:prstGeom>
           <a:solidFill>
-            <a:srgbClr val="FCE7F3"/>
-          </a:solidFill>
-          <a:ln w="19050">
-            <a:solidFill>
-              <a:srgbClr val="DB2777"/>
-            </a:solidFill>
-            <a:prstDash val="solid"/>
-          </a:ln>
-          <a:effectLst>
-            <a:outerShdw sx="100000" sy="100000" kx="0" ky="0" algn="bl" rotWithShape="0" blurRad="101600" dist="38100" dir="8100000">
-              <a:srgbClr val="000000">
-                <a:alpha val="12000"/>
-              </a:srgbClr>
-            </a:outerShdw>
-          </a:effectLst>
+            <a:srgbClr val="E2E8F0"/>
+          </a:solidFill>
+          <a:ln w="12700">
+            <a:solidFill>
+              <a:srgbClr val="E2E8F0"/>
+            </a:solidFill>
+            <a:prstDash val="solid"/>
+          </a:ln>
         </p:spPr>
       </p:sp>
       <p:sp>
@@ -23375,90 +24421,117 @@
         </p:nvSpPr>
         <p:spPr>
           <a:xfrm>
-            <a:off x="6519672" y="2258568"/>
-            <a:ext cx="1828800" cy="292608"/>
-          </a:xfrm>
-          <a:prstGeom prst="rect">
-            <a:avLst/>
-          </a:prstGeom>
-          <a:noFill/>
-          <a:ln/>
-        </p:spPr>
-        <p:txBody>
-          <a:bodyPr wrap="square" lIns="0" tIns="0" rIns="0" bIns="0" rtlCol="0" anchor="ctr"/>
-          <a:lstStyle/>
-          <a:p>
-            <a:pPr algn="ctr" indent="0" marL="0">
-              <a:buNone/>
-            </a:pPr>
-            <a:r>
-              <a:rPr lang="en-US" sz="1300" b="1" dirty="0">
-                <a:solidFill>
-                  <a:srgbClr val="9D174D"/>
+            <a:off x="365760" y="3273552"/>
+            <a:ext cx="1371600" cy="658368"/>
+          </a:xfrm>
+          <a:prstGeom prst="rect">
+            <a:avLst/>
+          </a:prstGeom>
+          <a:noFill/>
+          <a:ln/>
+        </p:spPr>
+        <p:txBody>
+          <a:bodyPr wrap="square" lIns="0" tIns="0" rIns="0" bIns="0" rtlCol="0" anchor="ctr"/>
+          <a:lstStyle/>
+          <a:p>
+            <a:pPr algn="ctr" indent="0" marL="0">
+              <a:buNone/>
+            </a:pPr>
+            <a:r>
+              <a:rPr lang="en-US" sz="1100" b="1" dirty="0">
+                <a:solidFill>
+                  <a:srgbClr val="475569"/>
                 </a:solidFill>
                 <a:latin typeface="Trebuchet MS" pitchFamily="34" charset="0"/>
                 <a:ea typeface="Trebuchet MS" pitchFamily="34" charset="-122"/>
                 <a:cs typeface="Trebuchet MS" pitchFamily="34" charset="-120"/>
               </a:rPr>
-              <a:t>ing</a:t>
-            </a:r>
-            <a:endParaRPr lang="en-US" sz="1300" dirty="0"/>
-          </a:p>
-        </p:txBody>
-      </p:sp>
-      <p:sp>
-        <p:nvSpPr>
-          <p:cNvPr id="24" name="Text 22"/>
-          <p:cNvSpPr/>
-          <p:nvPr/>
-        </p:nvSpPr>
-        <p:spPr>
-          <a:xfrm>
-            <a:off x="6519672" y="2569464"/>
-            <a:ext cx="1828800" cy="201168"/>
-          </a:xfrm>
-          <a:prstGeom prst="rect">
-            <a:avLst/>
-          </a:prstGeom>
-          <a:noFill/>
-          <a:ln/>
-        </p:spPr>
-        <p:txBody>
-          <a:bodyPr wrap="square" lIns="0" tIns="0" rIns="0" bIns="0" rtlCol="0" anchor="t"/>
-          <a:lstStyle/>
-          <a:p>
-            <a:pPr algn="ctr" indent="0" marL="0">
-              <a:buNone/>
-            </a:pPr>
-            <a:r>
-              <a:rPr lang="en-US" sz="850" dirty="0">
-                <a:solidFill>
-                  <a:srgbClr val="475569"/>
+              <a:t>Syllables</a:t>
+            </a:r>
+            <a:endParaRPr lang="en-US" sz="1100" dirty="0"/>
+          </a:p>
+        </p:txBody>
+      </p:sp>
+      <p:sp>
+        <p:nvSpPr>
+          <p:cNvPr id="24" name="Shape 22"/>
+          <p:cNvSpPr/>
+          <p:nvPr/>
+        </p:nvSpPr>
+        <p:spPr>
+          <a:xfrm>
+            <a:off x="1874520" y="3273552"/>
+            <a:ext cx="6903720" cy="658368"/>
+          </a:xfrm>
+          <a:prstGeom prst="rect">
+            <a:avLst>
+              <a:gd name="adj" fmla="val 8333"/>
+            </a:avLst>
+          </a:prstGeom>
+          <a:solidFill>
+            <a:srgbClr val="F8FAFC"/>
+          </a:solidFill>
+          <a:ln w="12700">
+            <a:solidFill>
+              <a:srgbClr val="E2E8F0"/>
+            </a:solidFill>
+            <a:prstDash val="dash"/>
+          </a:ln>
+        </p:spPr>
+      </p:sp>
+      <p:sp>
+        <p:nvSpPr>
+          <p:cNvPr id="25" name="Text 23"/>
+          <p:cNvSpPr/>
+          <p:nvPr/>
+        </p:nvSpPr>
+        <p:spPr>
+          <a:xfrm>
+            <a:off x="1874520" y="3273552"/>
+            <a:ext cx="6903720" cy="658368"/>
+          </a:xfrm>
+          <a:prstGeom prst="rect">
+            <a:avLst/>
+          </a:prstGeom>
+          <a:noFill/>
+          <a:ln/>
+        </p:spPr>
+        <p:txBody>
+          <a:bodyPr wrap="square" rtlCol="0" anchor="ctr"/>
+          <a:lstStyle/>
+          <a:p>
+            <a:pPr algn="ctr" indent="0" marL="0">
+              <a:buNone/>
+            </a:pPr>
+            <a:r>
+              <a:rPr lang="en-US" sz="1100" i="1" dirty="0">
+                <a:solidFill>
+                  <a:srgbClr val="CBD5E1"/>
                 </a:solidFill>
                 <a:latin typeface="Calibri" pitchFamily="34" charset="0"/>
                 <a:ea typeface="Calibri" pitchFamily="34" charset="-122"/>
                 <a:cs typeface="Calibri" pitchFamily="34" charset="-120"/>
               </a:rPr>
-              <a:t>action or process</a:t>
-            </a:r>
-            <a:endParaRPr lang="en-US" sz="850" dirty="0"/>
-          </a:p>
-        </p:txBody>
-      </p:sp>
-      <p:sp>
-        <p:nvSpPr>
-          <p:cNvPr id="25" name="Shape 23"/>
-          <p:cNvSpPr/>
-          <p:nvPr/>
-        </p:nvSpPr>
-        <p:spPr>
-          <a:xfrm>
-            <a:off x="365760" y="3273552"/>
-            <a:ext cx="1371600" cy="658368"/>
+              <a:t>Write here...</a:t>
+            </a:r>
+            <a:endParaRPr lang="en-US" sz="1100" dirty="0"/>
+          </a:p>
+        </p:txBody>
+      </p:sp>
+      <p:sp>
+        <p:nvSpPr>
+          <p:cNvPr id="26" name="Shape 24"/>
+          <p:cNvSpPr/>
+          <p:nvPr/>
+        </p:nvSpPr>
+        <p:spPr>
+          <a:xfrm>
+            <a:off x="365760" y="4096512"/>
+            <a:ext cx="1371600" cy="804672"/>
           </a:xfrm>
           <a:prstGeom prst="rect">
             <a:avLst>
-              <a:gd name="adj" fmla="val 8333"/>
+              <a:gd name="adj" fmla="val 6818"/>
             </a:avLst>
           </a:prstGeom>
           <a:solidFill>
@@ -23474,14 +24547,14 @@
       </p:sp>
       <p:sp>
         <p:nvSpPr>
-          <p:cNvPr id="26" name="Text 24"/>
-          <p:cNvSpPr/>
-          <p:nvPr/>
-        </p:nvSpPr>
-        <p:spPr>
-          <a:xfrm>
-            <a:off x="365760" y="3273552"/>
-            <a:ext cx="1371600" cy="658368"/>
+          <p:cNvPr id="27" name="Text 25"/>
+          <p:cNvSpPr/>
+          <p:nvPr/>
+        </p:nvSpPr>
+        <p:spPr>
+          <a:xfrm>
+            <a:off x="365760" y="4096512"/>
+            <a:ext cx="1371600" cy="804672"/>
           </a:xfrm>
           <a:prstGeom prst="rect">
             <a:avLst/>
@@ -23505,7 +24578,7 @@
                 <a:ea typeface="Trebuchet MS" pitchFamily="34" charset="-122"/>
                 <a:cs typeface="Trebuchet MS" pitchFamily="34" charset="-120"/>
               </a:rPr>
-              <a:t>Syllables</a:t>
+              <a:t>Phonemes</a:t>
             </a:r>
             <a:endParaRPr lang="en-US" sz="1100" dirty="0"/>
           </a:p>
@@ -23513,80 +24586,14 @@
       </p:sp>
       <p:sp>
         <p:nvSpPr>
-          <p:cNvPr id="27" name="Shape 25"/>
-          <p:cNvSpPr/>
-          <p:nvPr/>
-        </p:nvSpPr>
-        <p:spPr>
-          <a:xfrm>
-            <a:off x="1874520" y="3273552"/>
-            <a:ext cx="6903720" cy="658368"/>
-          </a:xfrm>
-          <a:prstGeom prst="rect">
-            <a:avLst>
-              <a:gd name="adj" fmla="val 8333"/>
-            </a:avLst>
-          </a:prstGeom>
-          <a:solidFill>
-            <a:srgbClr val="F8FAFC"/>
-          </a:solidFill>
-          <a:ln w="12700">
-            <a:solidFill>
-              <a:srgbClr val="E2E8F0"/>
-            </a:solidFill>
-            <a:prstDash val="dash"/>
-          </a:ln>
-        </p:spPr>
-      </p:sp>
-      <p:sp>
-        <p:nvSpPr>
-          <p:cNvPr id="28" name="Text 26"/>
-          <p:cNvSpPr/>
-          <p:nvPr/>
-        </p:nvSpPr>
-        <p:spPr>
-          <a:xfrm>
-            <a:off x="1874520" y="3273552"/>
-            <a:ext cx="6903720" cy="658368"/>
-          </a:xfrm>
-          <a:prstGeom prst="rect">
-            <a:avLst/>
-          </a:prstGeom>
-          <a:noFill/>
-          <a:ln/>
-        </p:spPr>
-        <p:txBody>
-          <a:bodyPr wrap="square" rtlCol="0" anchor="ctr"/>
-          <a:lstStyle/>
-          <a:p>
-            <a:pPr algn="ctr" indent="0" marL="0">
-              <a:buNone/>
-            </a:pPr>
-            <a:r>
-              <a:rPr lang="en-US" sz="1100" i="1" dirty="0">
-                <a:solidFill>
-                  <a:srgbClr val="CBD5E1"/>
-                </a:solidFill>
-                <a:latin typeface="Calibri" pitchFamily="34" charset="0"/>
-                <a:ea typeface="Calibri" pitchFamily="34" charset="-122"/>
-                <a:cs typeface="Calibri" pitchFamily="34" charset="-120"/>
-              </a:rPr>
-              <a:t>Write here...</a:t>
-            </a:r>
-            <a:endParaRPr lang="en-US" sz="1100" dirty="0"/>
-          </a:p>
-        </p:txBody>
-      </p:sp>
-      <p:sp>
-        <p:nvSpPr>
-          <p:cNvPr id="29" name="Shape 27"/>
-          <p:cNvSpPr/>
-          <p:nvPr/>
-        </p:nvSpPr>
-        <p:spPr>
-          <a:xfrm>
-            <a:off x="365760" y="4096512"/>
-            <a:ext cx="1371600" cy="804672"/>
+          <p:cNvPr id="28" name="Shape 26"/>
+          <p:cNvSpPr/>
+          <p:nvPr/>
+        </p:nvSpPr>
+        <p:spPr>
+          <a:xfrm>
+            <a:off x="1874520" y="4096512"/>
+            <a:ext cx="6903720" cy="804672"/>
           </a:xfrm>
           <a:prstGeom prst="rect">
             <a:avLst>
@@ -23594,85 +24601,19 @@
             </a:avLst>
           </a:prstGeom>
           <a:solidFill>
-            <a:srgbClr val="E2E8F0"/>
+            <a:srgbClr val="F8FAFC"/>
           </a:solidFill>
           <a:ln w="12700">
             <a:solidFill>
               <a:srgbClr val="E2E8F0"/>
             </a:solidFill>
-            <a:prstDash val="solid"/>
-          </a:ln>
-        </p:spPr>
-      </p:sp>
-      <p:sp>
-        <p:nvSpPr>
-          <p:cNvPr id="30" name="Text 28"/>
-          <p:cNvSpPr/>
-          <p:nvPr/>
-        </p:nvSpPr>
-        <p:spPr>
-          <a:xfrm>
-            <a:off x="365760" y="4096512"/>
-            <a:ext cx="1371600" cy="804672"/>
-          </a:xfrm>
-          <a:prstGeom prst="rect">
-            <a:avLst/>
-          </a:prstGeom>
-          <a:noFill/>
-          <a:ln/>
-        </p:spPr>
-        <p:txBody>
-          <a:bodyPr wrap="square" lIns="0" tIns="0" rIns="0" bIns="0" rtlCol="0" anchor="ctr"/>
-          <a:lstStyle/>
-          <a:p>
-            <a:pPr algn="ctr" indent="0" marL="0">
-              <a:buNone/>
-            </a:pPr>
-            <a:r>
-              <a:rPr lang="en-US" sz="1100" b="1" dirty="0">
-                <a:solidFill>
-                  <a:srgbClr val="475569"/>
-                </a:solidFill>
-                <a:latin typeface="Trebuchet MS" pitchFamily="34" charset="0"/>
-                <a:ea typeface="Trebuchet MS" pitchFamily="34" charset="-122"/>
-                <a:cs typeface="Trebuchet MS" pitchFamily="34" charset="-120"/>
-              </a:rPr>
-              <a:t>Phonemes</a:t>
-            </a:r>
-            <a:endParaRPr lang="en-US" sz="1100" dirty="0"/>
-          </a:p>
-        </p:txBody>
-      </p:sp>
-      <p:sp>
-        <p:nvSpPr>
-          <p:cNvPr id="31" name="Shape 29"/>
-          <p:cNvSpPr/>
-          <p:nvPr/>
-        </p:nvSpPr>
-        <p:spPr>
-          <a:xfrm>
-            <a:off x="1874520" y="4096512"/>
-            <a:ext cx="6903720" cy="804672"/>
-          </a:xfrm>
-          <a:prstGeom prst="rect">
-            <a:avLst>
-              <a:gd name="adj" fmla="val 6818"/>
-            </a:avLst>
-          </a:prstGeom>
-          <a:solidFill>
-            <a:srgbClr val="F8FAFC"/>
-          </a:solidFill>
-          <a:ln w="12700">
-            <a:solidFill>
-              <a:srgbClr val="E2E8F0"/>
-            </a:solidFill>
             <a:prstDash val="dash"/>
           </a:ln>
         </p:spPr>
       </p:sp>
       <p:sp>
         <p:nvSpPr>
-          <p:cNvPr id="32" name="Text 30"/>
+          <p:cNvPr id="29" name="Text 27"/>
           <p:cNvSpPr/>
           <p:nvPr/>
         </p:nvSpPr>
@@ -23995,7 +24936,7 @@
                 <a:ea typeface="Calibri" pitchFamily="34" charset="-122"/>
                 <a:cs typeface="Calibri" pitchFamily="34" charset="-120"/>
               </a:rPr>
-              <a:t>Word Labs  •  wordlabs.app  •  Root: 'teach' = to show or instruct others</a:t>
+              <a:t>Word Labs  •  wordlabs.app  •  Root: 'teach' = to show or instruct</a:t>
             </a:r>
             <a:endParaRPr lang="en-US" sz="800" dirty="0"/>
           </a:p>
@@ -24068,7 +25009,7 @@
                 <a:ea typeface="Trebuchet MS" pitchFamily="34" charset="-122"/>
                 <a:cs typeface="Trebuchet MS" pitchFamily="34" charset="-120"/>
               </a:rPr>
-              <a:t>We are learning that the root 'teach' means 'to show or instruct others'.</a:t>
+              <a:t>We are learning that the root 'teach' means 'to show or instruct'.</a:t>
             </a:r>
             <a:endParaRPr lang="en-US" sz="2000" dirty="0"/>
           </a:p>
@@ -24714,7 +25655,7 @@
                 <a:ea typeface="Calibri" pitchFamily="34" charset="-122"/>
                 <a:cs typeface="Calibri" pitchFamily="34" charset="-120"/>
               </a:rPr>
-              <a:t>Word Labs  •  wordlabs.app  •  Root: 'teach' = to show or instruct others</a:t>
+              <a:t>Word Labs  •  wordlabs.app  •  Root: 'teach' = to show or instruct</a:t>
             </a:r>
             <a:endParaRPr lang="en-US" sz="800" dirty="0"/>
           </a:p>
@@ -24853,7 +25794,7 @@
                 <a:ea typeface="Trebuchet MS" pitchFamily="34" charset="-122"/>
                 <a:cs typeface="Trebuchet MS" pitchFamily="34" charset="-120"/>
               </a:rPr>
-              <a:t>reteaching</a:t>
+              <a:t>teachable</a:t>
             </a:r>
             <a:endParaRPr lang="en-US" sz="2800" dirty="0"/>
           </a:p>
@@ -24933,7 +25874,7 @@
         </p:nvSpPr>
         <p:spPr>
           <a:xfrm>
-            <a:off x="2221992" y="2258568"/>
+            <a:off x="2938272" y="2258568"/>
             <a:ext cx="1828800" cy="292608"/>
           </a:xfrm>
           <a:prstGeom prst="rect">
@@ -24942,11 +25883,11 @@
             </a:avLst>
           </a:prstGeom>
           <a:solidFill>
-            <a:srgbClr val="DDD6FE"/>
+            <a:srgbClr val="CCFBF1"/>
           </a:solidFill>
           <a:ln w="19050">
             <a:solidFill>
-              <a:srgbClr val="7C3AED"/>
+              <a:srgbClr val="0D9488"/>
             </a:solidFill>
             <a:prstDash val="solid"/>
           </a:ln>
@@ -24967,7 +25908,7 @@
         </p:nvSpPr>
         <p:spPr>
           <a:xfrm>
-            <a:off x="2221992" y="2258568"/>
+            <a:off x="2938272" y="2258568"/>
             <a:ext cx="1828800" cy="292608"/>
           </a:xfrm>
           <a:prstGeom prst="rect">
@@ -24986,13 +25927,13 @@
             <a:r>
               <a:rPr lang="en-US" sz="1300" b="1" dirty="0">
                 <a:solidFill>
-                  <a:srgbClr val="4C1D95"/>
+                  <a:srgbClr val="0F766E"/>
                 </a:solidFill>
                 <a:latin typeface="Trebuchet MS" pitchFamily="34" charset="0"/>
                 <a:ea typeface="Trebuchet MS" pitchFamily="34" charset="-122"/>
                 <a:cs typeface="Trebuchet MS" pitchFamily="34" charset="-120"/>
               </a:rPr>
-              <a:t>re</a:t>
+              <a:t>teach</a:t>
             </a:r>
             <a:endParaRPr lang="en-US" sz="1300" dirty="0"/>
           </a:p>
@@ -25006,7 +25947,7 @@
         </p:nvSpPr>
         <p:spPr>
           <a:xfrm>
-            <a:off x="2221992" y="2569464"/>
+            <a:off x="2938272" y="2569464"/>
             <a:ext cx="1828800" cy="201168"/>
           </a:xfrm>
           <a:prstGeom prst="rect">
@@ -25031,7 +25972,7 @@
                 <a:ea typeface="Calibri" pitchFamily="34" charset="-122"/>
                 <a:cs typeface="Calibri" pitchFamily="34" charset="-120"/>
               </a:rPr>
-              <a:t>again</a:t>
+              <a:t>to show or instruct</a:t>
             </a:r>
             <a:endParaRPr lang="en-US" sz="850" dirty="0"/>
           </a:p>
@@ -25045,7 +25986,7 @@
         </p:nvSpPr>
         <p:spPr>
           <a:xfrm>
-            <a:off x="4370832" y="2258568"/>
+            <a:off x="5803392" y="2258568"/>
             <a:ext cx="1828800" cy="292608"/>
           </a:xfrm>
           <a:prstGeom prst="rect">
@@ -25054,11 +25995,11 @@
             </a:avLst>
           </a:prstGeom>
           <a:solidFill>
-            <a:srgbClr val="CCFBF1"/>
+            <a:srgbClr val="FCE7F3"/>
           </a:solidFill>
           <a:ln w="19050">
             <a:solidFill>
-              <a:srgbClr val="0D9488"/>
+              <a:srgbClr val="DB2777"/>
             </a:solidFill>
             <a:prstDash val="solid"/>
           </a:ln>
@@ -25079,7 +26020,7 @@
         </p:nvSpPr>
         <p:spPr>
           <a:xfrm>
-            <a:off x="4370832" y="2258568"/>
+            <a:off x="5803392" y="2258568"/>
             <a:ext cx="1828800" cy="292608"/>
           </a:xfrm>
           <a:prstGeom prst="rect">
@@ -25098,13 +26039,13 @@
             <a:r>
               <a:rPr lang="en-US" sz="1300" b="1" dirty="0">
                 <a:solidFill>
-                  <a:srgbClr val="0F766E"/>
+                  <a:srgbClr val="9D174D"/>
                 </a:solidFill>
                 <a:latin typeface="Trebuchet MS" pitchFamily="34" charset="0"/>
                 <a:ea typeface="Trebuchet MS" pitchFamily="34" charset="-122"/>
                 <a:cs typeface="Trebuchet MS" pitchFamily="34" charset="-120"/>
               </a:rPr>
-              <a:t>teach</a:t>
+              <a:t>able</a:t>
             </a:r>
             <a:endParaRPr lang="en-US" sz="1300" dirty="0"/>
           </a:p>
@@ -25118,7 +26059,7 @@
         </p:nvSpPr>
         <p:spPr>
           <a:xfrm>
-            <a:off x="4370832" y="2569464"/>
+            <a:off x="5803392" y="2569464"/>
             <a:ext cx="1828800" cy="201168"/>
           </a:xfrm>
           <a:prstGeom prst="rect">
@@ -25143,7 +26084,7 @@
                 <a:ea typeface="Calibri" pitchFamily="34" charset="-122"/>
                 <a:cs typeface="Calibri" pitchFamily="34" charset="-120"/>
               </a:rPr>
-              <a:t>to instruct or show</a:t>
+              <a:t>able to be; capable of</a:t>
             </a:r>
             <a:endParaRPr lang="en-US" sz="850" dirty="0"/>
           </a:p>
@@ -25157,30 +26098,23 @@
         </p:nvSpPr>
         <p:spPr>
           <a:xfrm>
-            <a:off x="6519672" y="2258568"/>
-            <a:ext cx="1828800" cy="292608"/>
+            <a:off x="365760" y="3273552"/>
+            <a:ext cx="1371600" cy="658368"/>
           </a:xfrm>
           <a:prstGeom prst="rect">
             <a:avLst>
-              <a:gd name="adj" fmla="val 25000"/>
+              <a:gd name="adj" fmla="val 8333"/>
             </a:avLst>
           </a:prstGeom>
           <a:solidFill>
-            <a:srgbClr val="FCE7F3"/>
-          </a:solidFill>
-          <a:ln w="19050">
-            <a:solidFill>
-              <a:srgbClr val="DB2777"/>
-            </a:solidFill>
-            <a:prstDash val="solid"/>
-          </a:ln>
-          <a:effectLst>
-            <a:outerShdw sx="100000" sy="100000" kx="0" ky="0" algn="bl" rotWithShape="0" blurRad="101600" dist="38100" dir="8100000">
-              <a:srgbClr val="000000">
-                <a:alpha val="12000"/>
-              </a:srgbClr>
-            </a:outerShdw>
-          </a:effectLst>
+            <a:srgbClr val="E2E8F0"/>
+          </a:solidFill>
+          <a:ln w="12700">
+            <a:solidFill>
+              <a:srgbClr val="E2E8F0"/>
+            </a:solidFill>
+            <a:prstDash val="solid"/>
+          </a:ln>
         </p:spPr>
       </p:sp>
       <p:sp>
@@ -25191,86 +26125,47 @@
         </p:nvSpPr>
         <p:spPr>
           <a:xfrm>
-            <a:off x="6519672" y="2258568"/>
-            <a:ext cx="1828800" cy="292608"/>
-          </a:xfrm>
-          <a:prstGeom prst="rect">
-            <a:avLst/>
-          </a:prstGeom>
-          <a:noFill/>
-          <a:ln/>
-        </p:spPr>
-        <p:txBody>
-          <a:bodyPr wrap="square" lIns="0" tIns="0" rIns="0" bIns="0" rtlCol="0" anchor="ctr"/>
-          <a:lstStyle/>
-          <a:p>
-            <a:pPr algn="ctr" indent="0" marL="0">
-              <a:buNone/>
-            </a:pPr>
-            <a:r>
-              <a:rPr lang="en-US" sz="1300" b="1" dirty="0">
-                <a:solidFill>
-                  <a:srgbClr val="9D174D"/>
+            <a:off x="365760" y="3273552"/>
+            <a:ext cx="1371600" cy="658368"/>
+          </a:xfrm>
+          <a:prstGeom prst="rect">
+            <a:avLst/>
+          </a:prstGeom>
+          <a:noFill/>
+          <a:ln/>
+        </p:spPr>
+        <p:txBody>
+          <a:bodyPr wrap="square" lIns="0" tIns="0" rIns="0" bIns="0" rtlCol="0" anchor="ctr"/>
+          <a:lstStyle/>
+          <a:p>
+            <a:pPr algn="ctr" indent="0" marL="0">
+              <a:buNone/>
+            </a:pPr>
+            <a:r>
+              <a:rPr lang="en-US" sz="1100" b="1" dirty="0">
+                <a:solidFill>
+                  <a:srgbClr val="475569"/>
                 </a:solidFill>
                 <a:latin typeface="Trebuchet MS" pitchFamily="34" charset="0"/>
                 <a:ea typeface="Trebuchet MS" pitchFamily="34" charset="-122"/>
                 <a:cs typeface="Trebuchet MS" pitchFamily="34" charset="-120"/>
               </a:rPr>
-              <a:t>ing</a:t>
-            </a:r>
-            <a:endParaRPr lang="en-US" sz="1300" dirty="0"/>
-          </a:p>
-        </p:txBody>
-      </p:sp>
-      <p:sp>
-        <p:nvSpPr>
-          <p:cNvPr id="24" name="Text 22"/>
-          <p:cNvSpPr/>
-          <p:nvPr/>
-        </p:nvSpPr>
-        <p:spPr>
-          <a:xfrm>
-            <a:off x="6519672" y="2569464"/>
-            <a:ext cx="1828800" cy="201168"/>
-          </a:xfrm>
-          <a:prstGeom prst="rect">
-            <a:avLst/>
-          </a:prstGeom>
-          <a:noFill/>
-          <a:ln/>
-        </p:spPr>
-        <p:txBody>
-          <a:bodyPr wrap="square" lIns="0" tIns="0" rIns="0" bIns="0" rtlCol="0" anchor="t"/>
-          <a:lstStyle/>
-          <a:p>
-            <a:pPr algn="ctr" indent="0" marL="0">
-              <a:buNone/>
-            </a:pPr>
-            <a:r>
-              <a:rPr lang="en-US" sz="850" dirty="0">
-                <a:solidFill>
-                  <a:srgbClr val="475569"/>
-                </a:solidFill>
-                <a:latin typeface="Calibri" pitchFamily="34" charset="0"/>
-                <a:ea typeface="Calibri" pitchFamily="34" charset="-122"/>
-                <a:cs typeface="Calibri" pitchFamily="34" charset="-120"/>
-              </a:rPr>
-              <a:t>action or process</a:t>
-            </a:r>
-            <a:endParaRPr lang="en-US" sz="850" dirty="0"/>
-          </a:p>
-        </p:txBody>
-      </p:sp>
-      <p:sp>
-        <p:nvSpPr>
-          <p:cNvPr id="25" name="Shape 23"/>
-          <p:cNvSpPr/>
-          <p:nvPr/>
-        </p:nvSpPr>
-        <p:spPr>
-          <a:xfrm>
-            <a:off x="365760" y="3273552"/>
-            <a:ext cx="1371600" cy="658368"/>
+              <a:t>Syllables</a:t>
+            </a:r>
+            <a:endParaRPr lang="en-US" sz="1100" dirty="0"/>
+          </a:p>
+        </p:txBody>
+      </p:sp>
+      <p:sp>
+        <p:nvSpPr>
+          <p:cNvPr id="24" name="Shape 22"/>
+          <p:cNvSpPr/>
+          <p:nvPr/>
+        </p:nvSpPr>
+        <p:spPr>
+          <a:xfrm>
+            <a:off x="1874520" y="3273552"/>
+            <a:ext cx="6903720" cy="658368"/>
           </a:xfrm>
           <a:prstGeom prst="rect">
             <a:avLst>
@@ -25278,11 +26173,38 @@
             </a:avLst>
           </a:prstGeom>
           <a:solidFill>
-            <a:srgbClr val="E2E8F0"/>
-          </a:solidFill>
-          <a:ln w="12700">
-            <a:solidFill>
-              <a:srgbClr val="E2E8F0"/>
+            <a:srgbClr val="CCFBF1"/>
+          </a:solidFill>
+          <a:ln w="12700">
+            <a:solidFill>
+              <a:srgbClr val="0D9488"/>
+            </a:solidFill>
+            <a:prstDash val="solid"/>
+          </a:ln>
+        </p:spPr>
+      </p:sp>
+      <p:sp>
+        <p:nvSpPr>
+          <p:cNvPr id="25" name="Shape 23"/>
+          <p:cNvSpPr/>
+          <p:nvPr/>
+        </p:nvSpPr>
+        <p:spPr>
+          <a:xfrm>
+            <a:off x="2313432" y="3364992"/>
+            <a:ext cx="1645920" cy="475488"/>
+          </a:xfrm>
+          <a:prstGeom prst="rect">
+            <a:avLst>
+              <a:gd name="adj" fmla="val 9615"/>
+            </a:avLst>
+          </a:prstGeom>
+          <a:solidFill>
+            <a:srgbClr val="FFFFFF"/>
+          </a:solidFill>
+          <a:ln w="12700">
+            <a:solidFill>
+              <a:srgbClr val="0D9488"/>
             </a:solidFill>
             <a:prstDash val="solid"/>
           </a:ln>
@@ -25296,63 +26218,75 @@
         </p:nvSpPr>
         <p:spPr>
           <a:xfrm>
-            <a:off x="365760" y="3273552"/>
-            <a:ext cx="1371600" cy="658368"/>
-          </a:xfrm>
-          <a:prstGeom prst="rect">
-            <a:avLst/>
-          </a:prstGeom>
-          <a:noFill/>
-          <a:ln/>
-        </p:spPr>
-        <p:txBody>
-          <a:bodyPr wrap="square" lIns="0" tIns="0" rIns="0" bIns="0" rtlCol="0" anchor="ctr"/>
-          <a:lstStyle/>
-          <a:p>
-            <a:pPr algn="ctr" indent="0" marL="0">
-              <a:buNone/>
-            </a:pPr>
-            <a:r>
-              <a:rPr lang="en-US" sz="1100" b="1" dirty="0">
-                <a:solidFill>
-                  <a:srgbClr val="475569"/>
+            <a:off x="2313432" y="3364992"/>
+            <a:ext cx="1645920" cy="475488"/>
+          </a:xfrm>
+          <a:prstGeom prst="rect">
+            <a:avLst/>
+          </a:prstGeom>
+          <a:noFill/>
+          <a:ln/>
+        </p:spPr>
+        <p:txBody>
+          <a:bodyPr wrap="square" lIns="0" tIns="0" rIns="0" bIns="0" rtlCol="0" anchor="ctr"/>
+          <a:lstStyle/>
+          <a:p>
+            <a:pPr algn="ctr" indent="0" marL="0">
+              <a:buNone/>
+            </a:pPr>
+            <a:r>
+              <a:rPr lang="en-US" sz="1400" b="1" dirty="0">
+                <a:solidFill>
+                  <a:srgbClr val="0D9488"/>
                 </a:solidFill>
                 <a:latin typeface="Trebuchet MS" pitchFamily="34" charset="0"/>
                 <a:ea typeface="Trebuchet MS" pitchFamily="34" charset="-122"/>
                 <a:cs typeface="Trebuchet MS" pitchFamily="34" charset="-120"/>
               </a:rPr>
-              <a:t>Syllables</a:t>
-            </a:r>
-            <a:endParaRPr lang="en-US" sz="1100" dirty="0"/>
-          </a:p>
-        </p:txBody>
-      </p:sp>
-      <p:sp>
-        <p:nvSpPr>
-          <p:cNvPr id="27" name="Shape 25"/>
-          <p:cNvSpPr/>
-          <p:nvPr/>
-        </p:nvSpPr>
-        <p:spPr>
-          <a:xfrm>
-            <a:off x="1874520" y="3273552"/>
-            <a:ext cx="6903720" cy="658368"/>
-          </a:xfrm>
-          <a:prstGeom prst="rect">
-            <a:avLst>
-              <a:gd name="adj" fmla="val 8333"/>
-            </a:avLst>
-          </a:prstGeom>
-          <a:solidFill>
-            <a:srgbClr val="CCFBF1"/>
-          </a:solidFill>
-          <a:ln w="12700">
-            <a:solidFill>
-              <a:srgbClr val="0D9488"/>
-            </a:solidFill>
-            <a:prstDash val="solid"/>
-          </a:ln>
-        </p:spPr>
+              <a:t>teach</a:t>
+            </a:r>
+            <a:endParaRPr lang="en-US" sz="1400" dirty="0"/>
+          </a:p>
+        </p:txBody>
+      </p:sp>
+      <p:sp>
+        <p:nvSpPr>
+          <p:cNvPr id="27" name="Text 25"/>
+          <p:cNvSpPr/>
+          <p:nvPr/>
+        </p:nvSpPr>
+        <p:spPr>
+          <a:xfrm>
+            <a:off x="3959352" y="3364992"/>
+            <a:ext cx="411480" cy="475488"/>
+          </a:xfrm>
+          <a:prstGeom prst="rect">
+            <a:avLst/>
+          </a:prstGeom>
+          <a:noFill/>
+          <a:ln/>
+        </p:spPr>
+        <p:txBody>
+          <a:bodyPr wrap="square" lIns="0" tIns="0" rIns="0" bIns="0" rtlCol="0" anchor="ctr"/>
+          <a:lstStyle/>
+          <a:p>
+            <a:pPr algn="ctr" indent="0" marL="0">
+              <a:buNone/>
+            </a:pPr>
+            <a:r>
+              <a:rPr lang="en-US" sz="1600" b="1" dirty="0">
+                <a:solidFill>
+                  <a:srgbClr val="0D9488"/>
+                </a:solidFill>
+                <a:latin typeface="Trebuchet MS" pitchFamily="34" charset="0"/>
+                <a:ea typeface="Trebuchet MS" pitchFamily="34" charset="-122"/>
+                <a:cs typeface="Trebuchet MS" pitchFamily="34" charset="-120"/>
+              </a:rPr>
+              <a:t>·</a:t>
+            </a:r>
+            <a:endParaRPr lang="en-US" sz="1600" dirty="0"/>
+          </a:p>
+        </p:txBody>
       </p:sp>
       <p:sp>
         <p:nvSpPr>
@@ -25362,7 +26296,7 @@
         </p:nvSpPr>
         <p:spPr>
           <a:xfrm>
-            <a:off x="2313432" y="3364992"/>
+            <a:off x="4370832" y="3364992"/>
             <a:ext cx="1645920" cy="475488"/>
           </a:xfrm>
           <a:prstGeom prst="rect">
@@ -25389,7 +26323,7 @@
         </p:nvSpPr>
         <p:spPr>
           <a:xfrm>
-            <a:off x="2313432" y="3364992"/>
+            <a:off x="4370832" y="3364992"/>
             <a:ext cx="1645920" cy="475488"/>
           </a:xfrm>
           <a:prstGeom prst="rect">
@@ -25414,7 +26348,7 @@
                 <a:ea typeface="Trebuchet MS" pitchFamily="34" charset="-122"/>
                 <a:cs typeface="Trebuchet MS" pitchFamily="34" charset="-120"/>
               </a:rPr>
-              <a:t>re</a:t>
+              <a:t>a</a:t>
             </a:r>
             <a:endParaRPr lang="en-US" sz="1400" dirty="0"/>
           </a:p>
@@ -25428,7 +26362,7 @@
         </p:nvSpPr>
         <p:spPr>
           <a:xfrm>
-            <a:off x="3959352" y="3364992"/>
+            <a:off x="6016752" y="3364992"/>
             <a:ext cx="411480" cy="475488"/>
           </a:xfrm>
           <a:prstGeom prst="rect">
@@ -25467,7 +26401,7 @@
         </p:nvSpPr>
         <p:spPr>
           <a:xfrm>
-            <a:off x="4370832" y="3364992"/>
+            <a:off x="6428232" y="3364992"/>
             <a:ext cx="1645920" cy="475488"/>
           </a:xfrm>
           <a:prstGeom prst="rect">
@@ -25494,7 +26428,7 @@
         </p:nvSpPr>
         <p:spPr>
           <a:xfrm>
-            <a:off x="4370832" y="3364992"/>
+            <a:off x="6428232" y="3364992"/>
             <a:ext cx="1645920" cy="475488"/>
           </a:xfrm>
           <a:prstGeom prst="rect">
@@ -25519,7 +26453,7 @@
                 <a:ea typeface="Trebuchet MS" pitchFamily="34" charset="-122"/>
                 <a:cs typeface="Trebuchet MS" pitchFamily="34" charset="-120"/>
               </a:rPr>
-              <a:t>teach</a:t>
+              <a:t>ble</a:t>
             </a:r>
             <a:endParaRPr lang="en-US" sz="1400" dirty="0"/>
           </a:p>
@@ -25527,119 +26461,80 @@
       </p:sp>
       <p:sp>
         <p:nvSpPr>
-          <p:cNvPr id="33" name="Text 31"/>
-          <p:cNvSpPr/>
-          <p:nvPr/>
-        </p:nvSpPr>
-        <p:spPr>
-          <a:xfrm>
-            <a:off x="6016752" y="3364992"/>
-            <a:ext cx="411480" cy="475488"/>
-          </a:xfrm>
-          <a:prstGeom prst="rect">
-            <a:avLst/>
-          </a:prstGeom>
-          <a:noFill/>
-          <a:ln/>
-        </p:spPr>
-        <p:txBody>
-          <a:bodyPr wrap="square" lIns="0" tIns="0" rIns="0" bIns="0" rtlCol="0" anchor="ctr"/>
-          <a:lstStyle/>
-          <a:p>
-            <a:pPr algn="ctr" indent="0" marL="0">
-              <a:buNone/>
-            </a:pPr>
-            <a:r>
-              <a:rPr lang="en-US" sz="1600" b="1" dirty="0">
-                <a:solidFill>
-                  <a:srgbClr val="0D9488"/>
+          <p:cNvPr id="33" name="Shape 31"/>
+          <p:cNvSpPr/>
+          <p:nvPr/>
+        </p:nvSpPr>
+        <p:spPr>
+          <a:xfrm>
+            <a:off x="365760" y="4096512"/>
+            <a:ext cx="1371600" cy="804672"/>
+          </a:xfrm>
+          <a:prstGeom prst="rect">
+            <a:avLst>
+              <a:gd name="adj" fmla="val 6818"/>
+            </a:avLst>
+          </a:prstGeom>
+          <a:solidFill>
+            <a:srgbClr val="E2E8F0"/>
+          </a:solidFill>
+          <a:ln w="12700">
+            <a:solidFill>
+              <a:srgbClr val="E2E8F0"/>
+            </a:solidFill>
+            <a:prstDash val="solid"/>
+          </a:ln>
+        </p:spPr>
+      </p:sp>
+      <p:sp>
+        <p:nvSpPr>
+          <p:cNvPr id="34" name="Text 32"/>
+          <p:cNvSpPr/>
+          <p:nvPr/>
+        </p:nvSpPr>
+        <p:spPr>
+          <a:xfrm>
+            <a:off x="365760" y="4096512"/>
+            <a:ext cx="1371600" cy="804672"/>
+          </a:xfrm>
+          <a:prstGeom prst="rect">
+            <a:avLst/>
+          </a:prstGeom>
+          <a:noFill/>
+          <a:ln/>
+        </p:spPr>
+        <p:txBody>
+          <a:bodyPr wrap="square" lIns="0" tIns="0" rIns="0" bIns="0" rtlCol="0" anchor="ctr"/>
+          <a:lstStyle/>
+          <a:p>
+            <a:pPr algn="ctr" indent="0" marL="0">
+              <a:buNone/>
+            </a:pPr>
+            <a:r>
+              <a:rPr lang="en-US" sz="1100" b="1" dirty="0">
+                <a:solidFill>
+                  <a:srgbClr val="475569"/>
                 </a:solidFill>
                 <a:latin typeface="Trebuchet MS" pitchFamily="34" charset="0"/>
                 <a:ea typeface="Trebuchet MS" pitchFamily="34" charset="-122"/>
                 <a:cs typeface="Trebuchet MS" pitchFamily="34" charset="-120"/>
               </a:rPr>
-              <a:t>·</a:t>
-            </a:r>
-            <a:endParaRPr lang="en-US" sz="1600" dirty="0"/>
-          </a:p>
-        </p:txBody>
-      </p:sp>
-      <p:sp>
-        <p:nvSpPr>
-          <p:cNvPr id="34" name="Shape 32"/>
-          <p:cNvSpPr/>
-          <p:nvPr/>
-        </p:nvSpPr>
-        <p:spPr>
-          <a:xfrm>
-            <a:off x="6428232" y="3364992"/>
-            <a:ext cx="1645920" cy="475488"/>
-          </a:xfrm>
-          <a:prstGeom prst="rect">
-            <a:avLst>
-              <a:gd name="adj" fmla="val 9615"/>
-            </a:avLst>
-          </a:prstGeom>
-          <a:solidFill>
-            <a:srgbClr val="FFFFFF"/>
-          </a:solidFill>
-          <a:ln w="12700">
-            <a:solidFill>
-              <a:srgbClr val="0D9488"/>
-            </a:solidFill>
-            <a:prstDash val="solid"/>
-          </a:ln>
-        </p:spPr>
-      </p:sp>
-      <p:sp>
-        <p:nvSpPr>
-          <p:cNvPr id="35" name="Text 33"/>
-          <p:cNvSpPr/>
-          <p:nvPr/>
-        </p:nvSpPr>
-        <p:spPr>
-          <a:xfrm>
-            <a:off x="6428232" y="3364992"/>
-            <a:ext cx="1645920" cy="475488"/>
-          </a:xfrm>
-          <a:prstGeom prst="rect">
-            <a:avLst/>
-          </a:prstGeom>
-          <a:noFill/>
-          <a:ln/>
-        </p:spPr>
-        <p:txBody>
-          <a:bodyPr wrap="square" lIns="0" tIns="0" rIns="0" bIns="0" rtlCol="0" anchor="ctr"/>
-          <a:lstStyle/>
-          <a:p>
-            <a:pPr algn="ctr" indent="0" marL="0">
-              <a:buNone/>
-            </a:pPr>
-            <a:r>
-              <a:rPr lang="en-US" sz="1400" b="1" dirty="0">
-                <a:solidFill>
-                  <a:srgbClr val="0D9488"/>
-                </a:solidFill>
-                <a:latin typeface="Trebuchet MS" pitchFamily="34" charset="0"/>
-                <a:ea typeface="Trebuchet MS" pitchFamily="34" charset="-122"/>
-                <a:cs typeface="Trebuchet MS" pitchFamily="34" charset="-120"/>
-              </a:rPr>
-              <a:t>ing</a:t>
-            </a:r>
-            <a:endParaRPr lang="en-US" sz="1400" dirty="0"/>
-          </a:p>
-        </p:txBody>
-      </p:sp>
-      <p:sp>
-        <p:nvSpPr>
-          <p:cNvPr id="36" name="Shape 34"/>
-          <p:cNvSpPr/>
-          <p:nvPr/>
-        </p:nvSpPr>
-        <p:spPr>
-          <a:xfrm>
-            <a:off x="365760" y="4096512"/>
-            <a:ext cx="1371600" cy="804672"/>
+              <a:t>Phonemes</a:t>
+            </a:r>
+            <a:endParaRPr lang="en-US" sz="1100" dirty="0"/>
+          </a:p>
+        </p:txBody>
+      </p:sp>
+      <p:sp>
+        <p:nvSpPr>
+          <p:cNvPr id="35" name="Shape 33"/>
+          <p:cNvSpPr/>
+          <p:nvPr/>
+        </p:nvSpPr>
+        <p:spPr>
+          <a:xfrm>
+            <a:off x="1874520" y="4096512"/>
+            <a:ext cx="6903720" cy="804672"/>
           </a:xfrm>
           <a:prstGeom prst="rect">
             <a:avLst>
@@ -25647,85 +26542,19 @@
             </a:avLst>
           </a:prstGeom>
           <a:solidFill>
-            <a:srgbClr val="E2E8F0"/>
+            <a:srgbClr val="F8FAFC"/>
           </a:solidFill>
           <a:ln w="12700">
             <a:solidFill>
               <a:srgbClr val="E2E8F0"/>
             </a:solidFill>
-            <a:prstDash val="solid"/>
-          </a:ln>
-        </p:spPr>
-      </p:sp>
-      <p:sp>
-        <p:nvSpPr>
-          <p:cNvPr id="37" name="Text 35"/>
-          <p:cNvSpPr/>
-          <p:nvPr/>
-        </p:nvSpPr>
-        <p:spPr>
-          <a:xfrm>
-            <a:off x="365760" y="4096512"/>
-            <a:ext cx="1371600" cy="804672"/>
-          </a:xfrm>
-          <a:prstGeom prst="rect">
-            <a:avLst/>
-          </a:prstGeom>
-          <a:noFill/>
-          <a:ln/>
-        </p:spPr>
-        <p:txBody>
-          <a:bodyPr wrap="square" lIns="0" tIns="0" rIns="0" bIns="0" rtlCol="0" anchor="ctr"/>
-          <a:lstStyle/>
-          <a:p>
-            <a:pPr algn="ctr" indent="0" marL="0">
-              <a:buNone/>
-            </a:pPr>
-            <a:r>
-              <a:rPr lang="en-US" sz="1100" b="1" dirty="0">
-                <a:solidFill>
-                  <a:srgbClr val="475569"/>
-                </a:solidFill>
-                <a:latin typeface="Trebuchet MS" pitchFamily="34" charset="0"/>
-                <a:ea typeface="Trebuchet MS" pitchFamily="34" charset="-122"/>
-                <a:cs typeface="Trebuchet MS" pitchFamily="34" charset="-120"/>
-              </a:rPr>
-              <a:t>Phonemes</a:t>
-            </a:r>
-            <a:endParaRPr lang="en-US" sz="1100" dirty="0"/>
-          </a:p>
-        </p:txBody>
-      </p:sp>
-      <p:sp>
-        <p:nvSpPr>
-          <p:cNvPr id="38" name="Shape 36"/>
-          <p:cNvSpPr/>
-          <p:nvPr/>
-        </p:nvSpPr>
-        <p:spPr>
-          <a:xfrm>
-            <a:off x="1874520" y="4096512"/>
-            <a:ext cx="6903720" cy="804672"/>
-          </a:xfrm>
-          <a:prstGeom prst="rect">
-            <a:avLst>
-              <a:gd name="adj" fmla="val 6818"/>
-            </a:avLst>
-          </a:prstGeom>
-          <a:solidFill>
-            <a:srgbClr val="F8FAFC"/>
-          </a:solidFill>
-          <a:ln w="12700">
-            <a:solidFill>
-              <a:srgbClr val="E2E8F0"/>
-            </a:solidFill>
             <a:prstDash val="dash"/>
           </a:ln>
         </p:spPr>
       </p:sp>
       <p:sp>
         <p:nvSpPr>
-          <p:cNvPr id="39" name="Text 37"/>
+          <p:cNvPr id="36" name="Text 34"/>
           <p:cNvSpPr/>
           <p:nvPr/>
         </p:nvSpPr>
@@ -26048,7 +26877,7 @@
                 <a:ea typeface="Calibri" pitchFamily="34" charset="-122"/>
                 <a:cs typeface="Calibri" pitchFamily="34" charset="-120"/>
               </a:rPr>
-              <a:t>Word Labs  •  wordlabs.app  •  Root: 'teach' = to show or instruct others</a:t>
+              <a:t>Word Labs  •  wordlabs.app  •  Root: 'teach' = to show or instruct</a:t>
             </a:r>
             <a:endParaRPr lang="en-US" sz="800" dirty="0"/>
           </a:p>
@@ -26187,7 +27016,7 @@
                 <a:ea typeface="Trebuchet MS" pitchFamily="34" charset="-122"/>
                 <a:cs typeface="Trebuchet MS" pitchFamily="34" charset="-120"/>
               </a:rPr>
-              <a:t>reteaching</a:t>
+              <a:t>teachable</a:t>
             </a:r>
             <a:endParaRPr lang="en-US" sz="2800" dirty="0"/>
           </a:p>
@@ -26267,7 +27096,7 @@
         </p:nvSpPr>
         <p:spPr>
           <a:xfrm>
-            <a:off x="2221992" y="2258568"/>
+            <a:off x="2938272" y="2258568"/>
             <a:ext cx="1828800" cy="292608"/>
           </a:xfrm>
           <a:prstGeom prst="rect">
@@ -26276,11 +27105,11 @@
             </a:avLst>
           </a:prstGeom>
           <a:solidFill>
-            <a:srgbClr val="DDD6FE"/>
+            <a:srgbClr val="CCFBF1"/>
           </a:solidFill>
           <a:ln w="19050">
             <a:solidFill>
-              <a:srgbClr val="7C3AED"/>
+              <a:srgbClr val="0D9488"/>
             </a:solidFill>
             <a:prstDash val="solid"/>
           </a:ln>
@@ -26301,7 +27130,7 @@
         </p:nvSpPr>
         <p:spPr>
           <a:xfrm>
-            <a:off x="2221992" y="2258568"/>
+            <a:off x="2938272" y="2258568"/>
             <a:ext cx="1828800" cy="292608"/>
           </a:xfrm>
           <a:prstGeom prst="rect">
@@ -26320,13 +27149,13 @@
             <a:r>
               <a:rPr lang="en-US" sz="1300" b="1" dirty="0">
                 <a:solidFill>
-                  <a:srgbClr val="4C1D95"/>
+                  <a:srgbClr val="0F766E"/>
                 </a:solidFill>
                 <a:latin typeface="Trebuchet MS" pitchFamily="34" charset="0"/>
                 <a:ea typeface="Trebuchet MS" pitchFamily="34" charset="-122"/>
                 <a:cs typeface="Trebuchet MS" pitchFamily="34" charset="-120"/>
               </a:rPr>
-              <a:t>re</a:t>
+              <a:t>teach</a:t>
             </a:r>
             <a:endParaRPr lang="en-US" sz="1300" dirty="0"/>
           </a:p>
@@ -26340,7 +27169,7 @@
         </p:nvSpPr>
         <p:spPr>
           <a:xfrm>
-            <a:off x="2221992" y="2569464"/>
+            <a:off x="2938272" y="2569464"/>
             <a:ext cx="1828800" cy="201168"/>
           </a:xfrm>
           <a:prstGeom prst="rect">
@@ -26365,7 +27194,7 @@
                 <a:ea typeface="Calibri" pitchFamily="34" charset="-122"/>
                 <a:cs typeface="Calibri" pitchFamily="34" charset="-120"/>
               </a:rPr>
-              <a:t>again</a:t>
+              <a:t>to show or instruct</a:t>
             </a:r>
             <a:endParaRPr lang="en-US" sz="850" dirty="0"/>
           </a:p>
@@ -26379,7 +27208,7 @@
         </p:nvSpPr>
         <p:spPr>
           <a:xfrm>
-            <a:off x="4370832" y="2258568"/>
+            <a:off x="5803392" y="2258568"/>
             <a:ext cx="1828800" cy="292608"/>
           </a:xfrm>
           <a:prstGeom prst="rect">
@@ -26388,11 +27217,11 @@
             </a:avLst>
           </a:prstGeom>
           <a:solidFill>
-            <a:srgbClr val="CCFBF1"/>
+            <a:srgbClr val="FCE7F3"/>
           </a:solidFill>
           <a:ln w="19050">
             <a:solidFill>
-              <a:srgbClr val="0D9488"/>
+              <a:srgbClr val="DB2777"/>
             </a:solidFill>
             <a:prstDash val="solid"/>
           </a:ln>
@@ -26413,7 +27242,7 @@
         </p:nvSpPr>
         <p:spPr>
           <a:xfrm>
-            <a:off x="4370832" y="2258568"/>
+            <a:off x="5803392" y="2258568"/>
             <a:ext cx="1828800" cy="292608"/>
           </a:xfrm>
           <a:prstGeom prst="rect">
@@ -26432,13 +27261,13 @@
             <a:r>
               <a:rPr lang="en-US" sz="1300" b="1" dirty="0">
                 <a:solidFill>
-                  <a:srgbClr val="0F766E"/>
+                  <a:srgbClr val="9D174D"/>
                 </a:solidFill>
                 <a:latin typeface="Trebuchet MS" pitchFamily="34" charset="0"/>
                 <a:ea typeface="Trebuchet MS" pitchFamily="34" charset="-122"/>
                 <a:cs typeface="Trebuchet MS" pitchFamily="34" charset="-120"/>
               </a:rPr>
-              <a:t>teach</a:t>
+              <a:t>able</a:t>
             </a:r>
             <a:endParaRPr lang="en-US" sz="1300" dirty="0"/>
           </a:p>
@@ -26452,7 +27281,7 @@
         </p:nvSpPr>
         <p:spPr>
           <a:xfrm>
-            <a:off x="4370832" y="2569464"/>
+            <a:off x="5803392" y="2569464"/>
             <a:ext cx="1828800" cy="201168"/>
           </a:xfrm>
           <a:prstGeom prst="rect">
@@ -26477,7 +27306,7 @@
                 <a:ea typeface="Calibri" pitchFamily="34" charset="-122"/>
                 <a:cs typeface="Calibri" pitchFamily="34" charset="-120"/>
               </a:rPr>
-              <a:t>to instruct or show</a:t>
+              <a:t>able to be; capable of</a:t>
             </a:r>
             <a:endParaRPr lang="en-US" sz="850" dirty="0"/>
           </a:p>
@@ -26491,30 +27320,23 @@
         </p:nvSpPr>
         <p:spPr>
           <a:xfrm>
-            <a:off x="6519672" y="2258568"/>
-            <a:ext cx="1828800" cy="292608"/>
+            <a:off x="365760" y="3273552"/>
+            <a:ext cx="1371600" cy="658368"/>
           </a:xfrm>
           <a:prstGeom prst="rect">
             <a:avLst>
-              <a:gd name="adj" fmla="val 25000"/>
+              <a:gd name="adj" fmla="val 8333"/>
             </a:avLst>
           </a:prstGeom>
           <a:solidFill>
-            <a:srgbClr val="FCE7F3"/>
-          </a:solidFill>
-          <a:ln w="19050">
-            <a:solidFill>
-              <a:srgbClr val="DB2777"/>
-            </a:solidFill>
-            <a:prstDash val="solid"/>
-          </a:ln>
-          <a:effectLst>
-            <a:outerShdw sx="100000" sy="100000" kx="0" ky="0" algn="bl" rotWithShape="0" blurRad="101600" dist="38100" dir="8100000">
-              <a:srgbClr val="000000">
-                <a:alpha val="12000"/>
-              </a:srgbClr>
-            </a:outerShdw>
-          </a:effectLst>
+            <a:srgbClr val="E2E8F0"/>
+          </a:solidFill>
+          <a:ln w="12700">
+            <a:solidFill>
+              <a:srgbClr val="E2E8F0"/>
+            </a:solidFill>
+            <a:prstDash val="solid"/>
+          </a:ln>
         </p:spPr>
       </p:sp>
       <p:sp>
@@ -26525,86 +27347,47 @@
         </p:nvSpPr>
         <p:spPr>
           <a:xfrm>
-            <a:off x="6519672" y="2258568"/>
-            <a:ext cx="1828800" cy="292608"/>
-          </a:xfrm>
-          <a:prstGeom prst="rect">
-            <a:avLst/>
-          </a:prstGeom>
-          <a:noFill/>
-          <a:ln/>
-        </p:spPr>
-        <p:txBody>
-          <a:bodyPr wrap="square" lIns="0" tIns="0" rIns="0" bIns="0" rtlCol="0" anchor="ctr"/>
-          <a:lstStyle/>
-          <a:p>
-            <a:pPr algn="ctr" indent="0" marL="0">
-              <a:buNone/>
-            </a:pPr>
-            <a:r>
-              <a:rPr lang="en-US" sz="1300" b="1" dirty="0">
-                <a:solidFill>
-                  <a:srgbClr val="9D174D"/>
+            <a:off x="365760" y="3273552"/>
+            <a:ext cx="1371600" cy="658368"/>
+          </a:xfrm>
+          <a:prstGeom prst="rect">
+            <a:avLst/>
+          </a:prstGeom>
+          <a:noFill/>
+          <a:ln/>
+        </p:spPr>
+        <p:txBody>
+          <a:bodyPr wrap="square" lIns="0" tIns="0" rIns="0" bIns="0" rtlCol="0" anchor="ctr"/>
+          <a:lstStyle/>
+          <a:p>
+            <a:pPr algn="ctr" indent="0" marL="0">
+              <a:buNone/>
+            </a:pPr>
+            <a:r>
+              <a:rPr lang="en-US" sz="1100" b="1" dirty="0">
+                <a:solidFill>
+                  <a:srgbClr val="475569"/>
                 </a:solidFill>
                 <a:latin typeface="Trebuchet MS" pitchFamily="34" charset="0"/>
                 <a:ea typeface="Trebuchet MS" pitchFamily="34" charset="-122"/>
                 <a:cs typeface="Trebuchet MS" pitchFamily="34" charset="-120"/>
               </a:rPr>
-              <a:t>ing</a:t>
-            </a:r>
-            <a:endParaRPr lang="en-US" sz="1300" dirty="0"/>
-          </a:p>
-        </p:txBody>
-      </p:sp>
-      <p:sp>
-        <p:nvSpPr>
-          <p:cNvPr id="24" name="Text 22"/>
-          <p:cNvSpPr/>
-          <p:nvPr/>
-        </p:nvSpPr>
-        <p:spPr>
-          <a:xfrm>
-            <a:off x="6519672" y="2569464"/>
-            <a:ext cx="1828800" cy="201168"/>
-          </a:xfrm>
-          <a:prstGeom prst="rect">
-            <a:avLst/>
-          </a:prstGeom>
-          <a:noFill/>
-          <a:ln/>
-        </p:spPr>
-        <p:txBody>
-          <a:bodyPr wrap="square" lIns="0" tIns="0" rIns="0" bIns="0" rtlCol="0" anchor="t"/>
-          <a:lstStyle/>
-          <a:p>
-            <a:pPr algn="ctr" indent="0" marL="0">
-              <a:buNone/>
-            </a:pPr>
-            <a:r>
-              <a:rPr lang="en-US" sz="850" dirty="0">
-                <a:solidFill>
-                  <a:srgbClr val="475569"/>
-                </a:solidFill>
-                <a:latin typeface="Calibri" pitchFamily="34" charset="0"/>
-                <a:ea typeface="Calibri" pitchFamily="34" charset="-122"/>
-                <a:cs typeface="Calibri" pitchFamily="34" charset="-120"/>
-              </a:rPr>
-              <a:t>action or process</a:t>
-            </a:r>
-            <a:endParaRPr lang="en-US" sz="850" dirty="0"/>
-          </a:p>
-        </p:txBody>
-      </p:sp>
-      <p:sp>
-        <p:nvSpPr>
-          <p:cNvPr id="25" name="Shape 23"/>
-          <p:cNvSpPr/>
-          <p:nvPr/>
-        </p:nvSpPr>
-        <p:spPr>
-          <a:xfrm>
-            <a:off x="365760" y="3273552"/>
-            <a:ext cx="1371600" cy="658368"/>
+              <a:t>Syllables</a:t>
+            </a:r>
+            <a:endParaRPr lang="en-US" sz="1100" dirty="0"/>
+          </a:p>
+        </p:txBody>
+      </p:sp>
+      <p:sp>
+        <p:nvSpPr>
+          <p:cNvPr id="24" name="Shape 22"/>
+          <p:cNvSpPr/>
+          <p:nvPr/>
+        </p:nvSpPr>
+        <p:spPr>
+          <a:xfrm>
+            <a:off x="1874520" y="3273552"/>
+            <a:ext cx="6903720" cy="658368"/>
           </a:xfrm>
           <a:prstGeom prst="rect">
             <a:avLst>
@@ -26612,11 +27395,38 @@
             </a:avLst>
           </a:prstGeom>
           <a:solidFill>
-            <a:srgbClr val="E2E8F0"/>
-          </a:solidFill>
-          <a:ln w="12700">
-            <a:solidFill>
-              <a:srgbClr val="E2E8F0"/>
+            <a:srgbClr val="CCFBF1"/>
+          </a:solidFill>
+          <a:ln w="12700">
+            <a:solidFill>
+              <a:srgbClr val="0D9488"/>
+            </a:solidFill>
+            <a:prstDash val="solid"/>
+          </a:ln>
+        </p:spPr>
+      </p:sp>
+      <p:sp>
+        <p:nvSpPr>
+          <p:cNvPr id="25" name="Shape 23"/>
+          <p:cNvSpPr/>
+          <p:nvPr/>
+        </p:nvSpPr>
+        <p:spPr>
+          <a:xfrm>
+            <a:off x="2313432" y="3364992"/>
+            <a:ext cx="1645920" cy="475488"/>
+          </a:xfrm>
+          <a:prstGeom prst="rect">
+            <a:avLst>
+              <a:gd name="adj" fmla="val 9615"/>
+            </a:avLst>
+          </a:prstGeom>
+          <a:solidFill>
+            <a:srgbClr val="FFFFFF"/>
+          </a:solidFill>
+          <a:ln w="12700">
+            <a:solidFill>
+              <a:srgbClr val="0D9488"/>
             </a:solidFill>
             <a:prstDash val="solid"/>
           </a:ln>
@@ -26630,32 +27440,308 @@
         </p:nvSpPr>
         <p:spPr>
           <a:xfrm>
-            <a:off x="365760" y="3273552"/>
-            <a:ext cx="1371600" cy="658368"/>
-          </a:xfrm>
-          <a:prstGeom prst="rect">
-            <a:avLst/>
-          </a:prstGeom>
-          <a:noFill/>
-          <a:ln/>
-        </p:spPr>
-        <p:txBody>
-          <a:bodyPr wrap="square" lIns="0" tIns="0" rIns="0" bIns="0" rtlCol="0" anchor="ctr"/>
-          <a:lstStyle/>
-          <a:p>
-            <a:pPr algn="ctr" indent="0" marL="0">
-              <a:buNone/>
-            </a:pPr>
-            <a:r>
-              <a:rPr lang="en-US" sz="1100" b="1" dirty="0">
-                <a:solidFill>
-                  <a:srgbClr val="475569"/>
+            <a:off x="2313432" y="3364992"/>
+            <a:ext cx="1645920" cy="475488"/>
+          </a:xfrm>
+          <a:prstGeom prst="rect">
+            <a:avLst/>
+          </a:prstGeom>
+          <a:noFill/>
+          <a:ln/>
+        </p:spPr>
+        <p:txBody>
+          <a:bodyPr wrap="square" lIns="0" tIns="0" rIns="0" bIns="0" rtlCol="0" anchor="ctr"/>
+          <a:lstStyle/>
+          <a:p>
+            <a:pPr algn="ctr" indent="0" marL="0">
+              <a:buNone/>
+            </a:pPr>
+            <a:r>
+              <a:rPr lang="en-US" sz="1400" b="1" dirty="0">
+                <a:solidFill>
+                  <a:srgbClr val="0D9488"/>
                 </a:solidFill>
                 <a:latin typeface="Trebuchet MS" pitchFamily="34" charset="0"/>
                 <a:ea typeface="Trebuchet MS" pitchFamily="34" charset="-122"/>
                 <a:cs typeface="Trebuchet MS" pitchFamily="34" charset="-120"/>
               </a:rPr>
-              <a:t>Syllables</a:t>
+              <a:t>teach</a:t>
+            </a:r>
+            <a:endParaRPr lang="en-US" sz="1400" dirty="0"/>
+          </a:p>
+        </p:txBody>
+      </p:sp>
+      <p:sp>
+        <p:nvSpPr>
+          <p:cNvPr id="27" name="Text 25"/>
+          <p:cNvSpPr/>
+          <p:nvPr/>
+        </p:nvSpPr>
+        <p:spPr>
+          <a:xfrm>
+            <a:off x="3959352" y="3364992"/>
+            <a:ext cx="411480" cy="475488"/>
+          </a:xfrm>
+          <a:prstGeom prst="rect">
+            <a:avLst/>
+          </a:prstGeom>
+          <a:noFill/>
+          <a:ln/>
+        </p:spPr>
+        <p:txBody>
+          <a:bodyPr wrap="square" lIns="0" tIns="0" rIns="0" bIns="0" rtlCol="0" anchor="ctr"/>
+          <a:lstStyle/>
+          <a:p>
+            <a:pPr algn="ctr" indent="0" marL="0">
+              <a:buNone/>
+            </a:pPr>
+            <a:r>
+              <a:rPr lang="en-US" sz="1600" b="1" dirty="0">
+                <a:solidFill>
+                  <a:srgbClr val="0D9488"/>
+                </a:solidFill>
+                <a:latin typeface="Trebuchet MS" pitchFamily="34" charset="0"/>
+                <a:ea typeface="Trebuchet MS" pitchFamily="34" charset="-122"/>
+                <a:cs typeface="Trebuchet MS" pitchFamily="34" charset="-120"/>
+              </a:rPr>
+              <a:t>·</a:t>
+            </a:r>
+            <a:endParaRPr lang="en-US" sz="1600" dirty="0"/>
+          </a:p>
+        </p:txBody>
+      </p:sp>
+      <p:sp>
+        <p:nvSpPr>
+          <p:cNvPr id="28" name="Shape 26"/>
+          <p:cNvSpPr/>
+          <p:nvPr/>
+        </p:nvSpPr>
+        <p:spPr>
+          <a:xfrm>
+            <a:off x="4370832" y="3364992"/>
+            <a:ext cx="1645920" cy="475488"/>
+          </a:xfrm>
+          <a:prstGeom prst="rect">
+            <a:avLst>
+              <a:gd name="adj" fmla="val 9615"/>
+            </a:avLst>
+          </a:prstGeom>
+          <a:solidFill>
+            <a:srgbClr val="FFFFFF"/>
+          </a:solidFill>
+          <a:ln w="12700">
+            <a:solidFill>
+              <a:srgbClr val="0D9488"/>
+            </a:solidFill>
+            <a:prstDash val="solid"/>
+          </a:ln>
+        </p:spPr>
+      </p:sp>
+      <p:sp>
+        <p:nvSpPr>
+          <p:cNvPr id="29" name="Text 27"/>
+          <p:cNvSpPr/>
+          <p:nvPr/>
+        </p:nvSpPr>
+        <p:spPr>
+          <a:xfrm>
+            <a:off x="4370832" y="3364992"/>
+            <a:ext cx="1645920" cy="475488"/>
+          </a:xfrm>
+          <a:prstGeom prst="rect">
+            <a:avLst/>
+          </a:prstGeom>
+          <a:noFill/>
+          <a:ln/>
+        </p:spPr>
+        <p:txBody>
+          <a:bodyPr wrap="square" lIns="0" tIns="0" rIns="0" bIns="0" rtlCol="0" anchor="ctr"/>
+          <a:lstStyle/>
+          <a:p>
+            <a:pPr algn="ctr" indent="0" marL="0">
+              <a:buNone/>
+            </a:pPr>
+            <a:r>
+              <a:rPr lang="en-US" sz="1400" b="1" dirty="0">
+                <a:solidFill>
+                  <a:srgbClr val="0D9488"/>
+                </a:solidFill>
+                <a:latin typeface="Trebuchet MS" pitchFamily="34" charset="0"/>
+                <a:ea typeface="Trebuchet MS" pitchFamily="34" charset="-122"/>
+                <a:cs typeface="Trebuchet MS" pitchFamily="34" charset="-120"/>
+              </a:rPr>
+              <a:t>a</a:t>
+            </a:r>
+            <a:endParaRPr lang="en-US" sz="1400" dirty="0"/>
+          </a:p>
+        </p:txBody>
+      </p:sp>
+      <p:sp>
+        <p:nvSpPr>
+          <p:cNvPr id="30" name="Text 28"/>
+          <p:cNvSpPr/>
+          <p:nvPr/>
+        </p:nvSpPr>
+        <p:spPr>
+          <a:xfrm>
+            <a:off x="6016752" y="3364992"/>
+            <a:ext cx="411480" cy="475488"/>
+          </a:xfrm>
+          <a:prstGeom prst="rect">
+            <a:avLst/>
+          </a:prstGeom>
+          <a:noFill/>
+          <a:ln/>
+        </p:spPr>
+        <p:txBody>
+          <a:bodyPr wrap="square" lIns="0" tIns="0" rIns="0" bIns="0" rtlCol="0" anchor="ctr"/>
+          <a:lstStyle/>
+          <a:p>
+            <a:pPr algn="ctr" indent="0" marL="0">
+              <a:buNone/>
+            </a:pPr>
+            <a:r>
+              <a:rPr lang="en-US" sz="1600" b="1" dirty="0">
+                <a:solidFill>
+                  <a:srgbClr val="0D9488"/>
+                </a:solidFill>
+                <a:latin typeface="Trebuchet MS" pitchFamily="34" charset="0"/>
+                <a:ea typeface="Trebuchet MS" pitchFamily="34" charset="-122"/>
+                <a:cs typeface="Trebuchet MS" pitchFamily="34" charset="-120"/>
+              </a:rPr>
+              <a:t>·</a:t>
+            </a:r>
+            <a:endParaRPr lang="en-US" sz="1600" dirty="0"/>
+          </a:p>
+        </p:txBody>
+      </p:sp>
+      <p:sp>
+        <p:nvSpPr>
+          <p:cNvPr id="31" name="Shape 29"/>
+          <p:cNvSpPr/>
+          <p:nvPr/>
+        </p:nvSpPr>
+        <p:spPr>
+          <a:xfrm>
+            <a:off x="6428232" y="3364992"/>
+            <a:ext cx="1645920" cy="475488"/>
+          </a:xfrm>
+          <a:prstGeom prst="rect">
+            <a:avLst>
+              <a:gd name="adj" fmla="val 9615"/>
+            </a:avLst>
+          </a:prstGeom>
+          <a:solidFill>
+            <a:srgbClr val="FFFFFF"/>
+          </a:solidFill>
+          <a:ln w="12700">
+            <a:solidFill>
+              <a:srgbClr val="0D9488"/>
+            </a:solidFill>
+            <a:prstDash val="solid"/>
+          </a:ln>
+        </p:spPr>
+      </p:sp>
+      <p:sp>
+        <p:nvSpPr>
+          <p:cNvPr id="32" name="Text 30"/>
+          <p:cNvSpPr/>
+          <p:nvPr/>
+        </p:nvSpPr>
+        <p:spPr>
+          <a:xfrm>
+            <a:off x="6428232" y="3364992"/>
+            <a:ext cx="1645920" cy="475488"/>
+          </a:xfrm>
+          <a:prstGeom prst="rect">
+            <a:avLst/>
+          </a:prstGeom>
+          <a:noFill/>
+          <a:ln/>
+        </p:spPr>
+        <p:txBody>
+          <a:bodyPr wrap="square" lIns="0" tIns="0" rIns="0" bIns="0" rtlCol="0" anchor="ctr"/>
+          <a:lstStyle/>
+          <a:p>
+            <a:pPr algn="ctr" indent="0" marL="0">
+              <a:buNone/>
+            </a:pPr>
+            <a:r>
+              <a:rPr lang="en-US" sz="1400" b="1" dirty="0">
+                <a:solidFill>
+                  <a:srgbClr val="0D9488"/>
+                </a:solidFill>
+                <a:latin typeface="Trebuchet MS" pitchFamily="34" charset="0"/>
+                <a:ea typeface="Trebuchet MS" pitchFamily="34" charset="-122"/>
+                <a:cs typeface="Trebuchet MS" pitchFamily="34" charset="-120"/>
+              </a:rPr>
+              <a:t>ble</a:t>
+            </a:r>
+            <a:endParaRPr lang="en-US" sz="1400" dirty="0"/>
+          </a:p>
+        </p:txBody>
+      </p:sp>
+      <p:sp>
+        <p:nvSpPr>
+          <p:cNvPr id="33" name="Shape 31"/>
+          <p:cNvSpPr/>
+          <p:nvPr/>
+        </p:nvSpPr>
+        <p:spPr>
+          <a:xfrm>
+            <a:off x="365760" y="4096512"/>
+            <a:ext cx="1371600" cy="804672"/>
+          </a:xfrm>
+          <a:prstGeom prst="rect">
+            <a:avLst>
+              <a:gd name="adj" fmla="val 6818"/>
+            </a:avLst>
+          </a:prstGeom>
+          <a:solidFill>
+            <a:srgbClr val="E2E8F0"/>
+          </a:solidFill>
+          <a:ln w="12700">
+            <a:solidFill>
+              <a:srgbClr val="E2E8F0"/>
+            </a:solidFill>
+            <a:prstDash val="solid"/>
+          </a:ln>
+        </p:spPr>
+      </p:sp>
+      <p:sp>
+        <p:nvSpPr>
+          <p:cNvPr id="34" name="Text 32"/>
+          <p:cNvSpPr/>
+          <p:nvPr/>
+        </p:nvSpPr>
+        <p:spPr>
+          <a:xfrm>
+            <a:off x="365760" y="4096512"/>
+            <a:ext cx="1371600" cy="804672"/>
+          </a:xfrm>
+          <a:prstGeom prst="rect">
+            <a:avLst/>
+          </a:prstGeom>
+          <a:noFill/>
+          <a:ln/>
+        </p:spPr>
+        <p:txBody>
+          <a:bodyPr wrap="square" lIns="0" tIns="0" rIns="0" bIns="0" rtlCol="0" anchor="ctr"/>
+          <a:lstStyle/>
+          <a:p>
+            <a:pPr algn="ctr" indent="0" marL="0">
+              <a:buNone/>
+            </a:pPr>
+            <a:r>
+              <a:rPr lang="en-US" sz="1100" b="1" dirty="0">
+                <a:solidFill>
+                  <a:srgbClr val="475569"/>
+                </a:solidFill>
+                <a:latin typeface="Trebuchet MS" pitchFamily="34" charset="0"/>
+                <a:ea typeface="Trebuchet MS" pitchFamily="34" charset="-122"/>
+                <a:cs typeface="Trebuchet MS" pitchFamily="34" charset="-120"/>
+              </a:rPr>
+              <a:t>Phonemes</a:t>
             </a:r>
             <a:endParaRPr lang="en-US" sz="1100" dirty="0"/>
           </a:p>
@@ -26663,13 +27749,13 @@
       </p:sp>
       <p:sp>
         <p:nvSpPr>
-          <p:cNvPr id="27" name="Shape 25"/>
-          <p:cNvSpPr/>
-          <p:nvPr/>
-        </p:nvSpPr>
-        <p:spPr>
-          <a:xfrm>
-            <a:off x="1874520" y="3273552"/>
+          <p:cNvPr id="35" name="Shape 33"/>
+          <p:cNvSpPr/>
+          <p:nvPr/>
+        </p:nvSpPr>
+        <p:spPr>
+          <a:xfrm>
+            <a:off x="1874520" y="4096512"/>
             <a:ext cx="6903720" cy="658368"/>
           </a:xfrm>
           <a:prstGeom prst="rect">
@@ -26678,30 +27764,30 @@
             </a:avLst>
           </a:prstGeom>
           <a:solidFill>
-            <a:srgbClr val="CCFBF1"/>
-          </a:solidFill>
-          <a:ln w="12700">
-            <a:solidFill>
-              <a:srgbClr val="0D9488"/>
-            </a:solidFill>
-            <a:prstDash val="solid"/>
-          </a:ln>
-        </p:spPr>
-      </p:sp>
-      <p:sp>
-        <p:nvSpPr>
-          <p:cNvPr id="28" name="Shape 26"/>
-          <p:cNvSpPr/>
-          <p:nvPr/>
-        </p:nvSpPr>
-        <p:spPr>
-          <a:xfrm>
-            <a:off x="2313432" y="3364992"/>
-            <a:ext cx="1645920" cy="475488"/>
+            <a:srgbClr val="FCE7F3"/>
+          </a:solidFill>
+          <a:ln w="12700">
+            <a:solidFill>
+              <a:srgbClr val="DB2777"/>
+            </a:solidFill>
+            <a:prstDash val="solid"/>
+          </a:ln>
+        </p:spPr>
+      </p:sp>
+      <p:sp>
+        <p:nvSpPr>
+          <p:cNvPr id="36" name="Shape 34"/>
+          <p:cNvSpPr/>
+          <p:nvPr/>
+        </p:nvSpPr>
+        <p:spPr>
+          <a:xfrm>
+            <a:off x="2254649" y="4169664"/>
+            <a:ext cx="685800" cy="475488"/>
           </a:xfrm>
           <a:prstGeom prst="rect">
             <a:avLst>
-              <a:gd name="adj" fmla="val 9615"/>
+              <a:gd name="adj" fmla="val 7692"/>
             </a:avLst>
           </a:prstGeom>
           <a:solidFill>
@@ -26709,104 +27795,131 @@
           </a:solidFill>
           <a:ln w="12700">
             <a:solidFill>
-              <a:srgbClr val="0D9488"/>
-            </a:solidFill>
-            <a:prstDash val="solid"/>
-          </a:ln>
-        </p:spPr>
-      </p:sp>
-      <p:sp>
-        <p:nvSpPr>
-          <p:cNvPr id="29" name="Text 27"/>
-          <p:cNvSpPr/>
-          <p:nvPr/>
-        </p:nvSpPr>
-        <p:spPr>
-          <a:xfrm>
-            <a:off x="2313432" y="3364992"/>
-            <a:ext cx="1645920" cy="475488"/>
-          </a:xfrm>
-          <a:prstGeom prst="rect">
-            <a:avLst/>
-          </a:prstGeom>
-          <a:noFill/>
-          <a:ln/>
-        </p:spPr>
-        <p:txBody>
-          <a:bodyPr wrap="square" lIns="0" tIns="0" rIns="0" bIns="0" rtlCol="0" anchor="ctr"/>
-          <a:lstStyle/>
-          <a:p>
-            <a:pPr algn="ctr" indent="0" marL="0">
-              <a:buNone/>
-            </a:pPr>
-            <a:r>
-              <a:rPr lang="en-US" sz="1400" b="1" dirty="0">
-                <a:solidFill>
-                  <a:srgbClr val="0D9488"/>
+              <a:srgbClr val="DB2777"/>
+            </a:solidFill>
+            <a:prstDash val="solid"/>
+          </a:ln>
+        </p:spPr>
+      </p:sp>
+      <p:sp>
+        <p:nvSpPr>
+          <p:cNvPr id="37" name="Text 35"/>
+          <p:cNvSpPr/>
+          <p:nvPr/>
+        </p:nvSpPr>
+        <p:spPr>
+          <a:xfrm>
+            <a:off x="2254649" y="4169664"/>
+            <a:ext cx="685800" cy="475488"/>
+          </a:xfrm>
+          <a:prstGeom prst="rect">
+            <a:avLst/>
+          </a:prstGeom>
+          <a:noFill/>
+          <a:ln/>
+        </p:spPr>
+        <p:txBody>
+          <a:bodyPr wrap="square" lIns="0" tIns="0" rIns="0" bIns="0" rtlCol="0" anchor="ctr"/>
+          <a:lstStyle/>
+          <a:p>
+            <a:pPr algn="ctr" indent="0" marL="0">
+              <a:buNone/>
+            </a:pPr>
+            <a:r>
+              <a:rPr lang="en-US" sz="900" b="1" dirty="0">
+                <a:solidFill>
+                  <a:srgbClr val="9D174D"/>
                 </a:solidFill>
                 <a:latin typeface="Trebuchet MS" pitchFamily="34" charset="0"/>
                 <a:ea typeface="Trebuchet MS" pitchFamily="34" charset="-122"/>
                 <a:cs typeface="Trebuchet MS" pitchFamily="34" charset="-120"/>
               </a:rPr>
-              <a:t>re</a:t>
-            </a:r>
-            <a:endParaRPr lang="en-US" sz="1400" dirty="0"/>
-          </a:p>
-        </p:txBody>
-      </p:sp>
-      <p:sp>
-        <p:nvSpPr>
-          <p:cNvPr id="30" name="Text 28"/>
-          <p:cNvSpPr/>
-          <p:nvPr/>
-        </p:nvSpPr>
-        <p:spPr>
-          <a:xfrm>
-            <a:off x="3959352" y="3364992"/>
-            <a:ext cx="411480" cy="475488"/>
-          </a:xfrm>
-          <a:prstGeom prst="rect">
-            <a:avLst/>
-          </a:prstGeom>
-          <a:noFill/>
-          <a:ln/>
-        </p:spPr>
-        <p:txBody>
-          <a:bodyPr wrap="square" lIns="0" tIns="0" rIns="0" bIns="0" rtlCol="0" anchor="ctr"/>
-          <a:lstStyle/>
-          <a:p>
-            <a:pPr algn="ctr" indent="0" marL="0">
-              <a:buNone/>
-            </a:pPr>
-            <a:r>
-              <a:rPr lang="en-US" sz="1600" b="1" dirty="0">
-                <a:solidFill>
-                  <a:srgbClr val="0D9488"/>
+              <a:t>t</a:t>
+            </a:r>
+            <a:endParaRPr lang="en-US" sz="900" dirty="0"/>
+          </a:p>
+        </p:txBody>
+      </p:sp>
+      <p:sp>
+        <p:nvSpPr>
+          <p:cNvPr id="38" name="Shape 36"/>
+          <p:cNvSpPr/>
+          <p:nvPr/>
+        </p:nvSpPr>
+        <p:spPr>
+          <a:xfrm>
+            <a:off x="3293146" y="4169664"/>
+            <a:ext cx="685800" cy="475488"/>
+          </a:xfrm>
+          <a:prstGeom prst="rect">
+            <a:avLst>
+              <a:gd name="adj" fmla="val 7692"/>
+            </a:avLst>
+          </a:prstGeom>
+          <a:solidFill>
+            <a:srgbClr val="FFFFFF"/>
+          </a:solidFill>
+          <a:ln w="12700">
+            <a:solidFill>
+              <a:srgbClr val="DB2777"/>
+            </a:solidFill>
+            <a:prstDash val="solid"/>
+          </a:ln>
+        </p:spPr>
+      </p:sp>
+      <p:sp>
+        <p:nvSpPr>
+          <p:cNvPr id="39" name="Text 37"/>
+          <p:cNvSpPr/>
+          <p:nvPr/>
+        </p:nvSpPr>
+        <p:spPr>
+          <a:xfrm>
+            <a:off x="3293146" y="4169664"/>
+            <a:ext cx="685800" cy="475488"/>
+          </a:xfrm>
+          <a:prstGeom prst="rect">
+            <a:avLst/>
+          </a:prstGeom>
+          <a:noFill/>
+          <a:ln/>
+        </p:spPr>
+        <p:txBody>
+          <a:bodyPr wrap="square" lIns="0" tIns="0" rIns="0" bIns="0" rtlCol="0" anchor="ctr"/>
+          <a:lstStyle/>
+          <a:p>
+            <a:pPr algn="ctr" indent="0" marL="0">
+              <a:buNone/>
+            </a:pPr>
+            <a:r>
+              <a:rPr lang="en-US" sz="900" b="1" dirty="0">
+                <a:solidFill>
+                  <a:srgbClr val="9D174D"/>
                 </a:solidFill>
                 <a:latin typeface="Trebuchet MS" pitchFamily="34" charset="0"/>
                 <a:ea typeface="Trebuchet MS" pitchFamily="34" charset="-122"/>
                 <a:cs typeface="Trebuchet MS" pitchFamily="34" charset="-120"/>
               </a:rPr>
-              <a:t>·</a:t>
-            </a:r>
-            <a:endParaRPr lang="en-US" sz="1600" dirty="0"/>
-          </a:p>
-        </p:txBody>
-      </p:sp>
-      <p:sp>
-        <p:nvSpPr>
-          <p:cNvPr id="31" name="Shape 29"/>
-          <p:cNvSpPr/>
-          <p:nvPr/>
-        </p:nvSpPr>
-        <p:spPr>
-          <a:xfrm>
-            <a:off x="4370832" y="3364992"/>
-            <a:ext cx="1645920" cy="475488"/>
+              <a:t>ea</a:t>
+            </a:r>
+            <a:endParaRPr lang="en-US" sz="900" dirty="0"/>
+          </a:p>
+        </p:txBody>
+      </p:sp>
+      <p:sp>
+        <p:nvSpPr>
+          <p:cNvPr id="40" name="Shape 38"/>
+          <p:cNvSpPr/>
+          <p:nvPr/>
+        </p:nvSpPr>
+        <p:spPr>
+          <a:xfrm>
+            <a:off x="4331643" y="4169664"/>
+            <a:ext cx="685800" cy="475488"/>
           </a:xfrm>
           <a:prstGeom prst="rect">
             <a:avLst>
-              <a:gd name="adj" fmla="val 9615"/>
+              <a:gd name="adj" fmla="val 7692"/>
             </a:avLst>
           </a:prstGeom>
           <a:solidFill>
@@ -26814,104 +27927,131 @@
           </a:solidFill>
           <a:ln w="12700">
             <a:solidFill>
-              <a:srgbClr val="0D9488"/>
-            </a:solidFill>
-            <a:prstDash val="solid"/>
-          </a:ln>
-        </p:spPr>
-      </p:sp>
-      <p:sp>
-        <p:nvSpPr>
-          <p:cNvPr id="32" name="Text 30"/>
-          <p:cNvSpPr/>
-          <p:nvPr/>
-        </p:nvSpPr>
-        <p:spPr>
-          <a:xfrm>
-            <a:off x="4370832" y="3364992"/>
-            <a:ext cx="1645920" cy="475488"/>
-          </a:xfrm>
-          <a:prstGeom prst="rect">
-            <a:avLst/>
-          </a:prstGeom>
-          <a:noFill/>
-          <a:ln/>
-        </p:spPr>
-        <p:txBody>
-          <a:bodyPr wrap="square" lIns="0" tIns="0" rIns="0" bIns="0" rtlCol="0" anchor="ctr"/>
-          <a:lstStyle/>
-          <a:p>
-            <a:pPr algn="ctr" indent="0" marL="0">
-              <a:buNone/>
-            </a:pPr>
-            <a:r>
-              <a:rPr lang="en-US" sz="1400" b="1" dirty="0">
-                <a:solidFill>
-                  <a:srgbClr val="0D9488"/>
+              <a:srgbClr val="DB2777"/>
+            </a:solidFill>
+            <a:prstDash val="solid"/>
+          </a:ln>
+        </p:spPr>
+      </p:sp>
+      <p:sp>
+        <p:nvSpPr>
+          <p:cNvPr id="41" name="Text 39"/>
+          <p:cNvSpPr/>
+          <p:nvPr/>
+        </p:nvSpPr>
+        <p:spPr>
+          <a:xfrm>
+            <a:off x="4331643" y="4169664"/>
+            <a:ext cx="685800" cy="475488"/>
+          </a:xfrm>
+          <a:prstGeom prst="rect">
+            <a:avLst/>
+          </a:prstGeom>
+          <a:noFill/>
+          <a:ln/>
+        </p:spPr>
+        <p:txBody>
+          <a:bodyPr wrap="square" lIns="0" tIns="0" rIns="0" bIns="0" rtlCol="0" anchor="ctr"/>
+          <a:lstStyle/>
+          <a:p>
+            <a:pPr algn="ctr" indent="0" marL="0">
+              <a:buNone/>
+            </a:pPr>
+            <a:r>
+              <a:rPr lang="en-US" sz="900" b="1" dirty="0">
+                <a:solidFill>
+                  <a:srgbClr val="9D174D"/>
                 </a:solidFill>
                 <a:latin typeface="Trebuchet MS" pitchFamily="34" charset="0"/>
                 <a:ea typeface="Trebuchet MS" pitchFamily="34" charset="-122"/>
                 <a:cs typeface="Trebuchet MS" pitchFamily="34" charset="-120"/>
               </a:rPr>
-              <a:t>teach</a:t>
-            </a:r>
-            <a:endParaRPr lang="en-US" sz="1400" dirty="0"/>
-          </a:p>
-        </p:txBody>
-      </p:sp>
-      <p:sp>
-        <p:nvSpPr>
-          <p:cNvPr id="33" name="Text 31"/>
-          <p:cNvSpPr/>
-          <p:nvPr/>
-        </p:nvSpPr>
-        <p:spPr>
-          <a:xfrm>
-            <a:off x="6016752" y="3364992"/>
-            <a:ext cx="411480" cy="475488"/>
-          </a:xfrm>
-          <a:prstGeom prst="rect">
-            <a:avLst/>
-          </a:prstGeom>
-          <a:noFill/>
-          <a:ln/>
-        </p:spPr>
-        <p:txBody>
-          <a:bodyPr wrap="square" lIns="0" tIns="0" rIns="0" bIns="0" rtlCol="0" anchor="ctr"/>
-          <a:lstStyle/>
-          <a:p>
-            <a:pPr algn="ctr" indent="0" marL="0">
-              <a:buNone/>
-            </a:pPr>
-            <a:r>
-              <a:rPr lang="en-US" sz="1600" b="1" dirty="0">
-                <a:solidFill>
-                  <a:srgbClr val="0D9488"/>
+              <a:t>ch</a:t>
+            </a:r>
+            <a:endParaRPr lang="en-US" sz="900" dirty="0"/>
+          </a:p>
+        </p:txBody>
+      </p:sp>
+      <p:sp>
+        <p:nvSpPr>
+          <p:cNvPr id="42" name="Shape 40"/>
+          <p:cNvSpPr/>
+          <p:nvPr/>
+        </p:nvSpPr>
+        <p:spPr>
+          <a:xfrm>
+            <a:off x="5370141" y="4169664"/>
+            <a:ext cx="685800" cy="475488"/>
+          </a:xfrm>
+          <a:prstGeom prst="rect">
+            <a:avLst>
+              <a:gd name="adj" fmla="val 7692"/>
+            </a:avLst>
+          </a:prstGeom>
+          <a:solidFill>
+            <a:srgbClr val="FFFFFF"/>
+          </a:solidFill>
+          <a:ln w="12700">
+            <a:solidFill>
+              <a:srgbClr val="DB2777"/>
+            </a:solidFill>
+            <a:prstDash val="solid"/>
+          </a:ln>
+        </p:spPr>
+      </p:sp>
+      <p:sp>
+        <p:nvSpPr>
+          <p:cNvPr id="43" name="Text 41"/>
+          <p:cNvSpPr/>
+          <p:nvPr/>
+        </p:nvSpPr>
+        <p:spPr>
+          <a:xfrm>
+            <a:off x="5370141" y="4169664"/>
+            <a:ext cx="685800" cy="475488"/>
+          </a:xfrm>
+          <a:prstGeom prst="rect">
+            <a:avLst/>
+          </a:prstGeom>
+          <a:noFill/>
+          <a:ln/>
+        </p:spPr>
+        <p:txBody>
+          <a:bodyPr wrap="square" lIns="0" tIns="0" rIns="0" bIns="0" rtlCol="0" anchor="ctr"/>
+          <a:lstStyle/>
+          <a:p>
+            <a:pPr algn="ctr" indent="0" marL="0">
+              <a:buNone/>
+            </a:pPr>
+            <a:r>
+              <a:rPr lang="en-US" sz="900" b="1" dirty="0">
+                <a:solidFill>
+                  <a:srgbClr val="9D174D"/>
                 </a:solidFill>
                 <a:latin typeface="Trebuchet MS" pitchFamily="34" charset="0"/>
                 <a:ea typeface="Trebuchet MS" pitchFamily="34" charset="-122"/>
                 <a:cs typeface="Trebuchet MS" pitchFamily="34" charset="-120"/>
               </a:rPr>
-              <a:t>·</a:t>
-            </a:r>
-            <a:endParaRPr lang="en-US" sz="1600" dirty="0"/>
-          </a:p>
-        </p:txBody>
-      </p:sp>
-      <p:sp>
-        <p:nvSpPr>
-          <p:cNvPr id="34" name="Shape 32"/>
-          <p:cNvSpPr/>
-          <p:nvPr/>
-        </p:nvSpPr>
-        <p:spPr>
-          <a:xfrm>
-            <a:off x="6428232" y="3364992"/>
-            <a:ext cx="1645920" cy="475488"/>
+              <a:t>a</a:t>
+            </a:r>
+            <a:endParaRPr lang="en-US" sz="900" dirty="0"/>
+          </a:p>
+        </p:txBody>
+      </p:sp>
+      <p:sp>
+        <p:nvSpPr>
+          <p:cNvPr id="44" name="Shape 42"/>
+          <p:cNvSpPr/>
+          <p:nvPr/>
+        </p:nvSpPr>
+        <p:spPr>
+          <a:xfrm>
+            <a:off x="6408638" y="4169664"/>
+            <a:ext cx="685800" cy="475488"/>
           </a:xfrm>
           <a:prstGeom prst="rect">
             <a:avLst>
-              <a:gd name="adj" fmla="val 9615"/>
+              <a:gd name="adj" fmla="val 7692"/>
             </a:avLst>
           </a:prstGeom>
           <a:solidFill>
@@ -26919,601 +28059,112 @@
           </a:solidFill>
           <a:ln w="12700">
             <a:solidFill>
-              <a:srgbClr val="0D9488"/>
-            </a:solidFill>
-            <a:prstDash val="solid"/>
-          </a:ln>
-        </p:spPr>
-      </p:sp>
-      <p:sp>
-        <p:nvSpPr>
-          <p:cNvPr id="35" name="Text 33"/>
-          <p:cNvSpPr/>
-          <p:nvPr/>
-        </p:nvSpPr>
-        <p:spPr>
-          <a:xfrm>
-            <a:off x="6428232" y="3364992"/>
-            <a:ext cx="1645920" cy="475488"/>
-          </a:xfrm>
-          <a:prstGeom prst="rect">
-            <a:avLst/>
-          </a:prstGeom>
-          <a:noFill/>
-          <a:ln/>
-        </p:spPr>
-        <p:txBody>
-          <a:bodyPr wrap="square" lIns="0" tIns="0" rIns="0" bIns="0" rtlCol="0" anchor="ctr"/>
-          <a:lstStyle/>
-          <a:p>
-            <a:pPr algn="ctr" indent="0" marL="0">
-              <a:buNone/>
-            </a:pPr>
-            <a:r>
-              <a:rPr lang="en-US" sz="1400" b="1" dirty="0">
-                <a:solidFill>
-                  <a:srgbClr val="0D9488"/>
+              <a:srgbClr val="DB2777"/>
+            </a:solidFill>
+            <a:prstDash val="solid"/>
+          </a:ln>
+        </p:spPr>
+      </p:sp>
+      <p:sp>
+        <p:nvSpPr>
+          <p:cNvPr id="45" name="Text 43"/>
+          <p:cNvSpPr/>
+          <p:nvPr/>
+        </p:nvSpPr>
+        <p:spPr>
+          <a:xfrm>
+            <a:off x="6408638" y="4169664"/>
+            <a:ext cx="685800" cy="475488"/>
+          </a:xfrm>
+          <a:prstGeom prst="rect">
+            <a:avLst/>
+          </a:prstGeom>
+          <a:noFill/>
+          <a:ln/>
+        </p:spPr>
+        <p:txBody>
+          <a:bodyPr wrap="square" lIns="0" tIns="0" rIns="0" bIns="0" rtlCol="0" anchor="ctr"/>
+          <a:lstStyle/>
+          <a:p>
+            <a:pPr algn="ctr" indent="0" marL="0">
+              <a:buNone/>
+            </a:pPr>
+            <a:r>
+              <a:rPr lang="en-US" sz="900" b="1" dirty="0">
+                <a:solidFill>
+                  <a:srgbClr val="9D174D"/>
                 </a:solidFill>
                 <a:latin typeface="Trebuchet MS" pitchFamily="34" charset="0"/>
                 <a:ea typeface="Trebuchet MS" pitchFamily="34" charset="-122"/>
                 <a:cs typeface="Trebuchet MS" pitchFamily="34" charset="-120"/>
               </a:rPr>
-              <a:t>ing</a:t>
-            </a:r>
-            <a:endParaRPr lang="en-US" sz="1400" dirty="0"/>
-          </a:p>
-        </p:txBody>
-      </p:sp>
-      <p:sp>
-        <p:nvSpPr>
-          <p:cNvPr id="36" name="Shape 34"/>
-          <p:cNvSpPr/>
-          <p:nvPr/>
-        </p:nvSpPr>
-        <p:spPr>
-          <a:xfrm>
-            <a:off x="365760" y="4096512"/>
-            <a:ext cx="1371600" cy="804672"/>
+              <a:t>b</a:t>
+            </a:r>
+            <a:endParaRPr lang="en-US" sz="900" dirty="0"/>
+          </a:p>
+        </p:txBody>
+      </p:sp>
+      <p:sp>
+        <p:nvSpPr>
+          <p:cNvPr id="46" name="Shape 44"/>
+          <p:cNvSpPr/>
+          <p:nvPr/>
+        </p:nvSpPr>
+        <p:spPr>
+          <a:xfrm>
+            <a:off x="7447135" y="4169664"/>
+            <a:ext cx="685800" cy="475488"/>
           </a:xfrm>
           <a:prstGeom prst="rect">
             <a:avLst>
-              <a:gd name="adj" fmla="val 6818"/>
+              <a:gd name="adj" fmla="val 7692"/>
             </a:avLst>
           </a:prstGeom>
           <a:solidFill>
-            <a:srgbClr val="E2E8F0"/>
-          </a:solidFill>
-          <a:ln w="12700">
-            <a:solidFill>
-              <a:srgbClr val="E2E8F0"/>
-            </a:solidFill>
-            <a:prstDash val="solid"/>
-          </a:ln>
-        </p:spPr>
-      </p:sp>
-      <p:sp>
-        <p:nvSpPr>
-          <p:cNvPr id="37" name="Text 35"/>
-          <p:cNvSpPr/>
-          <p:nvPr/>
-        </p:nvSpPr>
-        <p:spPr>
-          <a:xfrm>
-            <a:off x="365760" y="4096512"/>
-            <a:ext cx="1371600" cy="804672"/>
-          </a:xfrm>
-          <a:prstGeom prst="rect">
-            <a:avLst/>
-          </a:prstGeom>
-          <a:noFill/>
-          <a:ln/>
-        </p:spPr>
-        <p:txBody>
-          <a:bodyPr wrap="square" lIns="0" tIns="0" rIns="0" bIns="0" rtlCol="0" anchor="ctr"/>
-          <a:lstStyle/>
-          <a:p>
-            <a:pPr algn="ctr" indent="0" marL="0">
-              <a:buNone/>
-            </a:pPr>
-            <a:r>
-              <a:rPr lang="en-US" sz="1100" b="1" dirty="0">
-                <a:solidFill>
-                  <a:srgbClr val="475569"/>
+            <a:srgbClr val="FFFFFF"/>
+          </a:solidFill>
+          <a:ln w="12700">
+            <a:solidFill>
+              <a:srgbClr val="DB2777"/>
+            </a:solidFill>
+            <a:prstDash val="solid"/>
+          </a:ln>
+        </p:spPr>
+      </p:sp>
+      <p:sp>
+        <p:nvSpPr>
+          <p:cNvPr id="47" name="Text 45"/>
+          <p:cNvSpPr/>
+          <p:nvPr/>
+        </p:nvSpPr>
+        <p:spPr>
+          <a:xfrm>
+            <a:off x="7447135" y="4169664"/>
+            <a:ext cx="685800" cy="475488"/>
+          </a:xfrm>
+          <a:prstGeom prst="rect">
+            <a:avLst/>
+          </a:prstGeom>
+          <a:noFill/>
+          <a:ln/>
+        </p:spPr>
+        <p:txBody>
+          <a:bodyPr wrap="square" lIns="0" tIns="0" rIns="0" bIns="0" rtlCol="0" anchor="ctr"/>
+          <a:lstStyle/>
+          <a:p>
+            <a:pPr algn="ctr" indent="0" marL="0">
+              <a:buNone/>
+            </a:pPr>
+            <a:r>
+              <a:rPr lang="en-US" sz="900" b="1" dirty="0">
+                <a:solidFill>
+                  <a:srgbClr val="9D174D"/>
                 </a:solidFill>
                 <a:latin typeface="Trebuchet MS" pitchFamily="34" charset="0"/>
                 <a:ea typeface="Trebuchet MS" pitchFamily="34" charset="-122"/>
                 <a:cs typeface="Trebuchet MS" pitchFamily="34" charset="-120"/>
               </a:rPr>
-              <a:t>Phonemes</a:t>
-            </a:r>
-            <a:endParaRPr lang="en-US" sz="1100" dirty="0"/>
-          </a:p>
-        </p:txBody>
-      </p:sp>
-      <p:sp>
-        <p:nvSpPr>
-          <p:cNvPr id="38" name="Shape 36"/>
-          <p:cNvSpPr/>
-          <p:nvPr/>
-        </p:nvSpPr>
-        <p:spPr>
-          <a:xfrm>
-            <a:off x="1874520" y="4096512"/>
-            <a:ext cx="6903720" cy="658368"/>
-          </a:xfrm>
-          <a:prstGeom prst="rect">
-            <a:avLst>
-              <a:gd name="adj" fmla="val 8333"/>
-            </a:avLst>
-          </a:prstGeom>
-          <a:solidFill>
-            <a:srgbClr val="FCE7F3"/>
-          </a:solidFill>
-          <a:ln w="12700">
-            <a:solidFill>
-              <a:srgbClr val="DB2777"/>
-            </a:solidFill>
-            <a:prstDash val="solid"/>
-          </a:ln>
-        </p:spPr>
-      </p:sp>
-      <p:sp>
-        <p:nvSpPr>
-          <p:cNvPr id="39" name="Shape 37"/>
-          <p:cNvSpPr/>
-          <p:nvPr/>
-        </p:nvSpPr>
-        <p:spPr>
-          <a:xfrm>
-            <a:off x="2124837" y="4169664"/>
-            <a:ext cx="685800" cy="475488"/>
-          </a:xfrm>
-          <a:prstGeom prst="rect">
-            <a:avLst>
-              <a:gd name="adj" fmla="val 7692"/>
-            </a:avLst>
-          </a:prstGeom>
-          <a:solidFill>
-            <a:srgbClr val="FFFFFF"/>
-          </a:solidFill>
-          <a:ln w="12700">
-            <a:solidFill>
-              <a:srgbClr val="DB2777"/>
-            </a:solidFill>
-            <a:prstDash val="solid"/>
-          </a:ln>
-        </p:spPr>
-      </p:sp>
-      <p:sp>
-        <p:nvSpPr>
-          <p:cNvPr id="40" name="Text 38"/>
-          <p:cNvSpPr/>
-          <p:nvPr/>
-        </p:nvSpPr>
-        <p:spPr>
-          <a:xfrm>
-            <a:off x="2124837" y="4169664"/>
-            <a:ext cx="685800" cy="475488"/>
-          </a:xfrm>
-          <a:prstGeom prst="rect">
-            <a:avLst/>
-          </a:prstGeom>
-          <a:noFill/>
-          <a:ln/>
-        </p:spPr>
-        <p:txBody>
-          <a:bodyPr wrap="square" lIns="0" tIns="0" rIns="0" bIns="0" rtlCol="0" anchor="ctr"/>
-          <a:lstStyle/>
-          <a:p>
-            <a:pPr algn="ctr" indent="0" marL="0">
-              <a:buNone/>
-            </a:pPr>
-            <a:r>
-              <a:rPr lang="en-US" sz="900" b="1" dirty="0">
-                <a:solidFill>
-                  <a:srgbClr val="9D174D"/>
-                </a:solidFill>
-                <a:latin typeface="Trebuchet MS" pitchFamily="34" charset="0"/>
-                <a:ea typeface="Trebuchet MS" pitchFamily="34" charset="-122"/>
-                <a:cs typeface="Trebuchet MS" pitchFamily="34" charset="-120"/>
-              </a:rPr>
-              <a:t>r</a:t>
-            </a:r>
-            <a:endParaRPr lang="en-US" sz="900" dirty="0"/>
-          </a:p>
-        </p:txBody>
-      </p:sp>
-      <p:sp>
-        <p:nvSpPr>
-          <p:cNvPr id="41" name="Shape 39"/>
-          <p:cNvSpPr/>
-          <p:nvPr/>
-        </p:nvSpPr>
-        <p:spPr>
-          <a:xfrm>
-            <a:off x="3033522" y="4169664"/>
-            <a:ext cx="685800" cy="475488"/>
-          </a:xfrm>
-          <a:prstGeom prst="rect">
-            <a:avLst>
-              <a:gd name="adj" fmla="val 7692"/>
-            </a:avLst>
-          </a:prstGeom>
-          <a:solidFill>
-            <a:srgbClr val="FFFFFF"/>
-          </a:solidFill>
-          <a:ln w="12700">
-            <a:solidFill>
-              <a:srgbClr val="DB2777"/>
-            </a:solidFill>
-            <a:prstDash val="solid"/>
-          </a:ln>
-        </p:spPr>
-      </p:sp>
-      <p:sp>
-        <p:nvSpPr>
-          <p:cNvPr id="42" name="Text 40"/>
-          <p:cNvSpPr/>
-          <p:nvPr/>
-        </p:nvSpPr>
-        <p:spPr>
-          <a:xfrm>
-            <a:off x="3033522" y="4169664"/>
-            <a:ext cx="685800" cy="475488"/>
-          </a:xfrm>
-          <a:prstGeom prst="rect">
-            <a:avLst/>
-          </a:prstGeom>
-          <a:noFill/>
-          <a:ln/>
-        </p:spPr>
-        <p:txBody>
-          <a:bodyPr wrap="square" lIns="0" tIns="0" rIns="0" bIns="0" rtlCol="0" anchor="ctr"/>
-          <a:lstStyle/>
-          <a:p>
-            <a:pPr algn="ctr" indent="0" marL="0">
-              <a:buNone/>
-            </a:pPr>
-            <a:r>
-              <a:rPr lang="en-US" sz="900" b="1" dirty="0">
-                <a:solidFill>
-                  <a:srgbClr val="9D174D"/>
-                </a:solidFill>
-                <a:latin typeface="Trebuchet MS" pitchFamily="34" charset="0"/>
-                <a:ea typeface="Trebuchet MS" pitchFamily="34" charset="-122"/>
-                <a:cs typeface="Trebuchet MS" pitchFamily="34" charset="-120"/>
-              </a:rPr>
-              <a:t>e</a:t>
-            </a:r>
-            <a:endParaRPr lang="en-US" sz="900" dirty="0"/>
-          </a:p>
-        </p:txBody>
-      </p:sp>
-      <p:sp>
-        <p:nvSpPr>
-          <p:cNvPr id="43" name="Shape 41"/>
-          <p:cNvSpPr/>
-          <p:nvPr/>
-        </p:nvSpPr>
-        <p:spPr>
-          <a:xfrm>
-            <a:off x="3942207" y="4169664"/>
-            <a:ext cx="685800" cy="475488"/>
-          </a:xfrm>
-          <a:prstGeom prst="rect">
-            <a:avLst>
-              <a:gd name="adj" fmla="val 7692"/>
-            </a:avLst>
-          </a:prstGeom>
-          <a:solidFill>
-            <a:srgbClr val="FFFFFF"/>
-          </a:solidFill>
-          <a:ln w="12700">
-            <a:solidFill>
-              <a:srgbClr val="DB2777"/>
-            </a:solidFill>
-            <a:prstDash val="solid"/>
-          </a:ln>
-        </p:spPr>
-      </p:sp>
-      <p:sp>
-        <p:nvSpPr>
-          <p:cNvPr id="44" name="Text 42"/>
-          <p:cNvSpPr/>
-          <p:nvPr/>
-        </p:nvSpPr>
-        <p:spPr>
-          <a:xfrm>
-            <a:off x="3942207" y="4169664"/>
-            <a:ext cx="685800" cy="475488"/>
-          </a:xfrm>
-          <a:prstGeom prst="rect">
-            <a:avLst/>
-          </a:prstGeom>
-          <a:noFill/>
-          <a:ln/>
-        </p:spPr>
-        <p:txBody>
-          <a:bodyPr wrap="square" lIns="0" tIns="0" rIns="0" bIns="0" rtlCol="0" anchor="ctr"/>
-          <a:lstStyle/>
-          <a:p>
-            <a:pPr algn="ctr" indent="0" marL="0">
-              <a:buNone/>
-            </a:pPr>
-            <a:r>
-              <a:rPr lang="en-US" sz="900" b="1" dirty="0">
-                <a:solidFill>
-                  <a:srgbClr val="9D174D"/>
-                </a:solidFill>
-                <a:latin typeface="Trebuchet MS" pitchFamily="34" charset="0"/>
-                <a:ea typeface="Trebuchet MS" pitchFamily="34" charset="-122"/>
-                <a:cs typeface="Trebuchet MS" pitchFamily="34" charset="-120"/>
-              </a:rPr>
-              <a:t>t</a:t>
-            </a:r>
-            <a:endParaRPr lang="en-US" sz="900" dirty="0"/>
-          </a:p>
-        </p:txBody>
-      </p:sp>
-      <p:sp>
-        <p:nvSpPr>
-          <p:cNvPr id="45" name="Shape 43"/>
-          <p:cNvSpPr/>
-          <p:nvPr/>
-        </p:nvSpPr>
-        <p:spPr>
-          <a:xfrm>
-            <a:off x="4850892" y="4169664"/>
-            <a:ext cx="685800" cy="475488"/>
-          </a:xfrm>
-          <a:prstGeom prst="rect">
-            <a:avLst>
-              <a:gd name="adj" fmla="val 7692"/>
-            </a:avLst>
-          </a:prstGeom>
-          <a:solidFill>
-            <a:srgbClr val="FFFFFF"/>
-          </a:solidFill>
-          <a:ln w="12700">
-            <a:solidFill>
-              <a:srgbClr val="DB2777"/>
-            </a:solidFill>
-            <a:prstDash val="solid"/>
-          </a:ln>
-        </p:spPr>
-      </p:sp>
-      <p:sp>
-        <p:nvSpPr>
-          <p:cNvPr id="46" name="Text 44"/>
-          <p:cNvSpPr/>
-          <p:nvPr/>
-        </p:nvSpPr>
-        <p:spPr>
-          <a:xfrm>
-            <a:off x="4850892" y="4169664"/>
-            <a:ext cx="685800" cy="475488"/>
-          </a:xfrm>
-          <a:prstGeom prst="rect">
-            <a:avLst/>
-          </a:prstGeom>
-          <a:noFill/>
-          <a:ln/>
-        </p:spPr>
-        <p:txBody>
-          <a:bodyPr wrap="square" lIns="0" tIns="0" rIns="0" bIns="0" rtlCol="0" anchor="ctr"/>
-          <a:lstStyle/>
-          <a:p>
-            <a:pPr algn="ctr" indent="0" marL="0">
-              <a:buNone/>
-            </a:pPr>
-            <a:r>
-              <a:rPr lang="en-US" sz="900" b="1" dirty="0">
-                <a:solidFill>
-                  <a:srgbClr val="9D174D"/>
-                </a:solidFill>
-                <a:latin typeface="Trebuchet MS" pitchFamily="34" charset="0"/>
-                <a:ea typeface="Trebuchet MS" pitchFamily="34" charset="-122"/>
-                <a:cs typeface="Trebuchet MS" pitchFamily="34" charset="-120"/>
-              </a:rPr>
-              <a:t>ea</a:t>
-            </a:r>
-            <a:endParaRPr lang="en-US" sz="900" dirty="0"/>
-          </a:p>
-        </p:txBody>
-      </p:sp>
-      <p:sp>
-        <p:nvSpPr>
-          <p:cNvPr id="47" name="Shape 45"/>
-          <p:cNvSpPr/>
-          <p:nvPr/>
-        </p:nvSpPr>
-        <p:spPr>
-          <a:xfrm>
-            <a:off x="5759577" y="4169664"/>
-            <a:ext cx="685800" cy="475488"/>
-          </a:xfrm>
-          <a:prstGeom prst="rect">
-            <a:avLst>
-              <a:gd name="adj" fmla="val 7692"/>
-            </a:avLst>
-          </a:prstGeom>
-          <a:solidFill>
-            <a:srgbClr val="FFFFFF"/>
-          </a:solidFill>
-          <a:ln w="12700">
-            <a:solidFill>
-              <a:srgbClr val="DB2777"/>
-            </a:solidFill>
-            <a:prstDash val="solid"/>
-          </a:ln>
-        </p:spPr>
-      </p:sp>
-      <p:sp>
-        <p:nvSpPr>
-          <p:cNvPr id="48" name="Text 46"/>
-          <p:cNvSpPr/>
-          <p:nvPr/>
-        </p:nvSpPr>
-        <p:spPr>
-          <a:xfrm>
-            <a:off x="5759577" y="4169664"/>
-            <a:ext cx="685800" cy="475488"/>
-          </a:xfrm>
-          <a:prstGeom prst="rect">
-            <a:avLst/>
-          </a:prstGeom>
-          <a:noFill/>
-          <a:ln/>
-        </p:spPr>
-        <p:txBody>
-          <a:bodyPr wrap="square" lIns="0" tIns="0" rIns="0" bIns="0" rtlCol="0" anchor="ctr"/>
-          <a:lstStyle/>
-          <a:p>
-            <a:pPr algn="ctr" indent="0" marL="0">
-              <a:buNone/>
-            </a:pPr>
-            <a:r>
-              <a:rPr lang="en-US" sz="900" b="1" dirty="0">
-                <a:solidFill>
-                  <a:srgbClr val="9D174D"/>
-                </a:solidFill>
-                <a:latin typeface="Trebuchet MS" pitchFamily="34" charset="0"/>
-                <a:ea typeface="Trebuchet MS" pitchFamily="34" charset="-122"/>
-                <a:cs typeface="Trebuchet MS" pitchFamily="34" charset="-120"/>
-              </a:rPr>
-              <a:t>ch</a:t>
-            </a:r>
-            <a:endParaRPr lang="en-US" sz="900" dirty="0"/>
-          </a:p>
-        </p:txBody>
-      </p:sp>
-      <p:sp>
-        <p:nvSpPr>
-          <p:cNvPr id="49" name="Shape 47"/>
-          <p:cNvSpPr/>
-          <p:nvPr/>
-        </p:nvSpPr>
-        <p:spPr>
-          <a:xfrm>
-            <a:off x="6668262" y="4169664"/>
-            <a:ext cx="685800" cy="475488"/>
-          </a:xfrm>
-          <a:prstGeom prst="rect">
-            <a:avLst>
-              <a:gd name="adj" fmla="val 7692"/>
-            </a:avLst>
-          </a:prstGeom>
-          <a:solidFill>
-            <a:srgbClr val="FFFFFF"/>
-          </a:solidFill>
-          <a:ln w="12700">
-            <a:solidFill>
-              <a:srgbClr val="DB2777"/>
-            </a:solidFill>
-            <a:prstDash val="solid"/>
-          </a:ln>
-        </p:spPr>
-      </p:sp>
-      <p:sp>
-        <p:nvSpPr>
-          <p:cNvPr id="50" name="Text 48"/>
-          <p:cNvSpPr/>
-          <p:nvPr/>
-        </p:nvSpPr>
-        <p:spPr>
-          <a:xfrm>
-            <a:off x="6668262" y="4169664"/>
-            <a:ext cx="685800" cy="475488"/>
-          </a:xfrm>
-          <a:prstGeom prst="rect">
-            <a:avLst/>
-          </a:prstGeom>
-          <a:noFill/>
-          <a:ln/>
-        </p:spPr>
-        <p:txBody>
-          <a:bodyPr wrap="square" lIns="0" tIns="0" rIns="0" bIns="0" rtlCol="0" anchor="ctr"/>
-          <a:lstStyle/>
-          <a:p>
-            <a:pPr algn="ctr" indent="0" marL="0">
-              <a:buNone/>
-            </a:pPr>
-            <a:r>
-              <a:rPr lang="en-US" sz="900" b="1" dirty="0">
-                <a:solidFill>
-                  <a:srgbClr val="9D174D"/>
-                </a:solidFill>
-                <a:latin typeface="Trebuchet MS" pitchFamily="34" charset="0"/>
-                <a:ea typeface="Trebuchet MS" pitchFamily="34" charset="-122"/>
-                <a:cs typeface="Trebuchet MS" pitchFamily="34" charset="-120"/>
-              </a:rPr>
-              <a:t>i</a:t>
-            </a:r>
-            <a:endParaRPr lang="en-US" sz="900" dirty="0"/>
-          </a:p>
-        </p:txBody>
-      </p:sp>
-      <p:sp>
-        <p:nvSpPr>
-          <p:cNvPr id="51" name="Shape 49"/>
-          <p:cNvSpPr/>
-          <p:nvPr/>
-        </p:nvSpPr>
-        <p:spPr>
-          <a:xfrm>
-            <a:off x="7576947" y="4169664"/>
-            <a:ext cx="685800" cy="475488"/>
-          </a:xfrm>
-          <a:prstGeom prst="rect">
-            <a:avLst>
-              <a:gd name="adj" fmla="val 7692"/>
-            </a:avLst>
-          </a:prstGeom>
-          <a:solidFill>
-            <a:srgbClr val="FFFFFF"/>
-          </a:solidFill>
-          <a:ln w="12700">
-            <a:solidFill>
-              <a:srgbClr val="DB2777"/>
-            </a:solidFill>
-            <a:prstDash val="solid"/>
-          </a:ln>
-        </p:spPr>
-      </p:sp>
-      <p:sp>
-        <p:nvSpPr>
-          <p:cNvPr id="52" name="Text 50"/>
-          <p:cNvSpPr/>
-          <p:nvPr/>
-        </p:nvSpPr>
-        <p:spPr>
-          <a:xfrm>
-            <a:off x="7576947" y="4169664"/>
-            <a:ext cx="685800" cy="475488"/>
-          </a:xfrm>
-          <a:prstGeom prst="rect">
-            <a:avLst/>
-          </a:prstGeom>
-          <a:noFill/>
-          <a:ln/>
-        </p:spPr>
-        <p:txBody>
-          <a:bodyPr wrap="square" lIns="0" tIns="0" rIns="0" bIns="0" rtlCol="0" anchor="ctr"/>
-          <a:lstStyle/>
-          <a:p>
-            <a:pPr algn="ctr" indent="0" marL="0">
-              <a:buNone/>
-            </a:pPr>
-            <a:r>
-              <a:rPr lang="en-US" sz="900" b="1" dirty="0">
-                <a:solidFill>
-                  <a:srgbClr val="9D174D"/>
-                </a:solidFill>
-                <a:latin typeface="Trebuchet MS" pitchFamily="34" charset="0"/>
-                <a:ea typeface="Trebuchet MS" pitchFamily="34" charset="-122"/>
-                <a:cs typeface="Trebuchet MS" pitchFamily="34" charset="-120"/>
-              </a:rPr>
-              <a:t>ng</a:t>
+              <a:t>le</a:t>
             </a:r>
             <a:endParaRPr lang="en-US" sz="900" dirty="0"/>
           </a:p>
@@ -27805,7 +28456,7 @@
                 <a:ea typeface="Calibri" pitchFamily="34" charset="-122"/>
                 <a:cs typeface="Calibri" pitchFamily="34" charset="-120"/>
               </a:rPr>
-              <a:t>Word Labs  •  wordlabs.app  •  Root: 'teach' = to show or instruct others</a:t>
+              <a:t>Word Labs  •  wordlabs.app  •  Root: 'teach' = to show or instruct</a:t>
             </a:r>
             <a:endParaRPr lang="en-US" sz="800" dirty="0"/>
           </a:p>
@@ -27944,7 +28595,7 @@
                 <a:ea typeface="Trebuchet MS" pitchFamily="34" charset="-122"/>
                 <a:cs typeface="Trebuchet MS" pitchFamily="34" charset="-120"/>
               </a:rPr>
-              <a:t>teachable</a:t>
+              <a:t>teachings</a:t>
             </a:r>
             <a:endParaRPr lang="en-US" sz="2800" dirty="0"/>
           </a:p>
@@ -28632,7 +29283,7 @@
                 <a:ea typeface="Calibri" pitchFamily="34" charset="-122"/>
                 <a:cs typeface="Calibri" pitchFamily="34" charset="-120"/>
               </a:rPr>
-              <a:t>Word Labs  •  wordlabs.app  •  Root: 'teach' = to show or instruct others</a:t>
+              <a:t>Word Labs  •  wordlabs.app  •  Root: 'teach' = to show or instruct</a:t>
             </a:r>
             <a:endParaRPr lang="en-US" sz="800" dirty="0"/>
           </a:p>
@@ -28771,7 +29422,7 @@
                 <a:ea typeface="Trebuchet MS" pitchFamily="34" charset="-122"/>
                 <a:cs typeface="Trebuchet MS" pitchFamily="34" charset="-120"/>
               </a:rPr>
-              <a:t>teachable</a:t>
+              <a:t>teachings</a:t>
             </a:r>
             <a:endParaRPr lang="en-US" sz="2800" dirty="0"/>
           </a:p>
@@ -28851,7 +29502,7 @@
         </p:nvSpPr>
         <p:spPr>
           <a:xfrm>
-            <a:off x="2938272" y="2258568"/>
+            <a:off x="2221992" y="2258568"/>
             <a:ext cx="1828800" cy="292608"/>
           </a:xfrm>
           <a:prstGeom prst="rect">
@@ -28885,7 +29536,7 @@
         </p:nvSpPr>
         <p:spPr>
           <a:xfrm>
-            <a:off x="2938272" y="2258568"/>
+            <a:off x="2221992" y="2258568"/>
             <a:ext cx="1828800" cy="292608"/>
           </a:xfrm>
           <a:prstGeom prst="rect">
@@ -28924,7 +29575,7 @@
         </p:nvSpPr>
         <p:spPr>
           <a:xfrm>
-            <a:off x="2938272" y="2569464"/>
+            <a:off x="2221992" y="2569464"/>
             <a:ext cx="1828800" cy="201168"/>
           </a:xfrm>
           <a:prstGeom prst="rect">
@@ -28949,7 +29600,7 @@
                 <a:ea typeface="Calibri" pitchFamily="34" charset="-122"/>
                 <a:cs typeface="Calibri" pitchFamily="34" charset="-120"/>
               </a:rPr>
-              <a:t>to instruct or show</a:t>
+              <a:t>to show or instruct</a:t>
             </a:r>
             <a:endParaRPr lang="en-US" sz="850" dirty="0"/>
           </a:p>
@@ -28963,7 +29614,7 @@
         </p:nvSpPr>
         <p:spPr>
           <a:xfrm>
-            <a:off x="5803392" y="2258568"/>
+            <a:off x="4370832" y="2258568"/>
             <a:ext cx="1828800" cy="292608"/>
           </a:xfrm>
           <a:prstGeom prst="rect">
@@ -28997,7 +29648,7 @@
         </p:nvSpPr>
         <p:spPr>
           <a:xfrm>
-            <a:off x="5803392" y="2258568"/>
+            <a:off x="4370832" y="2258568"/>
             <a:ext cx="1828800" cy="292608"/>
           </a:xfrm>
           <a:prstGeom prst="rect">
@@ -29022,7 +29673,7 @@
                 <a:ea typeface="Trebuchet MS" pitchFamily="34" charset="-122"/>
                 <a:cs typeface="Trebuchet MS" pitchFamily="34" charset="-120"/>
               </a:rPr>
-              <a:t>able</a:t>
+              <a:t>ing</a:t>
             </a:r>
             <a:endParaRPr lang="en-US" sz="1300" dirty="0"/>
           </a:p>
@@ -29036,7 +29687,7 @@
         </p:nvSpPr>
         <p:spPr>
           <a:xfrm>
-            <a:off x="5803392" y="2569464"/>
+            <a:off x="4370832" y="2569464"/>
             <a:ext cx="1828800" cy="201168"/>
           </a:xfrm>
           <a:prstGeom prst="rect">
@@ -29061,7 +29712,7 @@
                 <a:ea typeface="Calibri" pitchFamily="34" charset="-122"/>
                 <a:cs typeface="Calibri" pitchFamily="34" charset="-120"/>
               </a:rPr>
-              <a:t>able to be</a:t>
+              <a:t>ongoing action</a:t>
             </a:r>
             <a:endParaRPr lang="en-US" sz="850" dirty="0"/>
           </a:p>
@@ -29070,6 +29721,118 @@
       <p:sp>
         <p:nvSpPr>
           <p:cNvPr id="22" name="Shape 20"/>
+          <p:cNvSpPr/>
+          <p:nvPr/>
+        </p:nvSpPr>
+        <p:spPr>
+          <a:xfrm>
+            <a:off x="6519672" y="2258568"/>
+            <a:ext cx="1828800" cy="292608"/>
+          </a:xfrm>
+          <a:prstGeom prst="rect">
+            <a:avLst>
+              <a:gd name="adj" fmla="val 25000"/>
+            </a:avLst>
+          </a:prstGeom>
+          <a:solidFill>
+            <a:srgbClr val="FCE7F3"/>
+          </a:solidFill>
+          <a:ln w="19050">
+            <a:solidFill>
+              <a:srgbClr val="DB2777"/>
+            </a:solidFill>
+            <a:prstDash val="solid"/>
+          </a:ln>
+          <a:effectLst>
+            <a:outerShdw sx="100000" sy="100000" kx="0" ky="0" algn="bl" rotWithShape="0" blurRad="101600" dist="38100" dir="8100000">
+              <a:srgbClr val="000000">
+                <a:alpha val="12000"/>
+              </a:srgbClr>
+            </a:outerShdw>
+          </a:effectLst>
+        </p:spPr>
+      </p:sp>
+      <p:sp>
+        <p:nvSpPr>
+          <p:cNvPr id="23" name="Text 21"/>
+          <p:cNvSpPr/>
+          <p:nvPr/>
+        </p:nvSpPr>
+        <p:spPr>
+          <a:xfrm>
+            <a:off x="6519672" y="2258568"/>
+            <a:ext cx="1828800" cy="292608"/>
+          </a:xfrm>
+          <a:prstGeom prst="rect">
+            <a:avLst/>
+          </a:prstGeom>
+          <a:noFill/>
+          <a:ln/>
+        </p:spPr>
+        <p:txBody>
+          <a:bodyPr wrap="square" lIns="0" tIns="0" rIns="0" bIns="0" rtlCol="0" anchor="ctr"/>
+          <a:lstStyle/>
+          <a:p>
+            <a:pPr algn="ctr" indent="0" marL="0">
+              <a:buNone/>
+            </a:pPr>
+            <a:r>
+              <a:rPr lang="en-US" sz="1300" b="1" dirty="0">
+                <a:solidFill>
+                  <a:srgbClr val="9D174D"/>
+                </a:solidFill>
+                <a:latin typeface="Trebuchet MS" pitchFamily="34" charset="0"/>
+                <a:ea typeface="Trebuchet MS" pitchFamily="34" charset="-122"/>
+                <a:cs typeface="Trebuchet MS" pitchFamily="34" charset="-120"/>
+              </a:rPr>
+              <a:t>s</a:t>
+            </a:r>
+            <a:endParaRPr lang="en-US" sz="1300" dirty="0"/>
+          </a:p>
+        </p:txBody>
+      </p:sp>
+      <p:sp>
+        <p:nvSpPr>
+          <p:cNvPr id="24" name="Text 22"/>
+          <p:cNvSpPr/>
+          <p:nvPr/>
+        </p:nvSpPr>
+        <p:spPr>
+          <a:xfrm>
+            <a:off x="6519672" y="2569464"/>
+            <a:ext cx="1828800" cy="201168"/>
+          </a:xfrm>
+          <a:prstGeom prst="rect">
+            <a:avLst/>
+          </a:prstGeom>
+          <a:noFill/>
+          <a:ln/>
+        </p:spPr>
+        <p:txBody>
+          <a:bodyPr wrap="square" lIns="0" tIns="0" rIns="0" bIns="0" rtlCol="0" anchor="t"/>
+          <a:lstStyle/>
+          <a:p>
+            <a:pPr algn="ctr" indent="0" marL="0">
+              <a:buNone/>
+            </a:pPr>
+            <a:r>
+              <a:rPr lang="en-US" sz="850" dirty="0">
+                <a:solidFill>
+                  <a:srgbClr val="475569"/>
+                </a:solidFill>
+                <a:latin typeface="Calibri" pitchFamily="34" charset="0"/>
+                <a:ea typeface="Calibri" pitchFamily="34" charset="-122"/>
+                <a:cs typeface="Calibri" pitchFamily="34" charset="-120"/>
+              </a:rPr>
+              <a:t>more than one</a:t>
+            </a:r>
+            <a:endParaRPr lang="en-US" sz="850" dirty="0"/>
+          </a:p>
+        </p:txBody>
+      </p:sp>
+      <p:sp>
+        <p:nvSpPr>
+          <p:cNvPr id="25" name="Shape 23"/>
           <p:cNvSpPr/>
           <p:nvPr/>
         </p:nvSpPr>
@@ -29096,7 +29859,7 @@
       </p:sp>
       <p:sp>
         <p:nvSpPr>
-          <p:cNvPr id="23" name="Text 21"/>
+          <p:cNvPr id="26" name="Text 24"/>
           <p:cNvSpPr/>
           <p:nvPr/>
         </p:nvSpPr>
@@ -29135,7 +29898,7 @@
       </p:sp>
       <p:sp>
         <p:nvSpPr>
-          <p:cNvPr id="24" name="Shape 22"/>
+          <p:cNvPr id="27" name="Shape 25"/>
           <p:cNvSpPr/>
           <p:nvPr/>
         </p:nvSpPr>
@@ -29162,7 +29925,7 @@
       </p:sp>
       <p:sp>
         <p:nvSpPr>
-          <p:cNvPr id="25" name="Text 23"/>
+          <p:cNvPr id="28" name="Text 26"/>
           <p:cNvSpPr/>
           <p:nvPr/>
         </p:nvSpPr>
@@ -29201,7 +29964,7 @@
       </p:sp>
       <p:sp>
         <p:nvSpPr>
-          <p:cNvPr id="26" name="Shape 24"/>
+          <p:cNvPr id="29" name="Shape 27"/>
           <p:cNvSpPr/>
           <p:nvPr/>
         </p:nvSpPr>
@@ -29228,7 +29991,7 @@
       </p:sp>
       <p:sp>
         <p:nvSpPr>
-          <p:cNvPr id="27" name="Text 25"/>
+          <p:cNvPr id="30" name="Text 28"/>
           <p:cNvSpPr/>
           <p:nvPr/>
         </p:nvSpPr>
@@ -29267,7 +30030,7 @@
       </p:sp>
       <p:sp>
         <p:nvSpPr>
-          <p:cNvPr id="28" name="Shape 26"/>
+          <p:cNvPr id="31" name="Shape 29"/>
           <p:cNvSpPr/>
           <p:nvPr/>
         </p:nvSpPr>
@@ -29294,7 +30057,7 @@
       </p:sp>
       <p:sp>
         <p:nvSpPr>
-          <p:cNvPr id="29" name="Text 27"/>
+          <p:cNvPr id="32" name="Text 30"/>
           <p:cNvSpPr/>
           <p:nvPr/>
         </p:nvSpPr>
@@ -29617,7 +30380,7 @@
                 <a:ea typeface="Calibri" pitchFamily="34" charset="-122"/>
                 <a:cs typeface="Calibri" pitchFamily="34" charset="-120"/>
               </a:rPr>
-              <a:t>Word Labs  •  wordlabs.app  •  Root: 'teach' = to show or instruct others</a:t>
+              <a:t>Word Labs  •  wordlabs.app  •  Root: 'teach' = to show or instruct</a:t>
             </a:r>
             <a:endParaRPr lang="en-US" sz="800" dirty="0"/>
           </a:p>
@@ -29756,7 +30519,7 @@
                 <a:ea typeface="Trebuchet MS" pitchFamily="34" charset="-122"/>
                 <a:cs typeface="Trebuchet MS" pitchFamily="34" charset="-120"/>
               </a:rPr>
-              <a:t>teachable</a:t>
+              <a:t>teachings</a:t>
             </a:r>
             <a:endParaRPr lang="en-US" sz="2800" dirty="0"/>
           </a:p>
@@ -29836,7 +30599,7 @@
         </p:nvSpPr>
         <p:spPr>
           <a:xfrm>
-            <a:off x="2938272" y="2258568"/>
+            <a:off x="2221992" y="2258568"/>
             <a:ext cx="1828800" cy="292608"/>
           </a:xfrm>
           <a:prstGeom prst="rect">
@@ -29870,7 +30633,7 @@
         </p:nvSpPr>
         <p:spPr>
           <a:xfrm>
-            <a:off x="2938272" y="2258568"/>
+            <a:off x="2221992" y="2258568"/>
             <a:ext cx="1828800" cy="292608"/>
           </a:xfrm>
           <a:prstGeom prst="rect">
@@ -29909,7 +30672,7 @@
         </p:nvSpPr>
         <p:spPr>
           <a:xfrm>
-            <a:off x="2938272" y="2569464"/>
+            <a:off x="2221992" y="2569464"/>
             <a:ext cx="1828800" cy="201168"/>
           </a:xfrm>
           <a:prstGeom prst="rect">
@@ -29934,7 +30697,7 @@
                 <a:ea typeface="Calibri" pitchFamily="34" charset="-122"/>
                 <a:cs typeface="Calibri" pitchFamily="34" charset="-120"/>
               </a:rPr>
-              <a:t>to instruct or show</a:t>
+              <a:t>to show or instruct</a:t>
             </a:r>
             <a:endParaRPr lang="en-US" sz="850" dirty="0"/>
           </a:p>
@@ -29948,7 +30711,7 @@
         </p:nvSpPr>
         <p:spPr>
           <a:xfrm>
-            <a:off x="5803392" y="2258568"/>
+            <a:off x="4370832" y="2258568"/>
             <a:ext cx="1828800" cy="292608"/>
           </a:xfrm>
           <a:prstGeom prst="rect">
@@ -29982,7 +30745,7 @@
         </p:nvSpPr>
         <p:spPr>
           <a:xfrm>
-            <a:off x="5803392" y="2258568"/>
+            <a:off x="4370832" y="2258568"/>
             <a:ext cx="1828800" cy="292608"/>
           </a:xfrm>
           <a:prstGeom prst="rect">
@@ -30007,7 +30770,7 @@
                 <a:ea typeface="Trebuchet MS" pitchFamily="34" charset="-122"/>
                 <a:cs typeface="Trebuchet MS" pitchFamily="34" charset="-120"/>
               </a:rPr>
-              <a:t>able</a:t>
+              <a:t>ing</a:t>
             </a:r>
             <a:endParaRPr lang="en-US" sz="1300" dirty="0"/>
           </a:p>
@@ -30021,7 +30784,7 @@
         </p:nvSpPr>
         <p:spPr>
           <a:xfrm>
-            <a:off x="5803392" y="2569464"/>
+            <a:off x="4370832" y="2569464"/>
             <a:ext cx="1828800" cy="201168"/>
           </a:xfrm>
           <a:prstGeom prst="rect">
@@ -30046,7 +30809,7 @@
                 <a:ea typeface="Calibri" pitchFamily="34" charset="-122"/>
                 <a:cs typeface="Calibri" pitchFamily="34" charset="-120"/>
               </a:rPr>
-              <a:t>able to be</a:t>
+              <a:t>ongoing action</a:t>
             </a:r>
             <a:endParaRPr lang="en-US" sz="850" dirty="0"/>
           </a:p>
@@ -30055,6 +30818,118 @@
       <p:sp>
         <p:nvSpPr>
           <p:cNvPr id="22" name="Shape 20"/>
+          <p:cNvSpPr/>
+          <p:nvPr/>
+        </p:nvSpPr>
+        <p:spPr>
+          <a:xfrm>
+            <a:off x="6519672" y="2258568"/>
+            <a:ext cx="1828800" cy="292608"/>
+          </a:xfrm>
+          <a:prstGeom prst="rect">
+            <a:avLst>
+              <a:gd name="adj" fmla="val 25000"/>
+            </a:avLst>
+          </a:prstGeom>
+          <a:solidFill>
+            <a:srgbClr val="FCE7F3"/>
+          </a:solidFill>
+          <a:ln w="19050">
+            <a:solidFill>
+              <a:srgbClr val="DB2777"/>
+            </a:solidFill>
+            <a:prstDash val="solid"/>
+          </a:ln>
+          <a:effectLst>
+            <a:outerShdw sx="100000" sy="100000" kx="0" ky="0" algn="bl" rotWithShape="0" blurRad="101600" dist="38100" dir="8100000">
+              <a:srgbClr val="000000">
+                <a:alpha val="12000"/>
+              </a:srgbClr>
+            </a:outerShdw>
+          </a:effectLst>
+        </p:spPr>
+      </p:sp>
+      <p:sp>
+        <p:nvSpPr>
+          <p:cNvPr id="23" name="Text 21"/>
+          <p:cNvSpPr/>
+          <p:nvPr/>
+        </p:nvSpPr>
+        <p:spPr>
+          <a:xfrm>
+            <a:off x="6519672" y="2258568"/>
+            <a:ext cx="1828800" cy="292608"/>
+          </a:xfrm>
+          <a:prstGeom prst="rect">
+            <a:avLst/>
+          </a:prstGeom>
+          <a:noFill/>
+          <a:ln/>
+        </p:spPr>
+        <p:txBody>
+          <a:bodyPr wrap="square" lIns="0" tIns="0" rIns="0" bIns="0" rtlCol="0" anchor="ctr"/>
+          <a:lstStyle/>
+          <a:p>
+            <a:pPr algn="ctr" indent="0" marL="0">
+              <a:buNone/>
+            </a:pPr>
+            <a:r>
+              <a:rPr lang="en-US" sz="1300" b="1" dirty="0">
+                <a:solidFill>
+                  <a:srgbClr val="9D174D"/>
+                </a:solidFill>
+                <a:latin typeface="Trebuchet MS" pitchFamily="34" charset="0"/>
+                <a:ea typeface="Trebuchet MS" pitchFamily="34" charset="-122"/>
+                <a:cs typeface="Trebuchet MS" pitchFamily="34" charset="-120"/>
+              </a:rPr>
+              <a:t>s</a:t>
+            </a:r>
+            <a:endParaRPr lang="en-US" sz="1300" dirty="0"/>
+          </a:p>
+        </p:txBody>
+      </p:sp>
+      <p:sp>
+        <p:nvSpPr>
+          <p:cNvPr id="24" name="Text 22"/>
+          <p:cNvSpPr/>
+          <p:nvPr/>
+        </p:nvSpPr>
+        <p:spPr>
+          <a:xfrm>
+            <a:off x="6519672" y="2569464"/>
+            <a:ext cx="1828800" cy="201168"/>
+          </a:xfrm>
+          <a:prstGeom prst="rect">
+            <a:avLst/>
+          </a:prstGeom>
+          <a:noFill/>
+          <a:ln/>
+        </p:spPr>
+        <p:txBody>
+          <a:bodyPr wrap="square" lIns="0" tIns="0" rIns="0" bIns="0" rtlCol="0" anchor="t"/>
+          <a:lstStyle/>
+          <a:p>
+            <a:pPr algn="ctr" indent="0" marL="0">
+              <a:buNone/>
+            </a:pPr>
+            <a:r>
+              <a:rPr lang="en-US" sz="850" dirty="0">
+                <a:solidFill>
+                  <a:srgbClr val="475569"/>
+                </a:solidFill>
+                <a:latin typeface="Calibri" pitchFamily="34" charset="0"/>
+                <a:ea typeface="Calibri" pitchFamily="34" charset="-122"/>
+                <a:cs typeface="Calibri" pitchFamily="34" charset="-120"/>
+              </a:rPr>
+              <a:t>more than one</a:t>
+            </a:r>
+            <a:endParaRPr lang="en-US" sz="850" dirty="0"/>
+          </a:p>
+        </p:txBody>
+      </p:sp>
+      <p:sp>
+        <p:nvSpPr>
+          <p:cNvPr id="25" name="Shape 23"/>
           <p:cNvSpPr/>
           <p:nvPr/>
         </p:nvSpPr>
@@ -30081,7 +30956,7 @@
       </p:sp>
       <p:sp>
         <p:nvSpPr>
-          <p:cNvPr id="23" name="Text 21"/>
+          <p:cNvPr id="26" name="Text 24"/>
           <p:cNvSpPr/>
           <p:nvPr/>
         </p:nvSpPr>
@@ -30120,7 +30995,7 @@
       </p:sp>
       <p:sp>
         <p:nvSpPr>
-          <p:cNvPr id="24" name="Shape 22"/>
+          <p:cNvPr id="27" name="Shape 25"/>
           <p:cNvSpPr/>
           <p:nvPr/>
         </p:nvSpPr>
@@ -30147,13 +31022,13 @@
       </p:sp>
       <p:sp>
         <p:nvSpPr>
-          <p:cNvPr id="25" name="Shape 23"/>
-          <p:cNvSpPr/>
-          <p:nvPr/>
-        </p:nvSpPr>
-        <p:spPr>
-          <a:xfrm>
-            <a:off x="2313432" y="3364992"/>
+          <p:cNvPr id="28" name="Shape 26"/>
+          <p:cNvSpPr/>
+          <p:nvPr/>
+        </p:nvSpPr>
+        <p:spPr>
+          <a:xfrm>
+            <a:off x="2999232" y="3364992"/>
             <a:ext cx="1645920" cy="475488"/>
           </a:xfrm>
           <a:prstGeom prst="rect">
@@ -30174,13 +31049,13 @@
       </p:sp>
       <p:sp>
         <p:nvSpPr>
-          <p:cNvPr id="26" name="Text 24"/>
-          <p:cNvSpPr/>
-          <p:nvPr/>
-        </p:nvSpPr>
-        <p:spPr>
-          <a:xfrm>
-            <a:off x="2313432" y="3364992"/>
+          <p:cNvPr id="29" name="Text 27"/>
+          <p:cNvSpPr/>
+          <p:nvPr/>
+        </p:nvSpPr>
+        <p:spPr>
+          <a:xfrm>
+            <a:off x="2999232" y="3364992"/>
             <a:ext cx="1645920" cy="475488"/>
           </a:xfrm>
           <a:prstGeom prst="rect">
@@ -30213,14 +31088,14 @@
       </p:sp>
       <p:sp>
         <p:nvSpPr>
-          <p:cNvPr id="27" name="Text 25"/>
-          <p:cNvSpPr/>
-          <p:nvPr/>
-        </p:nvSpPr>
-        <p:spPr>
-          <a:xfrm>
-            <a:off x="3959352" y="3364992"/>
-            <a:ext cx="411480" cy="475488"/>
+          <p:cNvPr id="30" name="Text 28"/>
+          <p:cNvSpPr/>
+          <p:nvPr/>
+        </p:nvSpPr>
+        <p:spPr>
+          <a:xfrm>
+            <a:off x="4645152" y="3364992"/>
+            <a:ext cx="1097280" cy="475488"/>
           </a:xfrm>
           <a:prstGeom prst="rect">
             <a:avLst/>
@@ -30252,13 +31127,13 @@
       </p:sp>
       <p:sp>
         <p:nvSpPr>
-          <p:cNvPr id="28" name="Shape 26"/>
-          <p:cNvSpPr/>
-          <p:nvPr/>
-        </p:nvSpPr>
-        <p:spPr>
-          <a:xfrm>
-            <a:off x="4370832" y="3364992"/>
+          <p:cNvPr id="31" name="Shape 29"/>
+          <p:cNvSpPr/>
+          <p:nvPr/>
+        </p:nvSpPr>
+        <p:spPr>
+          <a:xfrm>
+            <a:off x="5742432" y="3364992"/>
             <a:ext cx="1645920" cy="475488"/>
           </a:xfrm>
           <a:prstGeom prst="rect">
@@ -30279,13 +31154,13 @@
       </p:sp>
       <p:sp>
         <p:nvSpPr>
-          <p:cNvPr id="29" name="Text 27"/>
-          <p:cNvSpPr/>
-          <p:nvPr/>
-        </p:nvSpPr>
-        <p:spPr>
-          <a:xfrm>
-            <a:off x="4370832" y="3364992"/>
+          <p:cNvPr id="32" name="Text 30"/>
+          <p:cNvSpPr/>
+          <p:nvPr/>
+        </p:nvSpPr>
+        <p:spPr>
+          <a:xfrm>
+            <a:off x="5742432" y="3364992"/>
             <a:ext cx="1645920" cy="475488"/>
           </a:xfrm>
           <a:prstGeom prst="rect">
@@ -30310,112 +31185,7 @@
                 <a:ea typeface="Trebuchet MS" pitchFamily="34" charset="-122"/>
                 <a:cs typeface="Trebuchet MS" pitchFamily="34" charset="-120"/>
               </a:rPr>
-              <a:t>a</a:t>
-            </a:r>
-            <a:endParaRPr lang="en-US" sz="1400" dirty="0"/>
-          </a:p>
-        </p:txBody>
-      </p:sp>
-      <p:sp>
-        <p:nvSpPr>
-          <p:cNvPr id="30" name="Text 28"/>
-          <p:cNvSpPr/>
-          <p:nvPr/>
-        </p:nvSpPr>
-        <p:spPr>
-          <a:xfrm>
-            <a:off x="6016752" y="3364992"/>
-            <a:ext cx="411480" cy="475488"/>
-          </a:xfrm>
-          <a:prstGeom prst="rect">
-            <a:avLst/>
-          </a:prstGeom>
-          <a:noFill/>
-          <a:ln/>
-        </p:spPr>
-        <p:txBody>
-          <a:bodyPr wrap="square" lIns="0" tIns="0" rIns="0" bIns="0" rtlCol="0" anchor="ctr"/>
-          <a:lstStyle/>
-          <a:p>
-            <a:pPr algn="ctr" indent="0" marL="0">
-              <a:buNone/>
-            </a:pPr>
-            <a:r>
-              <a:rPr lang="en-US" sz="1600" b="1" dirty="0">
-                <a:solidFill>
-                  <a:srgbClr val="0D9488"/>
-                </a:solidFill>
-                <a:latin typeface="Trebuchet MS" pitchFamily="34" charset="0"/>
-                <a:ea typeface="Trebuchet MS" pitchFamily="34" charset="-122"/>
-                <a:cs typeface="Trebuchet MS" pitchFamily="34" charset="-120"/>
-              </a:rPr>
-              <a:t>·</a:t>
-            </a:r>
-            <a:endParaRPr lang="en-US" sz="1600" dirty="0"/>
-          </a:p>
-        </p:txBody>
-      </p:sp>
-      <p:sp>
-        <p:nvSpPr>
-          <p:cNvPr id="31" name="Shape 29"/>
-          <p:cNvSpPr/>
-          <p:nvPr/>
-        </p:nvSpPr>
-        <p:spPr>
-          <a:xfrm>
-            <a:off x="6428232" y="3364992"/>
-            <a:ext cx="1645920" cy="475488"/>
-          </a:xfrm>
-          <a:prstGeom prst="rect">
-            <a:avLst>
-              <a:gd name="adj" fmla="val 9615"/>
-            </a:avLst>
-          </a:prstGeom>
-          <a:solidFill>
-            <a:srgbClr val="FFFFFF"/>
-          </a:solidFill>
-          <a:ln w="12700">
-            <a:solidFill>
-              <a:srgbClr val="0D9488"/>
-            </a:solidFill>
-            <a:prstDash val="solid"/>
-          </a:ln>
-        </p:spPr>
-      </p:sp>
-      <p:sp>
-        <p:nvSpPr>
-          <p:cNvPr id="32" name="Text 30"/>
-          <p:cNvSpPr/>
-          <p:nvPr/>
-        </p:nvSpPr>
-        <p:spPr>
-          <a:xfrm>
-            <a:off x="6428232" y="3364992"/>
-            <a:ext cx="1645920" cy="475488"/>
-          </a:xfrm>
-          <a:prstGeom prst="rect">
-            <a:avLst/>
-          </a:prstGeom>
-          <a:noFill/>
-          <a:ln/>
-        </p:spPr>
-        <p:txBody>
-          <a:bodyPr wrap="square" lIns="0" tIns="0" rIns="0" bIns="0" rtlCol="0" anchor="ctr"/>
-          <a:lstStyle/>
-          <a:p>
-            <a:pPr algn="ctr" indent="0" marL="0">
-              <a:buNone/>
-            </a:pPr>
-            <a:r>
-              <a:rPr lang="en-US" sz="1400" b="1" dirty="0">
-                <a:solidFill>
-                  <a:srgbClr val="0D9488"/>
-                </a:solidFill>
-                <a:latin typeface="Trebuchet MS" pitchFamily="34" charset="0"/>
-                <a:ea typeface="Trebuchet MS" pitchFamily="34" charset="-122"/>
-                <a:cs typeface="Trebuchet MS" pitchFamily="34" charset="-120"/>
-              </a:rPr>
-              <a:t>ble</a:t>
+              <a:t>ings</a:t>
             </a:r>
             <a:endParaRPr lang="en-US" sz="1400" dirty="0"/>
           </a:p>
@@ -30839,7 +31609,7 @@
                 <a:ea typeface="Calibri" pitchFamily="34" charset="-122"/>
                 <a:cs typeface="Calibri" pitchFamily="34" charset="-120"/>
               </a:rPr>
-              <a:t>Word Labs  •  wordlabs.app  •  Root: 'teach' = to show or instruct others</a:t>
+              <a:t>Word Labs  •  wordlabs.app  •  Root: 'teach' = to show or instruct</a:t>
             </a:r>
             <a:endParaRPr lang="en-US" sz="800" dirty="0"/>
           </a:p>
@@ -30978,7 +31748,7 @@
                 <a:ea typeface="Trebuchet MS" pitchFamily="34" charset="-122"/>
                 <a:cs typeface="Trebuchet MS" pitchFamily="34" charset="-120"/>
               </a:rPr>
-              <a:t>teachable</a:t>
+              <a:t>teachings</a:t>
             </a:r>
             <a:endParaRPr lang="en-US" sz="2800" dirty="0"/>
           </a:p>
@@ -31058,7 +31828,7 @@
         </p:nvSpPr>
         <p:spPr>
           <a:xfrm>
-            <a:off x="2938272" y="2258568"/>
+            <a:off x="2221992" y="2258568"/>
             <a:ext cx="1828800" cy="292608"/>
           </a:xfrm>
           <a:prstGeom prst="rect">
@@ -31092,7 +31862,7 @@
         </p:nvSpPr>
         <p:spPr>
           <a:xfrm>
-            <a:off x="2938272" y="2258568"/>
+            <a:off x="2221992" y="2258568"/>
             <a:ext cx="1828800" cy="292608"/>
           </a:xfrm>
           <a:prstGeom prst="rect">
@@ -31131,7 +31901,7 @@
         </p:nvSpPr>
         <p:spPr>
           <a:xfrm>
-            <a:off x="2938272" y="2569464"/>
+            <a:off x="2221992" y="2569464"/>
             <a:ext cx="1828800" cy="201168"/>
           </a:xfrm>
           <a:prstGeom prst="rect">
@@ -31156,7 +31926,7 @@
                 <a:ea typeface="Calibri" pitchFamily="34" charset="-122"/>
                 <a:cs typeface="Calibri" pitchFamily="34" charset="-120"/>
               </a:rPr>
-              <a:t>to instruct or show</a:t>
+              <a:t>to show or instruct</a:t>
             </a:r>
             <a:endParaRPr lang="en-US" sz="850" dirty="0"/>
           </a:p>
@@ -31170,7 +31940,7 @@
         </p:nvSpPr>
         <p:spPr>
           <a:xfrm>
-            <a:off x="5803392" y="2258568"/>
+            <a:off x="4370832" y="2258568"/>
             <a:ext cx="1828800" cy="292608"/>
           </a:xfrm>
           <a:prstGeom prst="rect">
@@ -31204,7 +31974,7 @@
         </p:nvSpPr>
         <p:spPr>
           <a:xfrm>
-            <a:off x="5803392" y="2258568"/>
+            <a:off x="4370832" y="2258568"/>
             <a:ext cx="1828800" cy="292608"/>
           </a:xfrm>
           <a:prstGeom prst="rect">
@@ -31229,7 +31999,7 @@
                 <a:ea typeface="Trebuchet MS" pitchFamily="34" charset="-122"/>
                 <a:cs typeface="Trebuchet MS" pitchFamily="34" charset="-120"/>
               </a:rPr>
-              <a:t>able</a:t>
+              <a:t>ing</a:t>
             </a:r>
             <a:endParaRPr lang="en-US" sz="1300" dirty="0"/>
           </a:p>
@@ -31243,7 +32013,7 @@
         </p:nvSpPr>
         <p:spPr>
           <a:xfrm>
-            <a:off x="5803392" y="2569464"/>
+            <a:off x="4370832" y="2569464"/>
             <a:ext cx="1828800" cy="201168"/>
           </a:xfrm>
           <a:prstGeom prst="rect">
@@ -31268,7 +32038,7 @@
                 <a:ea typeface="Calibri" pitchFamily="34" charset="-122"/>
                 <a:cs typeface="Calibri" pitchFamily="34" charset="-120"/>
               </a:rPr>
-              <a:t>able to be</a:t>
+              <a:t>ongoing action</a:t>
             </a:r>
             <a:endParaRPr lang="en-US" sz="850" dirty="0"/>
           </a:p>
@@ -31277,6 +32047,118 @@
       <p:sp>
         <p:nvSpPr>
           <p:cNvPr id="22" name="Shape 20"/>
+          <p:cNvSpPr/>
+          <p:nvPr/>
+        </p:nvSpPr>
+        <p:spPr>
+          <a:xfrm>
+            <a:off x="6519672" y="2258568"/>
+            <a:ext cx="1828800" cy="292608"/>
+          </a:xfrm>
+          <a:prstGeom prst="rect">
+            <a:avLst>
+              <a:gd name="adj" fmla="val 25000"/>
+            </a:avLst>
+          </a:prstGeom>
+          <a:solidFill>
+            <a:srgbClr val="FCE7F3"/>
+          </a:solidFill>
+          <a:ln w="19050">
+            <a:solidFill>
+              <a:srgbClr val="DB2777"/>
+            </a:solidFill>
+            <a:prstDash val="solid"/>
+          </a:ln>
+          <a:effectLst>
+            <a:outerShdw sx="100000" sy="100000" kx="0" ky="0" algn="bl" rotWithShape="0" blurRad="101600" dist="38100" dir="8100000">
+              <a:srgbClr val="000000">
+                <a:alpha val="12000"/>
+              </a:srgbClr>
+            </a:outerShdw>
+          </a:effectLst>
+        </p:spPr>
+      </p:sp>
+      <p:sp>
+        <p:nvSpPr>
+          <p:cNvPr id="23" name="Text 21"/>
+          <p:cNvSpPr/>
+          <p:nvPr/>
+        </p:nvSpPr>
+        <p:spPr>
+          <a:xfrm>
+            <a:off x="6519672" y="2258568"/>
+            <a:ext cx="1828800" cy="292608"/>
+          </a:xfrm>
+          <a:prstGeom prst="rect">
+            <a:avLst/>
+          </a:prstGeom>
+          <a:noFill/>
+          <a:ln/>
+        </p:spPr>
+        <p:txBody>
+          <a:bodyPr wrap="square" lIns="0" tIns="0" rIns="0" bIns="0" rtlCol="0" anchor="ctr"/>
+          <a:lstStyle/>
+          <a:p>
+            <a:pPr algn="ctr" indent="0" marL="0">
+              <a:buNone/>
+            </a:pPr>
+            <a:r>
+              <a:rPr lang="en-US" sz="1300" b="1" dirty="0">
+                <a:solidFill>
+                  <a:srgbClr val="9D174D"/>
+                </a:solidFill>
+                <a:latin typeface="Trebuchet MS" pitchFamily="34" charset="0"/>
+                <a:ea typeface="Trebuchet MS" pitchFamily="34" charset="-122"/>
+                <a:cs typeface="Trebuchet MS" pitchFamily="34" charset="-120"/>
+              </a:rPr>
+              <a:t>s</a:t>
+            </a:r>
+            <a:endParaRPr lang="en-US" sz="1300" dirty="0"/>
+          </a:p>
+        </p:txBody>
+      </p:sp>
+      <p:sp>
+        <p:nvSpPr>
+          <p:cNvPr id="24" name="Text 22"/>
+          <p:cNvSpPr/>
+          <p:nvPr/>
+        </p:nvSpPr>
+        <p:spPr>
+          <a:xfrm>
+            <a:off x="6519672" y="2569464"/>
+            <a:ext cx="1828800" cy="201168"/>
+          </a:xfrm>
+          <a:prstGeom prst="rect">
+            <a:avLst/>
+          </a:prstGeom>
+          <a:noFill/>
+          <a:ln/>
+        </p:spPr>
+        <p:txBody>
+          <a:bodyPr wrap="square" lIns="0" tIns="0" rIns="0" bIns="0" rtlCol="0" anchor="t"/>
+          <a:lstStyle/>
+          <a:p>
+            <a:pPr algn="ctr" indent="0" marL="0">
+              <a:buNone/>
+            </a:pPr>
+            <a:r>
+              <a:rPr lang="en-US" sz="850" dirty="0">
+                <a:solidFill>
+                  <a:srgbClr val="475569"/>
+                </a:solidFill>
+                <a:latin typeface="Calibri" pitchFamily="34" charset="0"/>
+                <a:ea typeface="Calibri" pitchFamily="34" charset="-122"/>
+                <a:cs typeface="Calibri" pitchFamily="34" charset="-120"/>
+              </a:rPr>
+              <a:t>more than one</a:t>
+            </a:r>
+            <a:endParaRPr lang="en-US" sz="850" dirty="0"/>
+          </a:p>
+        </p:txBody>
+      </p:sp>
+      <p:sp>
+        <p:nvSpPr>
+          <p:cNvPr id="25" name="Shape 23"/>
           <p:cNvSpPr/>
           <p:nvPr/>
         </p:nvSpPr>
@@ -31303,7 +32185,7 @@
       </p:sp>
       <p:sp>
         <p:nvSpPr>
-          <p:cNvPr id="23" name="Text 21"/>
+          <p:cNvPr id="26" name="Text 24"/>
           <p:cNvSpPr/>
           <p:nvPr/>
         </p:nvSpPr>
@@ -31342,7 +32224,7 @@
       </p:sp>
       <p:sp>
         <p:nvSpPr>
-          <p:cNvPr id="24" name="Shape 22"/>
+          <p:cNvPr id="27" name="Shape 25"/>
           <p:cNvSpPr/>
           <p:nvPr/>
         </p:nvSpPr>
@@ -31369,13 +32251,13 @@
       </p:sp>
       <p:sp>
         <p:nvSpPr>
-          <p:cNvPr id="25" name="Shape 23"/>
-          <p:cNvSpPr/>
-          <p:nvPr/>
-        </p:nvSpPr>
-        <p:spPr>
-          <a:xfrm>
-            <a:off x="2313432" y="3364992"/>
+          <p:cNvPr id="28" name="Shape 26"/>
+          <p:cNvSpPr/>
+          <p:nvPr/>
+        </p:nvSpPr>
+        <p:spPr>
+          <a:xfrm>
+            <a:off x="2999232" y="3364992"/>
             <a:ext cx="1645920" cy="475488"/>
           </a:xfrm>
           <a:prstGeom prst="rect">
@@ -31396,13 +32278,13 @@
       </p:sp>
       <p:sp>
         <p:nvSpPr>
-          <p:cNvPr id="26" name="Text 24"/>
-          <p:cNvSpPr/>
-          <p:nvPr/>
-        </p:nvSpPr>
-        <p:spPr>
-          <a:xfrm>
-            <a:off x="2313432" y="3364992"/>
+          <p:cNvPr id="29" name="Text 27"/>
+          <p:cNvSpPr/>
+          <p:nvPr/>
+        </p:nvSpPr>
+        <p:spPr>
+          <a:xfrm>
+            <a:off x="2999232" y="3364992"/>
             <a:ext cx="1645920" cy="475488"/>
           </a:xfrm>
           <a:prstGeom prst="rect">
@@ -31435,14 +32317,14 @@
       </p:sp>
       <p:sp>
         <p:nvSpPr>
-          <p:cNvPr id="27" name="Text 25"/>
-          <p:cNvSpPr/>
-          <p:nvPr/>
-        </p:nvSpPr>
-        <p:spPr>
-          <a:xfrm>
-            <a:off x="3959352" y="3364992"/>
-            <a:ext cx="411480" cy="475488"/>
+          <p:cNvPr id="30" name="Text 28"/>
+          <p:cNvSpPr/>
+          <p:nvPr/>
+        </p:nvSpPr>
+        <p:spPr>
+          <a:xfrm>
+            <a:off x="4645152" y="3364992"/>
+            <a:ext cx="1097280" cy="475488"/>
           </a:xfrm>
           <a:prstGeom prst="rect">
             <a:avLst/>
@@ -31474,13 +32356,13 @@
       </p:sp>
       <p:sp>
         <p:nvSpPr>
-          <p:cNvPr id="28" name="Shape 26"/>
-          <p:cNvSpPr/>
-          <p:nvPr/>
-        </p:nvSpPr>
-        <p:spPr>
-          <a:xfrm>
-            <a:off x="4370832" y="3364992"/>
+          <p:cNvPr id="31" name="Shape 29"/>
+          <p:cNvSpPr/>
+          <p:nvPr/>
+        </p:nvSpPr>
+        <p:spPr>
+          <a:xfrm>
+            <a:off x="5742432" y="3364992"/>
             <a:ext cx="1645920" cy="475488"/>
           </a:xfrm>
           <a:prstGeom prst="rect">
@@ -31501,13 +32383,13 @@
       </p:sp>
       <p:sp>
         <p:nvSpPr>
-          <p:cNvPr id="29" name="Text 27"/>
-          <p:cNvSpPr/>
-          <p:nvPr/>
-        </p:nvSpPr>
-        <p:spPr>
-          <a:xfrm>
-            <a:off x="4370832" y="3364992"/>
+          <p:cNvPr id="32" name="Text 30"/>
+          <p:cNvSpPr/>
+          <p:nvPr/>
+        </p:nvSpPr>
+        <p:spPr>
+          <a:xfrm>
+            <a:off x="5742432" y="3364992"/>
             <a:ext cx="1645920" cy="475488"/>
           </a:xfrm>
           <a:prstGeom prst="rect">
@@ -31532,7 +32414,7 @@
                 <a:ea typeface="Trebuchet MS" pitchFamily="34" charset="-122"/>
                 <a:cs typeface="Trebuchet MS" pitchFamily="34" charset="-120"/>
               </a:rPr>
-              <a:t>a</a:t>
+              <a:t>ings</a:t>
             </a:r>
             <a:endParaRPr lang="en-US" sz="1400" dirty="0"/>
           </a:p>
@@ -31540,211 +32422,238 @@
       </p:sp>
       <p:sp>
         <p:nvSpPr>
-          <p:cNvPr id="30" name="Text 28"/>
-          <p:cNvSpPr/>
-          <p:nvPr/>
-        </p:nvSpPr>
-        <p:spPr>
-          <a:xfrm>
-            <a:off x="6016752" y="3364992"/>
-            <a:ext cx="411480" cy="475488"/>
-          </a:xfrm>
-          <a:prstGeom prst="rect">
-            <a:avLst/>
-          </a:prstGeom>
-          <a:noFill/>
-          <a:ln/>
-        </p:spPr>
-        <p:txBody>
-          <a:bodyPr wrap="square" lIns="0" tIns="0" rIns="0" bIns="0" rtlCol="0" anchor="ctr"/>
-          <a:lstStyle/>
-          <a:p>
-            <a:pPr algn="ctr" indent="0" marL="0">
-              <a:buNone/>
-            </a:pPr>
-            <a:r>
-              <a:rPr lang="en-US" sz="1600" b="1" dirty="0">
-                <a:solidFill>
-                  <a:srgbClr val="0D9488"/>
+          <p:cNvPr id="33" name="Shape 31"/>
+          <p:cNvSpPr/>
+          <p:nvPr/>
+        </p:nvSpPr>
+        <p:spPr>
+          <a:xfrm>
+            <a:off x="365760" y="4096512"/>
+            <a:ext cx="1371600" cy="804672"/>
+          </a:xfrm>
+          <a:prstGeom prst="rect">
+            <a:avLst>
+              <a:gd name="adj" fmla="val 6818"/>
+            </a:avLst>
+          </a:prstGeom>
+          <a:solidFill>
+            <a:srgbClr val="E2E8F0"/>
+          </a:solidFill>
+          <a:ln w="12700">
+            <a:solidFill>
+              <a:srgbClr val="E2E8F0"/>
+            </a:solidFill>
+            <a:prstDash val="solid"/>
+          </a:ln>
+        </p:spPr>
+      </p:sp>
+      <p:sp>
+        <p:nvSpPr>
+          <p:cNvPr id="34" name="Text 32"/>
+          <p:cNvSpPr/>
+          <p:nvPr/>
+        </p:nvSpPr>
+        <p:spPr>
+          <a:xfrm>
+            <a:off x="365760" y="4096512"/>
+            <a:ext cx="1371600" cy="804672"/>
+          </a:xfrm>
+          <a:prstGeom prst="rect">
+            <a:avLst/>
+          </a:prstGeom>
+          <a:noFill/>
+          <a:ln/>
+        </p:spPr>
+        <p:txBody>
+          <a:bodyPr wrap="square" lIns="0" tIns="0" rIns="0" bIns="0" rtlCol="0" anchor="ctr"/>
+          <a:lstStyle/>
+          <a:p>
+            <a:pPr algn="ctr" indent="0" marL="0">
+              <a:buNone/>
+            </a:pPr>
+            <a:r>
+              <a:rPr lang="en-US" sz="1100" b="1" dirty="0">
+                <a:solidFill>
+                  <a:srgbClr val="475569"/>
                 </a:solidFill>
                 <a:latin typeface="Trebuchet MS" pitchFamily="34" charset="0"/>
                 <a:ea typeface="Trebuchet MS" pitchFamily="34" charset="-122"/>
                 <a:cs typeface="Trebuchet MS" pitchFamily="34" charset="-120"/>
               </a:rPr>
-              <a:t>·</a:t>
-            </a:r>
-            <a:endParaRPr lang="en-US" sz="1600" dirty="0"/>
-          </a:p>
-        </p:txBody>
-      </p:sp>
-      <p:sp>
-        <p:nvSpPr>
-          <p:cNvPr id="31" name="Shape 29"/>
-          <p:cNvSpPr/>
-          <p:nvPr/>
-        </p:nvSpPr>
-        <p:spPr>
-          <a:xfrm>
-            <a:off x="6428232" y="3364992"/>
-            <a:ext cx="1645920" cy="475488"/>
+              <a:t>Phonemes</a:t>
+            </a:r>
+            <a:endParaRPr lang="en-US" sz="1100" dirty="0"/>
+          </a:p>
+        </p:txBody>
+      </p:sp>
+      <p:sp>
+        <p:nvSpPr>
+          <p:cNvPr id="35" name="Shape 33"/>
+          <p:cNvSpPr/>
+          <p:nvPr/>
+        </p:nvSpPr>
+        <p:spPr>
+          <a:xfrm>
+            <a:off x="1874520" y="4096512"/>
+            <a:ext cx="6903720" cy="658368"/>
           </a:xfrm>
           <a:prstGeom prst="rect">
             <a:avLst>
-              <a:gd name="adj" fmla="val 9615"/>
+              <a:gd name="adj" fmla="val 8333"/>
             </a:avLst>
           </a:prstGeom>
           <a:solidFill>
+            <a:srgbClr val="FCE7F3"/>
+          </a:solidFill>
+          <a:ln w="12700">
+            <a:solidFill>
+              <a:srgbClr val="DB2777"/>
+            </a:solidFill>
+            <a:prstDash val="solid"/>
+          </a:ln>
+        </p:spPr>
+      </p:sp>
+      <p:sp>
+        <p:nvSpPr>
+          <p:cNvPr id="36" name="Shape 34"/>
+          <p:cNvSpPr/>
+          <p:nvPr/>
+        </p:nvSpPr>
+        <p:spPr>
+          <a:xfrm>
+            <a:off x="2254649" y="4169664"/>
+            <a:ext cx="685800" cy="475488"/>
+          </a:xfrm>
+          <a:prstGeom prst="rect">
+            <a:avLst>
+              <a:gd name="adj" fmla="val 7692"/>
+            </a:avLst>
+          </a:prstGeom>
+          <a:solidFill>
             <a:srgbClr val="FFFFFF"/>
           </a:solidFill>
           <a:ln w="12700">
             <a:solidFill>
-              <a:srgbClr val="0D9488"/>
-            </a:solidFill>
-            <a:prstDash val="solid"/>
-          </a:ln>
-        </p:spPr>
-      </p:sp>
-      <p:sp>
-        <p:nvSpPr>
-          <p:cNvPr id="32" name="Text 30"/>
-          <p:cNvSpPr/>
-          <p:nvPr/>
-        </p:nvSpPr>
-        <p:spPr>
-          <a:xfrm>
-            <a:off x="6428232" y="3364992"/>
-            <a:ext cx="1645920" cy="475488"/>
-          </a:xfrm>
-          <a:prstGeom prst="rect">
-            <a:avLst/>
-          </a:prstGeom>
-          <a:noFill/>
-          <a:ln/>
-        </p:spPr>
-        <p:txBody>
-          <a:bodyPr wrap="square" lIns="0" tIns="0" rIns="0" bIns="0" rtlCol="0" anchor="ctr"/>
-          <a:lstStyle/>
-          <a:p>
-            <a:pPr algn="ctr" indent="0" marL="0">
-              <a:buNone/>
-            </a:pPr>
-            <a:r>
-              <a:rPr lang="en-US" sz="1400" b="1" dirty="0">
-                <a:solidFill>
-                  <a:srgbClr val="0D9488"/>
+              <a:srgbClr val="DB2777"/>
+            </a:solidFill>
+            <a:prstDash val="solid"/>
+          </a:ln>
+        </p:spPr>
+      </p:sp>
+      <p:sp>
+        <p:nvSpPr>
+          <p:cNvPr id="37" name="Text 35"/>
+          <p:cNvSpPr/>
+          <p:nvPr/>
+        </p:nvSpPr>
+        <p:spPr>
+          <a:xfrm>
+            <a:off x="2254649" y="4169664"/>
+            <a:ext cx="685800" cy="475488"/>
+          </a:xfrm>
+          <a:prstGeom prst="rect">
+            <a:avLst/>
+          </a:prstGeom>
+          <a:noFill/>
+          <a:ln/>
+        </p:spPr>
+        <p:txBody>
+          <a:bodyPr wrap="square" lIns="0" tIns="0" rIns="0" bIns="0" rtlCol="0" anchor="ctr"/>
+          <a:lstStyle/>
+          <a:p>
+            <a:pPr algn="ctr" indent="0" marL="0">
+              <a:buNone/>
+            </a:pPr>
+            <a:r>
+              <a:rPr lang="en-US" sz="900" b="1" dirty="0">
+                <a:solidFill>
+                  <a:srgbClr val="9D174D"/>
                 </a:solidFill>
                 <a:latin typeface="Trebuchet MS" pitchFamily="34" charset="0"/>
                 <a:ea typeface="Trebuchet MS" pitchFamily="34" charset="-122"/>
                 <a:cs typeface="Trebuchet MS" pitchFamily="34" charset="-120"/>
               </a:rPr>
-              <a:t>ble</a:t>
-            </a:r>
-            <a:endParaRPr lang="en-US" sz="1400" dirty="0"/>
-          </a:p>
-        </p:txBody>
-      </p:sp>
-      <p:sp>
-        <p:nvSpPr>
-          <p:cNvPr id="33" name="Shape 31"/>
-          <p:cNvSpPr/>
-          <p:nvPr/>
-        </p:nvSpPr>
-        <p:spPr>
-          <a:xfrm>
-            <a:off x="365760" y="4096512"/>
-            <a:ext cx="1371600" cy="804672"/>
+              <a:t>t</a:t>
+            </a:r>
+            <a:endParaRPr lang="en-US" sz="900" dirty="0"/>
+          </a:p>
+        </p:txBody>
+      </p:sp>
+      <p:sp>
+        <p:nvSpPr>
+          <p:cNvPr id="38" name="Shape 36"/>
+          <p:cNvSpPr/>
+          <p:nvPr/>
+        </p:nvSpPr>
+        <p:spPr>
+          <a:xfrm>
+            <a:off x="3293146" y="4169664"/>
+            <a:ext cx="685800" cy="475488"/>
           </a:xfrm>
           <a:prstGeom prst="rect">
             <a:avLst>
-              <a:gd name="adj" fmla="val 6818"/>
+              <a:gd name="adj" fmla="val 7692"/>
             </a:avLst>
           </a:prstGeom>
           <a:solidFill>
-            <a:srgbClr val="E2E8F0"/>
-          </a:solidFill>
-          <a:ln w="12700">
-            <a:solidFill>
-              <a:srgbClr val="E2E8F0"/>
-            </a:solidFill>
-            <a:prstDash val="solid"/>
-          </a:ln>
-        </p:spPr>
-      </p:sp>
-      <p:sp>
-        <p:nvSpPr>
-          <p:cNvPr id="34" name="Text 32"/>
-          <p:cNvSpPr/>
-          <p:nvPr/>
-        </p:nvSpPr>
-        <p:spPr>
-          <a:xfrm>
-            <a:off x="365760" y="4096512"/>
-            <a:ext cx="1371600" cy="804672"/>
-          </a:xfrm>
-          <a:prstGeom prst="rect">
-            <a:avLst/>
-          </a:prstGeom>
-          <a:noFill/>
-          <a:ln/>
-        </p:spPr>
-        <p:txBody>
-          <a:bodyPr wrap="square" lIns="0" tIns="0" rIns="0" bIns="0" rtlCol="0" anchor="ctr"/>
-          <a:lstStyle/>
-          <a:p>
-            <a:pPr algn="ctr" indent="0" marL="0">
-              <a:buNone/>
-            </a:pPr>
-            <a:r>
-              <a:rPr lang="en-US" sz="1100" b="1" dirty="0">
-                <a:solidFill>
-                  <a:srgbClr val="475569"/>
+            <a:srgbClr val="FFFFFF"/>
+          </a:solidFill>
+          <a:ln w="12700">
+            <a:solidFill>
+              <a:srgbClr val="DB2777"/>
+            </a:solidFill>
+            <a:prstDash val="solid"/>
+          </a:ln>
+        </p:spPr>
+      </p:sp>
+      <p:sp>
+        <p:nvSpPr>
+          <p:cNvPr id="39" name="Text 37"/>
+          <p:cNvSpPr/>
+          <p:nvPr/>
+        </p:nvSpPr>
+        <p:spPr>
+          <a:xfrm>
+            <a:off x="3293146" y="4169664"/>
+            <a:ext cx="685800" cy="475488"/>
+          </a:xfrm>
+          <a:prstGeom prst="rect">
+            <a:avLst/>
+          </a:prstGeom>
+          <a:noFill/>
+          <a:ln/>
+        </p:spPr>
+        <p:txBody>
+          <a:bodyPr wrap="square" lIns="0" tIns="0" rIns="0" bIns="0" rtlCol="0" anchor="ctr"/>
+          <a:lstStyle/>
+          <a:p>
+            <a:pPr algn="ctr" indent="0" marL="0">
+              <a:buNone/>
+            </a:pPr>
+            <a:r>
+              <a:rPr lang="en-US" sz="900" b="1" dirty="0">
+                <a:solidFill>
+                  <a:srgbClr val="9D174D"/>
                 </a:solidFill>
                 <a:latin typeface="Trebuchet MS" pitchFamily="34" charset="0"/>
                 <a:ea typeface="Trebuchet MS" pitchFamily="34" charset="-122"/>
                 <a:cs typeface="Trebuchet MS" pitchFamily="34" charset="-120"/>
               </a:rPr>
-              <a:t>Phonemes</a:t>
-            </a:r>
-            <a:endParaRPr lang="en-US" sz="1100" dirty="0"/>
-          </a:p>
-        </p:txBody>
-      </p:sp>
-      <p:sp>
-        <p:nvSpPr>
-          <p:cNvPr id="35" name="Shape 33"/>
-          <p:cNvSpPr/>
-          <p:nvPr/>
-        </p:nvSpPr>
-        <p:spPr>
-          <a:xfrm>
-            <a:off x="1874520" y="4096512"/>
-            <a:ext cx="6903720" cy="658368"/>
-          </a:xfrm>
-          <a:prstGeom prst="rect">
-            <a:avLst>
-              <a:gd name="adj" fmla="val 8333"/>
-            </a:avLst>
-          </a:prstGeom>
-          <a:solidFill>
-            <a:srgbClr val="FCE7F3"/>
-          </a:solidFill>
-          <a:ln w="12700">
-            <a:solidFill>
-              <a:srgbClr val="DB2777"/>
-            </a:solidFill>
-            <a:prstDash val="solid"/>
-          </a:ln>
-        </p:spPr>
-      </p:sp>
-      <p:sp>
-        <p:nvSpPr>
-          <p:cNvPr id="36" name="Shape 34"/>
-          <p:cNvSpPr/>
-          <p:nvPr/>
-        </p:nvSpPr>
-        <p:spPr>
-          <a:xfrm>
-            <a:off x="2254649" y="4169664"/>
+              <a:t>ea</a:t>
+            </a:r>
+            <a:endParaRPr lang="en-US" sz="900" dirty="0"/>
+          </a:p>
+        </p:txBody>
+      </p:sp>
+      <p:sp>
+        <p:nvSpPr>
+          <p:cNvPr id="40" name="Shape 38"/>
+          <p:cNvSpPr/>
+          <p:nvPr/>
+        </p:nvSpPr>
+        <p:spPr>
+          <a:xfrm>
+            <a:off x="4331643" y="4169664"/>
             <a:ext cx="685800" cy="475488"/>
           </a:xfrm>
           <a:prstGeom prst="rect">
@@ -31765,13 +32674,13 @@
       </p:sp>
       <p:sp>
         <p:nvSpPr>
-          <p:cNvPr id="37" name="Text 35"/>
-          <p:cNvSpPr/>
-          <p:nvPr/>
-        </p:nvSpPr>
-        <p:spPr>
-          <a:xfrm>
-            <a:off x="2254649" y="4169664"/>
+          <p:cNvPr id="41" name="Text 39"/>
+          <p:cNvSpPr/>
+          <p:nvPr/>
+        </p:nvSpPr>
+        <p:spPr>
+          <a:xfrm>
+            <a:off x="4331643" y="4169664"/>
             <a:ext cx="685800" cy="475488"/>
           </a:xfrm>
           <a:prstGeom prst="rect">
@@ -31796,7 +32705,7 @@
                 <a:ea typeface="Trebuchet MS" pitchFamily="34" charset="-122"/>
                 <a:cs typeface="Trebuchet MS" pitchFamily="34" charset="-120"/>
               </a:rPr>
-              <a:t>t</a:t>
+              <a:t>ch</a:t>
             </a:r>
             <a:endParaRPr lang="en-US" sz="900" dirty="0"/>
           </a:p>
@@ -31804,13 +32713,13 @@
       </p:sp>
       <p:sp>
         <p:nvSpPr>
-          <p:cNvPr id="38" name="Shape 36"/>
-          <p:cNvSpPr/>
-          <p:nvPr/>
-        </p:nvSpPr>
-        <p:spPr>
-          <a:xfrm>
-            <a:off x="3293146" y="4169664"/>
+          <p:cNvPr id="42" name="Shape 40"/>
+          <p:cNvSpPr/>
+          <p:nvPr/>
+        </p:nvSpPr>
+        <p:spPr>
+          <a:xfrm>
+            <a:off x="5370141" y="4169664"/>
             <a:ext cx="685800" cy="475488"/>
           </a:xfrm>
           <a:prstGeom prst="rect">
@@ -31831,13 +32740,13 @@
       </p:sp>
       <p:sp>
         <p:nvSpPr>
-          <p:cNvPr id="39" name="Text 37"/>
-          <p:cNvSpPr/>
-          <p:nvPr/>
-        </p:nvSpPr>
-        <p:spPr>
-          <a:xfrm>
-            <a:off x="3293146" y="4169664"/>
+          <p:cNvPr id="43" name="Text 41"/>
+          <p:cNvSpPr/>
+          <p:nvPr/>
+        </p:nvSpPr>
+        <p:spPr>
+          <a:xfrm>
+            <a:off x="5370141" y="4169664"/>
             <a:ext cx="685800" cy="475488"/>
           </a:xfrm>
           <a:prstGeom prst="rect">
@@ -31862,7 +32771,7 @@
                 <a:ea typeface="Trebuchet MS" pitchFamily="34" charset="-122"/>
                 <a:cs typeface="Trebuchet MS" pitchFamily="34" charset="-120"/>
               </a:rPr>
-              <a:t>ea</a:t>
+              <a:t>i</a:t>
             </a:r>
             <a:endParaRPr lang="en-US" sz="900" dirty="0"/>
           </a:p>
@@ -31870,13 +32779,13 @@
       </p:sp>
       <p:sp>
         <p:nvSpPr>
-          <p:cNvPr id="40" name="Shape 38"/>
-          <p:cNvSpPr/>
-          <p:nvPr/>
-        </p:nvSpPr>
-        <p:spPr>
-          <a:xfrm>
-            <a:off x="4331643" y="4169664"/>
+          <p:cNvPr id="44" name="Shape 42"/>
+          <p:cNvSpPr/>
+          <p:nvPr/>
+        </p:nvSpPr>
+        <p:spPr>
+          <a:xfrm>
+            <a:off x="6408638" y="4169664"/>
             <a:ext cx="685800" cy="475488"/>
           </a:xfrm>
           <a:prstGeom prst="rect">
@@ -31897,13 +32806,13 @@
       </p:sp>
       <p:sp>
         <p:nvSpPr>
-          <p:cNvPr id="41" name="Text 39"/>
-          <p:cNvSpPr/>
-          <p:nvPr/>
-        </p:nvSpPr>
-        <p:spPr>
-          <a:xfrm>
-            <a:off x="4331643" y="4169664"/>
+          <p:cNvPr id="45" name="Text 43"/>
+          <p:cNvSpPr/>
+          <p:nvPr/>
+        </p:nvSpPr>
+        <p:spPr>
+          <a:xfrm>
+            <a:off x="6408638" y="4169664"/>
             <a:ext cx="685800" cy="475488"/>
           </a:xfrm>
           <a:prstGeom prst="rect">
@@ -31928,7 +32837,7 @@
                 <a:ea typeface="Trebuchet MS" pitchFamily="34" charset="-122"/>
                 <a:cs typeface="Trebuchet MS" pitchFamily="34" charset="-120"/>
               </a:rPr>
-              <a:t>ch</a:t>
+              <a:t>ng</a:t>
             </a:r>
             <a:endParaRPr lang="en-US" sz="900" dirty="0"/>
           </a:p>
@@ -31936,13 +32845,13 @@
       </p:sp>
       <p:sp>
         <p:nvSpPr>
-          <p:cNvPr id="42" name="Shape 40"/>
-          <p:cNvSpPr/>
-          <p:nvPr/>
-        </p:nvSpPr>
-        <p:spPr>
-          <a:xfrm>
-            <a:off x="5370141" y="4169664"/>
+          <p:cNvPr id="46" name="Shape 44"/>
+          <p:cNvSpPr/>
+          <p:nvPr/>
+        </p:nvSpPr>
+        <p:spPr>
+          <a:xfrm>
+            <a:off x="7447135" y="4169664"/>
             <a:ext cx="685800" cy="475488"/>
           </a:xfrm>
           <a:prstGeom prst="rect">
@@ -31963,13 +32872,13 @@
       </p:sp>
       <p:sp>
         <p:nvSpPr>
-          <p:cNvPr id="43" name="Text 41"/>
-          <p:cNvSpPr/>
-          <p:nvPr/>
-        </p:nvSpPr>
-        <p:spPr>
-          <a:xfrm>
-            <a:off x="5370141" y="4169664"/>
+          <p:cNvPr id="47" name="Text 45"/>
+          <p:cNvSpPr/>
+          <p:nvPr/>
+        </p:nvSpPr>
+        <p:spPr>
+          <a:xfrm>
+            <a:off x="7447135" y="4169664"/>
             <a:ext cx="685800" cy="475488"/>
           </a:xfrm>
           <a:prstGeom prst="rect">
@@ -31994,139 +32903,7 @@
                 <a:ea typeface="Trebuchet MS" pitchFamily="34" charset="-122"/>
                 <a:cs typeface="Trebuchet MS" pitchFamily="34" charset="-120"/>
               </a:rPr>
-              <a:t>a</a:t>
-            </a:r>
-            <a:endParaRPr lang="en-US" sz="900" dirty="0"/>
-          </a:p>
-        </p:txBody>
-      </p:sp>
-      <p:sp>
-        <p:nvSpPr>
-          <p:cNvPr id="44" name="Shape 42"/>
-          <p:cNvSpPr/>
-          <p:nvPr/>
-        </p:nvSpPr>
-        <p:spPr>
-          <a:xfrm>
-            <a:off x="6408638" y="4169664"/>
-            <a:ext cx="685800" cy="475488"/>
-          </a:xfrm>
-          <a:prstGeom prst="rect">
-            <a:avLst>
-              <a:gd name="adj" fmla="val 7692"/>
-            </a:avLst>
-          </a:prstGeom>
-          <a:solidFill>
-            <a:srgbClr val="FFFFFF"/>
-          </a:solidFill>
-          <a:ln w="12700">
-            <a:solidFill>
-              <a:srgbClr val="DB2777"/>
-            </a:solidFill>
-            <a:prstDash val="solid"/>
-          </a:ln>
-        </p:spPr>
-      </p:sp>
-      <p:sp>
-        <p:nvSpPr>
-          <p:cNvPr id="45" name="Text 43"/>
-          <p:cNvSpPr/>
-          <p:nvPr/>
-        </p:nvSpPr>
-        <p:spPr>
-          <a:xfrm>
-            <a:off x="6408638" y="4169664"/>
-            <a:ext cx="685800" cy="475488"/>
-          </a:xfrm>
-          <a:prstGeom prst="rect">
-            <a:avLst/>
-          </a:prstGeom>
-          <a:noFill/>
-          <a:ln/>
-        </p:spPr>
-        <p:txBody>
-          <a:bodyPr wrap="square" lIns="0" tIns="0" rIns="0" bIns="0" rtlCol="0" anchor="ctr"/>
-          <a:lstStyle/>
-          <a:p>
-            <a:pPr algn="ctr" indent="0" marL="0">
-              <a:buNone/>
-            </a:pPr>
-            <a:r>
-              <a:rPr lang="en-US" sz="900" b="1" dirty="0">
-                <a:solidFill>
-                  <a:srgbClr val="9D174D"/>
-                </a:solidFill>
-                <a:latin typeface="Trebuchet MS" pitchFamily="34" charset="0"/>
-                <a:ea typeface="Trebuchet MS" pitchFamily="34" charset="-122"/>
-                <a:cs typeface="Trebuchet MS" pitchFamily="34" charset="-120"/>
-              </a:rPr>
-              <a:t>b</a:t>
-            </a:r>
-            <a:endParaRPr lang="en-US" sz="900" dirty="0"/>
-          </a:p>
-        </p:txBody>
-      </p:sp>
-      <p:sp>
-        <p:nvSpPr>
-          <p:cNvPr id="46" name="Shape 44"/>
-          <p:cNvSpPr/>
-          <p:nvPr/>
-        </p:nvSpPr>
-        <p:spPr>
-          <a:xfrm>
-            <a:off x="7447135" y="4169664"/>
-            <a:ext cx="685800" cy="475488"/>
-          </a:xfrm>
-          <a:prstGeom prst="rect">
-            <a:avLst>
-              <a:gd name="adj" fmla="val 7692"/>
-            </a:avLst>
-          </a:prstGeom>
-          <a:solidFill>
-            <a:srgbClr val="FFFFFF"/>
-          </a:solidFill>
-          <a:ln w="12700">
-            <a:solidFill>
-              <a:srgbClr val="DB2777"/>
-            </a:solidFill>
-            <a:prstDash val="solid"/>
-          </a:ln>
-        </p:spPr>
-      </p:sp>
-      <p:sp>
-        <p:nvSpPr>
-          <p:cNvPr id="47" name="Text 45"/>
-          <p:cNvSpPr/>
-          <p:nvPr/>
-        </p:nvSpPr>
-        <p:spPr>
-          <a:xfrm>
-            <a:off x="7447135" y="4169664"/>
-            <a:ext cx="685800" cy="475488"/>
-          </a:xfrm>
-          <a:prstGeom prst="rect">
-            <a:avLst/>
-          </a:prstGeom>
-          <a:noFill/>
-          <a:ln/>
-        </p:spPr>
-        <p:txBody>
-          <a:bodyPr wrap="square" lIns="0" tIns="0" rIns="0" bIns="0" rtlCol="0" anchor="ctr"/>
-          <a:lstStyle/>
-          <a:p>
-            <a:pPr algn="ctr" indent="0" marL="0">
-              <a:buNone/>
-            </a:pPr>
-            <a:r>
-              <a:rPr lang="en-US" sz="900" b="1" dirty="0">
-                <a:solidFill>
-                  <a:srgbClr val="9D174D"/>
-                </a:solidFill>
-                <a:latin typeface="Trebuchet MS" pitchFamily="34" charset="0"/>
-                <a:ea typeface="Trebuchet MS" pitchFamily="34" charset="-122"/>
-                <a:cs typeface="Trebuchet MS" pitchFamily="34" charset="-120"/>
-              </a:rPr>
-              <a:t>le</a:t>
+              <a:t>s</a:t>
             </a:r>
             <a:endParaRPr lang="en-US" sz="900" dirty="0"/>
           </a:p>
@@ -32418,7 +33195,7 @@
                 <a:ea typeface="Calibri" pitchFamily="34" charset="-122"/>
                 <a:cs typeface="Calibri" pitchFamily="34" charset="-120"/>
               </a:rPr>
-              <a:t>Word Labs  •  wordlabs.app  •  Root: 'teach' = to show or instruct others</a:t>
+              <a:t>Word Labs  •  wordlabs.app  •  Root: 'teach' = to show or instruct</a:t>
             </a:r>
             <a:endParaRPr lang="en-US" sz="800" dirty="0"/>
           </a:p>
@@ -33587,7 +34364,7 @@
                 <a:ea typeface="Calibri" pitchFamily="34" charset="-122"/>
                 <a:cs typeface="Calibri" pitchFamily="34" charset="-120"/>
               </a:rPr>
-              <a:t>Word Labs  •  wordlabs.app  •  Root: 'teach' = to show or instruct others</a:t>
+              <a:t>Word Labs  •  wordlabs.app  •  Root: 'teach' = to show or instruct</a:t>
             </a:r>
             <a:endParaRPr lang="en-US" sz="800" dirty="0"/>
           </a:p>
@@ -34233,7 +35010,7 @@
                 <a:ea typeface="Trebuchet MS" pitchFamily="34" charset="-122"/>
                 <a:cs typeface="Trebuchet MS" pitchFamily="34" charset="-120"/>
               </a:rPr>
-              <a:t>out-</a:t>
+              <a:t>mis-</a:t>
             </a:r>
             <a:endParaRPr lang="en-US" sz="1300" dirty="0"/>
           </a:p>
@@ -34386,7 +35163,7 @@
                 <a:ea typeface="Trebuchet MS" pitchFamily="34" charset="-122"/>
                 <a:cs typeface="Trebuchet MS" pitchFamily="34" charset="-120"/>
               </a:rPr>
-              <a:t>over-</a:t>
+              <a:t>out-</a:t>
             </a:r>
             <a:endParaRPr lang="en-US" sz="1300" dirty="0"/>
           </a:p>
@@ -34475,7 +35252,7 @@
                 <a:ea typeface="Trebuchet MS" pitchFamily="34" charset="-122"/>
                 <a:cs typeface="Trebuchet MS" pitchFamily="34" charset="-120"/>
               </a:rPr>
-              <a:t>-s</a:t>
+              <a:t>-ers</a:t>
             </a:r>
             <a:endParaRPr lang="en-US" sz="1300" dirty="0"/>
           </a:p>
@@ -34539,7 +35316,7 @@
                 <a:ea typeface="Trebuchet MS" pitchFamily="34" charset="-122"/>
                 <a:cs typeface="Trebuchet MS" pitchFamily="34" charset="-120"/>
               </a:rPr>
-              <a:t>mis-</a:t>
+              <a:t>co-</a:t>
             </a:r>
             <a:endParaRPr lang="en-US" sz="1300" dirty="0"/>
           </a:p>
@@ -34865,7 +35642,7 @@
                 <a:ea typeface="Trebuchet MS" pitchFamily="34" charset="-122"/>
                 <a:cs typeface="Trebuchet MS" pitchFamily="34" charset="-120"/>
               </a:rPr>
-              <a:t>teachable</a:t>
+              <a:t>teachers</a:t>
             </a:r>
             <a:endParaRPr lang="en-US" sz="1200" dirty="0"/>
           </a:p>
@@ -34997,7 +35774,7 @@
                 <a:ea typeface="Trebuchet MS" pitchFamily="34" charset="-122"/>
                 <a:cs typeface="Trebuchet MS" pitchFamily="34" charset="-120"/>
               </a:rPr>
-              <a:t>teachers</a:t>
+              <a:t>teachings</a:t>
             </a:r>
             <a:endParaRPr lang="en-US" sz="1200" dirty="0"/>
           </a:p>
@@ -35063,7 +35840,7 @@
                 <a:ea typeface="Trebuchet MS" pitchFamily="34" charset="-122"/>
                 <a:cs typeface="Trebuchet MS" pitchFamily="34" charset="-120"/>
               </a:rPr>
-              <a:t>teachings</a:t>
+              <a:t>teachable</a:t>
             </a:r>
             <a:endParaRPr lang="en-US" sz="1200" dirty="0"/>
           </a:p>
@@ -35129,7 +35906,7 @@
                 <a:ea typeface="Trebuchet MS" pitchFamily="34" charset="-122"/>
                 <a:cs typeface="Trebuchet MS" pitchFamily="34" charset="-120"/>
               </a:rPr>
-              <a:t>unteachable</a:t>
+              <a:t>coteacher</a:t>
             </a:r>
             <a:endParaRPr lang="en-US" sz="1200" dirty="0"/>
           </a:p>
@@ -35195,7 +35972,7 @@
                 <a:ea typeface="Trebuchet MS" pitchFamily="34" charset="-122"/>
                 <a:cs typeface="Trebuchet MS" pitchFamily="34" charset="-120"/>
               </a:rPr>
-              <a:t>outteach</a:t>
+              <a:t>misteach</a:t>
             </a:r>
             <a:endParaRPr lang="en-US" sz="1200" dirty="0"/>
           </a:p>
@@ -35487,7 +36264,7 @@
                 <a:ea typeface="Calibri" pitchFamily="34" charset="-122"/>
                 <a:cs typeface="Calibri" pitchFamily="34" charset="-120"/>
               </a:rPr>
-              <a:t>Word Labs  •  wordlabs.app  •  Root: 'teach' = to show or instruct others</a:t>
+              <a:t>Word Labs  •  wordlabs.app  •  Root: 'teach' = to show or instruct</a:t>
             </a:r>
             <a:endParaRPr lang="en-US" sz="800" dirty="0"/>
           </a:p>
@@ -35651,7 +36428,7 @@
                 <a:ea typeface="Calibri" pitchFamily="34" charset="-122"/>
                 <a:cs typeface="Calibri" pitchFamily="34" charset="-120"/>
               </a:rPr>
-              <a:t>The core part of a word carrying its basic meaning. For example, 'teach' means 'to show or instruct others'.</a:t>
+              <a:t>The core part of a word carrying its basic meaning. For example, 'teach' means 'to show or instruct'.</a:t>
             </a:r>
             <a:endParaRPr lang="en-US" sz="1350" dirty="0"/>
           </a:p>
@@ -36271,7 +37048,7 @@
                 <a:ea typeface="Calibri" pitchFamily="34" charset="-122"/>
                 <a:cs typeface="Calibri" pitchFamily="34" charset="-120"/>
               </a:rPr>
-              <a:t>Word Labs  •  wordlabs.app  •  Root: 'teach' = to show or instruct others</a:t>
+              <a:t>Word Labs  •  wordlabs.app  •  Root: 'teach' = to show or instruct</a:t>
             </a:r>
             <a:endParaRPr lang="en-US" sz="800" dirty="0"/>
           </a:p>
@@ -36383,7 +37160,7 @@
                 <a:ea typeface="Calibri" pitchFamily="34" charset="-122"/>
                 <a:cs typeface="Calibri" pitchFamily="34" charset="-120"/>
               </a:rPr>
-              <a:t>1.  The word 'teacher' contains the root 'teach' plus a suffix meaning 'one who'.</a:t>
+              <a:t>1.  'Reteach' means to teach something again.</a:t>
             </a:r>
             <a:endParaRPr lang="en-US" sz="1300" dirty="0"/>
           </a:p>
@@ -36522,7 +37299,7 @@
                 <a:ea typeface="Calibri" pitchFamily="34" charset="-122"/>
                 <a:cs typeface="Calibri" pitchFamily="34" charset="-120"/>
               </a:rPr>
-              <a:t>2.  The root 'teach' comes from the ancient Greek language.</a:t>
+              <a:t>2.  The root 'teach' comes from the Latin language.</a:t>
             </a:r>
             <a:endParaRPr lang="en-US" sz="1300" dirty="0"/>
           </a:p>
@@ -36661,7 +37438,7 @@
                 <a:ea typeface="Calibri" pitchFamily="34" charset="-122"/>
                 <a:cs typeface="Calibri" pitchFamily="34" charset="-120"/>
               </a:rPr>
-              <a:t>3.  Adding the suffix '-able' to 'teach' makes the word 'teachable', meaning able to be taught.</a:t>
+              <a:t>3.  The word 'teaching' has no suffix added to the root 'teach'.</a:t>
             </a:r>
             <a:endParaRPr lang="en-US" sz="1300" dirty="0"/>
           </a:p>
@@ -36684,11 +37461,11 @@
             </a:avLst>
           </a:prstGeom>
           <a:solidFill>
-            <a:srgbClr val="DCFCE7"/>
-          </a:solidFill>
-          <a:ln w="12700">
-            <a:solidFill>
-              <a:srgbClr val="16A34A"/>
+            <a:srgbClr val="FEE2E2"/>
+          </a:solidFill>
+          <a:ln w="12700">
+            <a:solidFill>
+              <a:srgbClr val="DC2626"/>
             </a:solidFill>
             <a:prstDash val="solid"/>
           </a:ln>
@@ -36721,13 +37498,13 @@
             <a:r>
               <a:rPr lang="en-US" sz="1100" b="1" dirty="0">
                 <a:solidFill>
-                  <a:srgbClr val="16A34A"/>
+                  <a:srgbClr val="DC2626"/>
                 </a:solidFill>
                 <a:latin typeface="Trebuchet MS" pitchFamily="34" charset="0"/>
                 <a:ea typeface="Trebuchet MS" pitchFamily="34" charset="-122"/>
                 <a:cs typeface="Trebuchet MS" pitchFamily="34" charset="-120"/>
               </a:rPr>
-              <a:t>TRUE</a:t>
+              <a:t>FALSE</a:t>
             </a:r>
             <a:endParaRPr lang="en-US" sz="1100" dirty="0"/>
           </a:p>
@@ -36800,7 +37577,7 @@
                 <a:ea typeface="Calibri" pitchFamily="34" charset="-122"/>
                 <a:cs typeface="Calibri" pitchFamily="34" charset="-120"/>
               </a:rPr>
-              <a:t>4.  The word 'reteach' means to teach something again.</a:t>
+              <a:t>4.  Adding '-able' to 'teach' makes the word 'teachable', meaning able to be taught.</a:t>
             </a:r>
             <a:endParaRPr lang="en-US" sz="1300" dirty="0"/>
           </a:p>
@@ -36939,7 +37716,7 @@
                 <a:ea typeface="Calibri" pitchFamily="34" charset="-122"/>
                 <a:cs typeface="Calibri" pitchFamily="34" charset="-120"/>
               </a:rPr>
-              <a:t>5.  The word 'teaching' is a noun and can never be used as a verb.</a:t>
+              <a:t>5.  The word 'teacher' contains the root 'teach' plus the suffix '-er'.</a:t>
             </a:r>
             <a:endParaRPr lang="en-US" sz="1300" dirty="0"/>
           </a:p>
@@ -36962,11 +37739,11 @@
             </a:avLst>
           </a:prstGeom>
           <a:solidFill>
-            <a:srgbClr val="FEE2E2"/>
-          </a:solidFill>
-          <a:ln w="12700">
-            <a:solidFill>
-              <a:srgbClr val="DC2626"/>
+            <a:srgbClr val="DCFCE7"/>
+          </a:solidFill>
+          <a:ln w="12700">
+            <a:solidFill>
+              <a:srgbClr val="16A34A"/>
             </a:solidFill>
             <a:prstDash val="solid"/>
           </a:ln>
@@ -36999,13 +37776,13 @@
             <a:r>
               <a:rPr lang="en-US" sz="1100" b="1" dirty="0">
                 <a:solidFill>
-                  <a:srgbClr val="DC2626"/>
+                  <a:srgbClr val="16A34A"/>
                 </a:solidFill>
                 <a:latin typeface="Trebuchet MS" pitchFamily="34" charset="0"/>
                 <a:ea typeface="Trebuchet MS" pitchFamily="34" charset="-122"/>
                 <a:cs typeface="Trebuchet MS" pitchFamily="34" charset="-120"/>
               </a:rPr>
-              <a:t>FALSE</a:t>
+              <a:t>TRUE</a:t>
             </a:r>
             <a:endParaRPr lang="en-US" sz="1100" dirty="0"/>
           </a:p>
@@ -37297,7 +38074,7 @@
                 <a:ea typeface="Calibri" pitchFamily="34" charset="-122"/>
                 <a:cs typeface="Calibri" pitchFamily="34" charset="-120"/>
               </a:rPr>
-              <a:t>Word Labs  •  wordlabs.app  •  Root: 'teach' = to show or instruct others</a:t>
+              <a:t>Word Labs  •  wordlabs.app  •  Root: 'teach' = to show or instruct</a:t>
             </a:r>
             <a:endParaRPr lang="en-US" sz="800" dirty="0"/>
           </a:p>
@@ -37434,7 +38211,7 @@
                 <a:ea typeface="Trebuchet MS" pitchFamily="34" charset="-122"/>
                 <a:cs typeface="Trebuchet MS" pitchFamily="34" charset="-120"/>
               </a:rPr>
-              <a:t>to show or instruct others</a:t>
+              <a:t>to show or instruct</a:t>
             </a:r>
             <a:endParaRPr lang="en-US" sz="2000" dirty="0"/>
           </a:p>
@@ -37473,7 +38250,7 @@
                 <a:ea typeface="Calibri" pitchFamily="34" charset="-122"/>
                 <a:cs typeface="Calibri" pitchFamily="34" charset="-120"/>
               </a:rPr>
-              <a:t>Origin: Latin: docere</a:t>
+              <a:t>Origin: Old English: tæcan</a:t>
             </a:r>
             <a:endParaRPr lang="en-US" sz="1100" dirty="0"/>
           </a:p>
@@ -37710,7 +38487,7 @@
                 <a:ea typeface="Trebuchet MS" pitchFamily="34" charset="-122"/>
                 <a:cs typeface="Trebuchet MS" pitchFamily="34" charset="-120"/>
               </a:rPr>
-              <a:t>teachable</a:t>
+              <a:t>teachers</a:t>
             </a:r>
             <a:endParaRPr lang="en-US" sz="1300" dirty="0"/>
           </a:p>
@@ -37842,7 +38619,7 @@
                 <a:ea typeface="Trebuchet MS" pitchFamily="34" charset="-122"/>
                 <a:cs typeface="Trebuchet MS" pitchFamily="34" charset="-120"/>
               </a:rPr>
-              <a:t>teachers</a:t>
+              <a:t>teachings</a:t>
             </a:r>
             <a:endParaRPr lang="en-US" sz="1300" dirty="0"/>
           </a:p>
@@ -37908,7 +38685,7 @@
                 <a:ea typeface="Trebuchet MS" pitchFamily="34" charset="-122"/>
                 <a:cs typeface="Trebuchet MS" pitchFamily="34" charset="-120"/>
               </a:rPr>
-              <a:t>teachings</a:t>
+              <a:t>teachable</a:t>
             </a:r>
             <a:endParaRPr lang="en-US" sz="1300" dirty="0"/>
           </a:p>
@@ -37974,7 +38751,7 @@
                 <a:ea typeface="Trebuchet MS" pitchFamily="34" charset="-122"/>
                 <a:cs typeface="Trebuchet MS" pitchFamily="34" charset="-120"/>
               </a:rPr>
-              <a:t>unteachable</a:t>
+              <a:t>coteacher</a:t>
             </a:r>
             <a:endParaRPr lang="en-US" sz="1300" dirty="0"/>
           </a:p>
@@ -38266,7 +39043,7 @@
                 <a:ea typeface="Calibri" pitchFamily="34" charset="-122"/>
                 <a:cs typeface="Calibri" pitchFamily="34" charset="-120"/>
               </a:rPr>
-              <a:t>Word Labs  •  wordlabs.app  •  Root: 'teach' = to show or instruct others</a:t>
+              <a:t>Word Labs  •  wordlabs.app  •  Root: 'teach' = to show or instruct</a:t>
             </a:r>
             <a:endParaRPr lang="en-US" sz="800" dirty="0"/>
           </a:p>
@@ -38912,7 +39689,7 @@
                 <a:ea typeface="Trebuchet MS" pitchFamily="34" charset="-122"/>
                 <a:cs typeface="Trebuchet MS" pitchFamily="34" charset="-120"/>
               </a:rPr>
-              <a:t>out-</a:t>
+              <a:t>mis-</a:t>
             </a:r>
             <a:endParaRPr lang="en-US" sz="1300" dirty="0"/>
           </a:p>
@@ -39065,7 +39842,7 @@
                 <a:ea typeface="Trebuchet MS" pitchFamily="34" charset="-122"/>
                 <a:cs typeface="Trebuchet MS" pitchFamily="34" charset="-120"/>
               </a:rPr>
-              <a:t>over-</a:t>
+              <a:t>out-</a:t>
             </a:r>
             <a:endParaRPr lang="en-US" sz="1300" dirty="0"/>
           </a:p>
@@ -39154,7 +39931,7 @@
                 <a:ea typeface="Trebuchet MS" pitchFamily="34" charset="-122"/>
                 <a:cs typeface="Trebuchet MS" pitchFamily="34" charset="-120"/>
               </a:rPr>
-              <a:t>-s</a:t>
+              <a:t>-ers</a:t>
             </a:r>
             <a:endParaRPr lang="en-US" sz="1300" dirty="0"/>
           </a:p>
@@ -39218,7 +39995,7 @@
                 <a:ea typeface="Trebuchet MS" pitchFamily="34" charset="-122"/>
                 <a:cs typeface="Trebuchet MS" pitchFamily="34" charset="-120"/>
               </a:rPr>
-              <a:t>mis-</a:t>
+              <a:t>co-</a:t>
             </a:r>
             <a:endParaRPr lang="en-US" sz="1300" dirty="0"/>
           </a:p>
@@ -40040,7 +40817,7 @@
                 <a:ea typeface="Calibri" pitchFamily="34" charset="-122"/>
                 <a:cs typeface="Calibri" pitchFamily="34" charset="-120"/>
               </a:rPr>
-              <a:t>Word Labs  •  wordlabs.app  •  Root: 'teach' = to show or instruct others</a:t>
+              <a:t>Word Labs  •  wordlabs.app  •  Root: 'teach' = to show or instruct</a:t>
             </a:r>
             <a:endParaRPr lang="en-US" sz="800" dirty="0"/>
           </a:p>
@@ -40357,7 +41134,7 @@
                 <a:ea typeface="Calibri" pitchFamily="34" charset="-122"/>
                 <a:cs typeface="Calibri" pitchFamily="34" charset="-120"/>
               </a:rPr>
-              <a:t>Able to be taught or willing to learn new things.</a:t>
+              <a:t>More than one person whose job is to help others learn.</a:t>
             </a:r>
             <a:endParaRPr lang="en-US" sz="1200" dirty="0"/>
           </a:p>
@@ -40430,7 +41207,7 @@
                 <a:ea typeface="Trebuchet MS" pitchFamily="34" charset="-122"/>
                 <a:cs typeface="Trebuchet MS" pitchFamily="34" charset="-120"/>
               </a:rPr>
-              <a:t>teachable</a:t>
+              <a:t>teachers</a:t>
             </a:r>
             <a:endParaRPr lang="en-US" sz="1200" dirty="0"/>
           </a:p>
@@ -40496,7 +41273,7 @@
                 <a:ea typeface="Calibri" pitchFamily="34" charset="-122"/>
                 <a:cs typeface="Calibri" pitchFamily="34" charset="-120"/>
               </a:rPr>
-              <a:t>The ideas or lessons that someone shares with others.</a:t>
+              <a:t>Able to be taught; describes someone who is willing and ready to learn.</a:t>
             </a:r>
             <a:endParaRPr lang="en-US" sz="1200" dirty="0"/>
           </a:p>
@@ -40635,7 +41412,7 @@
                 <a:ea typeface="Calibri" pitchFamily="34" charset="-122"/>
                 <a:cs typeface="Calibri" pitchFamily="34" charset="-120"/>
               </a:rPr>
-              <a:t>To teach something again, usually because someone did not understand it the first time.</a:t>
+              <a:t>To teach something again, often because it wasn't understood the first time.</a:t>
             </a:r>
             <a:endParaRPr lang="en-US" sz="1200" dirty="0"/>
           </a:p>
@@ -40708,7 +41485,7 @@
                 <a:ea typeface="Trebuchet MS" pitchFamily="34" charset="-122"/>
                 <a:cs typeface="Trebuchet MS" pitchFamily="34" charset="-120"/>
               </a:rPr>
-              <a:t>teachers</a:t>
+              <a:t>teachings</a:t>
             </a:r>
             <a:endParaRPr lang="en-US" sz="1200" dirty="0"/>
           </a:p>
@@ -40774,7 +41551,7 @@
                 <a:ea typeface="Calibri" pitchFamily="34" charset="-122"/>
                 <a:cs typeface="Calibri" pitchFamily="34" charset="-120"/>
               </a:rPr>
-              <a:t>More than one person whose job is to help others learn.</a:t>
+              <a:t>The ideas or lessons that someone has passed on to others.</a:t>
             </a:r>
             <a:endParaRPr lang="en-US" sz="1200" dirty="0"/>
           </a:p>
@@ -40847,7 +41624,7 @@
                 <a:ea typeface="Trebuchet MS" pitchFamily="34" charset="-122"/>
                 <a:cs typeface="Trebuchet MS" pitchFamily="34" charset="-120"/>
               </a:rPr>
-              <a:t>teachings</a:t>
+              <a:t>teachable</a:t>
             </a:r>
             <a:endParaRPr lang="en-US" sz="1200" dirty="0"/>
           </a:p>
@@ -40913,7 +41690,7 @@
                 <a:ea typeface="Calibri" pitchFamily="34" charset="-122"/>
                 <a:cs typeface="Calibri" pitchFamily="34" charset="-120"/>
               </a:rPr>
-              <a:t>Too difficult to teach or not able to be learned easily.</a:t>
+              <a:t>A person who teaches a class together with another teacher.</a:t>
             </a:r>
             <a:endParaRPr lang="en-US" sz="1200" dirty="0"/>
           </a:p>
@@ -40986,7 +41763,7 @@
                 <a:ea typeface="Trebuchet MS" pitchFamily="34" charset="-122"/>
                 <a:cs typeface="Trebuchet MS" pitchFamily="34" charset="-120"/>
               </a:rPr>
-              <a:t>unteachable</a:t>
+              <a:t>coteacher</a:t>
             </a:r>
             <a:endParaRPr lang="en-US" sz="1200" dirty="0"/>
           </a:p>
@@ -41052,7 +41829,7 @@
                 <a:ea typeface="Calibri" pitchFamily="34" charset="-122"/>
                 <a:cs typeface="Calibri" pitchFamily="34" charset="-120"/>
               </a:rPr>
-              <a:t>The act of sharing knowledge or skills with someone else.</a:t>
+              <a:t>The act of giving lessons or helping someone learn.</a:t>
             </a:r>
             <a:endParaRPr lang="en-US" sz="1200" dirty="0"/>
           </a:p>
@@ -41344,7 +42121,7 @@
                 <a:ea typeface="Calibri" pitchFamily="34" charset="-122"/>
                 <a:cs typeface="Calibri" pitchFamily="34" charset="-120"/>
               </a:rPr>
-              <a:t>Word Labs  •  wordlabs.app  •  Root: 'teach' = to show or instruct others</a:t>
+              <a:t>Word Labs  •  wordlabs.app  •  Root: 'teach' = to show or instruct</a:t>
             </a:r>
             <a:endParaRPr lang="en-US" sz="800" dirty="0"/>
           </a:p>
@@ -41547,7 +42324,7 @@
                 <a:ea typeface="Calibri" pitchFamily="34" charset="-122"/>
                 <a:cs typeface="Calibri" pitchFamily="34" charset="-120"/>
               </a:rPr>
-              <a:t>Our teacher showed us how to break words into morphemes so we could understand them better.</a:t>
+              <a:t>Our teacher explained how to solve the maths problem step by step.</a:t>
             </a:r>
             <a:endParaRPr lang="en-US" sz="1500" dirty="0"/>
           </a:p>
@@ -41711,7 +42488,7 @@
                 <a:ea typeface="Calibri" pitchFamily="34" charset="-122"/>
                 <a:cs typeface="Calibri" pitchFamily="34" charset="-120"/>
               </a:rPr>
-              <a:t>The teaching of new vocabulary every week helps students become stronger readers.</a:t>
+              <a:t>The teachings of that famous scientist changed the way people understood the world.</a:t>
             </a:r>
             <a:endParaRPr lang="en-US" sz="1500" dirty="0"/>
           </a:p>
@@ -41875,7 +42652,7 @@
                 <a:ea typeface="Calibri" pitchFamily="34" charset="-122"/>
                 <a:cs typeface="Calibri" pitchFamily="34" charset="-120"/>
               </a:rPr>
-              <a:t>Some concepts are very teachable when you use fun games and activities to explain them.</a:t>
+              <a:t>She found the new student to be very teachable and eager to learn.</a:t>
             </a:r>
             <a:endParaRPr lang="en-US" sz="1500" dirty="0"/>
           </a:p>

--- a/output/wordlabs-teach-3day.pptx
+++ b/output/wordlabs-teach-3day.pptx
@@ -4240,7 +4240,7 @@
                 <a:ea typeface="Calibri" pitchFamily="34" charset="-122"/>
                 <a:cs typeface="Calibri" pitchFamily="34" charset="-120"/>
               </a:rPr>
-              <a:t>"to show or instruct"</a:t>
+              <a:t>"to show someone how to do something"</a:t>
             </a:r>
             <a:endParaRPr lang="en-US" sz="2200" dirty="0"/>
           </a:p>
@@ -4279,7 +4279,7 @@
                 <a:ea typeface="Calibri" pitchFamily="34" charset="-122"/>
                 <a:cs typeface="Calibri" pitchFamily="34" charset="-120"/>
               </a:rPr>
-              <a:t>Origin: Old English: tæcan</a:t>
+              <a:t>Origin: Anglo-Saxon (Old English) root</a:t>
             </a:r>
             <a:endParaRPr lang="en-US" sz="1300" dirty="0"/>
           </a:p>
@@ -5288,7 +5288,7 @@
                 <a:ea typeface="Calibri" pitchFamily="34" charset="-122"/>
                 <a:cs typeface="Calibri" pitchFamily="34" charset="-120"/>
               </a:rPr>
-              <a:t>Word Labs  •  wordlabs.app  •  Root: 'teach' = to show or instruct</a:t>
+              <a:t>Word Labs  •  wordlabs.app  •  Root: 'teach' = to show someone how to do something</a:t>
             </a:r>
             <a:endParaRPr lang="en-US" sz="800" dirty="0"/>
           </a:p>
@@ -5928,7 +5928,7 @@
                 <a:ea typeface="Calibri" pitchFamily="34" charset="-122"/>
                 <a:cs typeface="Calibri" pitchFamily="34" charset="-120"/>
               </a:rPr>
-              <a:t>Word Labs  •  wordlabs.app  •  Root: 'teach' = to show or instruct</a:t>
+              <a:t>Word Labs  •  wordlabs.app  •  Root: 'teach' = to show someone how to do something</a:t>
             </a:r>
             <a:endParaRPr lang="en-US" sz="800" dirty="0"/>
           </a:p>
@@ -6071,7 +6071,7 @@
                 <a:ea typeface="Calibri" pitchFamily="34" charset="-122"/>
                 <a:cs typeface="Calibri" pitchFamily="34" charset="-120"/>
               </a:rPr>
-              <a:t> said that </a:t>
+              <a:t> explained the maths problem clearly. Mr Lee </a:t>
             </a:r>
             <a:pPr algn="l" indent="0" marL="0">
               <a:buNone/>
@@ -6088,7 +6088,7 @@
                 <a:ea typeface="Calibri" pitchFamily="34" charset="-122"/>
                 <a:cs typeface="Calibri" pitchFamily="34" charset="-120"/>
               </a:rPr>
-              <a:t>reteaching</a:t>
+              <a:t>teaches</a:t>
             </a:r>
             <a:pPr algn="l" indent="0" marL="0">
               <a:buNone/>
@@ -6102,7 +6102,7 @@
                 <a:ea typeface="Calibri" pitchFamily="34" charset="-122"/>
                 <a:cs typeface="Calibri" pitchFamily="34" charset="-120"/>
               </a:rPr>
-              <a:t> the lesson would help everyone understand.</a:t>
+              <a:t> science on Tuesdays.</a:t>
             </a:r>
             <a:endParaRPr lang="en-US" sz="1800" dirty="0"/>
           </a:p>
@@ -6385,7 +6385,7 @@
                 <a:ea typeface="Trebuchet MS" pitchFamily="34" charset="-122"/>
                 <a:cs typeface="Trebuchet MS" pitchFamily="34" charset="-120"/>
               </a:rPr>
-              <a:t>reteaching</a:t>
+              <a:t>teaches</a:t>
             </a:r>
             <a:endParaRPr lang="en-US" sz="1400" dirty="0"/>
           </a:p>
@@ -6716,7 +6716,7 @@
                 <a:ea typeface="Calibri" pitchFamily="34" charset="-122"/>
                 <a:cs typeface="Calibri" pitchFamily="34" charset="-120"/>
               </a:rPr>
-              <a:t>Word Labs  •  wordlabs.app  •  Root: 'teach' = to show or instruct</a:t>
+              <a:t>Word Labs  •  wordlabs.app  •  Root: 'teach' = to show someone how to do something</a:t>
             </a:r>
             <a:endParaRPr lang="en-US" sz="800" dirty="0"/>
           </a:p>
@@ -7543,7 +7543,7 @@
                 <a:ea typeface="Calibri" pitchFamily="34" charset="-122"/>
                 <a:cs typeface="Calibri" pitchFamily="34" charset="-120"/>
               </a:rPr>
-              <a:t>Word Labs  •  wordlabs.app  •  Root: 'teach' = to show or instruct</a:t>
+              <a:t>Word Labs  •  wordlabs.app  •  Root: 'teach' = to show someone how to do something</a:t>
             </a:r>
             <a:endParaRPr lang="en-US" sz="800" dirty="0"/>
           </a:p>
@@ -7860,7 +7860,7 @@
                 <a:ea typeface="Calibri" pitchFamily="34" charset="-122"/>
                 <a:cs typeface="Calibri" pitchFamily="34" charset="-120"/>
               </a:rPr>
-              <a:t>to show or instruct</a:t>
+              <a:t>to show someone how to do something</a:t>
             </a:r>
             <a:endParaRPr lang="en-US" sz="850" dirty="0"/>
           </a:p>
@@ -7972,7 +7972,7 @@
                 <a:ea typeface="Calibri" pitchFamily="34" charset="-122"/>
                 <a:cs typeface="Calibri" pitchFamily="34" charset="-120"/>
               </a:rPr>
-              <a:t>a person who does something</a:t>
+              <a:t>person who; more</a:t>
             </a:r>
             <a:endParaRPr lang="en-US" sz="850" dirty="0"/>
           </a:p>
@@ -8528,7 +8528,7 @@
                 <a:ea typeface="Calibri" pitchFamily="34" charset="-122"/>
                 <a:cs typeface="Calibri" pitchFamily="34" charset="-120"/>
               </a:rPr>
-              <a:t>Word Labs  •  wordlabs.app  •  Root: 'teach' = to show or instruct</a:t>
+              <a:t>Word Labs  •  wordlabs.app  •  Root: 'teach' = to show someone how to do something</a:t>
             </a:r>
             <a:endParaRPr lang="en-US" sz="800" dirty="0"/>
           </a:p>
@@ -8845,7 +8845,7 @@
                 <a:ea typeface="Calibri" pitchFamily="34" charset="-122"/>
                 <a:cs typeface="Calibri" pitchFamily="34" charset="-120"/>
               </a:rPr>
-              <a:t>to show or instruct</a:t>
+              <a:t>to show someone how to do something</a:t>
             </a:r>
             <a:endParaRPr lang="en-US" sz="850" dirty="0"/>
           </a:p>
@@ -8957,7 +8957,7 @@
                 <a:ea typeface="Calibri" pitchFamily="34" charset="-122"/>
                 <a:cs typeface="Calibri" pitchFamily="34" charset="-120"/>
               </a:rPr>
-              <a:t>a person who does something</a:t>
+              <a:t>person who; more</a:t>
             </a:r>
             <a:endParaRPr lang="en-US" sz="850" dirty="0"/>
           </a:p>
@@ -9645,7 +9645,7 @@
                 <a:ea typeface="Calibri" pitchFamily="34" charset="-122"/>
                 <a:cs typeface="Calibri" pitchFamily="34" charset="-120"/>
               </a:rPr>
-              <a:t>Word Labs  •  wordlabs.app  •  Root: 'teach' = to show or instruct</a:t>
+              <a:t>Word Labs  •  wordlabs.app  •  Root: 'teach' = to show someone how to do something</a:t>
             </a:r>
             <a:endParaRPr lang="en-US" sz="800" dirty="0"/>
           </a:p>
@@ -9962,7 +9962,7 @@
                 <a:ea typeface="Calibri" pitchFamily="34" charset="-122"/>
                 <a:cs typeface="Calibri" pitchFamily="34" charset="-120"/>
               </a:rPr>
-              <a:t>to show or instruct</a:t>
+              <a:t>to show someone how to do something</a:t>
             </a:r>
             <a:endParaRPr lang="en-US" sz="850" dirty="0"/>
           </a:p>
@@ -10074,7 +10074,7 @@
                 <a:ea typeface="Calibri" pitchFamily="34" charset="-122"/>
                 <a:cs typeface="Calibri" pitchFamily="34" charset="-120"/>
               </a:rPr>
-              <a:t>a person who does something</a:t>
+              <a:t>person who; more</a:t>
             </a:r>
             <a:endParaRPr lang="en-US" sz="850" dirty="0"/>
           </a:p>
@@ -10987,7 +10987,7 @@
                 <a:ea typeface="Calibri" pitchFamily="34" charset="-122"/>
                 <a:cs typeface="Calibri" pitchFamily="34" charset="-120"/>
               </a:rPr>
-              <a:t>Word Labs  •  wordlabs.app  •  Root: 'teach' = to show or instruct</a:t>
+              <a:t>Word Labs  •  wordlabs.app  •  Root: 'teach' = to show someone how to do something</a:t>
             </a:r>
             <a:endParaRPr lang="en-US" sz="800" dirty="0"/>
           </a:p>
@@ -11126,7 +11126,7 @@
                 <a:ea typeface="Trebuchet MS" pitchFamily="34" charset="-122"/>
                 <a:cs typeface="Trebuchet MS" pitchFamily="34" charset="-120"/>
               </a:rPr>
-              <a:t>reteaching</a:t>
+              <a:t>teaches</a:t>
             </a:r>
             <a:endParaRPr lang="en-US" sz="2800" dirty="0"/>
           </a:p>
@@ -11814,7 +11814,7 @@
                 <a:ea typeface="Calibri" pitchFamily="34" charset="-122"/>
                 <a:cs typeface="Calibri" pitchFamily="34" charset="-120"/>
               </a:rPr>
-              <a:t>Word Labs  •  wordlabs.app  •  Root: 'teach' = to show or instruct</a:t>
+              <a:t>Word Labs  •  wordlabs.app  •  Root: 'teach' = to show someone how to do something</a:t>
             </a:r>
             <a:endParaRPr lang="en-US" sz="800" dirty="0"/>
           </a:p>
@@ -11953,7 +11953,7 @@
                 <a:ea typeface="Trebuchet MS" pitchFamily="34" charset="-122"/>
                 <a:cs typeface="Trebuchet MS" pitchFamily="34" charset="-120"/>
               </a:rPr>
-              <a:t>reteaching</a:t>
+              <a:t>teaches</a:t>
             </a:r>
             <a:endParaRPr lang="en-US" sz="2800" dirty="0"/>
           </a:p>
@@ -12033,7 +12033,7 @@
         </p:nvSpPr>
         <p:spPr>
           <a:xfrm>
-            <a:off x="2221992" y="2258568"/>
+            <a:off x="2938272" y="2258568"/>
             <a:ext cx="1828800" cy="292608"/>
           </a:xfrm>
           <a:prstGeom prst="rect">
@@ -12042,11 +12042,11 @@
             </a:avLst>
           </a:prstGeom>
           <a:solidFill>
-            <a:srgbClr val="DDD6FE"/>
+            <a:srgbClr val="CCFBF1"/>
           </a:solidFill>
           <a:ln w="19050">
             <a:solidFill>
-              <a:srgbClr val="7C3AED"/>
+              <a:srgbClr val="0D9488"/>
             </a:solidFill>
             <a:prstDash val="solid"/>
           </a:ln>
@@ -12067,7 +12067,7 @@
         </p:nvSpPr>
         <p:spPr>
           <a:xfrm>
-            <a:off x="2221992" y="2258568"/>
+            <a:off x="2938272" y="2258568"/>
             <a:ext cx="1828800" cy="292608"/>
           </a:xfrm>
           <a:prstGeom prst="rect">
@@ -12086,13 +12086,13 @@
             <a:r>
               <a:rPr lang="en-US" sz="1300" b="1" dirty="0">
                 <a:solidFill>
-                  <a:srgbClr val="4C1D95"/>
+                  <a:srgbClr val="0F766E"/>
                 </a:solidFill>
                 <a:latin typeface="Trebuchet MS" pitchFamily="34" charset="0"/>
                 <a:ea typeface="Trebuchet MS" pitchFamily="34" charset="-122"/>
                 <a:cs typeface="Trebuchet MS" pitchFamily="34" charset="-120"/>
               </a:rPr>
-              <a:t>re</a:t>
+              <a:t>teach</a:t>
             </a:r>
             <a:endParaRPr lang="en-US" sz="1300" dirty="0"/>
           </a:p>
@@ -12106,7 +12106,7 @@
         </p:nvSpPr>
         <p:spPr>
           <a:xfrm>
-            <a:off x="2221992" y="2569464"/>
+            <a:off x="2938272" y="2569464"/>
             <a:ext cx="1828800" cy="201168"/>
           </a:xfrm>
           <a:prstGeom prst="rect">
@@ -12131,7 +12131,7 @@
                 <a:ea typeface="Calibri" pitchFamily="34" charset="-122"/>
                 <a:cs typeface="Calibri" pitchFamily="34" charset="-120"/>
               </a:rPr>
-              <a:t>again</a:t>
+              <a:t>to show someone how to do something</a:t>
             </a:r>
             <a:endParaRPr lang="en-US" sz="850" dirty="0"/>
           </a:p>
@@ -12145,7 +12145,7 @@
         </p:nvSpPr>
         <p:spPr>
           <a:xfrm>
-            <a:off x="4370832" y="2258568"/>
+            <a:off x="5803392" y="2258568"/>
             <a:ext cx="1828800" cy="292608"/>
           </a:xfrm>
           <a:prstGeom prst="rect">
@@ -12154,11 +12154,11 @@
             </a:avLst>
           </a:prstGeom>
           <a:solidFill>
-            <a:srgbClr val="CCFBF1"/>
+            <a:srgbClr val="FCE7F3"/>
           </a:solidFill>
           <a:ln w="19050">
             <a:solidFill>
-              <a:srgbClr val="0D9488"/>
+              <a:srgbClr val="DB2777"/>
             </a:solidFill>
             <a:prstDash val="solid"/>
           </a:ln>
@@ -12179,7 +12179,7 @@
         </p:nvSpPr>
         <p:spPr>
           <a:xfrm>
-            <a:off x="4370832" y="2258568"/>
+            <a:off x="5803392" y="2258568"/>
             <a:ext cx="1828800" cy="292608"/>
           </a:xfrm>
           <a:prstGeom prst="rect">
@@ -12198,13 +12198,13 @@
             <a:r>
               <a:rPr lang="en-US" sz="1300" b="1" dirty="0">
                 <a:solidFill>
-                  <a:srgbClr val="0F766E"/>
+                  <a:srgbClr val="9D174D"/>
                 </a:solidFill>
                 <a:latin typeface="Trebuchet MS" pitchFamily="34" charset="0"/>
                 <a:ea typeface="Trebuchet MS" pitchFamily="34" charset="-122"/>
                 <a:cs typeface="Trebuchet MS" pitchFamily="34" charset="-120"/>
               </a:rPr>
-              <a:t>teach</a:t>
+              <a:t>es</a:t>
             </a:r>
             <a:endParaRPr lang="en-US" sz="1300" dirty="0"/>
           </a:p>
@@ -12218,7 +12218,7 @@
         </p:nvSpPr>
         <p:spPr>
           <a:xfrm>
-            <a:off x="4370832" y="2569464"/>
+            <a:off x="5803392" y="2569464"/>
             <a:ext cx="1828800" cy="201168"/>
           </a:xfrm>
           <a:prstGeom prst="rect">
@@ -12243,7 +12243,7 @@
                 <a:ea typeface="Calibri" pitchFamily="34" charset="-122"/>
                 <a:cs typeface="Calibri" pitchFamily="34" charset="-120"/>
               </a:rPr>
-              <a:t>to show or instruct</a:t>
+              <a:t>plural or present tense</a:t>
             </a:r>
             <a:endParaRPr lang="en-US" sz="850" dirty="0"/>
           </a:p>
@@ -12257,30 +12257,23 @@
         </p:nvSpPr>
         <p:spPr>
           <a:xfrm>
-            <a:off x="6519672" y="2258568"/>
-            <a:ext cx="1828800" cy="292608"/>
+            <a:off x="365760" y="3273552"/>
+            <a:ext cx="1371600" cy="658368"/>
           </a:xfrm>
           <a:prstGeom prst="rect">
             <a:avLst>
-              <a:gd name="adj" fmla="val 25000"/>
+              <a:gd name="adj" fmla="val 8333"/>
             </a:avLst>
           </a:prstGeom>
           <a:solidFill>
-            <a:srgbClr val="FCE7F3"/>
-          </a:solidFill>
-          <a:ln w="19050">
-            <a:solidFill>
-              <a:srgbClr val="DB2777"/>
-            </a:solidFill>
-            <a:prstDash val="solid"/>
-          </a:ln>
-          <a:effectLst>
-            <a:outerShdw sx="100000" sy="100000" kx="0" ky="0" algn="bl" rotWithShape="0" blurRad="101600" dist="38100" dir="8100000">
-              <a:srgbClr val="000000">
-                <a:alpha val="12000"/>
-              </a:srgbClr>
-            </a:outerShdw>
-          </a:effectLst>
+            <a:srgbClr val="E2E8F0"/>
+          </a:solidFill>
+          <a:ln w="12700">
+            <a:solidFill>
+              <a:srgbClr val="E2E8F0"/>
+            </a:solidFill>
+            <a:prstDash val="solid"/>
+          </a:ln>
         </p:spPr>
       </p:sp>
       <p:sp>
@@ -12291,8 +12284,8 @@
         </p:nvSpPr>
         <p:spPr>
           <a:xfrm>
-            <a:off x="6519672" y="2258568"/>
-            <a:ext cx="1828800" cy="292608"/>
+            <a:off x="365760" y="3273552"/>
+            <a:ext cx="1371600" cy="658368"/>
           </a:xfrm>
           <a:prstGeom prst="rect">
             <a:avLst/>
@@ -12308,73 +12301,100 @@
               <a:buNone/>
             </a:pPr>
             <a:r>
-              <a:rPr lang="en-US" sz="1300" b="1" dirty="0">
-                <a:solidFill>
-                  <a:srgbClr val="9D174D"/>
+              <a:rPr lang="en-US" sz="1100" b="1" dirty="0">
+                <a:solidFill>
+                  <a:srgbClr val="475569"/>
                 </a:solidFill>
                 <a:latin typeface="Trebuchet MS" pitchFamily="34" charset="0"/>
                 <a:ea typeface="Trebuchet MS" pitchFamily="34" charset="-122"/>
                 <a:cs typeface="Trebuchet MS" pitchFamily="34" charset="-120"/>
               </a:rPr>
-              <a:t>ing</a:t>
-            </a:r>
-            <a:endParaRPr lang="en-US" sz="1300" dirty="0"/>
-          </a:p>
-        </p:txBody>
-      </p:sp>
-      <p:sp>
-        <p:nvSpPr>
-          <p:cNvPr id="24" name="Text 22"/>
-          <p:cNvSpPr/>
-          <p:nvPr/>
-        </p:nvSpPr>
-        <p:spPr>
-          <a:xfrm>
-            <a:off x="6519672" y="2569464"/>
-            <a:ext cx="1828800" cy="201168"/>
-          </a:xfrm>
-          <a:prstGeom prst="rect">
-            <a:avLst/>
-          </a:prstGeom>
-          <a:noFill/>
-          <a:ln/>
-        </p:spPr>
-        <p:txBody>
-          <a:bodyPr wrap="square" lIns="0" tIns="0" rIns="0" bIns="0" rtlCol="0" anchor="t"/>
-          <a:lstStyle/>
-          <a:p>
-            <a:pPr algn="ctr" indent="0" marL="0">
-              <a:buNone/>
-            </a:pPr>
-            <a:r>
-              <a:rPr lang="en-US" sz="850" dirty="0">
-                <a:solidFill>
-                  <a:srgbClr val="475569"/>
+              <a:t>Syllables</a:t>
+            </a:r>
+            <a:endParaRPr lang="en-US" sz="1100" dirty="0"/>
+          </a:p>
+        </p:txBody>
+      </p:sp>
+      <p:sp>
+        <p:nvSpPr>
+          <p:cNvPr id="24" name="Shape 22"/>
+          <p:cNvSpPr/>
+          <p:nvPr/>
+        </p:nvSpPr>
+        <p:spPr>
+          <a:xfrm>
+            <a:off x="1874520" y="3273552"/>
+            <a:ext cx="6903720" cy="658368"/>
+          </a:xfrm>
+          <a:prstGeom prst="rect">
+            <a:avLst>
+              <a:gd name="adj" fmla="val 8333"/>
+            </a:avLst>
+          </a:prstGeom>
+          <a:solidFill>
+            <a:srgbClr val="F8FAFC"/>
+          </a:solidFill>
+          <a:ln w="12700">
+            <a:solidFill>
+              <a:srgbClr val="E2E8F0"/>
+            </a:solidFill>
+            <a:prstDash val="dash"/>
+          </a:ln>
+        </p:spPr>
+      </p:sp>
+      <p:sp>
+        <p:nvSpPr>
+          <p:cNvPr id="25" name="Text 23"/>
+          <p:cNvSpPr/>
+          <p:nvPr/>
+        </p:nvSpPr>
+        <p:spPr>
+          <a:xfrm>
+            <a:off x="1874520" y="3273552"/>
+            <a:ext cx="6903720" cy="658368"/>
+          </a:xfrm>
+          <a:prstGeom prst="rect">
+            <a:avLst/>
+          </a:prstGeom>
+          <a:noFill/>
+          <a:ln/>
+        </p:spPr>
+        <p:txBody>
+          <a:bodyPr wrap="square" rtlCol="0" anchor="ctr"/>
+          <a:lstStyle/>
+          <a:p>
+            <a:pPr algn="ctr" indent="0" marL="0">
+              <a:buNone/>
+            </a:pPr>
+            <a:r>
+              <a:rPr lang="en-US" sz="1100" i="1" dirty="0">
+                <a:solidFill>
+                  <a:srgbClr val="CBD5E1"/>
                 </a:solidFill>
                 <a:latin typeface="Calibri" pitchFamily="34" charset="0"/>
                 <a:ea typeface="Calibri" pitchFamily="34" charset="-122"/>
                 <a:cs typeface="Calibri" pitchFamily="34" charset="-120"/>
               </a:rPr>
-              <a:t>ongoing action</a:t>
-            </a:r>
-            <a:endParaRPr lang="en-US" sz="850" dirty="0"/>
-          </a:p>
-        </p:txBody>
-      </p:sp>
-      <p:sp>
-        <p:nvSpPr>
-          <p:cNvPr id="25" name="Shape 23"/>
-          <p:cNvSpPr/>
-          <p:nvPr/>
-        </p:nvSpPr>
-        <p:spPr>
-          <a:xfrm>
-            <a:off x="365760" y="3273552"/>
-            <a:ext cx="1371600" cy="658368"/>
+              <a:t>Write here...</a:t>
+            </a:r>
+            <a:endParaRPr lang="en-US" sz="1100" dirty="0"/>
+          </a:p>
+        </p:txBody>
+      </p:sp>
+      <p:sp>
+        <p:nvSpPr>
+          <p:cNvPr id="26" name="Shape 24"/>
+          <p:cNvSpPr/>
+          <p:nvPr/>
+        </p:nvSpPr>
+        <p:spPr>
+          <a:xfrm>
+            <a:off x="365760" y="4096512"/>
+            <a:ext cx="1371600" cy="804672"/>
           </a:xfrm>
           <a:prstGeom prst="rect">
             <a:avLst>
-              <a:gd name="adj" fmla="val 8333"/>
+              <a:gd name="adj" fmla="val 6818"/>
             </a:avLst>
           </a:prstGeom>
           <a:solidFill>
@@ -12390,14 +12410,14 @@
       </p:sp>
       <p:sp>
         <p:nvSpPr>
-          <p:cNvPr id="26" name="Text 24"/>
-          <p:cNvSpPr/>
-          <p:nvPr/>
-        </p:nvSpPr>
-        <p:spPr>
-          <a:xfrm>
-            <a:off x="365760" y="3273552"/>
-            <a:ext cx="1371600" cy="658368"/>
+          <p:cNvPr id="27" name="Text 25"/>
+          <p:cNvSpPr/>
+          <p:nvPr/>
+        </p:nvSpPr>
+        <p:spPr>
+          <a:xfrm>
+            <a:off x="365760" y="4096512"/>
+            <a:ext cx="1371600" cy="804672"/>
           </a:xfrm>
           <a:prstGeom prst="rect">
             <a:avLst/>
@@ -12421,7 +12441,7 @@
                 <a:ea typeface="Trebuchet MS" pitchFamily="34" charset="-122"/>
                 <a:cs typeface="Trebuchet MS" pitchFamily="34" charset="-120"/>
               </a:rPr>
-              <a:t>Syllables</a:t>
+              <a:t>Phonemes</a:t>
             </a:r>
             <a:endParaRPr lang="en-US" sz="1100" dirty="0"/>
           </a:p>
@@ -12429,80 +12449,14 @@
       </p:sp>
       <p:sp>
         <p:nvSpPr>
-          <p:cNvPr id="27" name="Shape 25"/>
-          <p:cNvSpPr/>
-          <p:nvPr/>
-        </p:nvSpPr>
-        <p:spPr>
-          <a:xfrm>
-            <a:off x="1874520" y="3273552"/>
-            <a:ext cx="6903720" cy="658368"/>
-          </a:xfrm>
-          <a:prstGeom prst="rect">
-            <a:avLst>
-              <a:gd name="adj" fmla="val 8333"/>
-            </a:avLst>
-          </a:prstGeom>
-          <a:solidFill>
-            <a:srgbClr val="F8FAFC"/>
-          </a:solidFill>
-          <a:ln w="12700">
-            <a:solidFill>
-              <a:srgbClr val="E2E8F0"/>
-            </a:solidFill>
-            <a:prstDash val="dash"/>
-          </a:ln>
-        </p:spPr>
-      </p:sp>
-      <p:sp>
-        <p:nvSpPr>
-          <p:cNvPr id="28" name="Text 26"/>
-          <p:cNvSpPr/>
-          <p:nvPr/>
-        </p:nvSpPr>
-        <p:spPr>
-          <a:xfrm>
-            <a:off x="1874520" y="3273552"/>
-            <a:ext cx="6903720" cy="658368"/>
-          </a:xfrm>
-          <a:prstGeom prst="rect">
-            <a:avLst/>
-          </a:prstGeom>
-          <a:noFill/>
-          <a:ln/>
-        </p:spPr>
-        <p:txBody>
-          <a:bodyPr wrap="square" rtlCol="0" anchor="ctr"/>
-          <a:lstStyle/>
-          <a:p>
-            <a:pPr algn="ctr" indent="0" marL="0">
-              <a:buNone/>
-            </a:pPr>
-            <a:r>
-              <a:rPr lang="en-US" sz="1100" i="1" dirty="0">
-                <a:solidFill>
-                  <a:srgbClr val="CBD5E1"/>
-                </a:solidFill>
-                <a:latin typeface="Calibri" pitchFamily="34" charset="0"/>
-                <a:ea typeface="Calibri" pitchFamily="34" charset="-122"/>
-                <a:cs typeface="Calibri" pitchFamily="34" charset="-120"/>
-              </a:rPr>
-              <a:t>Write here...</a:t>
-            </a:r>
-            <a:endParaRPr lang="en-US" sz="1100" dirty="0"/>
-          </a:p>
-        </p:txBody>
-      </p:sp>
-      <p:sp>
-        <p:nvSpPr>
-          <p:cNvPr id="29" name="Shape 27"/>
-          <p:cNvSpPr/>
-          <p:nvPr/>
-        </p:nvSpPr>
-        <p:spPr>
-          <a:xfrm>
-            <a:off x="365760" y="4096512"/>
-            <a:ext cx="1371600" cy="804672"/>
+          <p:cNvPr id="28" name="Shape 26"/>
+          <p:cNvSpPr/>
+          <p:nvPr/>
+        </p:nvSpPr>
+        <p:spPr>
+          <a:xfrm>
+            <a:off x="1874520" y="4096512"/>
+            <a:ext cx="6903720" cy="804672"/>
           </a:xfrm>
           <a:prstGeom prst="rect">
             <a:avLst>
@@ -12510,85 +12464,19 @@
             </a:avLst>
           </a:prstGeom>
           <a:solidFill>
-            <a:srgbClr val="E2E8F0"/>
+            <a:srgbClr val="F8FAFC"/>
           </a:solidFill>
           <a:ln w="12700">
             <a:solidFill>
               <a:srgbClr val="E2E8F0"/>
             </a:solidFill>
-            <a:prstDash val="solid"/>
-          </a:ln>
-        </p:spPr>
-      </p:sp>
-      <p:sp>
-        <p:nvSpPr>
-          <p:cNvPr id="30" name="Text 28"/>
-          <p:cNvSpPr/>
-          <p:nvPr/>
-        </p:nvSpPr>
-        <p:spPr>
-          <a:xfrm>
-            <a:off x="365760" y="4096512"/>
-            <a:ext cx="1371600" cy="804672"/>
-          </a:xfrm>
-          <a:prstGeom prst="rect">
-            <a:avLst/>
-          </a:prstGeom>
-          <a:noFill/>
-          <a:ln/>
-        </p:spPr>
-        <p:txBody>
-          <a:bodyPr wrap="square" lIns="0" tIns="0" rIns="0" bIns="0" rtlCol="0" anchor="ctr"/>
-          <a:lstStyle/>
-          <a:p>
-            <a:pPr algn="ctr" indent="0" marL="0">
-              <a:buNone/>
-            </a:pPr>
-            <a:r>
-              <a:rPr lang="en-US" sz="1100" b="1" dirty="0">
-                <a:solidFill>
-                  <a:srgbClr val="475569"/>
-                </a:solidFill>
-                <a:latin typeface="Trebuchet MS" pitchFamily="34" charset="0"/>
-                <a:ea typeface="Trebuchet MS" pitchFamily="34" charset="-122"/>
-                <a:cs typeface="Trebuchet MS" pitchFamily="34" charset="-120"/>
-              </a:rPr>
-              <a:t>Phonemes</a:t>
-            </a:r>
-            <a:endParaRPr lang="en-US" sz="1100" dirty="0"/>
-          </a:p>
-        </p:txBody>
-      </p:sp>
-      <p:sp>
-        <p:nvSpPr>
-          <p:cNvPr id="31" name="Shape 29"/>
-          <p:cNvSpPr/>
-          <p:nvPr/>
-        </p:nvSpPr>
-        <p:spPr>
-          <a:xfrm>
-            <a:off x="1874520" y="4096512"/>
-            <a:ext cx="6903720" cy="804672"/>
-          </a:xfrm>
-          <a:prstGeom prst="rect">
-            <a:avLst>
-              <a:gd name="adj" fmla="val 6818"/>
-            </a:avLst>
-          </a:prstGeom>
-          <a:solidFill>
-            <a:srgbClr val="F8FAFC"/>
-          </a:solidFill>
-          <a:ln w="12700">
-            <a:solidFill>
-              <a:srgbClr val="E2E8F0"/>
-            </a:solidFill>
             <a:prstDash val="dash"/>
           </a:ln>
         </p:spPr>
       </p:sp>
       <p:sp>
         <p:nvSpPr>
-          <p:cNvPr id="32" name="Text 30"/>
+          <p:cNvPr id="29" name="Text 27"/>
           <p:cNvSpPr/>
           <p:nvPr/>
         </p:nvSpPr>
@@ -12911,7 +12799,7 @@
                 <a:ea typeface="Calibri" pitchFamily="34" charset="-122"/>
                 <a:cs typeface="Calibri" pitchFamily="34" charset="-120"/>
               </a:rPr>
-              <a:t>Word Labs  •  wordlabs.app  •  Root: 'teach' = to show or instruct</a:t>
+              <a:t>Word Labs  •  wordlabs.app  •  Root: 'teach' = to show someone how to do something</a:t>
             </a:r>
             <a:endParaRPr lang="en-US" sz="800" dirty="0"/>
           </a:p>
@@ -13050,7 +12938,7 @@
                 <a:ea typeface="Trebuchet MS" pitchFamily="34" charset="-122"/>
                 <a:cs typeface="Trebuchet MS" pitchFamily="34" charset="-120"/>
               </a:rPr>
-              <a:t>reteaching</a:t>
+              <a:t>teaches</a:t>
             </a:r>
             <a:endParaRPr lang="en-US" sz="2800" dirty="0"/>
           </a:p>
@@ -13130,7 +13018,7 @@
         </p:nvSpPr>
         <p:spPr>
           <a:xfrm>
-            <a:off x="2221992" y="2258568"/>
+            <a:off x="2938272" y="2258568"/>
             <a:ext cx="1828800" cy="292608"/>
           </a:xfrm>
           <a:prstGeom prst="rect">
@@ -13139,11 +13027,11 @@
             </a:avLst>
           </a:prstGeom>
           <a:solidFill>
-            <a:srgbClr val="DDD6FE"/>
+            <a:srgbClr val="CCFBF1"/>
           </a:solidFill>
           <a:ln w="19050">
             <a:solidFill>
-              <a:srgbClr val="7C3AED"/>
+              <a:srgbClr val="0D9488"/>
             </a:solidFill>
             <a:prstDash val="solid"/>
           </a:ln>
@@ -13164,7 +13052,7 @@
         </p:nvSpPr>
         <p:spPr>
           <a:xfrm>
-            <a:off x="2221992" y="2258568"/>
+            <a:off x="2938272" y="2258568"/>
             <a:ext cx="1828800" cy="292608"/>
           </a:xfrm>
           <a:prstGeom prst="rect">
@@ -13183,13 +13071,13 @@
             <a:r>
               <a:rPr lang="en-US" sz="1300" b="1" dirty="0">
                 <a:solidFill>
-                  <a:srgbClr val="4C1D95"/>
+                  <a:srgbClr val="0F766E"/>
                 </a:solidFill>
                 <a:latin typeface="Trebuchet MS" pitchFamily="34" charset="0"/>
                 <a:ea typeface="Trebuchet MS" pitchFamily="34" charset="-122"/>
                 <a:cs typeface="Trebuchet MS" pitchFamily="34" charset="-120"/>
               </a:rPr>
-              <a:t>re</a:t>
+              <a:t>teach</a:t>
             </a:r>
             <a:endParaRPr lang="en-US" sz="1300" dirty="0"/>
           </a:p>
@@ -13203,7 +13091,7 @@
         </p:nvSpPr>
         <p:spPr>
           <a:xfrm>
-            <a:off x="2221992" y="2569464"/>
+            <a:off x="2938272" y="2569464"/>
             <a:ext cx="1828800" cy="201168"/>
           </a:xfrm>
           <a:prstGeom prst="rect">
@@ -13228,7 +13116,7 @@
                 <a:ea typeface="Calibri" pitchFamily="34" charset="-122"/>
                 <a:cs typeface="Calibri" pitchFamily="34" charset="-120"/>
               </a:rPr>
-              <a:t>again</a:t>
+              <a:t>to show someone how to do something</a:t>
             </a:r>
             <a:endParaRPr lang="en-US" sz="850" dirty="0"/>
           </a:p>
@@ -13242,7 +13130,7 @@
         </p:nvSpPr>
         <p:spPr>
           <a:xfrm>
-            <a:off x="4370832" y="2258568"/>
+            <a:off x="5803392" y="2258568"/>
             <a:ext cx="1828800" cy="292608"/>
           </a:xfrm>
           <a:prstGeom prst="rect">
@@ -13251,11 +13139,11 @@
             </a:avLst>
           </a:prstGeom>
           <a:solidFill>
-            <a:srgbClr val="CCFBF1"/>
+            <a:srgbClr val="FCE7F3"/>
           </a:solidFill>
           <a:ln w="19050">
             <a:solidFill>
-              <a:srgbClr val="0D9488"/>
+              <a:srgbClr val="DB2777"/>
             </a:solidFill>
             <a:prstDash val="solid"/>
           </a:ln>
@@ -13276,7 +13164,7 @@
         </p:nvSpPr>
         <p:spPr>
           <a:xfrm>
-            <a:off x="4370832" y="2258568"/>
+            <a:off x="5803392" y="2258568"/>
             <a:ext cx="1828800" cy="292608"/>
           </a:xfrm>
           <a:prstGeom prst="rect">
@@ -13295,13 +13183,13 @@
             <a:r>
               <a:rPr lang="en-US" sz="1300" b="1" dirty="0">
                 <a:solidFill>
-                  <a:srgbClr val="0F766E"/>
+                  <a:srgbClr val="9D174D"/>
                 </a:solidFill>
                 <a:latin typeface="Trebuchet MS" pitchFamily="34" charset="0"/>
                 <a:ea typeface="Trebuchet MS" pitchFamily="34" charset="-122"/>
                 <a:cs typeface="Trebuchet MS" pitchFamily="34" charset="-120"/>
               </a:rPr>
-              <a:t>teach</a:t>
+              <a:t>es</a:t>
             </a:r>
             <a:endParaRPr lang="en-US" sz="1300" dirty="0"/>
           </a:p>
@@ -13315,7 +13203,7 @@
         </p:nvSpPr>
         <p:spPr>
           <a:xfrm>
-            <a:off x="4370832" y="2569464"/>
+            <a:off x="5803392" y="2569464"/>
             <a:ext cx="1828800" cy="201168"/>
           </a:xfrm>
           <a:prstGeom prst="rect">
@@ -13340,7 +13228,7 @@
                 <a:ea typeface="Calibri" pitchFamily="34" charset="-122"/>
                 <a:cs typeface="Calibri" pitchFamily="34" charset="-120"/>
               </a:rPr>
-              <a:t>to show or instruct</a:t>
+              <a:t>plural or present tense</a:t>
             </a:r>
             <a:endParaRPr lang="en-US" sz="850" dirty="0"/>
           </a:p>
@@ -13354,30 +13242,23 @@
         </p:nvSpPr>
         <p:spPr>
           <a:xfrm>
-            <a:off x="6519672" y="2258568"/>
-            <a:ext cx="1828800" cy="292608"/>
+            <a:off x="365760" y="3273552"/>
+            <a:ext cx="1371600" cy="658368"/>
           </a:xfrm>
           <a:prstGeom prst="rect">
             <a:avLst>
-              <a:gd name="adj" fmla="val 25000"/>
+              <a:gd name="adj" fmla="val 8333"/>
             </a:avLst>
           </a:prstGeom>
           <a:solidFill>
-            <a:srgbClr val="FCE7F3"/>
-          </a:solidFill>
-          <a:ln w="19050">
-            <a:solidFill>
-              <a:srgbClr val="DB2777"/>
-            </a:solidFill>
-            <a:prstDash val="solid"/>
-          </a:ln>
-          <a:effectLst>
-            <a:outerShdw sx="100000" sy="100000" kx="0" ky="0" algn="bl" rotWithShape="0" blurRad="101600" dist="38100" dir="8100000">
-              <a:srgbClr val="000000">
-                <a:alpha val="12000"/>
-              </a:srgbClr>
-            </a:outerShdw>
-          </a:effectLst>
+            <a:srgbClr val="E2E8F0"/>
+          </a:solidFill>
+          <a:ln w="12700">
+            <a:solidFill>
+              <a:srgbClr val="E2E8F0"/>
+            </a:solidFill>
+            <a:prstDash val="solid"/>
+          </a:ln>
         </p:spPr>
       </p:sp>
       <p:sp>
@@ -13388,8 +13269,8 @@
         </p:nvSpPr>
         <p:spPr>
           <a:xfrm>
-            <a:off x="6519672" y="2258568"/>
-            <a:ext cx="1828800" cy="292608"/>
+            <a:off x="365760" y="3273552"/>
+            <a:ext cx="1371600" cy="658368"/>
           </a:xfrm>
           <a:prstGeom prst="rect">
             <a:avLst/>
@@ -13405,69 +13286,30 @@
               <a:buNone/>
             </a:pPr>
             <a:r>
-              <a:rPr lang="en-US" sz="1300" b="1" dirty="0">
-                <a:solidFill>
-                  <a:srgbClr val="9D174D"/>
+              <a:rPr lang="en-US" sz="1100" b="1" dirty="0">
+                <a:solidFill>
+                  <a:srgbClr val="475569"/>
                 </a:solidFill>
                 <a:latin typeface="Trebuchet MS" pitchFamily="34" charset="0"/>
                 <a:ea typeface="Trebuchet MS" pitchFamily="34" charset="-122"/>
                 <a:cs typeface="Trebuchet MS" pitchFamily="34" charset="-120"/>
               </a:rPr>
-              <a:t>ing</a:t>
-            </a:r>
-            <a:endParaRPr lang="en-US" sz="1300" dirty="0"/>
-          </a:p>
-        </p:txBody>
-      </p:sp>
-      <p:sp>
-        <p:nvSpPr>
-          <p:cNvPr id="24" name="Text 22"/>
-          <p:cNvSpPr/>
-          <p:nvPr/>
-        </p:nvSpPr>
-        <p:spPr>
-          <a:xfrm>
-            <a:off x="6519672" y="2569464"/>
-            <a:ext cx="1828800" cy="201168"/>
-          </a:xfrm>
-          <a:prstGeom prst="rect">
-            <a:avLst/>
-          </a:prstGeom>
-          <a:noFill/>
-          <a:ln/>
-        </p:spPr>
-        <p:txBody>
-          <a:bodyPr wrap="square" lIns="0" tIns="0" rIns="0" bIns="0" rtlCol="0" anchor="t"/>
-          <a:lstStyle/>
-          <a:p>
-            <a:pPr algn="ctr" indent="0" marL="0">
-              <a:buNone/>
-            </a:pPr>
-            <a:r>
-              <a:rPr lang="en-US" sz="850" dirty="0">
-                <a:solidFill>
-                  <a:srgbClr val="475569"/>
-                </a:solidFill>
-                <a:latin typeface="Calibri" pitchFamily="34" charset="0"/>
-                <a:ea typeface="Calibri" pitchFamily="34" charset="-122"/>
-                <a:cs typeface="Calibri" pitchFamily="34" charset="-120"/>
-              </a:rPr>
-              <a:t>ongoing action</a:t>
-            </a:r>
-            <a:endParaRPr lang="en-US" sz="850" dirty="0"/>
-          </a:p>
-        </p:txBody>
-      </p:sp>
-      <p:sp>
-        <p:nvSpPr>
-          <p:cNvPr id="25" name="Shape 23"/>
-          <p:cNvSpPr/>
-          <p:nvPr/>
-        </p:nvSpPr>
-        <p:spPr>
-          <a:xfrm>
-            <a:off x="365760" y="3273552"/>
-            <a:ext cx="1371600" cy="658368"/>
+              <a:t>Syllables</a:t>
+            </a:r>
+            <a:endParaRPr lang="en-US" sz="1100" dirty="0"/>
+          </a:p>
+        </p:txBody>
+      </p:sp>
+      <p:sp>
+        <p:nvSpPr>
+          <p:cNvPr id="24" name="Shape 22"/>
+          <p:cNvSpPr/>
+          <p:nvPr/>
+        </p:nvSpPr>
+        <p:spPr>
+          <a:xfrm>
+            <a:off x="1874520" y="3273552"/>
+            <a:ext cx="6903720" cy="658368"/>
           </a:xfrm>
           <a:prstGeom prst="rect">
             <a:avLst>
@@ -13475,11 +13317,38 @@
             </a:avLst>
           </a:prstGeom>
           <a:solidFill>
-            <a:srgbClr val="E2E8F0"/>
-          </a:solidFill>
-          <a:ln w="12700">
-            <a:solidFill>
-              <a:srgbClr val="E2E8F0"/>
+            <a:srgbClr val="CCFBF1"/>
+          </a:solidFill>
+          <a:ln w="12700">
+            <a:solidFill>
+              <a:srgbClr val="0D9488"/>
+            </a:solidFill>
+            <a:prstDash val="solid"/>
+          </a:ln>
+        </p:spPr>
+      </p:sp>
+      <p:sp>
+        <p:nvSpPr>
+          <p:cNvPr id="25" name="Shape 23"/>
+          <p:cNvSpPr/>
+          <p:nvPr/>
+        </p:nvSpPr>
+        <p:spPr>
+          <a:xfrm>
+            <a:off x="2999232" y="3364992"/>
+            <a:ext cx="1645920" cy="475488"/>
+          </a:xfrm>
+          <a:prstGeom prst="rect">
+            <a:avLst>
+              <a:gd name="adj" fmla="val 9615"/>
+            </a:avLst>
+          </a:prstGeom>
+          <a:solidFill>
+            <a:srgbClr val="FFFFFF"/>
+          </a:solidFill>
+          <a:ln w="12700">
+            <a:solidFill>
+              <a:srgbClr val="0D9488"/>
             </a:solidFill>
             <a:prstDash val="solid"/>
           </a:ln>
@@ -13493,8 +13362,8 @@
         </p:nvSpPr>
         <p:spPr>
           <a:xfrm>
-            <a:off x="365760" y="3273552"/>
-            <a:ext cx="1371600" cy="658368"/>
+            <a:off x="2999232" y="3364992"/>
+            <a:ext cx="1645920" cy="475488"/>
           </a:xfrm>
           <a:prstGeom prst="rect">
             <a:avLst/>
@@ -13510,46 +13379,58 @@
               <a:buNone/>
             </a:pPr>
             <a:r>
-              <a:rPr lang="en-US" sz="1100" b="1" dirty="0">
-                <a:solidFill>
-                  <a:srgbClr val="475569"/>
+              <a:rPr lang="en-US" sz="1400" b="1" dirty="0">
+                <a:solidFill>
+                  <a:srgbClr val="0D9488"/>
                 </a:solidFill>
                 <a:latin typeface="Trebuchet MS" pitchFamily="34" charset="0"/>
                 <a:ea typeface="Trebuchet MS" pitchFamily="34" charset="-122"/>
                 <a:cs typeface="Trebuchet MS" pitchFamily="34" charset="-120"/>
               </a:rPr>
-              <a:t>Syllables</a:t>
-            </a:r>
-            <a:endParaRPr lang="en-US" sz="1100" dirty="0"/>
-          </a:p>
-        </p:txBody>
-      </p:sp>
-      <p:sp>
-        <p:nvSpPr>
-          <p:cNvPr id="27" name="Shape 25"/>
-          <p:cNvSpPr/>
-          <p:nvPr/>
-        </p:nvSpPr>
-        <p:spPr>
-          <a:xfrm>
-            <a:off x="1874520" y="3273552"/>
-            <a:ext cx="6903720" cy="658368"/>
-          </a:xfrm>
-          <a:prstGeom prst="rect">
-            <a:avLst>
-              <a:gd name="adj" fmla="val 8333"/>
-            </a:avLst>
-          </a:prstGeom>
-          <a:solidFill>
-            <a:srgbClr val="CCFBF1"/>
-          </a:solidFill>
-          <a:ln w="12700">
-            <a:solidFill>
-              <a:srgbClr val="0D9488"/>
-            </a:solidFill>
-            <a:prstDash val="solid"/>
-          </a:ln>
-        </p:spPr>
+              <a:t>teach</a:t>
+            </a:r>
+            <a:endParaRPr lang="en-US" sz="1400" dirty="0"/>
+          </a:p>
+        </p:txBody>
+      </p:sp>
+      <p:sp>
+        <p:nvSpPr>
+          <p:cNvPr id="27" name="Text 25"/>
+          <p:cNvSpPr/>
+          <p:nvPr/>
+        </p:nvSpPr>
+        <p:spPr>
+          <a:xfrm>
+            <a:off x="4645152" y="3364992"/>
+            <a:ext cx="1097280" cy="475488"/>
+          </a:xfrm>
+          <a:prstGeom prst="rect">
+            <a:avLst/>
+          </a:prstGeom>
+          <a:noFill/>
+          <a:ln/>
+        </p:spPr>
+        <p:txBody>
+          <a:bodyPr wrap="square" lIns="0" tIns="0" rIns="0" bIns="0" rtlCol="0" anchor="ctr"/>
+          <a:lstStyle/>
+          <a:p>
+            <a:pPr algn="ctr" indent="0" marL="0">
+              <a:buNone/>
+            </a:pPr>
+            <a:r>
+              <a:rPr lang="en-US" sz="1600" b="1" dirty="0">
+                <a:solidFill>
+                  <a:srgbClr val="0D9488"/>
+                </a:solidFill>
+                <a:latin typeface="Trebuchet MS" pitchFamily="34" charset="0"/>
+                <a:ea typeface="Trebuchet MS" pitchFamily="34" charset="-122"/>
+                <a:cs typeface="Trebuchet MS" pitchFamily="34" charset="-120"/>
+              </a:rPr>
+              <a:t>·</a:t>
+            </a:r>
+            <a:endParaRPr lang="en-US" sz="1600" dirty="0"/>
+          </a:p>
+        </p:txBody>
       </p:sp>
       <p:sp>
         <p:nvSpPr>
@@ -13559,7 +13440,7 @@
         </p:nvSpPr>
         <p:spPr>
           <a:xfrm>
-            <a:off x="2313432" y="3364992"/>
+            <a:off x="5742432" y="3364992"/>
             <a:ext cx="1645920" cy="475488"/>
           </a:xfrm>
           <a:prstGeom prst="rect">
@@ -13586,7 +13467,7 @@
         </p:nvSpPr>
         <p:spPr>
           <a:xfrm>
-            <a:off x="2313432" y="3364992"/>
+            <a:off x="5742432" y="3364992"/>
             <a:ext cx="1645920" cy="475488"/>
           </a:xfrm>
           <a:prstGeom prst="rect">
@@ -13611,7 +13492,7 @@
                 <a:ea typeface="Trebuchet MS" pitchFamily="34" charset="-122"/>
                 <a:cs typeface="Trebuchet MS" pitchFamily="34" charset="-120"/>
               </a:rPr>
-              <a:t>re</a:t>
+              <a:t>es</a:t>
             </a:r>
             <a:endParaRPr lang="en-US" sz="1400" dirty="0"/>
           </a:p>
@@ -13619,14 +13500,41 @@
       </p:sp>
       <p:sp>
         <p:nvSpPr>
-          <p:cNvPr id="30" name="Text 28"/>
-          <p:cNvSpPr/>
-          <p:nvPr/>
-        </p:nvSpPr>
-        <p:spPr>
-          <a:xfrm>
-            <a:off x="3959352" y="3364992"/>
-            <a:ext cx="411480" cy="475488"/>
+          <p:cNvPr id="30" name="Shape 28"/>
+          <p:cNvSpPr/>
+          <p:nvPr/>
+        </p:nvSpPr>
+        <p:spPr>
+          <a:xfrm>
+            <a:off x="365760" y="4096512"/>
+            <a:ext cx="1371600" cy="804672"/>
+          </a:xfrm>
+          <a:prstGeom prst="rect">
+            <a:avLst>
+              <a:gd name="adj" fmla="val 6818"/>
+            </a:avLst>
+          </a:prstGeom>
+          <a:solidFill>
+            <a:srgbClr val="E2E8F0"/>
+          </a:solidFill>
+          <a:ln w="12700">
+            <a:solidFill>
+              <a:srgbClr val="E2E8F0"/>
+            </a:solidFill>
+            <a:prstDash val="solid"/>
+          </a:ln>
+        </p:spPr>
+      </p:sp>
+      <p:sp>
+        <p:nvSpPr>
+          <p:cNvPr id="31" name="Text 29"/>
+          <p:cNvSpPr/>
+          <p:nvPr/>
+        </p:nvSpPr>
+        <p:spPr>
+          <a:xfrm>
+            <a:off x="365760" y="4096512"/>
+            <a:ext cx="1371600" cy="804672"/>
           </a:xfrm>
           <a:prstGeom prst="rect">
             <a:avLst/>
@@ -13642,201 +13550,30 @@
               <a:buNone/>
             </a:pPr>
             <a:r>
-              <a:rPr lang="en-US" sz="1600" b="1" dirty="0">
-                <a:solidFill>
-                  <a:srgbClr val="0D9488"/>
+              <a:rPr lang="en-US" sz="1100" b="1" dirty="0">
+                <a:solidFill>
+                  <a:srgbClr val="475569"/>
                 </a:solidFill>
                 <a:latin typeface="Trebuchet MS" pitchFamily="34" charset="0"/>
                 <a:ea typeface="Trebuchet MS" pitchFamily="34" charset="-122"/>
                 <a:cs typeface="Trebuchet MS" pitchFamily="34" charset="-120"/>
               </a:rPr>
-              <a:t>·</a:t>
-            </a:r>
-            <a:endParaRPr lang="en-US" sz="1600" dirty="0"/>
-          </a:p>
-        </p:txBody>
-      </p:sp>
-      <p:sp>
-        <p:nvSpPr>
-          <p:cNvPr id="31" name="Shape 29"/>
-          <p:cNvSpPr/>
-          <p:nvPr/>
-        </p:nvSpPr>
-        <p:spPr>
-          <a:xfrm>
-            <a:off x="4370832" y="3364992"/>
-            <a:ext cx="1645920" cy="475488"/>
-          </a:xfrm>
-          <a:prstGeom prst="rect">
-            <a:avLst>
-              <a:gd name="adj" fmla="val 9615"/>
-            </a:avLst>
-          </a:prstGeom>
-          <a:solidFill>
-            <a:srgbClr val="FFFFFF"/>
-          </a:solidFill>
-          <a:ln w="12700">
-            <a:solidFill>
-              <a:srgbClr val="0D9488"/>
-            </a:solidFill>
-            <a:prstDash val="solid"/>
-          </a:ln>
-        </p:spPr>
-      </p:sp>
-      <p:sp>
-        <p:nvSpPr>
-          <p:cNvPr id="32" name="Text 30"/>
-          <p:cNvSpPr/>
-          <p:nvPr/>
-        </p:nvSpPr>
-        <p:spPr>
-          <a:xfrm>
-            <a:off x="4370832" y="3364992"/>
-            <a:ext cx="1645920" cy="475488"/>
-          </a:xfrm>
-          <a:prstGeom prst="rect">
-            <a:avLst/>
-          </a:prstGeom>
-          <a:noFill/>
-          <a:ln/>
-        </p:spPr>
-        <p:txBody>
-          <a:bodyPr wrap="square" lIns="0" tIns="0" rIns="0" bIns="0" rtlCol="0" anchor="ctr"/>
-          <a:lstStyle/>
-          <a:p>
-            <a:pPr algn="ctr" indent="0" marL="0">
-              <a:buNone/>
-            </a:pPr>
-            <a:r>
-              <a:rPr lang="en-US" sz="1400" b="1" dirty="0">
-                <a:solidFill>
-                  <a:srgbClr val="0D9488"/>
-                </a:solidFill>
-                <a:latin typeface="Trebuchet MS" pitchFamily="34" charset="0"/>
-                <a:ea typeface="Trebuchet MS" pitchFamily="34" charset="-122"/>
-                <a:cs typeface="Trebuchet MS" pitchFamily="34" charset="-120"/>
-              </a:rPr>
-              <a:t>teach</a:t>
-            </a:r>
-            <a:endParaRPr lang="en-US" sz="1400" dirty="0"/>
-          </a:p>
-        </p:txBody>
-      </p:sp>
-      <p:sp>
-        <p:nvSpPr>
-          <p:cNvPr id="33" name="Text 31"/>
-          <p:cNvSpPr/>
-          <p:nvPr/>
-        </p:nvSpPr>
-        <p:spPr>
-          <a:xfrm>
-            <a:off x="6016752" y="3364992"/>
-            <a:ext cx="411480" cy="475488"/>
-          </a:xfrm>
-          <a:prstGeom prst="rect">
-            <a:avLst/>
-          </a:prstGeom>
-          <a:noFill/>
-          <a:ln/>
-        </p:spPr>
-        <p:txBody>
-          <a:bodyPr wrap="square" lIns="0" tIns="0" rIns="0" bIns="0" rtlCol="0" anchor="ctr"/>
-          <a:lstStyle/>
-          <a:p>
-            <a:pPr algn="ctr" indent="0" marL="0">
-              <a:buNone/>
-            </a:pPr>
-            <a:r>
-              <a:rPr lang="en-US" sz="1600" b="1" dirty="0">
-                <a:solidFill>
-                  <a:srgbClr val="0D9488"/>
-                </a:solidFill>
-                <a:latin typeface="Trebuchet MS" pitchFamily="34" charset="0"/>
-                <a:ea typeface="Trebuchet MS" pitchFamily="34" charset="-122"/>
-                <a:cs typeface="Trebuchet MS" pitchFamily="34" charset="-120"/>
-              </a:rPr>
-              <a:t>·</a:t>
-            </a:r>
-            <a:endParaRPr lang="en-US" sz="1600" dirty="0"/>
-          </a:p>
-        </p:txBody>
-      </p:sp>
-      <p:sp>
-        <p:nvSpPr>
-          <p:cNvPr id="34" name="Shape 32"/>
-          <p:cNvSpPr/>
-          <p:nvPr/>
-        </p:nvSpPr>
-        <p:spPr>
-          <a:xfrm>
-            <a:off x="6428232" y="3364992"/>
-            <a:ext cx="1645920" cy="475488"/>
-          </a:xfrm>
-          <a:prstGeom prst="rect">
-            <a:avLst>
-              <a:gd name="adj" fmla="val 9615"/>
-            </a:avLst>
-          </a:prstGeom>
-          <a:solidFill>
-            <a:srgbClr val="FFFFFF"/>
-          </a:solidFill>
-          <a:ln w="12700">
-            <a:solidFill>
-              <a:srgbClr val="0D9488"/>
-            </a:solidFill>
-            <a:prstDash val="solid"/>
-          </a:ln>
-        </p:spPr>
-      </p:sp>
-      <p:sp>
-        <p:nvSpPr>
-          <p:cNvPr id="35" name="Text 33"/>
-          <p:cNvSpPr/>
-          <p:nvPr/>
-        </p:nvSpPr>
-        <p:spPr>
-          <a:xfrm>
-            <a:off x="6428232" y="3364992"/>
-            <a:ext cx="1645920" cy="475488"/>
-          </a:xfrm>
-          <a:prstGeom prst="rect">
-            <a:avLst/>
-          </a:prstGeom>
-          <a:noFill/>
-          <a:ln/>
-        </p:spPr>
-        <p:txBody>
-          <a:bodyPr wrap="square" lIns="0" tIns="0" rIns="0" bIns="0" rtlCol="0" anchor="ctr"/>
-          <a:lstStyle/>
-          <a:p>
-            <a:pPr algn="ctr" indent="0" marL="0">
-              <a:buNone/>
-            </a:pPr>
-            <a:r>
-              <a:rPr lang="en-US" sz="1400" b="1" dirty="0">
-                <a:solidFill>
-                  <a:srgbClr val="0D9488"/>
-                </a:solidFill>
-                <a:latin typeface="Trebuchet MS" pitchFamily="34" charset="0"/>
-                <a:ea typeface="Trebuchet MS" pitchFamily="34" charset="-122"/>
-                <a:cs typeface="Trebuchet MS" pitchFamily="34" charset="-120"/>
-              </a:rPr>
-              <a:t>ing</a:t>
-            </a:r>
-            <a:endParaRPr lang="en-US" sz="1400" dirty="0"/>
-          </a:p>
-        </p:txBody>
-      </p:sp>
-      <p:sp>
-        <p:nvSpPr>
-          <p:cNvPr id="36" name="Shape 34"/>
-          <p:cNvSpPr/>
-          <p:nvPr/>
-        </p:nvSpPr>
-        <p:spPr>
-          <a:xfrm>
-            <a:off x="365760" y="4096512"/>
-            <a:ext cx="1371600" cy="804672"/>
+              <a:t>Phonemes</a:t>
+            </a:r>
+            <a:endParaRPr lang="en-US" sz="1100" dirty="0"/>
+          </a:p>
+        </p:txBody>
+      </p:sp>
+      <p:sp>
+        <p:nvSpPr>
+          <p:cNvPr id="32" name="Shape 30"/>
+          <p:cNvSpPr/>
+          <p:nvPr/>
+        </p:nvSpPr>
+        <p:spPr>
+          <a:xfrm>
+            <a:off x="1874520" y="4096512"/>
+            <a:ext cx="6903720" cy="804672"/>
           </a:xfrm>
           <a:prstGeom prst="rect">
             <a:avLst>
@@ -13844,85 +13581,19 @@
             </a:avLst>
           </a:prstGeom>
           <a:solidFill>
-            <a:srgbClr val="E2E8F0"/>
+            <a:srgbClr val="F8FAFC"/>
           </a:solidFill>
           <a:ln w="12700">
             <a:solidFill>
               <a:srgbClr val="E2E8F0"/>
             </a:solidFill>
-            <a:prstDash val="solid"/>
-          </a:ln>
-        </p:spPr>
-      </p:sp>
-      <p:sp>
-        <p:nvSpPr>
-          <p:cNvPr id="37" name="Text 35"/>
-          <p:cNvSpPr/>
-          <p:nvPr/>
-        </p:nvSpPr>
-        <p:spPr>
-          <a:xfrm>
-            <a:off x="365760" y="4096512"/>
-            <a:ext cx="1371600" cy="804672"/>
-          </a:xfrm>
-          <a:prstGeom prst="rect">
-            <a:avLst/>
-          </a:prstGeom>
-          <a:noFill/>
-          <a:ln/>
-        </p:spPr>
-        <p:txBody>
-          <a:bodyPr wrap="square" lIns="0" tIns="0" rIns="0" bIns="0" rtlCol="0" anchor="ctr"/>
-          <a:lstStyle/>
-          <a:p>
-            <a:pPr algn="ctr" indent="0" marL="0">
-              <a:buNone/>
-            </a:pPr>
-            <a:r>
-              <a:rPr lang="en-US" sz="1100" b="1" dirty="0">
-                <a:solidFill>
-                  <a:srgbClr val="475569"/>
-                </a:solidFill>
-                <a:latin typeface="Trebuchet MS" pitchFamily="34" charset="0"/>
-                <a:ea typeface="Trebuchet MS" pitchFamily="34" charset="-122"/>
-                <a:cs typeface="Trebuchet MS" pitchFamily="34" charset="-120"/>
-              </a:rPr>
-              <a:t>Phonemes</a:t>
-            </a:r>
-            <a:endParaRPr lang="en-US" sz="1100" dirty="0"/>
-          </a:p>
-        </p:txBody>
-      </p:sp>
-      <p:sp>
-        <p:nvSpPr>
-          <p:cNvPr id="38" name="Shape 36"/>
-          <p:cNvSpPr/>
-          <p:nvPr/>
-        </p:nvSpPr>
-        <p:spPr>
-          <a:xfrm>
-            <a:off x="1874520" y="4096512"/>
-            <a:ext cx="6903720" cy="804672"/>
-          </a:xfrm>
-          <a:prstGeom prst="rect">
-            <a:avLst>
-              <a:gd name="adj" fmla="val 6818"/>
-            </a:avLst>
-          </a:prstGeom>
-          <a:solidFill>
-            <a:srgbClr val="F8FAFC"/>
-          </a:solidFill>
-          <a:ln w="12700">
-            <a:solidFill>
-              <a:srgbClr val="E2E8F0"/>
-            </a:solidFill>
             <a:prstDash val="dash"/>
           </a:ln>
         </p:spPr>
       </p:sp>
       <p:sp>
         <p:nvSpPr>
-          <p:cNvPr id="39" name="Text 37"/>
+          <p:cNvPr id="33" name="Text 31"/>
           <p:cNvSpPr/>
           <p:nvPr/>
         </p:nvSpPr>
@@ -14154,7 +13825,7 @@
                 <a:ea typeface="Calibri" pitchFamily="34" charset="-122"/>
                 <a:cs typeface="Calibri" pitchFamily="34" charset="-120"/>
               </a:rPr>
-              <a:t>Root 'teach' — to show or instruct</a:t>
+              <a:t>Root 'teach' — to show someone how to do something</a:t>
             </a:r>
             <a:endParaRPr lang="en-US" sz="1600" dirty="0"/>
           </a:p>
@@ -14510,7 +14181,7 @@
                 <a:ea typeface="Calibri" pitchFamily="34" charset="-122"/>
                 <a:cs typeface="Calibri" pitchFamily="34" charset="-120"/>
               </a:rPr>
-              <a:t>Word Labs  •  wordlabs.app  •  Root: 'teach' = to show or instruct</a:t>
+              <a:t>Word Labs  •  wordlabs.app  •  Root: 'teach' = to show someone how to do something</a:t>
             </a:r>
             <a:endParaRPr lang="en-US" sz="800" dirty="0"/>
           </a:p>
@@ -14649,7 +14320,7 @@
                 <a:ea typeface="Trebuchet MS" pitchFamily="34" charset="-122"/>
                 <a:cs typeface="Trebuchet MS" pitchFamily="34" charset="-120"/>
               </a:rPr>
-              <a:t>reteaching</a:t>
+              <a:t>teaches</a:t>
             </a:r>
             <a:endParaRPr lang="en-US" sz="2800" dirty="0"/>
           </a:p>
@@ -14729,7 +14400,7 @@
         </p:nvSpPr>
         <p:spPr>
           <a:xfrm>
-            <a:off x="2221992" y="2258568"/>
+            <a:off x="2938272" y="2258568"/>
             <a:ext cx="1828800" cy="292608"/>
           </a:xfrm>
           <a:prstGeom prst="rect">
@@ -14738,11 +14409,11 @@
             </a:avLst>
           </a:prstGeom>
           <a:solidFill>
-            <a:srgbClr val="DDD6FE"/>
+            <a:srgbClr val="CCFBF1"/>
           </a:solidFill>
           <a:ln w="19050">
             <a:solidFill>
-              <a:srgbClr val="7C3AED"/>
+              <a:srgbClr val="0D9488"/>
             </a:solidFill>
             <a:prstDash val="solid"/>
           </a:ln>
@@ -14763,7 +14434,7 @@
         </p:nvSpPr>
         <p:spPr>
           <a:xfrm>
-            <a:off x="2221992" y="2258568"/>
+            <a:off x="2938272" y="2258568"/>
             <a:ext cx="1828800" cy="292608"/>
           </a:xfrm>
           <a:prstGeom prst="rect">
@@ -14782,13 +14453,13 @@
             <a:r>
               <a:rPr lang="en-US" sz="1300" b="1" dirty="0">
                 <a:solidFill>
-                  <a:srgbClr val="4C1D95"/>
+                  <a:srgbClr val="0F766E"/>
                 </a:solidFill>
                 <a:latin typeface="Trebuchet MS" pitchFamily="34" charset="0"/>
                 <a:ea typeface="Trebuchet MS" pitchFamily="34" charset="-122"/>
                 <a:cs typeface="Trebuchet MS" pitchFamily="34" charset="-120"/>
               </a:rPr>
-              <a:t>re</a:t>
+              <a:t>teach</a:t>
             </a:r>
             <a:endParaRPr lang="en-US" sz="1300" dirty="0"/>
           </a:p>
@@ -14802,7 +14473,7 @@
         </p:nvSpPr>
         <p:spPr>
           <a:xfrm>
-            <a:off x="2221992" y="2569464"/>
+            <a:off x="2938272" y="2569464"/>
             <a:ext cx="1828800" cy="201168"/>
           </a:xfrm>
           <a:prstGeom prst="rect">
@@ -14827,7 +14498,7 @@
                 <a:ea typeface="Calibri" pitchFamily="34" charset="-122"/>
                 <a:cs typeface="Calibri" pitchFamily="34" charset="-120"/>
               </a:rPr>
-              <a:t>again</a:t>
+              <a:t>to show someone how to do something</a:t>
             </a:r>
             <a:endParaRPr lang="en-US" sz="850" dirty="0"/>
           </a:p>
@@ -14841,7 +14512,7 @@
         </p:nvSpPr>
         <p:spPr>
           <a:xfrm>
-            <a:off x="4370832" y="2258568"/>
+            <a:off x="5803392" y="2258568"/>
             <a:ext cx="1828800" cy="292608"/>
           </a:xfrm>
           <a:prstGeom prst="rect">
@@ -14850,11 +14521,11 @@
             </a:avLst>
           </a:prstGeom>
           <a:solidFill>
-            <a:srgbClr val="CCFBF1"/>
+            <a:srgbClr val="FCE7F3"/>
           </a:solidFill>
           <a:ln w="19050">
             <a:solidFill>
-              <a:srgbClr val="0D9488"/>
+              <a:srgbClr val="DB2777"/>
             </a:solidFill>
             <a:prstDash val="solid"/>
           </a:ln>
@@ -14875,7 +14546,7 @@
         </p:nvSpPr>
         <p:spPr>
           <a:xfrm>
-            <a:off x="4370832" y="2258568"/>
+            <a:off x="5803392" y="2258568"/>
             <a:ext cx="1828800" cy="292608"/>
           </a:xfrm>
           <a:prstGeom prst="rect">
@@ -14894,13 +14565,13 @@
             <a:r>
               <a:rPr lang="en-US" sz="1300" b="1" dirty="0">
                 <a:solidFill>
-                  <a:srgbClr val="0F766E"/>
+                  <a:srgbClr val="9D174D"/>
                 </a:solidFill>
                 <a:latin typeface="Trebuchet MS" pitchFamily="34" charset="0"/>
                 <a:ea typeface="Trebuchet MS" pitchFamily="34" charset="-122"/>
                 <a:cs typeface="Trebuchet MS" pitchFamily="34" charset="-120"/>
               </a:rPr>
-              <a:t>teach</a:t>
+              <a:t>es</a:t>
             </a:r>
             <a:endParaRPr lang="en-US" sz="1300" dirty="0"/>
           </a:p>
@@ -14914,7 +14585,7 @@
         </p:nvSpPr>
         <p:spPr>
           <a:xfrm>
-            <a:off x="4370832" y="2569464"/>
+            <a:off x="5803392" y="2569464"/>
             <a:ext cx="1828800" cy="201168"/>
           </a:xfrm>
           <a:prstGeom prst="rect">
@@ -14939,7 +14610,7 @@
                 <a:ea typeface="Calibri" pitchFamily="34" charset="-122"/>
                 <a:cs typeface="Calibri" pitchFamily="34" charset="-120"/>
               </a:rPr>
-              <a:t>to show or instruct</a:t>
+              <a:t>plural or present tense</a:t>
             </a:r>
             <a:endParaRPr lang="en-US" sz="850" dirty="0"/>
           </a:p>
@@ -14953,30 +14624,23 @@
         </p:nvSpPr>
         <p:spPr>
           <a:xfrm>
-            <a:off x="6519672" y="2258568"/>
-            <a:ext cx="1828800" cy="292608"/>
+            <a:off x="365760" y="3273552"/>
+            <a:ext cx="1371600" cy="658368"/>
           </a:xfrm>
           <a:prstGeom prst="rect">
             <a:avLst>
-              <a:gd name="adj" fmla="val 25000"/>
+              <a:gd name="adj" fmla="val 8333"/>
             </a:avLst>
           </a:prstGeom>
           <a:solidFill>
-            <a:srgbClr val="FCE7F3"/>
-          </a:solidFill>
-          <a:ln w="19050">
-            <a:solidFill>
-              <a:srgbClr val="DB2777"/>
-            </a:solidFill>
-            <a:prstDash val="solid"/>
-          </a:ln>
-          <a:effectLst>
-            <a:outerShdw sx="100000" sy="100000" kx="0" ky="0" algn="bl" rotWithShape="0" blurRad="101600" dist="38100" dir="8100000">
-              <a:srgbClr val="000000">
-                <a:alpha val="12000"/>
-              </a:srgbClr>
-            </a:outerShdw>
-          </a:effectLst>
+            <a:srgbClr val="E2E8F0"/>
+          </a:solidFill>
+          <a:ln w="12700">
+            <a:solidFill>
+              <a:srgbClr val="E2E8F0"/>
+            </a:solidFill>
+            <a:prstDash val="solid"/>
+          </a:ln>
         </p:spPr>
       </p:sp>
       <p:sp>
@@ -14987,8 +14651,8 @@
         </p:nvSpPr>
         <p:spPr>
           <a:xfrm>
-            <a:off x="6519672" y="2258568"/>
-            <a:ext cx="1828800" cy="292608"/>
+            <a:off x="365760" y="3273552"/>
+            <a:ext cx="1371600" cy="658368"/>
           </a:xfrm>
           <a:prstGeom prst="rect">
             <a:avLst/>
@@ -15004,69 +14668,30 @@
               <a:buNone/>
             </a:pPr>
             <a:r>
-              <a:rPr lang="en-US" sz="1300" b="1" dirty="0">
-                <a:solidFill>
-                  <a:srgbClr val="9D174D"/>
+              <a:rPr lang="en-US" sz="1100" b="1" dirty="0">
+                <a:solidFill>
+                  <a:srgbClr val="475569"/>
                 </a:solidFill>
                 <a:latin typeface="Trebuchet MS" pitchFamily="34" charset="0"/>
                 <a:ea typeface="Trebuchet MS" pitchFamily="34" charset="-122"/>
                 <a:cs typeface="Trebuchet MS" pitchFamily="34" charset="-120"/>
               </a:rPr>
-              <a:t>ing</a:t>
-            </a:r>
-            <a:endParaRPr lang="en-US" sz="1300" dirty="0"/>
-          </a:p>
-        </p:txBody>
-      </p:sp>
-      <p:sp>
-        <p:nvSpPr>
-          <p:cNvPr id="24" name="Text 22"/>
-          <p:cNvSpPr/>
-          <p:nvPr/>
-        </p:nvSpPr>
-        <p:spPr>
-          <a:xfrm>
-            <a:off x="6519672" y="2569464"/>
-            <a:ext cx="1828800" cy="201168"/>
-          </a:xfrm>
-          <a:prstGeom prst="rect">
-            <a:avLst/>
-          </a:prstGeom>
-          <a:noFill/>
-          <a:ln/>
-        </p:spPr>
-        <p:txBody>
-          <a:bodyPr wrap="square" lIns="0" tIns="0" rIns="0" bIns="0" rtlCol="0" anchor="t"/>
-          <a:lstStyle/>
-          <a:p>
-            <a:pPr algn="ctr" indent="0" marL="0">
-              <a:buNone/>
-            </a:pPr>
-            <a:r>
-              <a:rPr lang="en-US" sz="850" dirty="0">
-                <a:solidFill>
-                  <a:srgbClr val="475569"/>
-                </a:solidFill>
-                <a:latin typeface="Calibri" pitchFamily="34" charset="0"/>
-                <a:ea typeface="Calibri" pitchFamily="34" charset="-122"/>
-                <a:cs typeface="Calibri" pitchFamily="34" charset="-120"/>
-              </a:rPr>
-              <a:t>ongoing action</a:t>
-            </a:r>
-            <a:endParaRPr lang="en-US" sz="850" dirty="0"/>
-          </a:p>
-        </p:txBody>
-      </p:sp>
-      <p:sp>
-        <p:nvSpPr>
-          <p:cNvPr id="25" name="Shape 23"/>
-          <p:cNvSpPr/>
-          <p:nvPr/>
-        </p:nvSpPr>
-        <p:spPr>
-          <a:xfrm>
-            <a:off x="365760" y="3273552"/>
-            <a:ext cx="1371600" cy="658368"/>
+              <a:t>Syllables</a:t>
+            </a:r>
+            <a:endParaRPr lang="en-US" sz="1100" dirty="0"/>
+          </a:p>
+        </p:txBody>
+      </p:sp>
+      <p:sp>
+        <p:nvSpPr>
+          <p:cNvPr id="24" name="Shape 22"/>
+          <p:cNvSpPr/>
+          <p:nvPr/>
+        </p:nvSpPr>
+        <p:spPr>
+          <a:xfrm>
+            <a:off x="1874520" y="3273552"/>
+            <a:ext cx="6903720" cy="658368"/>
           </a:xfrm>
           <a:prstGeom prst="rect">
             <a:avLst>
@@ -15074,11 +14699,38 @@
             </a:avLst>
           </a:prstGeom>
           <a:solidFill>
-            <a:srgbClr val="E2E8F0"/>
-          </a:solidFill>
-          <a:ln w="12700">
-            <a:solidFill>
-              <a:srgbClr val="E2E8F0"/>
+            <a:srgbClr val="CCFBF1"/>
+          </a:solidFill>
+          <a:ln w="12700">
+            <a:solidFill>
+              <a:srgbClr val="0D9488"/>
+            </a:solidFill>
+            <a:prstDash val="solid"/>
+          </a:ln>
+        </p:spPr>
+      </p:sp>
+      <p:sp>
+        <p:nvSpPr>
+          <p:cNvPr id="25" name="Shape 23"/>
+          <p:cNvSpPr/>
+          <p:nvPr/>
+        </p:nvSpPr>
+        <p:spPr>
+          <a:xfrm>
+            <a:off x="2999232" y="3364992"/>
+            <a:ext cx="1645920" cy="475488"/>
+          </a:xfrm>
+          <a:prstGeom prst="rect">
+            <a:avLst>
+              <a:gd name="adj" fmla="val 9615"/>
+            </a:avLst>
+          </a:prstGeom>
+          <a:solidFill>
+            <a:srgbClr val="FFFFFF"/>
+          </a:solidFill>
+          <a:ln w="12700">
+            <a:solidFill>
+              <a:srgbClr val="0D9488"/>
             </a:solidFill>
             <a:prstDash val="solid"/>
           </a:ln>
@@ -15092,8 +14744,8 @@
         </p:nvSpPr>
         <p:spPr>
           <a:xfrm>
-            <a:off x="365760" y="3273552"/>
-            <a:ext cx="1371600" cy="658368"/>
+            <a:off x="2999232" y="3364992"/>
+            <a:ext cx="1645920" cy="475488"/>
           </a:xfrm>
           <a:prstGeom prst="rect">
             <a:avLst/>
@@ -15109,15 +14761,186 @@
               <a:buNone/>
             </a:pPr>
             <a:r>
-              <a:rPr lang="en-US" sz="1100" b="1" dirty="0">
-                <a:solidFill>
-                  <a:srgbClr val="475569"/>
+              <a:rPr lang="en-US" sz="1400" b="1" dirty="0">
+                <a:solidFill>
+                  <a:srgbClr val="0D9488"/>
                 </a:solidFill>
                 <a:latin typeface="Trebuchet MS" pitchFamily="34" charset="0"/>
                 <a:ea typeface="Trebuchet MS" pitchFamily="34" charset="-122"/>
                 <a:cs typeface="Trebuchet MS" pitchFamily="34" charset="-120"/>
               </a:rPr>
-              <a:t>Syllables</a:t>
+              <a:t>teach</a:t>
+            </a:r>
+            <a:endParaRPr lang="en-US" sz="1400" dirty="0"/>
+          </a:p>
+        </p:txBody>
+      </p:sp>
+      <p:sp>
+        <p:nvSpPr>
+          <p:cNvPr id="27" name="Text 25"/>
+          <p:cNvSpPr/>
+          <p:nvPr/>
+        </p:nvSpPr>
+        <p:spPr>
+          <a:xfrm>
+            <a:off x="4645152" y="3364992"/>
+            <a:ext cx="1097280" cy="475488"/>
+          </a:xfrm>
+          <a:prstGeom prst="rect">
+            <a:avLst/>
+          </a:prstGeom>
+          <a:noFill/>
+          <a:ln/>
+        </p:spPr>
+        <p:txBody>
+          <a:bodyPr wrap="square" lIns="0" tIns="0" rIns="0" bIns="0" rtlCol="0" anchor="ctr"/>
+          <a:lstStyle/>
+          <a:p>
+            <a:pPr algn="ctr" indent="0" marL="0">
+              <a:buNone/>
+            </a:pPr>
+            <a:r>
+              <a:rPr lang="en-US" sz="1600" b="1" dirty="0">
+                <a:solidFill>
+                  <a:srgbClr val="0D9488"/>
+                </a:solidFill>
+                <a:latin typeface="Trebuchet MS" pitchFamily="34" charset="0"/>
+                <a:ea typeface="Trebuchet MS" pitchFamily="34" charset="-122"/>
+                <a:cs typeface="Trebuchet MS" pitchFamily="34" charset="-120"/>
+              </a:rPr>
+              <a:t>·</a:t>
+            </a:r>
+            <a:endParaRPr lang="en-US" sz="1600" dirty="0"/>
+          </a:p>
+        </p:txBody>
+      </p:sp>
+      <p:sp>
+        <p:nvSpPr>
+          <p:cNvPr id="28" name="Shape 26"/>
+          <p:cNvSpPr/>
+          <p:nvPr/>
+        </p:nvSpPr>
+        <p:spPr>
+          <a:xfrm>
+            <a:off x="5742432" y="3364992"/>
+            <a:ext cx="1645920" cy="475488"/>
+          </a:xfrm>
+          <a:prstGeom prst="rect">
+            <a:avLst>
+              <a:gd name="adj" fmla="val 9615"/>
+            </a:avLst>
+          </a:prstGeom>
+          <a:solidFill>
+            <a:srgbClr val="FFFFFF"/>
+          </a:solidFill>
+          <a:ln w="12700">
+            <a:solidFill>
+              <a:srgbClr val="0D9488"/>
+            </a:solidFill>
+            <a:prstDash val="solid"/>
+          </a:ln>
+        </p:spPr>
+      </p:sp>
+      <p:sp>
+        <p:nvSpPr>
+          <p:cNvPr id="29" name="Text 27"/>
+          <p:cNvSpPr/>
+          <p:nvPr/>
+        </p:nvSpPr>
+        <p:spPr>
+          <a:xfrm>
+            <a:off x="5742432" y="3364992"/>
+            <a:ext cx="1645920" cy="475488"/>
+          </a:xfrm>
+          <a:prstGeom prst="rect">
+            <a:avLst/>
+          </a:prstGeom>
+          <a:noFill/>
+          <a:ln/>
+        </p:spPr>
+        <p:txBody>
+          <a:bodyPr wrap="square" lIns="0" tIns="0" rIns="0" bIns="0" rtlCol="0" anchor="ctr"/>
+          <a:lstStyle/>
+          <a:p>
+            <a:pPr algn="ctr" indent="0" marL="0">
+              <a:buNone/>
+            </a:pPr>
+            <a:r>
+              <a:rPr lang="en-US" sz="1400" b="1" dirty="0">
+                <a:solidFill>
+                  <a:srgbClr val="0D9488"/>
+                </a:solidFill>
+                <a:latin typeface="Trebuchet MS" pitchFamily="34" charset="0"/>
+                <a:ea typeface="Trebuchet MS" pitchFamily="34" charset="-122"/>
+                <a:cs typeface="Trebuchet MS" pitchFamily="34" charset="-120"/>
+              </a:rPr>
+              <a:t>es</a:t>
+            </a:r>
+            <a:endParaRPr lang="en-US" sz="1400" dirty="0"/>
+          </a:p>
+        </p:txBody>
+      </p:sp>
+      <p:sp>
+        <p:nvSpPr>
+          <p:cNvPr id="30" name="Shape 28"/>
+          <p:cNvSpPr/>
+          <p:nvPr/>
+        </p:nvSpPr>
+        <p:spPr>
+          <a:xfrm>
+            <a:off x="365760" y="4096512"/>
+            <a:ext cx="1371600" cy="804672"/>
+          </a:xfrm>
+          <a:prstGeom prst="rect">
+            <a:avLst>
+              <a:gd name="adj" fmla="val 6818"/>
+            </a:avLst>
+          </a:prstGeom>
+          <a:solidFill>
+            <a:srgbClr val="E2E8F0"/>
+          </a:solidFill>
+          <a:ln w="12700">
+            <a:solidFill>
+              <a:srgbClr val="E2E8F0"/>
+            </a:solidFill>
+            <a:prstDash val="solid"/>
+          </a:ln>
+        </p:spPr>
+      </p:sp>
+      <p:sp>
+        <p:nvSpPr>
+          <p:cNvPr id="31" name="Text 29"/>
+          <p:cNvSpPr/>
+          <p:nvPr/>
+        </p:nvSpPr>
+        <p:spPr>
+          <a:xfrm>
+            <a:off x="365760" y="4096512"/>
+            <a:ext cx="1371600" cy="804672"/>
+          </a:xfrm>
+          <a:prstGeom prst="rect">
+            <a:avLst/>
+          </a:prstGeom>
+          <a:noFill/>
+          <a:ln/>
+        </p:spPr>
+        <p:txBody>
+          <a:bodyPr wrap="square" lIns="0" tIns="0" rIns="0" bIns="0" rtlCol="0" anchor="ctr"/>
+          <a:lstStyle/>
+          <a:p>
+            <a:pPr algn="ctr" indent="0" marL="0">
+              <a:buNone/>
+            </a:pPr>
+            <a:r>
+              <a:rPr lang="en-US" sz="1100" b="1" dirty="0">
+                <a:solidFill>
+                  <a:srgbClr val="475569"/>
+                </a:solidFill>
+                <a:latin typeface="Trebuchet MS" pitchFamily="34" charset="0"/>
+                <a:ea typeface="Trebuchet MS" pitchFamily="34" charset="-122"/>
+                <a:cs typeface="Trebuchet MS" pitchFamily="34" charset="-120"/>
+              </a:rPr>
+              <a:t>Phonemes</a:t>
             </a:r>
             <a:endParaRPr lang="en-US" sz="1100" dirty="0"/>
           </a:p>
@@ -15125,13 +14948,13 @@
       </p:sp>
       <p:sp>
         <p:nvSpPr>
-          <p:cNvPr id="27" name="Shape 25"/>
-          <p:cNvSpPr/>
-          <p:nvPr/>
-        </p:nvSpPr>
-        <p:spPr>
-          <a:xfrm>
-            <a:off x="1874520" y="3273552"/>
+          <p:cNvPr id="32" name="Shape 30"/>
+          <p:cNvSpPr/>
+          <p:nvPr/>
+        </p:nvSpPr>
+        <p:spPr>
+          <a:xfrm>
+            <a:off x="1874520" y="4096512"/>
             <a:ext cx="6903720" cy="658368"/>
           </a:xfrm>
           <a:prstGeom prst="rect">
@@ -15140,30 +14963,30 @@
             </a:avLst>
           </a:prstGeom>
           <a:solidFill>
-            <a:srgbClr val="CCFBF1"/>
-          </a:solidFill>
-          <a:ln w="12700">
-            <a:solidFill>
-              <a:srgbClr val="0D9488"/>
-            </a:solidFill>
-            <a:prstDash val="solid"/>
-          </a:ln>
-        </p:spPr>
-      </p:sp>
-      <p:sp>
-        <p:nvSpPr>
-          <p:cNvPr id="28" name="Shape 26"/>
-          <p:cNvSpPr/>
-          <p:nvPr/>
-        </p:nvSpPr>
-        <p:spPr>
-          <a:xfrm>
-            <a:off x="2313432" y="3364992"/>
-            <a:ext cx="1645920" cy="475488"/>
+            <a:srgbClr val="FCE7F3"/>
+          </a:solidFill>
+          <a:ln w="12700">
+            <a:solidFill>
+              <a:srgbClr val="DB2777"/>
+            </a:solidFill>
+            <a:prstDash val="solid"/>
+          </a:ln>
+        </p:spPr>
+      </p:sp>
+      <p:sp>
+        <p:nvSpPr>
+          <p:cNvPr id="33" name="Shape 31"/>
+          <p:cNvSpPr/>
+          <p:nvPr/>
+        </p:nvSpPr>
+        <p:spPr>
+          <a:xfrm>
+            <a:off x="2427732" y="4169664"/>
+            <a:ext cx="685800" cy="475488"/>
           </a:xfrm>
           <a:prstGeom prst="rect">
             <a:avLst>
-              <a:gd name="adj" fmla="val 9615"/>
+              <a:gd name="adj" fmla="val 7692"/>
             </a:avLst>
           </a:prstGeom>
           <a:solidFill>
@@ -15171,22 +14994,22 @@
           </a:solidFill>
           <a:ln w="12700">
             <a:solidFill>
-              <a:srgbClr val="0D9488"/>
-            </a:solidFill>
-            <a:prstDash val="solid"/>
-          </a:ln>
-        </p:spPr>
-      </p:sp>
-      <p:sp>
-        <p:nvSpPr>
-          <p:cNvPr id="29" name="Text 27"/>
-          <p:cNvSpPr/>
-          <p:nvPr/>
-        </p:nvSpPr>
-        <p:spPr>
-          <a:xfrm>
-            <a:off x="2313432" y="3364992"/>
-            <a:ext cx="1645920" cy="475488"/>
+              <a:srgbClr val="DB2777"/>
+            </a:solidFill>
+            <a:prstDash val="solid"/>
+          </a:ln>
+        </p:spPr>
+      </p:sp>
+      <p:sp>
+        <p:nvSpPr>
+          <p:cNvPr id="34" name="Text 32"/>
+          <p:cNvSpPr/>
+          <p:nvPr/>
+        </p:nvSpPr>
+        <p:spPr>
+          <a:xfrm>
+            <a:off x="2427732" y="4169664"/>
+            <a:ext cx="685800" cy="475488"/>
           </a:xfrm>
           <a:prstGeom prst="rect">
             <a:avLst/>
@@ -15202,30 +15025,57 @@
               <a:buNone/>
             </a:pPr>
             <a:r>
-              <a:rPr lang="en-US" sz="1400" b="1" dirty="0">
-                <a:solidFill>
-                  <a:srgbClr val="0D9488"/>
+              <a:rPr lang="en-US" sz="900" b="1" dirty="0">
+                <a:solidFill>
+                  <a:srgbClr val="9D174D"/>
                 </a:solidFill>
                 <a:latin typeface="Trebuchet MS" pitchFamily="34" charset="0"/>
                 <a:ea typeface="Trebuchet MS" pitchFamily="34" charset="-122"/>
                 <a:cs typeface="Trebuchet MS" pitchFamily="34" charset="-120"/>
               </a:rPr>
-              <a:t>re</a:t>
-            </a:r>
-            <a:endParaRPr lang="en-US" sz="1400" dirty="0"/>
-          </a:p>
-        </p:txBody>
-      </p:sp>
-      <p:sp>
-        <p:nvSpPr>
-          <p:cNvPr id="30" name="Text 28"/>
-          <p:cNvSpPr/>
-          <p:nvPr/>
-        </p:nvSpPr>
-        <p:spPr>
-          <a:xfrm>
-            <a:off x="3959352" y="3364992"/>
-            <a:ext cx="411480" cy="475488"/>
+              <a:t>t</a:t>
+            </a:r>
+            <a:endParaRPr lang="en-US" sz="900" dirty="0"/>
+          </a:p>
+        </p:txBody>
+      </p:sp>
+      <p:sp>
+        <p:nvSpPr>
+          <p:cNvPr id="35" name="Shape 33"/>
+          <p:cNvSpPr/>
+          <p:nvPr/>
+        </p:nvSpPr>
+        <p:spPr>
+          <a:xfrm>
+            <a:off x="3639312" y="4169664"/>
+            <a:ext cx="685800" cy="475488"/>
+          </a:xfrm>
+          <a:prstGeom prst="rect">
+            <a:avLst>
+              <a:gd name="adj" fmla="val 7692"/>
+            </a:avLst>
+          </a:prstGeom>
+          <a:solidFill>
+            <a:srgbClr val="FFFFFF"/>
+          </a:solidFill>
+          <a:ln w="12700">
+            <a:solidFill>
+              <a:srgbClr val="DB2777"/>
+            </a:solidFill>
+            <a:prstDash val="solid"/>
+          </a:ln>
+        </p:spPr>
+      </p:sp>
+      <p:sp>
+        <p:nvSpPr>
+          <p:cNvPr id="36" name="Text 34"/>
+          <p:cNvSpPr/>
+          <p:nvPr/>
+        </p:nvSpPr>
+        <p:spPr>
+          <a:xfrm>
+            <a:off x="3639312" y="4169664"/>
+            <a:ext cx="685800" cy="475488"/>
           </a:xfrm>
           <a:prstGeom prst="rect">
             <a:avLst/>
@@ -15241,34 +15091,34 @@
               <a:buNone/>
             </a:pPr>
             <a:r>
-              <a:rPr lang="en-US" sz="1600" b="1" dirty="0">
-                <a:solidFill>
-                  <a:srgbClr val="0D9488"/>
+              <a:rPr lang="en-US" sz="900" b="1" dirty="0">
+                <a:solidFill>
+                  <a:srgbClr val="9D174D"/>
                 </a:solidFill>
                 <a:latin typeface="Trebuchet MS" pitchFamily="34" charset="0"/>
                 <a:ea typeface="Trebuchet MS" pitchFamily="34" charset="-122"/>
                 <a:cs typeface="Trebuchet MS" pitchFamily="34" charset="-120"/>
               </a:rPr>
-              <a:t>·</a:t>
-            </a:r>
-            <a:endParaRPr lang="en-US" sz="1600" dirty="0"/>
-          </a:p>
-        </p:txBody>
-      </p:sp>
-      <p:sp>
-        <p:nvSpPr>
-          <p:cNvPr id="31" name="Shape 29"/>
-          <p:cNvSpPr/>
-          <p:nvPr/>
-        </p:nvSpPr>
-        <p:spPr>
-          <a:xfrm>
-            <a:off x="4370832" y="3364992"/>
-            <a:ext cx="1645920" cy="475488"/>
+              <a:t>ea</a:t>
+            </a:r>
+            <a:endParaRPr lang="en-US" sz="900" dirty="0"/>
+          </a:p>
+        </p:txBody>
+      </p:sp>
+      <p:sp>
+        <p:nvSpPr>
+          <p:cNvPr id="37" name="Shape 35"/>
+          <p:cNvSpPr/>
+          <p:nvPr/>
+        </p:nvSpPr>
+        <p:spPr>
+          <a:xfrm>
+            <a:off x="4850892" y="4169664"/>
+            <a:ext cx="685800" cy="475488"/>
           </a:xfrm>
           <a:prstGeom prst="rect">
             <a:avLst>
-              <a:gd name="adj" fmla="val 9615"/>
+              <a:gd name="adj" fmla="val 7692"/>
             </a:avLst>
           </a:prstGeom>
           <a:solidFill>
@@ -15276,22 +15126,22 @@
           </a:solidFill>
           <a:ln w="12700">
             <a:solidFill>
-              <a:srgbClr val="0D9488"/>
-            </a:solidFill>
-            <a:prstDash val="solid"/>
-          </a:ln>
-        </p:spPr>
-      </p:sp>
-      <p:sp>
-        <p:nvSpPr>
-          <p:cNvPr id="32" name="Text 30"/>
-          <p:cNvSpPr/>
-          <p:nvPr/>
-        </p:nvSpPr>
-        <p:spPr>
-          <a:xfrm>
-            <a:off x="4370832" y="3364992"/>
-            <a:ext cx="1645920" cy="475488"/>
+              <a:srgbClr val="DB2777"/>
+            </a:solidFill>
+            <a:prstDash val="solid"/>
+          </a:ln>
+        </p:spPr>
+      </p:sp>
+      <p:sp>
+        <p:nvSpPr>
+          <p:cNvPr id="38" name="Text 36"/>
+          <p:cNvSpPr/>
+          <p:nvPr/>
+        </p:nvSpPr>
+        <p:spPr>
+          <a:xfrm>
+            <a:off x="4850892" y="4169664"/>
+            <a:ext cx="685800" cy="475488"/>
           </a:xfrm>
           <a:prstGeom prst="rect">
             <a:avLst/>
@@ -15307,30 +15157,57 @@
               <a:buNone/>
             </a:pPr>
             <a:r>
-              <a:rPr lang="en-US" sz="1400" b="1" dirty="0">
-                <a:solidFill>
-                  <a:srgbClr val="0D9488"/>
+              <a:rPr lang="en-US" sz="900" b="1" dirty="0">
+                <a:solidFill>
+                  <a:srgbClr val="9D174D"/>
                 </a:solidFill>
                 <a:latin typeface="Trebuchet MS" pitchFamily="34" charset="0"/>
                 <a:ea typeface="Trebuchet MS" pitchFamily="34" charset="-122"/>
                 <a:cs typeface="Trebuchet MS" pitchFamily="34" charset="-120"/>
               </a:rPr>
-              <a:t>teach</a:t>
-            </a:r>
-            <a:endParaRPr lang="en-US" sz="1400" dirty="0"/>
-          </a:p>
-        </p:txBody>
-      </p:sp>
-      <p:sp>
-        <p:nvSpPr>
-          <p:cNvPr id="33" name="Text 31"/>
-          <p:cNvSpPr/>
-          <p:nvPr/>
-        </p:nvSpPr>
-        <p:spPr>
-          <a:xfrm>
-            <a:off x="6016752" y="3364992"/>
-            <a:ext cx="411480" cy="475488"/>
+              <a:t>ch</a:t>
+            </a:r>
+            <a:endParaRPr lang="en-US" sz="900" dirty="0"/>
+          </a:p>
+        </p:txBody>
+      </p:sp>
+      <p:sp>
+        <p:nvSpPr>
+          <p:cNvPr id="39" name="Shape 37"/>
+          <p:cNvSpPr/>
+          <p:nvPr/>
+        </p:nvSpPr>
+        <p:spPr>
+          <a:xfrm>
+            <a:off x="6062472" y="4169664"/>
+            <a:ext cx="685800" cy="475488"/>
+          </a:xfrm>
+          <a:prstGeom prst="rect">
+            <a:avLst>
+              <a:gd name="adj" fmla="val 7692"/>
+            </a:avLst>
+          </a:prstGeom>
+          <a:solidFill>
+            <a:srgbClr val="FFFFFF"/>
+          </a:solidFill>
+          <a:ln w="12700">
+            <a:solidFill>
+              <a:srgbClr val="DB2777"/>
+            </a:solidFill>
+            <a:prstDash val="solid"/>
+          </a:ln>
+        </p:spPr>
+      </p:sp>
+      <p:sp>
+        <p:nvSpPr>
+          <p:cNvPr id="40" name="Text 38"/>
+          <p:cNvSpPr/>
+          <p:nvPr/>
+        </p:nvSpPr>
+        <p:spPr>
+          <a:xfrm>
+            <a:off x="6062472" y="4169664"/>
+            <a:ext cx="685800" cy="475488"/>
           </a:xfrm>
           <a:prstGeom prst="rect">
             <a:avLst/>
@@ -15346,34 +15223,34 @@
               <a:buNone/>
             </a:pPr>
             <a:r>
-              <a:rPr lang="en-US" sz="1600" b="1" dirty="0">
-                <a:solidFill>
-                  <a:srgbClr val="0D9488"/>
+              <a:rPr lang="en-US" sz="900" b="1" dirty="0">
+                <a:solidFill>
+                  <a:srgbClr val="9D174D"/>
                 </a:solidFill>
                 <a:latin typeface="Trebuchet MS" pitchFamily="34" charset="0"/>
                 <a:ea typeface="Trebuchet MS" pitchFamily="34" charset="-122"/>
                 <a:cs typeface="Trebuchet MS" pitchFamily="34" charset="-120"/>
               </a:rPr>
-              <a:t>·</a:t>
-            </a:r>
-            <a:endParaRPr lang="en-US" sz="1600" dirty="0"/>
-          </a:p>
-        </p:txBody>
-      </p:sp>
-      <p:sp>
-        <p:nvSpPr>
-          <p:cNvPr id="34" name="Shape 32"/>
-          <p:cNvSpPr/>
-          <p:nvPr/>
-        </p:nvSpPr>
-        <p:spPr>
-          <a:xfrm>
-            <a:off x="6428232" y="3364992"/>
-            <a:ext cx="1645920" cy="475488"/>
+              <a:t>e</a:t>
+            </a:r>
+            <a:endParaRPr lang="en-US" sz="900" dirty="0"/>
+          </a:p>
+        </p:txBody>
+      </p:sp>
+      <p:sp>
+        <p:nvSpPr>
+          <p:cNvPr id="41" name="Shape 39"/>
+          <p:cNvSpPr/>
+          <p:nvPr/>
+        </p:nvSpPr>
+        <p:spPr>
+          <a:xfrm>
+            <a:off x="7274052" y="4169664"/>
+            <a:ext cx="685800" cy="475488"/>
           </a:xfrm>
           <a:prstGeom prst="rect">
             <a:avLst>
-              <a:gd name="adj" fmla="val 9615"/>
+              <a:gd name="adj" fmla="val 7692"/>
             </a:avLst>
           </a:prstGeom>
           <a:solidFill>
@@ -15381,22 +15258,22 @@
           </a:solidFill>
           <a:ln w="12700">
             <a:solidFill>
-              <a:srgbClr val="0D9488"/>
-            </a:solidFill>
-            <a:prstDash val="solid"/>
-          </a:ln>
-        </p:spPr>
-      </p:sp>
-      <p:sp>
-        <p:nvSpPr>
-          <p:cNvPr id="35" name="Text 33"/>
-          <p:cNvSpPr/>
-          <p:nvPr/>
-        </p:nvSpPr>
-        <p:spPr>
-          <a:xfrm>
-            <a:off x="6428232" y="3364992"/>
-            <a:ext cx="1645920" cy="475488"/>
+              <a:srgbClr val="DB2777"/>
+            </a:solidFill>
+            <a:prstDash val="solid"/>
+          </a:ln>
+        </p:spPr>
+      </p:sp>
+      <p:sp>
+        <p:nvSpPr>
+          <p:cNvPr id="42" name="Text 40"/>
+          <p:cNvSpPr/>
+          <p:nvPr/>
+        </p:nvSpPr>
+        <p:spPr>
+          <a:xfrm>
+            <a:off x="7274052" y="4169664"/>
+            <a:ext cx="685800" cy="475488"/>
           </a:xfrm>
           <a:prstGeom prst="rect">
             <a:avLst/>
@@ -15412,570 +15289,15 @@
               <a:buNone/>
             </a:pPr>
             <a:r>
-              <a:rPr lang="en-US" sz="1400" b="1" dirty="0">
-                <a:solidFill>
-                  <a:srgbClr val="0D9488"/>
+              <a:rPr lang="en-US" sz="900" b="1" dirty="0">
+                <a:solidFill>
+                  <a:srgbClr val="9D174D"/>
                 </a:solidFill>
                 <a:latin typeface="Trebuchet MS" pitchFamily="34" charset="0"/>
                 <a:ea typeface="Trebuchet MS" pitchFamily="34" charset="-122"/>
                 <a:cs typeface="Trebuchet MS" pitchFamily="34" charset="-120"/>
               </a:rPr>
-              <a:t>ing</a:t>
-            </a:r>
-            <a:endParaRPr lang="en-US" sz="1400" dirty="0"/>
-          </a:p>
-        </p:txBody>
-      </p:sp>
-      <p:sp>
-        <p:nvSpPr>
-          <p:cNvPr id="36" name="Shape 34"/>
-          <p:cNvSpPr/>
-          <p:nvPr/>
-        </p:nvSpPr>
-        <p:spPr>
-          <a:xfrm>
-            <a:off x="365760" y="4096512"/>
-            <a:ext cx="1371600" cy="804672"/>
-          </a:xfrm>
-          <a:prstGeom prst="rect">
-            <a:avLst>
-              <a:gd name="adj" fmla="val 6818"/>
-            </a:avLst>
-          </a:prstGeom>
-          <a:solidFill>
-            <a:srgbClr val="E2E8F0"/>
-          </a:solidFill>
-          <a:ln w="12700">
-            <a:solidFill>
-              <a:srgbClr val="E2E8F0"/>
-            </a:solidFill>
-            <a:prstDash val="solid"/>
-          </a:ln>
-        </p:spPr>
-      </p:sp>
-      <p:sp>
-        <p:nvSpPr>
-          <p:cNvPr id="37" name="Text 35"/>
-          <p:cNvSpPr/>
-          <p:nvPr/>
-        </p:nvSpPr>
-        <p:spPr>
-          <a:xfrm>
-            <a:off x="365760" y="4096512"/>
-            <a:ext cx="1371600" cy="804672"/>
-          </a:xfrm>
-          <a:prstGeom prst="rect">
-            <a:avLst/>
-          </a:prstGeom>
-          <a:noFill/>
-          <a:ln/>
-        </p:spPr>
-        <p:txBody>
-          <a:bodyPr wrap="square" lIns="0" tIns="0" rIns="0" bIns="0" rtlCol="0" anchor="ctr"/>
-          <a:lstStyle/>
-          <a:p>
-            <a:pPr algn="ctr" indent="0" marL="0">
-              <a:buNone/>
-            </a:pPr>
-            <a:r>
-              <a:rPr lang="en-US" sz="1100" b="1" dirty="0">
-                <a:solidFill>
-                  <a:srgbClr val="475569"/>
-                </a:solidFill>
-                <a:latin typeface="Trebuchet MS" pitchFamily="34" charset="0"/>
-                <a:ea typeface="Trebuchet MS" pitchFamily="34" charset="-122"/>
-                <a:cs typeface="Trebuchet MS" pitchFamily="34" charset="-120"/>
-              </a:rPr>
-              <a:t>Phonemes</a:t>
-            </a:r>
-            <a:endParaRPr lang="en-US" sz="1100" dirty="0"/>
-          </a:p>
-        </p:txBody>
-      </p:sp>
-      <p:sp>
-        <p:nvSpPr>
-          <p:cNvPr id="38" name="Shape 36"/>
-          <p:cNvSpPr/>
-          <p:nvPr/>
-        </p:nvSpPr>
-        <p:spPr>
-          <a:xfrm>
-            <a:off x="1874520" y="4096512"/>
-            <a:ext cx="6903720" cy="658368"/>
-          </a:xfrm>
-          <a:prstGeom prst="rect">
-            <a:avLst>
-              <a:gd name="adj" fmla="val 8333"/>
-            </a:avLst>
-          </a:prstGeom>
-          <a:solidFill>
-            <a:srgbClr val="FCE7F3"/>
-          </a:solidFill>
-          <a:ln w="12700">
-            <a:solidFill>
-              <a:srgbClr val="DB2777"/>
-            </a:solidFill>
-            <a:prstDash val="solid"/>
-          </a:ln>
-        </p:spPr>
-      </p:sp>
-      <p:sp>
-        <p:nvSpPr>
-          <p:cNvPr id="39" name="Shape 37"/>
-          <p:cNvSpPr/>
-          <p:nvPr/>
-        </p:nvSpPr>
-        <p:spPr>
-          <a:xfrm>
-            <a:off x="2124837" y="4169664"/>
-            <a:ext cx="685800" cy="475488"/>
-          </a:xfrm>
-          <a:prstGeom prst="rect">
-            <a:avLst>
-              <a:gd name="adj" fmla="val 7692"/>
-            </a:avLst>
-          </a:prstGeom>
-          <a:solidFill>
-            <a:srgbClr val="FFFFFF"/>
-          </a:solidFill>
-          <a:ln w="12700">
-            <a:solidFill>
-              <a:srgbClr val="DB2777"/>
-            </a:solidFill>
-            <a:prstDash val="solid"/>
-          </a:ln>
-        </p:spPr>
-      </p:sp>
-      <p:sp>
-        <p:nvSpPr>
-          <p:cNvPr id="40" name="Text 38"/>
-          <p:cNvSpPr/>
-          <p:nvPr/>
-        </p:nvSpPr>
-        <p:spPr>
-          <a:xfrm>
-            <a:off x="2124837" y="4169664"/>
-            <a:ext cx="685800" cy="475488"/>
-          </a:xfrm>
-          <a:prstGeom prst="rect">
-            <a:avLst/>
-          </a:prstGeom>
-          <a:noFill/>
-          <a:ln/>
-        </p:spPr>
-        <p:txBody>
-          <a:bodyPr wrap="square" lIns="0" tIns="0" rIns="0" bIns="0" rtlCol="0" anchor="ctr"/>
-          <a:lstStyle/>
-          <a:p>
-            <a:pPr algn="ctr" indent="0" marL="0">
-              <a:buNone/>
-            </a:pPr>
-            <a:r>
-              <a:rPr lang="en-US" sz="900" b="1" dirty="0">
-                <a:solidFill>
-                  <a:srgbClr val="9D174D"/>
-                </a:solidFill>
-                <a:latin typeface="Trebuchet MS" pitchFamily="34" charset="0"/>
-                <a:ea typeface="Trebuchet MS" pitchFamily="34" charset="-122"/>
-                <a:cs typeface="Trebuchet MS" pitchFamily="34" charset="-120"/>
-              </a:rPr>
-              <a:t>r</a:t>
-            </a:r>
-            <a:endParaRPr lang="en-US" sz="900" dirty="0"/>
-          </a:p>
-        </p:txBody>
-      </p:sp>
-      <p:sp>
-        <p:nvSpPr>
-          <p:cNvPr id="41" name="Shape 39"/>
-          <p:cNvSpPr/>
-          <p:nvPr/>
-        </p:nvSpPr>
-        <p:spPr>
-          <a:xfrm>
-            <a:off x="3033522" y="4169664"/>
-            <a:ext cx="685800" cy="475488"/>
-          </a:xfrm>
-          <a:prstGeom prst="rect">
-            <a:avLst>
-              <a:gd name="adj" fmla="val 7692"/>
-            </a:avLst>
-          </a:prstGeom>
-          <a:solidFill>
-            <a:srgbClr val="FFFFFF"/>
-          </a:solidFill>
-          <a:ln w="12700">
-            <a:solidFill>
-              <a:srgbClr val="DB2777"/>
-            </a:solidFill>
-            <a:prstDash val="solid"/>
-          </a:ln>
-        </p:spPr>
-      </p:sp>
-      <p:sp>
-        <p:nvSpPr>
-          <p:cNvPr id="42" name="Text 40"/>
-          <p:cNvSpPr/>
-          <p:nvPr/>
-        </p:nvSpPr>
-        <p:spPr>
-          <a:xfrm>
-            <a:off x="3033522" y="4169664"/>
-            <a:ext cx="685800" cy="475488"/>
-          </a:xfrm>
-          <a:prstGeom prst="rect">
-            <a:avLst/>
-          </a:prstGeom>
-          <a:noFill/>
-          <a:ln/>
-        </p:spPr>
-        <p:txBody>
-          <a:bodyPr wrap="square" lIns="0" tIns="0" rIns="0" bIns="0" rtlCol="0" anchor="ctr"/>
-          <a:lstStyle/>
-          <a:p>
-            <a:pPr algn="ctr" indent="0" marL="0">
-              <a:buNone/>
-            </a:pPr>
-            <a:r>
-              <a:rPr lang="en-US" sz="900" b="1" dirty="0">
-                <a:solidFill>
-                  <a:srgbClr val="9D174D"/>
-                </a:solidFill>
-                <a:latin typeface="Trebuchet MS" pitchFamily="34" charset="0"/>
-                <a:ea typeface="Trebuchet MS" pitchFamily="34" charset="-122"/>
-                <a:cs typeface="Trebuchet MS" pitchFamily="34" charset="-120"/>
-              </a:rPr>
-              <a:t>e</a:t>
-            </a:r>
-            <a:endParaRPr lang="en-US" sz="900" dirty="0"/>
-          </a:p>
-        </p:txBody>
-      </p:sp>
-      <p:sp>
-        <p:nvSpPr>
-          <p:cNvPr id="43" name="Shape 41"/>
-          <p:cNvSpPr/>
-          <p:nvPr/>
-        </p:nvSpPr>
-        <p:spPr>
-          <a:xfrm>
-            <a:off x="3942207" y="4169664"/>
-            <a:ext cx="685800" cy="475488"/>
-          </a:xfrm>
-          <a:prstGeom prst="rect">
-            <a:avLst>
-              <a:gd name="adj" fmla="val 7692"/>
-            </a:avLst>
-          </a:prstGeom>
-          <a:solidFill>
-            <a:srgbClr val="FFFFFF"/>
-          </a:solidFill>
-          <a:ln w="12700">
-            <a:solidFill>
-              <a:srgbClr val="DB2777"/>
-            </a:solidFill>
-            <a:prstDash val="solid"/>
-          </a:ln>
-        </p:spPr>
-      </p:sp>
-      <p:sp>
-        <p:nvSpPr>
-          <p:cNvPr id="44" name="Text 42"/>
-          <p:cNvSpPr/>
-          <p:nvPr/>
-        </p:nvSpPr>
-        <p:spPr>
-          <a:xfrm>
-            <a:off x="3942207" y="4169664"/>
-            <a:ext cx="685800" cy="475488"/>
-          </a:xfrm>
-          <a:prstGeom prst="rect">
-            <a:avLst/>
-          </a:prstGeom>
-          <a:noFill/>
-          <a:ln/>
-        </p:spPr>
-        <p:txBody>
-          <a:bodyPr wrap="square" lIns="0" tIns="0" rIns="0" bIns="0" rtlCol="0" anchor="ctr"/>
-          <a:lstStyle/>
-          <a:p>
-            <a:pPr algn="ctr" indent="0" marL="0">
-              <a:buNone/>
-            </a:pPr>
-            <a:r>
-              <a:rPr lang="en-US" sz="900" b="1" dirty="0">
-                <a:solidFill>
-                  <a:srgbClr val="9D174D"/>
-                </a:solidFill>
-                <a:latin typeface="Trebuchet MS" pitchFamily="34" charset="0"/>
-                <a:ea typeface="Trebuchet MS" pitchFamily="34" charset="-122"/>
-                <a:cs typeface="Trebuchet MS" pitchFamily="34" charset="-120"/>
-              </a:rPr>
-              <a:t>t</a:t>
-            </a:r>
-            <a:endParaRPr lang="en-US" sz="900" dirty="0"/>
-          </a:p>
-        </p:txBody>
-      </p:sp>
-      <p:sp>
-        <p:nvSpPr>
-          <p:cNvPr id="45" name="Shape 43"/>
-          <p:cNvSpPr/>
-          <p:nvPr/>
-        </p:nvSpPr>
-        <p:spPr>
-          <a:xfrm>
-            <a:off x="4850892" y="4169664"/>
-            <a:ext cx="685800" cy="475488"/>
-          </a:xfrm>
-          <a:prstGeom prst="rect">
-            <a:avLst>
-              <a:gd name="adj" fmla="val 7692"/>
-            </a:avLst>
-          </a:prstGeom>
-          <a:solidFill>
-            <a:srgbClr val="FFFFFF"/>
-          </a:solidFill>
-          <a:ln w="12700">
-            <a:solidFill>
-              <a:srgbClr val="DB2777"/>
-            </a:solidFill>
-            <a:prstDash val="solid"/>
-          </a:ln>
-        </p:spPr>
-      </p:sp>
-      <p:sp>
-        <p:nvSpPr>
-          <p:cNvPr id="46" name="Text 44"/>
-          <p:cNvSpPr/>
-          <p:nvPr/>
-        </p:nvSpPr>
-        <p:spPr>
-          <a:xfrm>
-            <a:off x="4850892" y="4169664"/>
-            <a:ext cx="685800" cy="475488"/>
-          </a:xfrm>
-          <a:prstGeom prst="rect">
-            <a:avLst/>
-          </a:prstGeom>
-          <a:noFill/>
-          <a:ln/>
-        </p:spPr>
-        <p:txBody>
-          <a:bodyPr wrap="square" lIns="0" tIns="0" rIns="0" bIns="0" rtlCol="0" anchor="ctr"/>
-          <a:lstStyle/>
-          <a:p>
-            <a:pPr algn="ctr" indent="0" marL="0">
-              <a:buNone/>
-            </a:pPr>
-            <a:r>
-              <a:rPr lang="en-US" sz="900" b="1" dirty="0">
-                <a:solidFill>
-                  <a:srgbClr val="9D174D"/>
-                </a:solidFill>
-                <a:latin typeface="Trebuchet MS" pitchFamily="34" charset="0"/>
-                <a:ea typeface="Trebuchet MS" pitchFamily="34" charset="-122"/>
-                <a:cs typeface="Trebuchet MS" pitchFamily="34" charset="-120"/>
-              </a:rPr>
-              <a:t>ea</a:t>
-            </a:r>
-            <a:endParaRPr lang="en-US" sz="900" dirty="0"/>
-          </a:p>
-        </p:txBody>
-      </p:sp>
-      <p:sp>
-        <p:nvSpPr>
-          <p:cNvPr id="47" name="Shape 45"/>
-          <p:cNvSpPr/>
-          <p:nvPr/>
-        </p:nvSpPr>
-        <p:spPr>
-          <a:xfrm>
-            <a:off x="5759577" y="4169664"/>
-            <a:ext cx="685800" cy="475488"/>
-          </a:xfrm>
-          <a:prstGeom prst="rect">
-            <a:avLst>
-              <a:gd name="adj" fmla="val 7692"/>
-            </a:avLst>
-          </a:prstGeom>
-          <a:solidFill>
-            <a:srgbClr val="FFFFFF"/>
-          </a:solidFill>
-          <a:ln w="12700">
-            <a:solidFill>
-              <a:srgbClr val="DB2777"/>
-            </a:solidFill>
-            <a:prstDash val="solid"/>
-          </a:ln>
-        </p:spPr>
-      </p:sp>
-      <p:sp>
-        <p:nvSpPr>
-          <p:cNvPr id="48" name="Text 46"/>
-          <p:cNvSpPr/>
-          <p:nvPr/>
-        </p:nvSpPr>
-        <p:spPr>
-          <a:xfrm>
-            <a:off x="5759577" y="4169664"/>
-            <a:ext cx="685800" cy="475488"/>
-          </a:xfrm>
-          <a:prstGeom prst="rect">
-            <a:avLst/>
-          </a:prstGeom>
-          <a:noFill/>
-          <a:ln/>
-        </p:spPr>
-        <p:txBody>
-          <a:bodyPr wrap="square" lIns="0" tIns="0" rIns="0" bIns="0" rtlCol="0" anchor="ctr"/>
-          <a:lstStyle/>
-          <a:p>
-            <a:pPr algn="ctr" indent="0" marL="0">
-              <a:buNone/>
-            </a:pPr>
-            <a:r>
-              <a:rPr lang="en-US" sz="900" b="1" dirty="0">
-                <a:solidFill>
-                  <a:srgbClr val="9D174D"/>
-                </a:solidFill>
-                <a:latin typeface="Trebuchet MS" pitchFamily="34" charset="0"/>
-                <a:ea typeface="Trebuchet MS" pitchFamily="34" charset="-122"/>
-                <a:cs typeface="Trebuchet MS" pitchFamily="34" charset="-120"/>
-              </a:rPr>
-              <a:t>ch</a:t>
-            </a:r>
-            <a:endParaRPr lang="en-US" sz="900" dirty="0"/>
-          </a:p>
-        </p:txBody>
-      </p:sp>
-      <p:sp>
-        <p:nvSpPr>
-          <p:cNvPr id="49" name="Shape 47"/>
-          <p:cNvSpPr/>
-          <p:nvPr/>
-        </p:nvSpPr>
-        <p:spPr>
-          <a:xfrm>
-            <a:off x="6668262" y="4169664"/>
-            <a:ext cx="685800" cy="475488"/>
-          </a:xfrm>
-          <a:prstGeom prst="rect">
-            <a:avLst>
-              <a:gd name="adj" fmla="val 7692"/>
-            </a:avLst>
-          </a:prstGeom>
-          <a:solidFill>
-            <a:srgbClr val="FFFFFF"/>
-          </a:solidFill>
-          <a:ln w="12700">
-            <a:solidFill>
-              <a:srgbClr val="DB2777"/>
-            </a:solidFill>
-            <a:prstDash val="solid"/>
-          </a:ln>
-        </p:spPr>
-      </p:sp>
-      <p:sp>
-        <p:nvSpPr>
-          <p:cNvPr id="50" name="Text 48"/>
-          <p:cNvSpPr/>
-          <p:nvPr/>
-        </p:nvSpPr>
-        <p:spPr>
-          <a:xfrm>
-            <a:off x="6668262" y="4169664"/>
-            <a:ext cx="685800" cy="475488"/>
-          </a:xfrm>
-          <a:prstGeom prst="rect">
-            <a:avLst/>
-          </a:prstGeom>
-          <a:noFill/>
-          <a:ln/>
-        </p:spPr>
-        <p:txBody>
-          <a:bodyPr wrap="square" lIns="0" tIns="0" rIns="0" bIns="0" rtlCol="0" anchor="ctr"/>
-          <a:lstStyle/>
-          <a:p>
-            <a:pPr algn="ctr" indent="0" marL="0">
-              <a:buNone/>
-            </a:pPr>
-            <a:r>
-              <a:rPr lang="en-US" sz="900" b="1" dirty="0">
-                <a:solidFill>
-                  <a:srgbClr val="9D174D"/>
-                </a:solidFill>
-                <a:latin typeface="Trebuchet MS" pitchFamily="34" charset="0"/>
-                <a:ea typeface="Trebuchet MS" pitchFamily="34" charset="-122"/>
-                <a:cs typeface="Trebuchet MS" pitchFamily="34" charset="-120"/>
-              </a:rPr>
-              <a:t>i</a:t>
-            </a:r>
-            <a:endParaRPr lang="en-US" sz="900" dirty="0"/>
-          </a:p>
-        </p:txBody>
-      </p:sp>
-      <p:sp>
-        <p:nvSpPr>
-          <p:cNvPr id="51" name="Shape 49"/>
-          <p:cNvSpPr/>
-          <p:nvPr/>
-        </p:nvSpPr>
-        <p:spPr>
-          <a:xfrm>
-            <a:off x="7576947" y="4169664"/>
-            <a:ext cx="685800" cy="475488"/>
-          </a:xfrm>
-          <a:prstGeom prst="rect">
-            <a:avLst>
-              <a:gd name="adj" fmla="val 7692"/>
-            </a:avLst>
-          </a:prstGeom>
-          <a:solidFill>
-            <a:srgbClr val="FFFFFF"/>
-          </a:solidFill>
-          <a:ln w="12700">
-            <a:solidFill>
-              <a:srgbClr val="DB2777"/>
-            </a:solidFill>
-            <a:prstDash val="solid"/>
-          </a:ln>
-        </p:spPr>
-      </p:sp>
-      <p:sp>
-        <p:nvSpPr>
-          <p:cNvPr id="52" name="Text 50"/>
-          <p:cNvSpPr/>
-          <p:nvPr/>
-        </p:nvSpPr>
-        <p:spPr>
-          <a:xfrm>
-            <a:off x="7576947" y="4169664"/>
-            <a:ext cx="685800" cy="475488"/>
-          </a:xfrm>
-          <a:prstGeom prst="rect">
-            <a:avLst/>
-          </a:prstGeom>
-          <a:noFill/>
-          <a:ln/>
-        </p:spPr>
-        <p:txBody>
-          <a:bodyPr wrap="square" lIns="0" tIns="0" rIns="0" bIns="0" rtlCol="0" anchor="ctr"/>
-          <a:lstStyle/>
-          <a:p>
-            <a:pPr algn="ctr" indent="0" marL="0">
-              <a:buNone/>
-            </a:pPr>
-            <a:r>
-              <a:rPr lang="en-US" sz="900" b="1" dirty="0">
-                <a:solidFill>
-                  <a:srgbClr val="9D174D"/>
-                </a:solidFill>
-                <a:latin typeface="Trebuchet MS" pitchFamily="34" charset="0"/>
-                <a:ea typeface="Trebuchet MS" pitchFamily="34" charset="-122"/>
-                <a:cs typeface="Trebuchet MS" pitchFamily="34" charset="-120"/>
-              </a:rPr>
-              <a:t>ng</a:t>
+              <a:t>s</a:t>
             </a:r>
             <a:endParaRPr lang="en-US" sz="900" dirty="0"/>
           </a:p>
@@ -16549,7 +15871,7 @@
                 <a:ea typeface="Calibri" pitchFamily="34" charset="-122"/>
                 <a:cs typeface="Calibri" pitchFamily="34" charset="-120"/>
               </a:rPr>
-              <a:t>Word Labs  •  wordlabs.app  •  Root: 'teach' = to show or instruct</a:t>
+              <a:t>Word Labs  •  wordlabs.app  •  Root: 'teach' = to show someone how to do something</a:t>
             </a:r>
             <a:endParaRPr lang="en-US" sz="800" dirty="0"/>
           </a:p>
@@ -16883,7 +16205,7 @@
                 <a:ea typeface="Trebuchet MS" pitchFamily="34" charset="-122"/>
                 <a:cs typeface="Trebuchet MS" pitchFamily="34" charset="-120"/>
               </a:rPr>
-              <a:t>2</a:t>
+              <a:t>0</a:t>
             </a:r>
             <a:pPr algn="ctr" indent="0" marL="0">
               <a:buNone/>
@@ -16897,7 +16219,7 @@
                 <a:ea typeface="Trebuchet MS" pitchFamily="34" charset="-122"/>
                 <a:cs typeface="Trebuchet MS" pitchFamily="34" charset="-120"/>
               </a:rPr>
-              <a:t>  punctuation marks</a:t>
+              <a:t>  punctuation mark</a:t>
             </a:r>
             <a:endParaRPr lang="en-US" sz="2800" dirty="0"/>
           </a:p>
@@ -17189,7 +16511,7 @@
                 <a:ea typeface="Calibri" pitchFamily="34" charset="-122"/>
                 <a:cs typeface="Calibri" pitchFamily="34" charset="-120"/>
               </a:rPr>
-              <a:t>Word Labs  •  wordlabs.app  •  Root: 'teach' = to show or instruct</a:t>
+              <a:t>Word Labs  •  wordlabs.app  •  Root: 'teach' = to show someone how to do something</a:t>
             </a:r>
             <a:endParaRPr lang="en-US" sz="800" dirty="0"/>
           </a:p>
@@ -17318,7 +16640,7 @@
                 <a:ea typeface="Calibri" pitchFamily="34" charset="-122"/>
                 <a:cs typeface="Calibri" pitchFamily="34" charset="-120"/>
               </a:rPr>
-              <a:t>coteacher</a:t>
+              <a:t>teachers</a:t>
             </a:r>
             <a:pPr algn="l" indent="0" marL="0">
               <a:buNone/>
@@ -17332,7 +16654,7 @@
                 <a:ea typeface="Calibri" pitchFamily="34" charset="-122"/>
                 <a:cs typeface="Calibri" pitchFamily="34" charset="-120"/>
               </a:rPr>
-              <a:t> focused on </a:t>
+              <a:t> met after school to plan the excursion. </a:t>
             </a:r>
             <a:pPr algn="l" indent="0" marL="0">
               <a:buNone/>
@@ -17349,7 +16671,7 @@
                 <a:ea typeface="Calibri" pitchFamily="34" charset="-122"/>
                 <a:cs typeface="Calibri" pitchFamily="34" charset="-120"/>
               </a:rPr>
-              <a:t>teachable</a:t>
+              <a:t>Teaching</a:t>
             </a:r>
             <a:pPr algn="l" indent="0" marL="0">
               <a:buNone/>
@@ -17363,7 +16685,7 @@
                 <a:ea typeface="Calibri" pitchFamily="34" charset="-122"/>
                 <a:cs typeface="Calibri" pitchFamily="34" charset="-120"/>
               </a:rPr>
-              <a:t> moments, while the </a:t>
+              <a:t> younger students takes patience and clear explanations. The </a:t>
             </a:r>
             <a:pPr algn="l" indent="0" marL="0">
               <a:buNone/>
@@ -17394,7 +16716,7 @@
                 <a:ea typeface="Calibri" pitchFamily="34" charset="-122"/>
                 <a:cs typeface="Calibri" pitchFamily="34" charset="-120"/>
               </a:rPr>
-              <a:t> from last week were still fresh in our minds.</a:t>
+              <a:t> of the wise elder were written in an old book.</a:t>
             </a:r>
             <a:endParaRPr lang="en-US" sz="1800" dirty="0"/>
           </a:p>
@@ -17549,7 +16871,7 @@
                 <a:ea typeface="Trebuchet MS" pitchFamily="34" charset="-122"/>
                 <a:cs typeface="Trebuchet MS" pitchFamily="34" charset="-120"/>
               </a:rPr>
-              <a:t>coteacher</a:t>
+              <a:t>teachers</a:t>
             </a:r>
             <a:endParaRPr lang="en-US" sz="1400" dirty="0"/>
           </a:p>
@@ -17677,7 +16999,7 @@
                 <a:ea typeface="Trebuchet MS" pitchFamily="34" charset="-122"/>
                 <a:cs typeface="Trebuchet MS" pitchFamily="34" charset="-120"/>
               </a:rPr>
-              <a:t>teachable</a:t>
+              <a:t>teaching</a:t>
             </a:r>
             <a:endParaRPr lang="en-US" sz="1400" dirty="0"/>
           </a:p>
@@ -18136,7 +17458,7 @@
                 <a:ea typeface="Calibri" pitchFamily="34" charset="-122"/>
                 <a:cs typeface="Calibri" pitchFamily="34" charset="-120"/>
               </a:rPr>
-              <a:t>Word Labs  •  wordlabs.app  •  Root: 'teach' = to show or instruct</a:t>
+              <a:t>Word Labs  •  wordlabs.app  •  Root: 'teach' = to show someone how to do something</a:t>
             </a:r>
             <a:endParaRPr lang="en-US" sz="800" dirty="0"/>
           </a:p>
@@ -18275,7 +17597,7 @@
                 <a:ea typeface="Trebuchet MS" pitchFamily="34" charset="-122"/>
                 <a:cs typeface="Trebuchet MS" pitchFamily="34" charset="-120"/>
               </a:rPr>
-              <a:t>coteacher</a:t>
+              <a:t>teachers</a:t>
             </a:r>
             <a:endParaRPr lang="en-US" sz="2800" dirty="0"/>
           </a:p>
@@ -18963,7 +18285,7 @@
                 <a:ea typeface="Calibri" pitchFamily="34" charset="-122"/>
                 <a:cs typeface="Calibri" pitchFamily="34" charset="-120"/>
               </a:rPr>
-              <a:t>Word Labs  •  wordlabs.app  •  Root: 'teach' = to show or instruct</a:t>
+              <a:t>Word Labs  •  wordlabs.app  •  Root: 'teach' = to show someone how to do something</a:t>
             </a:r>
             <a:endParaRPr lang="en-US" sz="800" dirty="0"/>
           </a:p>
@@ -19102,7 +18424,7 @@
                 <a:ea typeface="Trebuchet MS" pitchFamily="34" charset="-122"/>
                 <a:cs typeface="Trebuchet MS" pitchFamily="34" charset="-120"/>
               </a:rPr>
-              <a:t>coteacher</a:t>
+              <a:t>teachers</a:t>
             </a:r>
             <a:endParaRPr lang="en-US" sz="2800" dirty="0"/>
           </a:p>
@@ -19191,11 +18513,11 @@
             </a:avLst>
           </a:prstGeom>
           <a:solidFill>
-            <a:srgbClr val="DDD6FE"/>
+            <a:srgbClr val="CCFBF1"/>
           </a:solidFill>
           <a:ln w="19050">
             <a:solidFill>
-              <a:srgbClr val="7C3AED"/>
+              <a:srgbClr val="0D9488"/>
             </a:solidFill>
             <a:prstDash val="solid"/>
           </a:ln>
@@ -19235,13 +18557,13 @@
             <a:r>
               <a:rPr lang="en-US" sz="1300" b="1" dirty="0">
                 <a:solidFill>
-                  <a:srgbClr val="4C1D95"/>
+                  <a:srgbClr val="0F766E"/>
                 </a:solidFill>
                 <a:latin typeface="Trebuchet MS" pitchFamily="34" charset="0"/>
                 <a:ea typeface="Trebuchet MS" pitchFamily="34" charset="-122"/>
                 <a:cs typeface="Trebuchet MS" pitchFamily="34" charset="-120"/>
               </a:rPr>
-              <a:t>co</a:t>
+              <a:t>teach</a:t>
             </a:r>
             <a:endParaRPr lang="en-US" sz="1300" dirty="0"/>
           </a:p>
@@ -19280,7 +18602,7 @@
                 <a:ea typeface="Calibri" pitchFamily="34" charset="-122"/>
                 <a:cs typeface="Calibri" pitchFamily="34" charset="-120"/>
               </a:rPr>
-              <a:t>together; with</a:t>
+              <a:t>to show someone how to do something</a:t>
             </a:r>
             <a:endParaRPr lang="en-US" sz="850" dirty="0"/>
           </a:p>
@@ -19303,11 +18625,11 @@
             </a:avLst>
           </a:prstGeom>
           <a:solidFill>
-            <a:srgbClr val="CCFBF1"/>
+            <a:srgbClr val="FCE7F3"/>
           </a:solidFill>
           <a:ln w="19050">
             <a:solidFill>
-              <a:srgbClr val="0D9488"/>
+              <a:srgbClr val="DB2777"/>
             </a:solidFill>
             <a:prstDash val="solid"/>
           </a:ln>
@@ -19347,13 +18669,13 @@
             <a:r>
               <a:rPr lang="en-US" sz="1300" b="1" dirty="0">
                 <a:solidFill>
-                  <a:srgbClr val="0F766E"/>
+                  <a:srgbClr val="9D174D"/>
                 </a:solidFill>
                 <a:latin typeface="Trebuchet MS" pitchFamily="34" charset="0"/>
                 <a:ea typeface="Trebuchet MS" pitchFamily="34" charset="-122"/>
                 <a:cs typeface="Trebuchet MS" pitchFamily="34" charset="-120"/>
               </a:rPr>
-              <a:t>teach</a:t>
+              <a:t>er</a:t>
             </a:r>
             <a:endParaRPr lang="en-US" sz="1300" dirty="0"/>
           </a:p>
@@ -19392,7 +18714,7 @@
                 <a:ea typeface="Calibri" pitchFamily="34" charset="-122"/>
                 <a:cs typeface="Calibri" pitchFamily="34" charset="-120"/>
               </a:rPr>
-              <a:t>to show or instruct</a:t>
+              <a:t>person who; more</a:t>
             </a:r>
             <a:endParaRPr lang="en-US" sz="850" dirty="0"/>
           </a:p>
@@ -19465,7 +18787,7 @@
                 <a:ea typeface="Trebuchet MS" pitchFamily="34" charset="-122"/>
                 <a:cs typeface="Trebuchet MS" pitchFamily="34" charset="-120"/>
               </a:rPr>
-              <a:t>er</a:t>
+              <a:t>s</a:t>
             </a:r>
             <a:endParaRPr lang="en-US" sz="1300" dirty="0"/>
           </a:p>
@@ -19504,7 +18826,7 @@
                 <a:ea typeface="Calibri" pitchFamily="34" charset="-122"/>
                 <a:cs typeface="Calibri" pitchFamily="34" charset="-120"/>
               </a:rPr>
-              <a:t>a person who does something</a:t>
+              <a:t>plural or present tense</a:t>
             </a:r>
             <a:endParaRPr lang="en-US" sz="850" dirty="0"/>
           </a:p>
@@ -20060,7 +19382,7 @@
                 <a:ea typeface="Calibri" pitchFamily="34" charset="-122"/>
                 <a:cs typeface="Calibri" pitchFamily="34" charset="-120"/>
               </a:rPr>
-              <a:t>Word Labs  •  wordlabs.app  •  Root: 'teach' = to show or instruct</a:t>
+              <a:t>Word Labs  •  wordlabs.app  •  Root: 'teach' = to show someone how to do something</a:t>
             </a:r>
             <a:endParaRPr lang="en-US" sz="800" dirty="0"/>
           </a:p>
@@ -20199,7 +19521,7 @@
                 <a:ea typeface="Trebuchet MS" pitchFamily="34" charset="-122"/>
                 <a:cs typeface="Trebuchet MS" pitchFamily="34" charset="-120"/>
               </a:rPr>
-              <a:t>coteacher</a:t>
+              <a:t>teachers</a:t>
             </a:r>
             <a:endParaRPr lang="en-US" sz="2800" dirty="0"/>
           </a:p>
@@ -20288,11 +19610,11 @@
             </a:avLst>
           </a:prstGeom>
           <a:solidFill>
-            <a:srgbClr val="DDD6FE"/>
+            <a:srgbClr val="CCFBF1"/>
           </a:solidFill>
           <a:ln w="19050">
             <a:solidFill>
-              <a:srgbClr val="7C3AED"/>
+              <a:srgbClr val="0D9488"/>
             </a:solidFill>
             <a:prstDash val="solid"/>
           </a:ln>
@@ -20332,13 +19654,13 @@
             <a:r>
               <a:rPr lang="en-US" sz="1300" b="1" dirty="0">
                 <a:solidFill>
-                  <a:srgbClr val="4C1D95"/>
+                  <a:srgbClr val="0F766E"/>
                 </a:solidFill>
                 <a:latin typeface="Trebuchet MS" pitchFamily="34" charset="0"/>
                 <a:ea typeface="Trebuchet MS" pitchFamily="34" charset="-122"/>
                 <a:cs typeface="Trebuchet MS" pitchFamily="34" charset="-120"/>
               </a:rPr>
-              <a:t>co</a:t>
+              <a:t>teach</a:t>
             </a:r>
             <a:endParaRPr lang="en-US" sz="1300" dirty="0"/>
           </a:p>
@@ -20377,7 +19699,7 @@
                 <a:ea typeface="Calibri" pitchFamily="34" charset="-122"/>
                 <a:cs typeface="Calibri" pitchFamily="34" charset="-120"/>
               </a:rPr>
-              <a:t>together; with</a:t>
+              <a:t>to show someone how to do something</a:t>
             </a:r>
             <a:endParaRPr lang="en-US" sz="850" dirty="0"/>
           </a:p>
@@ -20400,11 +19722,11 @@
             </a:avLst>
           </a:prstGeom>
           <a:solidFill>
-            <a:srgbClr val="CCFBF1"/>
+            <a:srgbClr val="FCE7F3"/>
           </a:solidFill>
           <a:ln w="19050">
             <a:solidFill>
-              <a:srgbClr val="0D9488"/>
+              <a:srgbClr val="DB2777"/>
             </a:solidFill>
             <a:prstDash val="solid"/>
           </a:ln>
@@ -20444,13 +19766,13 @@
             <a:r>
               <a:rPr lang="en-US" sz="1300" b="1" dirty="0">
                 <a:solidFill>
-                  <a:srgbClr val="0F766E"/>
+                  <a:srgbClr val="9D174D"/>
                 </a:solidFill>
                 <a:latin typeface="Trebuchet MS" pitchFamily="34" charset="0"/>
                 <a:ea typeface="Trebuchet MS" pitchFamily="34" charset="-122"/>
                 <a:cs typeface="Trebuchet MS" pitchFamily="34" charset="-120"/>
               </a:rPr>
-              <a:t>teach</a:t>
+              <a:t>er</a:t>
             </a:r>
             <a:endParaRPr lang="en-US" sz="1300" dirty="0"/>
           </a:p>
@@ -20489,7 +19811,7 @@
                 <a:ea typeface="Calibri" pitchFamily="34" charset="-122"/>
                 <a:cs typeface="Calibri" pitchFamily="34" charset="-120"/>
               </a:rPr>
-              <a:t>to show or instruct</a:t>
+              <a:t>person who; more</a:t>
             </a:r>
             <a:endParaRPr lang="en-US" sz="850" dirty="0"/>
           </a:p>
@@ -20562,7 +19884,7 @@
                 <a:ea typeface="Trebuchet MS" pitchFamily="34" charset="-122"/>
                 <a:cs typeface="Trebuchet MS" pitchFamily="34" charset="-120"/>
               </a:rPr>
-              <a:t>er</a:t>
+              <a:t>s</a:t>
             </a:r>
             <a:endParaRPr lang="en-US" sz="1300" dirty="0"/>
           </a:p>
@@ -20601,7 +19923,7 @@
                 <a:ea typeface="Calibri" pitchFamily="34" charset="-122"/>
                 <a:cs typeface="Calibri" pitchFamily="34" charset="-120"/>
               </a:rPr>
-              <a:t>a person who does something</a:t>
+              <a:t>plural or present tense</a:t>
             </a:r>
             <a:endParaRPr lang="en-US" sz="850" dirty="0"/>
           </a:p>
@@ -20708,7 +20030,7 @@
         </p:nvSpPr>
         <p:spPr>
           <a:xfrm>
-            <a:off x="2313432" y="3364992"/>
+            <a:off x="2999232" y="3364992"/>
             <a:ext cx="1645920" cy="475488"/>
           </a:xfrm>
           <a:prstGeom prst="rect">
@@ -20735,7 +20057,7 @@
         </p:nvSpPr>
         <p:spPr>
           <a:xfrm>
-            <a:off x="2313432" y="3364992"/>
+            <a:off x="2999232" y="3364992"/>
             <a:ext cx="1645920" cy="475488"/>
           </a:xfrm>
           <a:prstGeom prst="rect">
@@ -20760,7 +20082,7 @@
                 <a:ea typeface="Trebuchet MS" pitchFamily="34" charset="-122"/>
                 <a:cs typeface="Trebuchet MS" pitchFamily="34" charset="-120"/>
               </a:rPr>
-              <a:t>co</a:t>
+              <a:t>teach</a:t>
             </a:r>
             <a:endParaRPr lang="en-US" sz="1400" dirty="0"/>
           </a:p>
@@ -20774,8 +20096,8 @@
         </p:nvSpPr>
         <p:spPr>
           <a:xfrm>
-            <a:off x="3959352" y="3364992"/>
-            <a:ext cx="411480" cy="475488"/>
+            <a:off x="4645152" y="3364992"/>
+            <a:ext cx="1097280" cy="475488"/>
           </a:xfrm>
           <a:prstGeom prst="rect">
             <a:avLst/>
@@ -20813,7 +20135,7 @@
         </p:nvSpPr>
         <p:spPr>
           <a:xfrm>
-            <a:off x="4370832" y="3364992"/>
+            <a:off x="5742432" y="3364992"/>
             <a:ext cx="1645920" cy="475488"/>
           </a:xfrm>
           <a:prstGeom prst="rect">
@@ -20840,7 +20162,7 @@
         </p:nvSpPr>
         <p:spPr>
           <a:xfrm>
-            <a:off x="4370832" y="3364992"/>
+            <a:off x="5742432" y="3364992"/>
             <a:ext cx="1645920" cy="475488"/>
           </a:xfrm>
           <a:prstGeom prst="rect">
@@ -20865,7 +20187,7 @@
                 <a:ea typeface="Trebuchet MS" pitchFamily="34" charset="-122"/>
                 <a:cs typeface="Trebuchet MS" pitchFamily="34" charset="-120"/>
               </a:rPr>
-              <a:t>teach</a:t>
+              <a:t>ers</a:t>
             </a:r>
             <a:endParaRPr lang="en-US" sz="1400" dirty="0"/>
           </a:p>
@@ -20873,14 +20195,41 @@
       </p:sp>
       <p:sp>
         <p:nvSpPr>
-          <p:cNvPr id="33" name="Text 31"/>
-          <p:cNvSpPr/>
-          <p:nvPr/>
-        </p:nvSpPr>
-        <p:spPr>
-          <a:xfrm>
-            <a:off x="6016752" y="3364992"/>
-            <a:ext cx="411480" cy="475488"/>
+          <p:cNvPr id="33" name="Shape 31"/>
+          <p:cNvSpPr/>
+          <p:nvPr/>
+        </p:nvSpPr>
+        <p:spPr>
+          <a:xfrm>
+            <a:off x="365760" y="4096512"/>
+            <a:ext cx="1371600" cy="804672"/>
+          </a:xfrm>
+          <a:prstGeom prst="rect">
+            <a:avLst>
+              <a:gd name="adj" fmla="val 6818"/>
+            </a:avLst>
+          </a:prstGeom>
+          <a:solidFill>
+            <a:srgbClr val="E2E8F0"/>
+          </a:solidFill>
+          <a:ln w="12700">
+            <a:solidFill>
+              <a:srgbClr val="E2E8F0"/>
+            </a:solidFill>
+            <a:prstDash val="solid"/>
+          </a:ln>
+        </p:spPr>
+      </p:sp>
+      <p:sp>
+        <p:nvSpPr>
+          <p:cNvPr id="34" name="Text 32"/>
+          <p:cNvSpPr/>
+          <p:nvPr/>
+        </p:nvSpPr>
+        <p:spPr>
+          <a:xfrm>
+            <a:off x="365760" y="4096512"/>
+            <a:ext cx="1371600" cy="804672"/>
           </a:xfrm>
           <a:prstGeom prst="rect">
             <a:avLst/>
@@ -20896,96 +20245,30 @@
               <a:buNone/>
             </a:pPr>
             <a:r>
-              <a:rPr lang="en-US" sz="1600" b="1" dirty="0">
-                <a:solidFill>
-                  <a:srgbClr val="0D9488"/>
+              <a:rPr lang="en-US" sz="1100" b="1" dirty="0">
+                <a:solidFill>
+                  <a:srgbClr val="475569"/>
                 </a:solidFill>
                 <a:latin typeface="Trebuchet MS" pitchFamily="34" charset="0"/>
                 <a:ea typeface="Trebuchet MS" pitchFamily="34" charset="-122"/>
                 <a:cs typeface="Trebuchet MS" pitchFamily="34" charset="-120"/>
               </a:rPr>
-              <a:t>·</a:t>
-            </a:r>
-            <a:endParaRPr lang="en-US" sz="1600" dirty="0"/>
-          </a:p>
-        </p:txBody>
-      </p:sp>
-      <p:sp>
-        <p:nvSpPr>
-          <p:cNvPr id="34" name="Shape 32"/>
-          <p:cNvSpPr/>
-          <p:nvPr/>
-        </p:nvSpPr>
-        <p:spPr>
-          <a:xfrm>
-            <a:off x="6428232" y="3364992"/>
-            <a:ext cx="1645920" cy="475488"/>
-          </a:xfrm>
-          <a:prstGeom prst="rect">
-            <a:avLst>
-              <a:gd name="adj" fmla="val 9615"/>
-            </a:avLst>
-          </a:prstGeom>
-          <a:solidFill>
-            <a:srgbClr val="FFFFFF"/>
-          </a:solidFill>
-          <a:ln w="12700">
-            <a:solidFill>
-              <a:srgbClr val="0D9488"/>
-            </a:solidFill>
-            <a:prstDash val="solid"/>
-          </a:ln>
-        </p:spPr>
-      </p:sp>
-      <p:sp>
-        <p:nvSpPr>
-          <p:cNvPr id="35" name="Text 33"/>
-          <p:cNvSpPr/>
-          <p:nvPr/>
-        </p:nvSpPr>
-        <p:spPr>
-          <a:xfrm>
-            <a:off x="6428232" y="3364992"/>
-            <a:ext cx="1645920" cy="475488"/>
-          </a:xfrm>
-          <a:prstGeom prst="rect">
-            <a:avLst/>
-          </a:prstGeom>
-          <a:noFill/>
-          <a:ln/>
-        </p:spPr>
-        <p:txBody>
-          <a:bodyPr wrap="square" lIns="0" tIns="0" rIns="0" bIns="0" rtlCol="0" anchor="ctr"/>
-          <a:lstStyle/>
-          <a:p>
-            <a:pPr algn="ctr" indent="0" marL="0">
-              <a:buNone/>
-            </a:pPr>
-            <a:r>
-              <a:rPr lang="en-US" sz="1400" b="1" dirty="0">
-                <a:solidFill>
-                  <a:srgbClr val="0D9488"/>
-                </a:solidFill>
-                <a:latin typeface="Trebuchet MS" pitchFamily="34" charset="0"/>
-                <a:ea typeface="Trebuchet MS" pitchFamily="34" charset="-122"/>
-                <a:cs typeface="Trebuchet MS" pitchFamily="34" charset="-120"/>
-              </a:rPr>
-              <a:t>er</a:t>
-            </a:r>
-            <a:endParaRPr lang="en-US" sz="1400" dirty="0"/>
-          </a:p>
-        </p:txBody>
-      </p:sp>
-      <p:sp>
-        <p:nvSpPr>
-          <p:cNvPr id="36" name="Shape 34"/>
-          <p:cNvSpPr/>
-          <p:nvPr/>
-        </p:nvSpPr>
-        <p:spPr>
-          <a:xfrm>
-            <a:off x="365760" y="4096512"/>
-            <a:ext cx="1371600" cy="804672"/>
+              <a:t>Phonemes</a:t>
+            </a:r>
+            <a:endParaRPr lang="en-US" sz="1100" dirty="0"/>
+          </a:p>
+        </p:txBody>
+      </p:sp>
+      <p:sp>
+        <p:nvSpPr>
+          <p:cNvPr id="35" name="Shape 33"/>
+          <p:cNvSpPr/>
+          <p:nvPr/>
+        </p:nvSpPr>
+        <p:spPr>
+          <a:xfrm>
+            <a:off x="1874520" y="4096512"/>
+            <a:ext cx="6903720" cy="804672"/>
           </a:xfrm>
           <a:prstGeom prst="rect">
             <a:avLst>
@@ -20993,85 +20276,19 @@
             </a:avLst>
           </a:prstGeom>
           <a:solidFill>
-            <a:srgbClr val="E2E8F0"/>
+            <a:srgbClr val="F8FAFC"/>
           </a:solidFill>
           <a:ln w="12700">
             <a:solidFill>
               <a:srgbClr val="E2E8F0"/>
             </a:solidFill>
-            <a:prstDash val="solid"/>
-          </a:ln>
-        </p:spPr>
-      </p:sp>
-      <p:sp>
-        <p:nvSpPr>
-          <p:cNvPr id="37" name="Text 35"/>
-          <p:cNvSpPr/>
-          <p:nvPr/>
-        </p:nvSpPr>
-        <p:spPr>
-          <a:xfrm>
-            <a:off x="365760" y="4096512"/>
-            <a:ext cx="1371600" cy="804672"/>
-          </a:xfrm>
-          <a:prstGeom prst="rect">
-            <a:avLst/>
-          </a:prstGeom>
-          <a:noFill/>
-          <a:ln/>
-        </p:spPr>
-        <p:txBody>
-          <a:bodyPr wrap="square" lIns="0" tIns="0" rIns="0" bIns="0" rtlCol="0" anchor="ctr"/>
-          <a:lstStyle/>
-          <a:p>
-            <a:pPr algn="ctr" indent="0" marL="0">
-              <a:buNone/>
-            </a:pPr>
-            <a:r>
-              <a:rPr lang="en-US" sz="1100" b="1" dirty="0">
-                <a:solidFill>
-                  <a:srgbClr val="475569"/>
-                </a:solidFill>
-                <a:latin typeface="Trebuchet MS" pitchFamily="34" charset="0"/>
-                <a:ea typeface="Trebuchet MS" pitchFamily="34" charset="-122"/>
-                <a:cs typeface="Trebuchet MS" pitchFamily="34" charset="-120"/>
-              </a:rPr>
-              <a:t>Phonemes</a:t>
-            </a:r>
-            <a:endParaRPr lang="en-US" sz="1100" dirty="0"/>
-          </a:p>
-        </p:txBody>
-      </p:sp>
-      <p:sp>
-        <p:nvSpPr>
-          <p:cNvPr id="38" name="Shape 36"/>
-          <p:cNvSpPr/>
-          <p:nvPr/>
-        </p:nvSpPr>
-        <p:spPr>
-          <a:xfrm>
-            <a:off x="1874520" y="4096512"/>
-            <a:ext cx="6903720" cy="804672"/>
-          </a:xfrm>
-          <a:prstGeom prst="rect">
-            <a:avLst>
-              <a:gd name="adj" fmla="val 6818"/>
-            </a:avLst>
-          </a:prstGeom>
-          <a:solidFill>
-            <a:srgbClr val="F8FAFC"/>
-          </a:solidFill>
-          <a:ln w="12700">
-            <a:solidFill>
-              <a:srgbClr val="E2E8F0"/>
-            </a:solidFill>
             <a:prstDash val="dash"/>
           </a:ln>
         </p:spPr>
       </p:sp>
       <p:sp>
         <p:nvSpPr>
-          <p:cNvPr id="39" name="Text 37"/>
+          <p:cNvPr id="36" name="Text 34"/>
           <p:cNvSpPr/>
           <p:nvPr/>
         </p:nvSpPr>
@@ -21394,7 +20611,7 @@
                 <a:ea typeface="Calibri" pitchFamily="34" charset="-122"/>
                 <a:cs typeface="Calibri" pitchFamily="34" charset="-120"/>
               </a:rPr>
-              <a:t>Word Labs  •  wordlabs.app  •  Root: 'teach' = to show or instruct</a:t>
+              <a:t>Word Labs  •  wordlabs.app  •  Root: 'teach' = to show someone how to do something</a:t>
             </a:r>
             <a:endParaRPr lang="en-US" sz="800" dirty="0"/>
           </a:p>
@@ -21533,7 +20750,7 @@
                 <a:ea typeface="Trebuchet MS" pitchFamily="34" charset="-122"/>
                 <a:cs typeface="Trebuchet MS" pitchFamily="34" charset="-120"/>
               </a:rPr>
-              <a:t>coteacher</a:t>
+              <a:t>teachers</a:t>
             </a:r>
             <a:endParaRPr lang="en-US" sz="2800" dirty="0"/>
           </a:p>
@@ -21622,11 +20839,11 @@
             </a:avLst>
           </a:prstGeom>
           <a:solidFill>
-            <a:srgbClr val="DDD6FE"/>
+            <a:srgbClr val="CCFBF1"/>
           </a:solidFill>
           <a:ln w="19050">
             <a:solidFill>
-              <a:srgbClr val="7C3AED"/>
+              <a:srgbClr val="0D9488"/>
             </a:solidFill>
             <a:prstDash val="solid"/>
           </a:ln>
@@ -21666,13 +20883,13 @@
             <a:r>
               <a:rPr lang="en-US" sz="1300" b="1" dirty="0">
                 <a:solidFill>
-                  <a:srgbClr val="4C1D95"/>
+                  <a:srgbClr val="0F766E"/>
                 </a:solidFill>
                 <a:latin typeface="Trebuchet MS" pitchFamily="34" charset="0"/>
                 <a:ea typeface="Trebuchet MS" pitchFamily="34" charset="-122"/>
                 <a:cs typeface="Trebuchet MS" pitchFamily="34" charset="-120"/>
               </a:rPr>
-              <a:t>co</a:t>
+              <a:t>teach</a:t>
             </a:r>
             <a:endParaRPr lang="en-US" sz="1300" dirty="0"/>
           </a:p>
@@ -21711,7 +20928,7 @@
                 <a:ea typeface="Calibri" pitchFamily="34" charset="-122"/>
                 <a:cs typeface="Calibri" pitchFamily="34" charset="-120"/>
               </a:rPr>
-              <a:t>together; with</a:t>
+              <a:t>to show someone how to do something</a:t>
             </a:r>
             <a:endParaRPr lang="en-US" sz="850" dirty="0"/>
           </a:p>
@@ -21734,11 +20951,11 @@
             </a:avLst>
           </a:prstGeom>
           <a:solidFill>
-            <a:srgbClr val="CCFBF1"/>
+            <a:srgbClr val="FCE7F3"/>
           </a:solidFill>
           <a:ln w="19050">
             <a:solidFill>
-              <a:srgbClr val="0D9488"/>
+              <a:srgbClr val="DB2777"/>
             </a:solidFill>
             <a:prstDash val="solid"/>
           </a:ln>
@@ -21778,13 +20995,13 @@
             <a:r>
               <a:rPr lang="en-US" sz="1300" b="1" dirty="0">
                 <a:solidFill>
-                  <a:srgbClr val="0F766E"/>
+                  <a:srgbClr val="9D174D"/>
                 </a:solidFill>
                 <a:latin typeface="Trebuchet MS" pitchFamily="34" charset="0"/>
                 <a:ea typeface="Trebuchet MS" pitchFamily="34" charset="-122"/>
                 <a:cs typeface="Trebuchet MS" pitchFamily="34" charset="-120"/>
               </a:rPr>
-              <a:t>teach</a:t>
+              <a:t>er</a:t>
             </a:r>
             <a:endParaRPr lang="en-US" sz="1300" dirty="0"/>
           </a:p>
@@ -21823,7 +21040,7 @@
                 <a:ea typeface="Calibri" pitchFamily="34" charset="-122"/>
                 <a:cs typeface="Calibri" pitchFamily="34" charset="-120"/>
               </a:rPr>
-              <a:t>to show or instruct</a:t>
+              <a:t>person who; more</a:t>
             </a:r>
             <a:endParaRPr lang="en-US" sz="850" dirty="0"/>
           </a:p>
@@ -21896,7 +21113,7 @@
                 <a:ea typeface="Trebuchet MS" pitchFamily="34" charset="-122"/>
                 <a:cs typeface="Trebuchet MS" pitchFamily="34" charset="-120"/>
               </a:rPr>
-              <a:t>er</a:t>
+              <a:t>s</a:t>
             </a:r>
             <a:endParaRPr lang="en-US" sz="1300" dirty="0"/>
           </a:p>
@@ -21935,7 +21152,7 @@
                 <a:ea typeface="Calibri" pitchFamily="34" charset="-122"/>
                 <a:cs typeface="Calibri" pitchFamily="34" charset="-120"/>
               </a:rPr>
-              <a:t>a person who does something</a:t>
+              <a:t>plural or present tense</a:t>
             </a:r>
             <a:endParaRPr lang="en-US" sz="850" dirty="0"/>
           </a:p>
@@ -22042,7 +21259,7 @@
         </p:nvSpPr>
         <p:spPr>
           <a:xfrm>
-            <a:off x="2313432" y="3364992"/>
+            <a:off x="2999232" y="3364992"/>
             <a:ext cx="1645920" cy="475488"/>
           </a:xfrm>
           <a:prstGeom prst="rect">
@@ -22069,7 +21286,7 @@
         </p:nvSpPr>
         <p:spPr>
           <a:xfrm>
-            <a:off x="2313432" y="3364992"/>
+            <a:off x="2999232" y="3364992"/>
             <a:ext cx="1645920" cy="475488"/>
           </a:xfrm>
           <a:prstGeom prst="rect">
@@ -22094,7 +21311,7 @@
                 <a:ea typeface="Trebuchet MS" pitchFamily="34" charset="-122"/>
                 <a:cs typeface="Trebuchet MS" pitchFamily="34" charset="-120"/>
               </a:rPr>
-              <a:t>co</a:t>
+              <a:t>teach</a:t>
             </a:r>
             <a:endParaRPr lang="en-US" sz="1400" dirty="0"/>
           </a:p>
@@ -22108,8 +21325,8 @@
         </p:nvSpPr>
         <p:spPr>
           <a:xfrm>
-            <a:off x="3959352" y="3364992"/>
-            <a:ext cx="411480" cy="475488"/>
+            <a:off x="4645152" y="3364992"/>
+            <a:ext cx="1097280" cy="475488"/>
           </a:xfrm>
           <a:prstGeom prst="rect">
             <a:avLst/>
@@ -22147,7 +21364,7 @@
         </p:nvSpPr>
         <p:spPr>
           <a:xfrm>
-            <a:off x="4370832" y="3364992"/>
+            <a:off x="5742432" y="3364992"/>
             <a:ext cx="1645920" cy="475488"/>
           </a:xfrm>
           <a:prstGeom prst="rect">
@@ -22174,7 +21391,7 @@
         </p:nvSpPr>
         <p:spPr>
           <a:xfrm>
-            <a:off x="4370832" y="3364992"/>
+            <a:off x="5742432" y="3364992"/>
             <a:ext cx="1645920" cy="475488"/>
           </a:xfrm>
           <a:prstGeom prst="rect">
@@ -22199,7 +21416,7 @@
                 <a:ea typeface="Trebuchet MS" pitchFamily="34" charset="-122"/>
                 <a:cs typeface="Trebuchet MS" pitchFamily="34" charset="-120"/>
               </a:rPr>
-              <a:t>teach</a:t>
+              <a:t>ers</a:t>
             </a:r>
             <a:endParaRPr lang="en-US" sz="1400" dirty="0"/>
           </a:p>
@@ -22207,14 +21424,41 @@
       </p:sp>
       <p:sp>
         <p:nvSpPr>
-          <p:cNvPr id="33" name="Text 31"/>
-          <p:cNvSpPr/>
-          <p:nvPr/>
-        </p:nvSpPr>
-        <p:spPr>
-          <a:xfrm>
-            <a:off x="6016752" y="3364992"/>
-            <a:ext cx="411480" cy="475488"/>
+          <p:cNvPr id="33" name="Shape 31"/>
+          <p:cNvSpPr/>
+          <p:nvPr/>
+        </p:nvSpPr>
+        <p:spPr>
+          <a:xfrm>
+            <a:off x="365760" y="4096512"/>
+            <a:ext cx="1371600" cy="804672"/>
+          </a:xfrm>
+          <a:prstGeom prst="rect">
+            <a:avLst>
+              <a:gd name="adj" fmla="val 6818"/>
+            </a:avLst>
+          </a:prstGeom>
+          <a:solidFill>
+            <a:srgbClr val="E2E8F0"/>
+          </a:solidFill>
+          <a:ln w="12700">
+            <a:solidFill>
+              <a:srgbClr val="E2E8F0"/>
+            </a:solidFill>
+            <a:prstDash val="solid"/>
+          </a:ln>
+        </p:spPr>
+      </p:sp>
+      <p:sp>
+        <p:nvSpPr>
+          <p:cNvPr id="34" name="Text 32"/>
+          <p:cNvSpPr/>
+          <p:nvPr/>
+        </p:nvSpPr>
+        <p:spPr>
+          <a:xfrm>
+            <a:off x="365760" y="4096512"/>
+            <a:ext cx="1371600" cy="804672"/>
           </a:xfrm>
           <a:prstGeom prst="rect">
             <a:avLst/>
@@ -22230,57 +21474,84 @@
               <a:buNone/>
             </a:pPr>
             <a:r>
-              <a:rPr lang="en-US" sz="1600" b="1" dirty="0">
-                <a:solidFill>
-                  <a:srgbClr val="0D9488"/>
+              <a:rPr lang="en-US" sz="1100" b="1" dirty="0">
+                <a:solidFill>
+                  <a:srgbClr val="475569"/>
                 </a:solidFill>
                 <a:latin typeface="Trebuchet MS" pitchFamily="34" charset="0"/>
                 <a:ea typeface="Trebuchet MS" pitchFamily="34" charset="-122"/>
                 <a:cs typeface="Trebuchet MS" pitchFamily="34" charset="-120"/>
               </a:rPr>
-              <a:t>·</a:t>
-            </a:r>
-            <a:endParaRPr lang="en-US" sz="1600" dirty="0"/>
-          </a:p>
-        </p:txBody>
-      </p:sp>
-      <p:sp>
-        <p:nvSpPr>
-          <p:cNvPr id="34" name="Shape 32"/>
-          <p:cNvSpPr/>
-          <p:nvPr/>
-        </p:nvSpPr>
-        <p:spPr>
-          <a:xfrm>
-            <a:off x="6428232" y="3364992"/>
-            <a:ext cx="1645920" cy="475488"/>
+              <a:t>Phonemes</a:t>
+            </a:r>
+            <a:endParaRPr lang="en-US" sz="1100" dirty="0"/>
+          </a:p>
+        </p:txBody>
+      </p:sp>
+      <p:sp>
+        <p:nvSpPr>
+          <p:cNvPr id="35" name="Shape 33"/>
+          <p:cNvSpPr/>
+          <p:nvPr/>
+        </p:nvSpPr>
+        <p:spPr>
+          <a:xfrm>
+            <a:off x="1874520" y="4096512"/>
+            <a:ext cx="6903720" cy="658368"/>
           </a:xfrm>
           <a:prstGeom prst="rect">
             <a:avLst>
-              <a:gd name="adj" fmla="val 9615"/>
+              <a:gd name="adj" fmla="val 8333"/>
             </a:avLst>
           </a:prstGeom>
           <a:solidFill>
+            <a:srgbClr val="FCE7F3"/>
+          </a:solidFill>
+          <a:ln w="12700">
+            <a:solidFill>
+              <a:srgbClr val="DB2777"/>
+            </a:solidFill>
+            <a:prstDash val="solid"/>
+          </a:ln>
+        </p:spPr>
+      </p:sp>
+      <p:sp>
+        <p:nvSpPr>
+          <p:cNvPr id="36" name="Shape 34"/>
+          <p:cNvSpPr/>
+          <p:nvPr/>
+        </p:nvSpPr>
+        <p:spPr>
+          <a:xfrm>
+            <a:off x="2427732" y="4169664"/>
+            <a:ext cx="685800" cy="475488"/>
+          </a:xfrm>
+          <a:prstGeom prst="rect">
+            <a:avLst>
+              <a:gd name="adj" fmla="val 7692"/>
+            </a:avLst>
+          </a:prstGeom>
+          <a:solidFill>
             <a:srgbClr val="FFFFFF"/>
           </a:solidFill>
           <a:ln w="12700">
             <a:solidFill>
-              <a:srgbClr val="0D9488"/>
-            </a:solidFill>
-            <a:prstDash val="solid"/>
-          </a:ln>
-        </p:spPr>
-      </p:sp>
-      <p:sp>
-        <p:nvSpPr>
-          <p:cNvPr id="35" name="Text 33"/>
-          <p:cNvSpPr/>
-          <p:nvPr/>
-        </p:nvSpPr>
-        <p:spPr>
-          <a:xfrm>
-            <a:off x="6428232" y="3364992"/>
-            <a:ext cx="1645920" cy="475488"/>
+              <a:srgbClr val="DB2777"/>
+            </a:solidFill>
+            <a:prstDash val="solid"/>
+          </a:ln>
+        </p:spPr>
+      </p:sp>
+      <p:sp>
+        <p:nvSpPr>
+          <p:cNvPr id="37" name="Text 35"/>
+          <p:cNvSpPr/>
+          <p:nvPr/>
+        </p:nvSpPr>
+        <p:spPr>
+          <a:xfrm>
+            <a:off x="2427732" y="4169664"/>
+            <a:ext cx="685800" cy="475488"/>
           </a:xfrm>
           <a:prstGeom prst="rect">
             <a:avLst/>
@@ -22296,57 +21567,57 @@
               <a:buNone/>
             </a:pPr>
             <a:r>
-              <a:rPr lang="en-US" sz="1400" b="1" dirty="0">
-                <a:solidFill>
-                  <a:srgbClr val="0D9488"/>
+              <a:rPr lang="en-US" sz="900" b="1" dirty="0">
+                <a:solidFill>
+                  <a:srgbClr val="9D174D"/>
                 </a:solidFill>
                 <a:latin typeface="Trebuchet MS" pitchFamily="34" charset="0"/>
                 <a:ea typeface="Trebuchet MS" pitchFamily="34" charset="-122"/>
                 <a:cs typeface="Trebuchet MS" pitchFamily="34" charset="-120"/>
               </a:rPr>
-              <a:t>er</a:t>
-            </a:r>
-            <a:endParaRPr lang="en-US" sz="1400" dirty="0"/>
-          </a:p>
-        </p:txBody>
-      </p:sp>
-      <p:sp>
-        <p:nvSpPr>
-          <p:cNvPr id="36" name="Shape 34"/>
-          <p:cNvSpPr/>
-          <p:nvPr/>
-        </p:nvSpPr>
-        <p:spPr>
-          <a:xfrm>
-            <a:off x="365760" y="4096512"/>
-            <a:ext cx="1371600" cy="804672"/>
+              <a:t>t</a:t>
+            </a:r>
+            <a:endParaRPr lang="en-US" sz="900" dirty="0"/>
+          </a:p>
+        </p:txBody>
+      </p:sp>
+      <p:sp>
+        <p:nvSpPr>
+          <p:cNvPr id="38" name="Shape 36"/>
+          <p:cNvSpPr/>
+          <p:nvPr/>
+        </p:nvSpPr>
+        <p:spPr>
+          <a:xfrm>
+            <a:off x="3639312" y="4169664"/>
+            <a:ext cx="685800" cy="475488"/>
           </a:xfrm>
           <a:prstGeom prst="rect">
             <a:avLst>
-              <a:gd name="adj" fmla="val 6818"/>
+              <a:gd name="adj" fmla="val 7692"/>
             </a:avLst>
           </a:prstGeom>
           <a:solidFill>
-            <a:srgbClr val="E2E8F0"/>
-          </a:solidFill>
-          <a:ln w="12700">
-            <a:solidFill>
-              <a:srgbClr val="E2E8F0"/>
-            </a:solidFill>
-            <a:prstDash val="solid"/>
-          </a:ln>
-        </p:spPr>
-      </p:sp>
-      <p:sp>
-        <p:nvSpPr>
-          <p:cNvPr id="37" name="Text 35"/>
-          <p:cNvSpPr/>
-          <p:nvPr/>
-        </p:nvSpPr>
-        <p:spPr>
-          <a:xfrm>
-            <a:off x="365760" y="4096512"/>
-            <a:ext cx="1371600" cy="804672"/>
+            <a:srgbClr val="FFFFFF"/>
+          </a:solidFill>
+          <a:ln w="12700">
+            <a:solidFill>
+              <a:srgbClr val="DB2777"/>
+            </a:solidFill>
+            <a:prstDash val="solid"/>
+          </a:ln>
+        </p:spPr>
+      </p:sp>
+      <p:sp>
+        <p:nvSpPr>
+          <p:cNvPr id="39" name="Text 37"/>
+          <p:cNvSpPr/>
+          <p:nvPr/>
+        </p:nvSpPr>
+        <p:spPr>
+          <a:xfrm>
+            <a:off x="3639312" y="4169664"/>
+            <a:ext cx="685800" cy="475488"/>
           </a:xfrm>
           <a:prstGeom prst="rect">
             <a:avLst/>
@@ -22362,38 +21633,38 @@
               <a:buNone/>
             </a:pPr>
             <a:r>
-              <a:rPr lang="en-US" sz="1100" b="1" dirty="0">
-                <a:solidFill>
-                  <a:srgbClr val="475569"/>
+              <a:rPr lang="en-US" sz="900" b="1" dirty="0">
+                <a:solidFill>
+                  <a:srgbClr val="9D174D"/>
                 </a:solidFill>
                 <a:latin typeface="Trebuchet MS" pitchFamily="34" charset="0"/>
                 <a:ea typeface="Trebuchet MS" pitchFamily="34" charset="-122"/>
                 <a:cs typeface="Trebuchet MS" pitchFamily="34" charset="-120"/>
               </a:rPr>
-              <a:t>Phonemes</a:t>
-            </a:r>
-            <a:endParaRPr lang="en-US" sz="1100" dirty="0"/>
-          </a:p>
-        </p:txBody>
-      </p:sp>
-      <p:sp>
-        <p:nvSpPr>
-          <p:cNvPr id="38" name="Shape 36"/>
-          <p:cNvSpPr/>
-          <p:nvPr/>
-        </p:nvSpPr>
-        <p:spPr>
-          <a:xfrm>
-            <a:off x="1874520" y="4096512"/>
-            <a:ext cx="6903720" cy="804672"/>
+              <a:t>ea</a:t>
+            </a:r>
+            <a:endParaRPr lang="en-US" sz="900" dirty="0"/>
+          </a:p>
+        </p:txBody>
+      </p:sp>
+      <p:sp>
+        <p:nvSpPr>
+          <p:cNvPr id="40" name="Shape 38"/>
+          <p:cNvSpPr/>
+          <p:nvPr/>
+        </p:nvSpPr>
+        <p:spPr>
+          <a:xfrm>
+            <a:off x="4850892" y="4169664"/>
+            <a:ext cx="685800" cy="475488"/>
           </a:xfrm>
           <a:prstGeom prst="rect">
             <a:avLst>
-              <a:gd name="adj" fmla="val 6818"/>
+              <a:gd name="adj" fmla="val 7692"/>
             </a:avLst>
           </a:prstGeom>
           <a:solidFill>
-            <a:srgbClr val="FCE7F3"/>
+            <a:srgbClr val="FFFFFF"/>
           </a:solidFill>
           <a:ln w="12700">
             <a:solidFill>
@@ -22405,41 +21676,14 @@
       </p:sp>
       <p:sp>
         <p:nvSpPr>
-          <p:cNvPr id="39" name="Shape 37"/>
-          <p:cNvSpPr/>
-          <p:nvPr/>
-        </p:nvSpPr>
-        <p:spPr>
-          <a:xfrm>
-            <a:off x="2254649" y="4169664"/>
-            <a:ext cx="685800" cy="384048"/>
-          </a:xfrm>
-          <a:prstGeom prst="rect">
-            <a:avLst>
-              <a:gd name="adj" fmla="val 9524"/>
-            </a:avLst>
-          </a:prstGeom>
-          <a:solidFill>
-            <a:srgbClr val="FFFFFF"/>
-          </a:solidFill>
-          <a:ln w="12700">
-            <a:solidFill>
-              <a:srgbClr val="DB2777"/>
-            </a:solidFill>
-            <a:prstDash val="solid"/>
-          </a:ln>
-        </p:spPr>
-      </p:sp>
-      <p:sp>
-        <p:nvSpPr>
-          <p:cNvPr id="40" name="Text 38"/>
-          <p:cNvSpPr/>
-          <p:nvPr/>
-        </p:nvSpPr>
-        <p:spPr>
-          <a:xfrm>
-            <a:off x="2254649" y="4169664"/>
-            <a:ext cx="685800" cy="384048"/>
+          <p:cNvPr id="41" name="Text 39"/>
+          <p:cNvSpPr/>
+          <p:nvPr/>
+        </p:nvSpPr>
+        <p:spPr>
+          <a:xfrm>
+            <a:off x="4850892" y="4169664"/>
+            <a:ext cx="685800" cy="475488"/>
           </a:xfrm>
           <a:prstGeom prst="rect">
             <a:avLst/>
@@ -22463,7 +21707,7 @@
                 <a:ea typeface="Trebuchet MS" pitchFamily="34" charset="-122"/>
                 <a:cs typeface="Trebuchet MS" pitchFamily="34" charset="-120"/>
               </a:rPr>
-              <a:t>c</a:t>
+              <a:t>ch</a:t>
             </a:r>
             <a:endParaRPr lang="en-US" sz="900" dirty="0"/>
           </a:p>
@@ -22471,57 +21715,18 @@
       </p:sp>
       <p:sp>
         <p:nvSpPr>
-          <p:cNvPr id="41" name="Text 39"/>
-          <p:cNvSpPr/>
-          <p:nvPr/>
-        </p:nvSpPr>
-        <p:spPr>
-          <a:xfrm>
-            <a:off x="2254649" y="4572000"/>
-            <a:ext cx="685800" cy="219456"/>
-          </a:xfrm>
-          <a:prstGeom prst="rect">
-            <a:avLst/>
-          </a:prstGeom>
-          <a:noFill/>
-          <a:ln/>
-        </p:spPr>
-        <p:txBody>
-          <a:bodyPr wrap="square" lIns="0" tIns="0" rIns="0" bIns="0" rtlCol="0" anchor="t"/>
-          <a:lstStyle/>
-          <a:p>
-            <a:pPr algn="ctr" indent="0" marL="0">
-              <a:buNone/>
-            </a:pPr>
-            <a:r>
-              <a:rPr lang="en-US" sz="750" i="1" dirty="0">
-                <a:solidFill>
-                  <a:srgbClr val="94A3B8"/>
-                </a:solidFill>
-                <a:latin typeface="Calibri" pitchFamily="34" charset="0"/>
-                <a:ea typeface="Calibri" pitchFamily="34" charset="-122"/>
-                <a:cs typeface="Calibri" pitchFamily="34" charset="-120"/>
-              </a:rPr>
-              <a:t>/k/</a:t>
-            </a:r>
-            <a:endParaRPr lang="en-US" sz="750" dirty="0"/>
-          </a:p>
-        </p:txBody>
-      </p:sp>
-      <p:sp>
-        <p:nvSpPr>
           <p:cNvPr id="42" name="Shape 40"/>
           <p:cNvSpPr/>
           <p:nvPr/>
         </p:nvSpPr>
         <p:spPr>
           <a:xfrm>
-            <a:off x="3293146" y="4169664"/>
-            <a:ext cx="685800" cy="384048"/>
+            <a:off x="6062472" y="4169664"/>
+            <a:ext cx="685800" cy="475488"/>
           </a:xfrm>
           <a:prstGeom prst="rect">
             <a:avLst>
-              <a:gd name="adj" fmla="val 9524"/>
+              <a:gd name="adj" fmla="val 7692"/>
             </a:avLst>
           </a:prstGeom>
           <a:solidFill>
@@ -22543,8 +21748,8 @@
         </p:nvSpPr>
         <p:spPr>
           <a:xfrm>
-            <a:off x="3293146" y="4169664"/>
-            <a:ext cx="685800" cy="384048"/>
+            <a:off x="6062472" y="4169664"/>
+            <a:ext cx="685800" cy="475488"/>
           </a:xfrm>
           <a:prstGeom prst="rect">
             <a:avLst/>
@@ -22568,7 +21773,7 @@
                 <a:ea typeface="Trebuchet MS" pitchFamily="34" charset="-122"/>
                 <a:cs typeface="Trebuchet MS" pitchFamily="34" charset="-120"/>
               </a:rPr>
-              <a:t>o</a:t>
+              <a:t>er</a:t>
             </a:r>
             <a:endParaRPr lang="en-US" sz="900" dirty="0"/>
           </a:p>
@@ -22582,12 +21787,12 @@
         </p:nvSpPr>
         <p:spPr>
           <a:xfrm>
-            <a:off x="4331643" y="4169664"/>
-            <a:ext cx="685800" cy="384048"/>
+            <a:off x="7274052" y="4169664"/>
+            <a:ext cx="685800" cy="475488"/>
           </a:xfrm>
           <a:prstGeom prst="rect">
             <a:avLst>
-              <a:gd name="adj" fmla="val 9524"/>
+              <a:gd name="adj" fmla="val 7692"/>
             </a:avLst>
           </a:prstGeom>
           <a:solidFill>
@@ -22609,8 +21814,8 @@
         </p:nvSpPr>
         <p:spPr>
           <a:xfrm>
-            <a:off x="4331643" y="4169664"/>
-            <a:ext cx="685800" cy="384048"/>
+            <a:off x="7274052" y="4169664"/>
+            <a:ext cx="685800" cy="475488"/>
           </a:xfrm>
           <a:prstGeom prst="rect">
             <a:avLst/>
@@ -22634,205 +21839,7 @@
                 <a:ea typeface="Trebuchet MS" pitchFamily="34" charset="-122"/>
                 <a:cs typeface="Trebuchet MS" pitchFamily="34" charset="-120"/>
               </a:rPr>
-              <a:t>t</a:t>
-            </a:r>
-            <a:endParaRPr lang="en-US" sz="900" dirty="0"/>
-          </a:p>
-        </p:txBody>
-      </p:sp>
-      <p:sp>
-        <p:nvSpPr>
-          <p:cNvPr id="46" name="Shape 44"/>
-          <p:cNvSpPr/>
-          <p:nvPr/>
-        </p:nvSpPr>
-        <p:spPr>
-          <a:xfrm>
-            <a:off x="5370141" y="4169664"/>
-            <a:ext cx="685800" cy="384048"/>
-          </a:xfrm>
-          <a:prstGeom prst="rect">
-            <a:avLst>
-              <a:gd name="adj" fmla="val 9524"/>
-            </a:avLst>
-          </a:prstGeom>
-          <a:solidFill>
-            <a:srgbClr val="FFFFFF"/>
-          </a:solidFill>
-          <a:ln w="12700">
-            <a:solidFill>
-              <a:srgbClr val="DB2777"/>
-            </a:solidFill>
-            <a:prstDash val="solid"/>
-          </a:ln>
-        </p:spPr>
-      </p:sp>
-      <p:sp>
-        <p:nvSpPr>
-          <p:cNvPr id="47" name="Text 45"/>
-          <p:cNvSpPr/>
-          <p:nvPr/>
-        </p:nvSpPr>
-        <p:spPr>
-          <a:xfrm>
-            <a:off x="5370141" y="4169664"/>
-            <a:ext cx="685800" cy="384048"/>
-          </a:xfrm>
-          <a:prstGeom prst="rect">
-            <a:avLst/>
-          </a:prstGeom>
-          <a:noFill/>
-          <a:ln/>
-        </p:spPr>
-        <p:txBody>
-          <a:bodyPr wrap="square" lIns="0" tIns="0" rIns="0" bIns="0" rtlCol="0" anchor="ctr"/>
-          <a:lstStyle/>
-          <a:p>
-            <a:pPr algn="ctr" indent="0" marL="0">
-              <a:buNone/>
-            </a:pPr>
-            <a:r>
-              <a:rPr lang="en-US" sz="900" b="1" dirty="0">
-                <a:solidFill>
-                  <a:srgbClr val="9D174D"/>
-                </a:solidFill>
-                <a:latin typeface="Trebuchet MS" pitchFamily="34" charset="0"/>
-                <a:ea typeface="Trebuchet MS" pitchFamily="34" charset="-122"/>
-                <a:cs typeface="Trebuchet MS" pitchFamily="34" charset="-120"/>
-              </a:rPr>
-              <a:t>ea</a:t>
-            </a:r>
-            <a:endParaRPr lang="en-US" sz="900" dirty="0"/>
-          </a:p>
-        </p:txBody>
-      </p:sp>
-      <p:sp>
-        <p:nvSpPr>
-          <p:cNvPr id="48" name="Shape 46"/>
-          <p:cNvSpPr/>
-          <p:nvPr/>
-        </p:nvSpPr>
-        <p:spPr>
-          <a:xfrm>
-            <a:off x="6408638" y="4169664"/>
-            <a:ext cx="685800" cy="384048"/>
-          </a:xfrm>
-          <a:prstGeom prst="rect">
-            <a:avLst>
-              <a:gd name="adj" fmla="val 9524"/>
-            </a:avLst>
-          </a:prstGeom>
-          <a:solidFill>
-            <a:srgbClr val="FFFFFF"/>
-          </a:solidFill>
-          <a:ln w="12700">
-            <a:solidFill>
-              <a:srgbClr val="DB2777"/>
-            </a:solidFill>
-            <a:prstDash val="solid"/>
-          </a:ln>
-        </p:spPr>
-      </p:sp>
-      <p:sp>
-        <p:nvSpPr>
-          <p:cNvPr id="49" name="Text 47"/>
-          <p:cNvSpPr/>
-          <p:nvPr/>
-        </p:nvSpPr>
-        <p:spPr>
-          <a:xfrm>
-            <a:off x="6408638" y="4169664"/>
-            <a:ext cx="685800" cy="384048"/>
-          </a:xfrm>
-          <a:prstGeom prst="rect">
-            <a:avLst/>
-          </a:prstGeom>
-          <a:noFill/>
-          <a:ln/>
-        </p:spPr>
-        <p:txBody>
-          <a:bodyPr wrap="square" lIns="0" tIns="0" rIns="0" bIns="0" rtlCol="0" anchor="ctr"/>
-          <a:lstStyle/>
-          <a:p>
-            <a:pPr algn="ctr" indent="0" marL="0">
-              <a:buNone/>
-            </a:pPr>
-            <a:r>
-              <a:rPr lang="en-US" sz="900" b="1" dirty="0">
-                <a:solidFill>
-                  <a:srgbClr val="9D174D"/>
-                </a:solidFill>
-                <a:latin typeface="Trebuchet MS" pitchFamily="34" charset="0"/>
-                <a:ea typeface="Trebuchet MS" pitchFamily="34" charset="-122"/>
-                <a:cs typeface="Trebuchet MS" pitchFamily="34" charset="-120"/>
-              </a:rPr>
-              <a:t>ch</a:t>
-            </a:r>
-            <a:endParaRPr lang="en-US" sz="900" dirty="0"/>
-          </a:p>
-        </p:txBody>
-      </p:sp>
-      <p:sp>
-        <p:nvSpPr>
-          <p:cNvPr id="50" name="Shape 48"/>
-          <p:cNvSpPr/>
-          <p:nvPr/>
-        </p:nvSpPr>
-        <p:spPr>
-          <a:xfrm>
-            <a:off x="7447135" y="4169664"/>
-            <a:ext cx="685800" cy="384048"/>
-          </a:xfrm>
-          <a:prstGeom prst="rect">
-            <a:avLst>
-              <a:gd name="adj" fmla="val 9524"/>
-            </a:avLst>
-          </a:prstGeom>
-          <a:solidFill>
-            <a:srgbClr val="FFFFFF"/>
-          </a:solidFill>
-          <a:ln w="12700">
-            <a:solidFill>
-              <a:srgbClr val="DB2777"/>
-            </a:solidFill>
-            <a:prstDash val="solid"/>
-          </a:ln>
-        </p:spPr>
-      </p:sp>
-      <p:sp>
-        <p:nvSpPr>
-          <p:cNvPr id="51" name="Text 49"/>
-          <p:cNvSpPr/>
-          <p:nvPr/>
-        </p:nvSpPr>
-        <p:spPr>
-          <a:xfrm>
-            <a:off x="7447135" y="4169664"/>
-            <a:ext cx="685800" cy="384048"/>
-          </a:xfrm>
-          <a:prstGeom prst="rect">
-            <a:avLst/>
-          </a:prstGeom>
-          <a:noFill/>
-          <a:ln/>
-        </p:spPr>
-        <p:txBody>
-          <a:bodyPr wrap="square" lIns="0" tIns="0" rIns="0" bIns="0" rtlCol="0" anchor="ctr"/>
-          <a:lstStyle/>
-          <a:p>
-            <a:pPr algn="ctr" indent="0" marL="0">
-              <a:buNone/>
-            </a:pPr>
-            <a:r>
-              <a:rPr lang="en-US" sz="900" b="1" dirty="0">
-                <a:solidFill>
-                  <a:srgbClr val="9D174D"/>
-                </a:solidFill>
-                <a:latin typeface="Trebuchet MS" pitchFamily="34" charset="0"/>
-                <a:ea typeface="Trebuchet MS" pitchFamily="34" charset="-122"/>
-                <a:cs typeface="Trebuchet MS" pitchFamily="34" charset="-120"/>
-              </a:rPr>
-              <a:t>er</a:t>
+              <a:t>s</a:t>
             </a:r>
             <a:endParaRPr lang="en-US" sz="900" dirty="0"/>
           </a:p>
@@ -23124,7 +22131,7 @@
                 <a:ea typeface="Calibri" pitchFamily="34" charset="-122"/>
                 <a:cs typeface="Calibri" pitchFamily="34" charset="-120"/>
               </a:rPr>
-              <a:t>Word Labs  •  wordlabs.app  •  Root: 'teach' = to show or instruct</a:t>
+              <a:t>Word Labs  •  wordlabs.app  •  Root: 'teach' = to show someone how to do something</a:t>
             </a:r>
             <a:endParaRPr lang="en-US" sz="800" dirty="0"/>
           </a:p>
@@ -23263,7 +22270,7 @@
                 <a:ea typeface="Trebuchet MS" pitchFamily="34" charset="-122"/>
                 <a:cs typeface="Trebuchet MS" pitchFamily="34" charset="-120"/>
               </a:rPr>
-              <a:t>teachable</a:t>
+              <a:t>teaching</a:t>
             </a:r>
             <a:endParaRPr lang="en-US" sz="2800" dirty="0"/>
           </a:p>
@@ -23951,7 +22958,7 @@
                 <a:ea typeface="Calibri" pitchFamily="34" charset="-122"/>
                 <a:cs typeface="Calibri" pitchFamily="34" charset="-120"/>
               </a:rPr>
-              <a:t>Word Labs  •  wordlabs.app  •  Root: 'teach' = to show or instruct</a:t>
+              <a:t>Word Labs  •  wordlabs.app  •  Root: 'teach' = to show someone how to do something</a:t>
             </a:r>
             <a:endParaRPr lang="en-US" sz="800" dirty="0"/>
           </a:p>
@@ -24090,7 +23097,7 @@
                 <a:ea typeface="Trebuchet MS" pitchFamily="34" charset="-122"/>
                 <a:cs typeface="Trebuchet MS" pitchFamily="34" charset="-120"/>
               </a:rPr>
-              <a:t>teachable</a:t>
+              <a:t>teaching</a:t>
             </a:r>
             <a:endParaRPr lang="en-US" sz="2800" dirty="0"/>
           </a:p>
@@ -24268,7 +23275,7 @@
                 <a:ea typeface="Calibri" pitchFamily="34" charset="-122"/>
                 <a:cs typeface="Calibri" pitchFamily="34" charset="-120"/>
               </a:rPr>
-              <a:t>to show or instruct</a:t>
+              <a:t>to show someone how to do something</a:t>
             </a:r>
             <a:endParaRPr lang="en-US" sz="850" dirty="0"/>
           </a:p>
@@ -24341,7 +23348,7 @@
                 <a:ea typeface="Trebuchet MS" pitchFamily="34" charset="-122"/>
                 <a:cs typeface="Trebuchet MS" pitchFamily="34" charset="-120"/>
               </a:rPr>
-              <a:t>able</a:t>
+              <a:t>ing</a:t>
             </a:r>
             <a:endParaRPr lang="en-US" sz="1300" dirty="0"/>
           </a:p>
@@ -24380,7 +23387,7 @@
                 <a:ea typeface="Calibri" pitchFamily="34" charset="-122"/>
                 <a:cs typeface="Calibri" pitchFamily="34" charset="-120"/>
               </a:rPr>
-              <a:t>able to be; capable of</a:t>
+              <a:t>happening now</a:t>
             </a:r>
             <a:endParaRPr lang="en-US" sz="850" dirty="0"/>
           </a:p>
@@ -24936,7 +23943,7 @@
                 <a:ea typeface="Calibri" pitchFamily="34" charset="-122"/>
                 <a:cs typeface="Calibri" pitchFamily="34" charset="-120"/>
               </a:rPr>
-              <a:t>Word Labs  •  wordlabs.app  •  Root: 'teach' = to show or instruct</a:t>
+              <a:t>Word Labs  •  wordlabs.app  •  Root: 'teach' = to show someone how to do something</a:t>
             </a:r>
             <a:endParaRPr lang="en-US" sz="800" dirty="0"/>
           </a:p>
@@ -25009,7 +24016,7 @@
                 <a:ea typeface="Trebuchet MS" pitchFamily="34" charset="-122"/>
                 <a:cs typeface="Trebuchet MS" pitchFamily="34" charset="-120"/>
               </a:rPr>
-              <a:t>We are learning that the root 'teach' means 'to show or instruct'.</a:t>
+              <a:t>We are learning that the root 'teach' means 'to show someone how to do something'.</a:t>
             </a:r>
             <a:endParaRPr lang="en-US" sz="2000" dirty="0"/>
           </a:p>
@@ -25655,7 +24662,7 @@
                 <a:ea typeface="Calibri" pitchFamily="34" charset="-122"/>
                 <a:cs typeface="Calibri" pitchFamily="34" charset="-120"/>
               </a:rPr>
-              <a:t>Word Labs  •  wordlabs.app  •  Root: 'teach' = to show or instruct</a:t>
+              <a:t>Word Labs  •  wordlabs.app  •  Root: 'teach' = to show someone how to do something</a:t>
             </a:r>
             <a:endParaRPr lang="en-US" sz="800" dirty="0"/>
           </a:p>
@@ -25794,7 +24801,7 @@
                 <a:ea typeface="Trebuchet MS" pitchFamily="34" charset="-122"/>
                 <a:cs typeface="Trebuchet MS" pitchFamily="34" charset="-120"/>
               </a:rPr>
-              <a:t>teachable</a:t>
+              <a:t>teaching</a:t>
             </a:r>
             <a:endParaRPr lang="en-US" sz="2800" dirty="0"/>
           </a:p>
@@ -25972,7 +24979,7 @@
                 <a:ea typeface="Calibri" pitchFamily="34" charset="-122"/>
                 <a:cs typeface="Calibri" pitchFamily="34" charset="-120"/>
               </a:rPr>
-              <a:t>to show or instruct</a:t>
+              <a:t>to show someone how to do something</a:t>
             </a:r>
             <a:endParaRPr lang="en-US" sz="850" dirty="0"/>
           </a:p>
@@ -26045,7 +25052,7 @@
                 <a:ea typeface="Trebuchet MS" pitchFamily="34" charset="-122"/>
                 <a:cs typeface="Trebuchet MS" pitchFamily="34" charset="-120"/>
               </a:rPr>
-              <a:t>able</a:t>
+              <a:t>ing</a:t>
             </a:r>
             <a:endParaRPr lang="en-US" sz="1300" dirty="0"/>
           </a:p>
@@ -26084,7 +25091,7 @@
                 <a:ea typeface="Calibri" pitchFamily="34" charset="-122"/>
                 <a:cs typeface="Calibri" pitchFamily="34" charset="-120"/>
               </a:rPr>
-              <a:t>able to be; capable of</a:t>
+              <a:t>happening now</a:t>
             </a:r>
             <a:endParaRPr lang="en-US" sz="850" dirty="0"/>
           </a:p>
@@ -26191,7 +25198,7 @@
         </p:nvSpPr>
         <p:spPr>
           <a:xfrm>
-            <a:off x="2313432" y="3364992"/>
+            <a:off x="2999232" y="3364992"/>
             <a:ext cx="1645920" cy="475488"/>
           </a:xfrm>
           <a:prstGeom prst="rect">
@@ -26218,7 +25225,7 @@
         </p:nvSpPr>
         <p:spPr>
           <a:xfrm>
-            <a:off x="2313432" y="3364992"/>
+            <a:off x="2999232" y="3364992"/>
             <a:ext cx="1645920" cy="475488"/>
           </a:xfrm>
           <a:prstGeom prst="rect">
@@ -26257,8 +25264,8 @@
         </p:nvSpPr>
         <p:spPr>
           <a:xfrm>
-            <a:off x="3959352" y="3364992"/>
-            <a:ext cx="411480" cy="475488"/>
+            <a:off x="4645152" y="3364992"/>
+            <a:ext cx="1097280" cy="475488"/>
           </a:xfrm>
           <a:prstGeom prst="rect">
             <a:avLst/>
@@ -26296,7 +25303,7 @@
         </p:nvSpPr>
         <p:spPr>
           <a:xfrm>
-            <a:off x="4370832" y="3364992"/>
+            <a:off x="5742432" y="3364992"/>
             <a:ext cx="1645920" cy="475488"/>
           </a:xfrm>
           <a:prstGeom prst="rect">
@@ -26323,7 +25330,7 @@
         </p:nvSpPr>
         <p:spPr>
           <a:xfrm>
-            <a:off x="4370832" y="3364992"/>
+            <a:off x="5742432" y="3364992"/>
             <a:ext cx="1645920" cy="475488"/>
           </a:xfrm>
           <a:prstGeom prst="rect">
@@ -26348,7 +25355,7 @@
                 <a:ea typeface="Trebuchet MS" pitchFamily="34" charset="-122"/>
                 <a:cs typeface="Trebuchet MS" pitchFamily="34" charset="-120"/>
               </a:rPr>
-              <a:t>a</a:t>
+              <a:t>ing</a:t>
             </a:r>
             <a:endParaRPr lang="en-US" sz="1400" dirty="0"/>
           </a:p>
@@ -26356,14 +25363,41 @@
       </p:sp>
       <p:sp>
         <p:nvSpPr>
-          <p:cNvPr id="30" name="Text 28"/>
-          <p:cNvSpPr/>
-          <p:nvPr/>
-        </p:nvSpPr>
-        <p:spPr>
-          <a:xfrm>
-            <a:off x="6016752" y="3364992"/>
-            <a:ext cx="411480" cy="475488"/>
+          <p:cNvPr id="30" name="Shape 28"/>
+          <p:cNvSpPr/>
+          <p:nvPr/>
+        </p:nvSpPr>
+        <p:spPr>
+          <a:xfrm>
+            <a:off x="365760" y="4096512"/>
+            <a:ext cx="1371600" cy="804672"/>
+          </a:xfrm>
+          <a:prstGeom prst="rect">
+            <a:avLst>
+              <a:gd name="adj" fmla="val 6818"/>
+            </a:avLst>
+          </a:prstGeom>
+          <a:solidFill>
+            <a:srgbClr val="E2E8F0"/>
+          </a:solidFill>
+          <a:ln w="12700">
+            <a:solidFill>
+              <a:srgbClr val="E2E8F0"/>
+            </a:solidFill>
+            <a:prstDash val="solid"/>
+          </a:ln>
+        </p:spPr>
+      </p:sp>
+      <p:sp>
+        <p:nvSpPr>
+          <p:cNvPr id="31" name="Text 29"/>
+          <p:cNvSpPr/>
+          <p:nvPr/>
+        </p:nvSpPr>
+        <p:spPr>
+          <a:xfrm>
+            <a:off x="365760" y="4096512"/>
+            <a:ext cx="1371600" cy="804672"/>
           </a:xfrm>
           <a:prstGeom prst="rect">
             <a:avLst/>
@@ -26379,96 +25413,30 @@
               <a:buNone/>
             </a:pPr>
             <a:r>
-              <a:rPr lang="en-US" sz="1600" b="1" dirty="0">
-                <a:solidFill>
-                  <a:srgbClr val="0D9488"/>
+              <a:rPr lang="en-US" sz="1100" b="1" dirty="0">
+                <a:solidFill>
+                  <a:srgbClr val="475569"/>
                 </a:solidFill>
                 <a:latin typeface="Trebuchet MS" pitchFamily="34" charset="0"/>
                 <a:ea typeface="Trebuchet MS" pitchFamily="34" charset="-122"/>
                 <a:cs typeface="Trebuchet MS" pitchFamily="34" charset="-120"/>
               </a:rPr>
-              <a:t>·</a:t>
-            </a:r>
-            <a:endParaRPr lang="en-US" sz="1600" dirty="0"/>
-          </a:p>
-        </p:txBody>
-      </p:sp>
-      <p:sp>
-        <p:nvSpPr>
-          <p:cNvPr id="31" name="Shape 29"/>
-          <p:cNvSpPr/>
-          <p:nvPr/>
-        </p:nvSpPr>
-        <p:spPr>
-          <a:xfrm>
-            <a:off x="6428232" y="3364992"/>
-            <a:ext cx="1645920" cy="475488"/>
-          </a:xfrm>
-          <a:prstGeom prst="rect">
-            <a:avLst>
-              <a:gd name="adj" fmla="val 9615"/>
-            </a:avLst>
-          </a:prstGeom>
-          <a:solidFill>
-            <a:srgbClr val="FFFFFF"/>
-          </a:solidFill>
-          <a:ln w="12700">
-            <a:solidFill>
-              <a:srgbClr val="0D9488"/>
-            </a:solidFill>
-            <a:prstDash val="solid"/>
-          </a:ln>
-        </p:spPr>
-      </p:sp>
-      <p:sp>
-        <p:nvSpPr>
-          <p:cNvPr id="32" name="Text 30"/>
-          <p:cNvSpPr/>
-          <p:nvPr/>
-        </p:nvSpPr>
-        <p:spPr>
-          <a:xfrm>
-            <a:off x="6428232" y="3364992"/>
-            <a:ext cx="1645920" cy="475488"/>
-          </a:xfrm>
-          <a:prstGeom prst="rect">
-            <a:avLst/>
-          </a:prstGeom>
-          <a:noFill/>
-          <a:ln/>
-        </p:spPr>
-        <p:txBody>
-          <a:bodyPr wrap="square" lIns="0" tIns="0" rIns="0" bIns="0" rtlCol="0" anchor="ctr"/>
-          <a:lstStyle/>
-          <a:p>
-            <a:pPr algn="ctr" indent="0" marL="0">
-              <a:buNone/>
-            </a:pPr>
-            <a:r>
-              <a:rPr lang="en-US" sz="1400" b="1" dirty="0">
-                <a:solidFill>
-                  <a:srgbClr val="0D9488"/>
-                </a:solidFill>
-                <a:latin typeface="Trebuchet MS" pitchFamily="34" charset="0"/>
-                <a:ea typeface="Trebuchet MS" pitchFamily="34" charset="-122"/>
-                <a:cs typeface="Trebuchet MS" pitchFamily="34" charset="-120"/>
-              </a:rPr>
-              <a:t>ble</a:t>
-            </a:r>
-            <a:endParaRPr lang="en-US" sz="1400" dirty="0"/>
-          </a:p>
-        </p:txBody>
-      </p:sp>
-      <p:sp>
-        <p:nvSpPr>
-          <p:cNvPr id="33" name="Shape 31"/>
-          <p:cNvSpPr/>
-          <p:nvPr/>
-        </p:nvSpPr>
-        <p:spPr>
-          <a:xfrm>
-            <a:off x="365760" y="4096512"/>
-            <a:ext cx="1371600" cy="804672"/>
+              <a:t>Phonemes</a:t>
+            </a:r>
+            <a:endParaRPr lang="en-US" sz="1100" dirty="0"/>
+          </a:p>
+        </p:txBody>
+      </p:sp>
+      <p:sp>
+        <p:nvSpPr>
+          <p:cNvPr id="32" name="Shape 30"/>
+          <p:cNvSpPr/>
+          <p:nvPr/>
+        </p:nvSpPr>
+        <p:spPr>
+          <a:xfrm>
+            <a:off x="1874520" y="4096512"/>
+            <a:ext cx="6903720" cy="804672"/>
           </a:xfrm>
           <a:prstGeom prst="rect">
             <a:avLst>
@@ -26476,85 +25444,19 @@
             </a:avLst>
           </a:prstGeom>
           <a:solidFill>
-            <a:srgbClr val="E2E8F0"/>
+            <a:srgbClr val="F8FAFC"/>
           </a:solidFill>
           <a:ln w="12700">
             <a:solidFill>
               <a:srgbClr val="E2E8F0"/>
             </a:solidFill>
-            <a:prstDash val="solid"/>
-          </a:ln>
-        </p:spPr>
-      </p:sp>
-      <p:sp>
-        <p:nvSpPr>
-          <p:cNvPr id="34" name="Text 32"/>
-          <p:cNvSpPr/>
-          <p:nvPr/>
-        </p:nvSpPr>
-        <p:spPr>
-          <a:xfrm>
-            <a:off x="365760" y="4096512"/>
-            <a:ext cx="1371600" cy="804672"/>
-          </a:xfrm>
-          <a:prstGeom prst="rect">
-            <a:avLst/>
-          </a:prstGeom>
-          <a:noFill/>
-          <a:ln/>
-        </p:spPr>
-        <p:txBody>
-          <a:bodyPr wrap="square" lIns="0" tIns="0" rIns="0" bIns="0" rtlCol="0" anchor="ctr"/>
-          <a:lstStyle/>
-          <a:p>
-            <a:pPr algn="ctr" indent="0" marL="0">
-              <a:buNone/>
-            </a:pPr>
-            <a:r>
-              <a:rPr lang="en-US" sz="1100" b="1" dirty="0">
-                <a:solidFill>
-                  <a:srgbClr val="475569"/>
-                </a:solidFill>
-                <a:latin typeface="Trebuchet MS" pitchFamily="34" charset="0"/>
-                <a:ea typeface="Trebuchet MS" pitchFamily="34" charset="-122"/>
-                <a:cs typeface="Trebuchet MS" pitchFamily="34" charset="-120"/>
-              </a:rPr>
-              <a:t>Phonemes</a:t>
-            </a:r>
-            <a:endParaRPr lang="en-US" sz="1100" dirty="0"/>
-          </a:p>
-        </p:txBody>
-      </p:sp>
-      <p:sp>
-        <p:nvSpPr>
-          <p:cNvPr id="35" name="Shape 33"/>
-          <p:cNvSpPr/>
-          <p:nvPr/>
-        </p:nvSpPr>
-        <p:spPr>
-          <a:xfrm>
-            <a:off x="1874520" y="4096512"/>
-            <a:ext cx="6903720" cy="804672"/>
-          </a:xfrm>
-          <a:prstGeom prst="rect">
-            <a:avLst>
-              <a:gd name="adj" fmla="val 6818"/>
-            </a:avLst>
-          </a:prstGeom>
-          <a:solidFill>
-            <a:srgbClr val="F8FAFC"/>
-          </a:solidFill>
-          <a:ln w="12700">
-            <a:solidFill>
-              <a:srgbClr val="E2E8F0"/>
-            </a:solidFill>
             <a:prstDash val="dash"/>
           </a:ln>
         </p:spPr>
       </p:sp>
       <p:sp>
         <p:nvSpPr>
-          <p:cNvPr id="36" name="Text 34"/>
+          <p:cNvPr id="33" name="Text 31"/>
           <p:cNvSpPr/>
           <p:nvPr/>
         </p:nvSpPr>
@@ -26877,7 +25779,7 @@
                 <a:ea typeface="Calibri" pitchFamily="34" charset="-122"/>
                 <a:cs typeface="Calibri" pitchFamily="34" charset="-120"/>
               </a:rPr>
-              <a:t>Word Labs  •  wordlabs.app  •  Root: 'teach' = to show or instruct</a:t>
+              <a:t>Word Labs  •  wordlabs.app  •  Root: 'teach' = to show someone how to do something</a:t>
             </a:r>
             <a:endParaRPr lang="en-US" sz="800" dirty="0"/>
           </a:p>
@@ -27016,7 +25918,7 @@
                 <a:ea typeface="Trebuchet MS" pitchFamily="34" charset="-122"/>
                 <a:cs typeface="Trebuchet MS" pitchFamily="34" charset="-120"/>
               </a:rPr>
-              <a:t>teachable</a:t>
+              <a:t>teaching</a:t>
             </a:r>
             <a:endParaRPr lang="en-US" sz="2800" dirty="0"/>
           </a:p>
@@ -27194,7 +26096,7 @@
                 <a:ea typeface="Calibri" pitchFamily="34" charset="-122"/>
                 <a:cs typeface="Calibri" pitchFamily="34" charset="-120"/>
               </a:rPr>
-              <a:t>to show or instruct</a:t>
+              <a:t>to show someone how to do something</a:t>
             </a:r>
             <a:endParaRPr lang="en-US" sz="850" dirty="0"/>
           </a:p>
@@ -27267,7 +26169,7 @@
                 <a:ea typeface="Trebuchet MS" pitchFamily="34" charset="-122"/>
                 <a:cs typeface="Trebuchet MS" pitchFamily="34" charset="-120"/>
               </a:rPr>
-              <a:t>able</a:t>
+              <a:t>ing</a:t>
             </a:r>
             <a:endParaRPr lang="en-US" sz="1300" dirty="0"/>
           </a:p>
@@ -27306,7 +26208,7 @@
                 <a:ea typeface="Calibri" pitchFamily="34" charset="-122"/>
                 <a:cs typeface="Calibri" pitchFamily="34" charset="-120"/>
               </a:rPr>
-              <a:t>able to be; capable of</a:t>
+              <a:t>happening now</a:t>
             </a:r>
             <a:endParaRPr lang="en-US" sz="850" dirty="0"/>
           </a:p>
@@ -27413,7 +26315,7 @@
         </p:nvSpPr>
         <p:spPr>
           <a:xfrm>
-            <a:off x="2313432" y="3364992"/>
+            <a:off x="2999232" y="3364992"/>
             <a:ext cx="1645920" cy="475488"/>
           </a:xfrm>
           <a:prstGeom prst="rect">
@@ -27440,7 +26342,7 @@
         </p:nvSpPr>
         <p:spPr>
           <a:xfrm>
-            <a:off x="2313432" y="3364992"/>
+            <a:off x="2999232" y="3364992"/>
             <a:ext cx="1645920" cy="475488"/>
           </a:xfrm>
           <a:prstGeom prst="rect">
@@ -27479,8 +26381,8 @@
         </p:nvSpPr>
         <p:spPr>
           <a:xfrm>
-            <a:off x="3959352" y="3364992"/>
-            <a:ext cx="411480" cy="475488"/>
+            <a:off x="4645152" y="3364992"/>
+            <a:ext cx="1097280" cy="475488"/>
           </a:xfrm>
           <a:prstGeom prst="rect">
             <a:avLst/>
@@ -27518,7 +26420,7 @@
         </p:nvSpPr>
         <p:spPr>
           <a:xfrm>
-            <a:off x="4370832" y="3364992"/>
+            <a:off x="5742432" y="3364992"/>
             <a:ext cx="1645920" cy="475488"/>
           </a:xfrm>
           <a:prstGeom prst="rect">
@@ -27545,7 +26447,7 @@
         </p:nvSpPr>
         <p:spPr>
           <a:xfrm>
-            <a:off x="4370832" y="3364992"/>
+            <a:off x="5742432" y="3364992"/>
             <a:ext cx="1645920" cy="475488"/>
           </a:xfrm>
           <a:prstGeom prst="rect">
@@ -27570,7 +26472,7 @@
                 <a:ea typeface="Trebuchet MS" pitchFamily="34" charset="-122"/>
                 <a:cs typeface="Trebuchet MS" pitchFamily="34" charset="-120"/>
               </a:rPr>
-              <a:t>a</a:t>
+              <a:t>ing</a:t>
             </a:r>
             <a:endParaRPr lang="en-US" sz="1400" dirty="0"/>
           </a:p>
@@ -27578,14 +26480,41 @@
       </p:sp>
       <p:sp>
         <p:nvSpPr>
-          <p:cNvPr id="30" name="Text 28"/>
-          <p:cNvSpPr/>
-          <p:nvPr/>
-        </p:nvSpPr>
-        <p:spPr>
-          <a:xfrm>
-            <a:off x="6016752" y="3364992"/>
-            <a:ext cx="411480" cy="475488"/>
+          <p:cNvPr id="30" name="Shape 28"/>
+          <p:cNvSpPr/>
+          <p:nvPr/>
+        </p:nvSpPr>
+        <p:spPr>
+          <a:xfrm>
+            <a:off x="365760" y="4096512"/>
+            <a:ext cx="1371600" cy="804672"/>
+          </a:xfrm>
+          <a:prstGeom prst="rect">
+            <a:avLst>
+              <a:gd name="adj" fmla="val 6818"/>
+            </a:avLst>
+          </a:prstGeom>
+          <a:solidFill>
+            <a:srgbClr val="E2E8F0"/>
+          </a:solidFill>
+          <a:ln w="12700">
+            <a:solidFill>
+              <a:srgbClr val="E2E8F0"/>
+            </a:solidFill>
+            <a:prstDash val="solid"/>
+          </a:ln>
+        </p:spPr>
+      </p:sp>
+      <p:sp>
+        <p:nvSpPr>
+          <p:cNvPr id="31" name="Text 29"/>
+          <p:cNvSpPr/>
+          <p:nvPr/>
+        </p:nvSpPr>
+        <p:spPr>
+          <a:xfrm>
+            <a:off x="365760" y="4096512"/>
+            <a:ext cx="1371600" cy="804672"/>
           </a:xfrm>
           <a:prstGeom prst="rect">
             <a:avLst/>
@@ -27601,57 +26530,84 @@
               <a:buNone/>
             </a:pPr>
             <a:r>
-              <a:rPr lang="en-US" sz="1600" b="1" dirty="0">
-                <a:solidFill>
-                  <a:srgbClr val="0D9488"/>
+              <a:rPr lang="en-US" sz="1100" b="1" dirty="0">
+                <a:solidFill>
+                  <a:srgbClr val="475569"/>
                 </a:solidFill>
                 <a:latin typeface="Trebuchet MS" pitchFamily="34" charset="0"/>
                 <a:ea typeface="Trebuchet MS" pitchFamily="34" charset="-122"/>
                 <a:cs typeface="Trebuchet MS" pitchFamily="34" charset="-120"/>
               </a:rPr>
-              <a:t>·</a:t>
-            </a:r>
-            <a:endParaRPr lang="en-US" sz="1600" dirty="0"/>
-          </a:p>
-        </p:txBody>
-      </p:sp>
-      <p:sp>
-        <p:nvSpPr>
-          <p:cNvPr id="31" name="Shape 29"/>
-          <p:cNvSpPr/>
-          <p:nvPr/>
-        </p:nvSpPr>
-        <p:spPr>
-          <a:xfrm>
-            <a:off x="6428232" y="3364992"/>
-            <a:ext cx="1645920" cy="475488"/>
+              <a:t>Phonemes</a:t>
+            </a:r>
+            <a:endParaRPr lang="en-US" sz="1100" dirty="0"/>
+          </a:p>
+        </p:txBody>
+      </p:sp>
+      <p:sp>
+        <p:nvSpPr>
+          <p:cNvPr id="32" name="Shape 30"/>
+          <p:cNvSpPr/>
+          <p:nvPr/>
+        </p:nvSpPr>
+        <p:spPr>
+          <a:xfrm>
+            <a:off x="1874520" y="4096512"/>
+            <a:ext cx="6903720" cy="658368"/>
           </a:xfrm>
           <a:prstGeom prst="rect">
             <a:avLst>
-              <a:gd name="adj" fmla="val 9615"/>
+              <a:gd name="adj" fmla="val 8333"/>
             </a:avLst>
           </a:prstGeom>
           <a:solidFill>
+            <a:srgbClr val="FCE7F3"/>
+          </a:solidFill>
+          <a:ln w="12700">
+            <a:solidFill>
+              <a:srgbClr val="DB2777"/>
+            </a:solidFill>
+            <a:prstDash val="solid"/>
+          </a:ln>
+        </p:spPr>
+      </p:sp>
+      <p:sp>
+        <p:nvSpPr>
+          <p:cNvPr id="33" name="Shape 31"/>
+          <p:cNvSpPr/>
+          <p:nvPr/>
+        </p:nvSpPr>
+        <p:spPr>
+          <a:xfrm>
+            <a:off x="2427732" y="4169664"/>
+            <a:ext cx="685800" cy="475488"/>
+          </a:xfrm>
+          <a:prstGeom prst="rect">
+            <a:avLst>
+              <a:gd name="adj" fmla="val 7692"/>
+            </a:avLst>
+          </a:prstGeom>
+          <a:solidFill>
             <a:srgbClr val="FFFFFF"/>
           </a:solidFill>
           <a:ln w="12700">
             <a:solidFill>
-              <a:srgbClr val="0D9488"/>
-            </a:solidFill>
-            <a:prstDash val="solid"/>
-          </a:ln>
-        </p:spPr>
-      </p:sp>
-      <p:sp>
-        <p:nvSpPr>
-          <p:cNvPr id="32" name="Text 30"/>
-          <p:cNvSpPr/>
-          <p:nvPr/>
-        </p:nvSpPr>
-        <p:spPr>
-          <a:xfrm>
-            <a:off x="6428232" y="3364992"/>
-            <a:ext cx="1645920" cy="475488"/>
+              <a:srgbClr val="DB2777"/>
+            </a:solidFill>
+            <a:prstDash val="solid"/>
+          </a:ln>
+        </p:spPr>
+      </p:sp>
+      <p:sp>
+        <p:nvSpPr>
+          <p:cNvPr id="34" name="Text 32"/>
+          <p:cNvSpPr/>
+          <p:nvPr/>
+        </p:nvSpPr>
+        <p:spPr>
+          <a:xfrm>
+            <a:off x="2427732" y="4169664"/>
+            <a:ext cx="685800" cy="475488"/>
           </a:xfrm>
           <a:prstGeom prst="rect">
             <a:avLst/>
@@ -27667,57 +26623,57 @@
               <a:buNone/>
             </a:pPr>
             <a:r>
-              <a:rPr lang="en-US" sz="1400" b="1" dirty="0">
-                <a:solidFill>
-                  <a:srgbClr val="0D9488"/>
+              <a:rPr lang="en-US" sz="900" b="1" dirty="0">
+                <a:solidFill>
+                  <a:srgbClr val="9D174D"/>
                 </a:solidFill>
                 <a:latin typeface="Trebuchet MS" pitchFamily="34" charset="0"/>
                 <a:ea typeface="Trebuchet MS" pitchFamily="34" charset="-122"/>
                 <a:cs typeface="Trebuchet MS" pitchFamily="34" charset="-120"/>
               </a:rPr>
-              <a:t>ble</a:t>
-            </a:r>
-            <a:endParaRPr lang="en-US" sz="1400" dirty="0"/>
-          </a:p>
-        </p:txBody>
-      </p:sp>
-      <p:sp>
-        <p:nvSpPr>
-          <p:cNvPr id="33" name="Shape 31"/>
-          <p:cNvSpPr/>
-          <p:nvPr/>
-        </p:nvSpPr>
-        <p:spPr>
-          <a:xfrm>
-            <a:off x="365760" y="4096512"/>
-            <a:ext cx="1371600" cy="804672"/>
+              <a:t>t</a:t>
+            </a:r>
+            <a:endParaRPr lang="en-US" sz="900" dirty="0"/>
+          </a:p>
+        </p:txBody>
+      </p:sp>
+      <p:sp>
+        <p:nvSpPr>
+          <p:cNvPr id="35" name="Shape 33"/>
+          <p:cNvSpPr/>
+          <p:nvPr/>
+        </p:nvSpPr>
+        <p:spPr>
+          <a:xfrm>
+            <a:off x="3639312" y="4169664"/>
+            <a:ext cx="685800" cy="475488"/>
           </a:xfrm>
           <a:prstGeom prst="rect">
             <a:avLst>
-              <a:gd name="adj" fmla="val 6818"/>
+              <a:gd name="adj" fmla="val 7692"/>
             </a:avLst>
           </a:prstGeom>
           <a:solidFill>
-            <a:srgbClr val="E2E8F0"/>
-          </a:solidFill>
-          <a:ln w="12700">
-            <a:solidFill>
-              <a:srgbClr val="E2E8F0"/>
-            </a:solidFill>
-            <a:prstDash val="solid"/>
-          </a:ln>
-        </p:spPr>
-      </p:sp>
-      <p:sp>
-        <p:nvSpPr>
-          <p:cNvPr id="34" name="Text 32"/>
-          <p:cNvSpPr/>
-          <p:nvPr/>
-        </p:nvSpPr>
-        <p:spPr>
-          <a:xfrm>
-            <a:off x="365760" y="4096512"/>
-            <a:ext cx="1371600" cy="804672"/>
+            <a:srgbClr val="FFFFFF"/>
+          </a:solidFill>
+          <a:ln w="12700">
+            <a:solidFill>
+              <a:srgbClr val="DB2777"/>
+            </a:solidFill>
+            <a:prstDash val="solid"/>
+          </a:ln>
+        </p:spPr>
+      </p:sp>
+      <p:sp>
+        <p:nvSpPr>
+          <p:cNvPr id="36" name="Text 34"/>
+          <p:cNvSpPr/>
+          <p:nvPr/>
+        </p:nvSpPr>
+        <p:spPr>
+          <a:xfrm>
+            <a:off x="3639312" y="4169664"/>
+            <a:ext cx="685800" cy="475488"/>
           </a:xfrm>
           <a:prstGeom prst="rect">
             <a:avLst/>
@@ -27733,56 +26689,29 @@
               <a:buNone/>
             </a:pPr>
             <a:r>
-              <a:rPr lang="en-US" sz="1100" b="1" dirty="0">
-                <a:solidFill>
-                  <a:srgbClr val="475569"/>
+              <a:rPr lang="en-US" sz="900" b="1" dirty="0">
+                <a:solidFill>
+                  <a:srgbClr val="9D174D"/>
                 </a:solidFill>
                 <a:latin typeface="Trebuchet MS" pitchFamily="34" charset="0"/>
                 <a:ea typeface="Trebuchet MS" pitchFamily="34" charset="-122"/>
                 <a:cs typeface="Trebuchet MS" pitchFamily="34" charset="-120"/>
               </a:rPr>
-              <a:t>Phonemes</a:t>
-            </a:r>
-            <a:endParaRPr lang="en-US" sz="1100" dirty="0"/>
-          </a:p>
-        </p:txBody>
-      </p:sp>
-      <p:sp>
-        <p:nvSpPr>
-          <p:cNvPr id="35" name="Shape 33"/>
-          <p:cNvSpPr/>
-          <p:nvPr/>
-        </p:nvSpPr>
-        <p:spPr>
-          <a:xfrm>
-            <a:off x="1874520" y="4096512"/>
-            <a:ext cx="6903720" cy="658368"/>
-          </a:xfrm>
-          <a:prstGeom prst="rect">
-            <a:avLst>
-              <a:gd name="adj" fmla="val 8333"/>
-            </a:avLst>
-          </a:prstGeom>
-          <a:solidFill>
-            <a:srgbClr val="FCE7F3"/>
-          </a:solidFill>
-          <a:ln w="12700">
-            <a:solidFill>
-              <a:srgbClr val="DB2777"/>
-            </a:solidFill>
-            <a:prstDash val="solid"/>
-          </a:ln>
-        </p:spPr>
-      </p:sp>
-      <p:sp>
-        <p:nvSpPr>
-          <p:cNvPr id="36" name="Shape 34"/>
-          <p:cNvSpPr/>
-          <p:nvPr/>
-        </p:nvSpPr>
-        <p:spPr>
-          <a:xfrm>
-            <a:off x="2254649" y="4169664"/>
+              <a:t>ea</a:t>
+            </a:r>
+            <a:endParaRPr lang="en-US" sz="900" dirty="0"/>
+          </a:p>
+        </p:txBody>
+      </p:sp>
+      <p:sp>
+        <p:nvSpPr>
+          <p:cNvPr id="37" name="Shape 35"/>
+          <p:cNvSpPr/>
+          <p:nvPr/>
+        </p:nvSpPr>
+        <p:spPr>
+          <a:xfrm>
+            <a:off x="4850892" y="4169664"/>
             <a:ext cx="685800" cy="475488"/>
           </a:xfrm>
           <a:prstGeom prst="rect">
@@ -27803,13 +26732,13 @@
       </p:sp>
       <p:sp>
         <p:nvSpPr>
-          <p:cNvPr id="37" name="Text 35"/>
-          <p:cNvSpPr/>
-          <p:nvPr/>
-        </p:nvSpPr>
-        <p:spPr>
-          <a:xfrm>
-            <a:off x="2254649" y="4169664"/>
+          <p:cNvPr id="38" name="Text 36"/>
+          <p:cNvSpPr/>
+          <p:nvPr/>
+        </p:nvSpPr>
+        <p:spPr>
+          <a:xfrm>
+            <a:off x="4850892" y="4169664"/>
             <a:ext cx="685800" cy="475488"/>
           </a:xfrm>
           <a:prstGeom prst="rect">
@@ -27834,7 +26763,7 @@
                 <a:ea typeface="Trebuchet MS" pitchFamily="34" charset="-122"/>
                 <a:cs typeface="Trebuchet MS" pitchFamily="34" charset="-120"/>
               </a:rPr>
-              <a:t>t</a:t>
+              <a:t>ch</a:t>
             </a:r>
             <a:endParaRPr lang="en-US" sz="900" dirty="0"/>
           </a:p>
@@ -27842,13 +26771,13 @@
       </p:sp>
       <p:sp>
         <p:nvSpPr>
-          <p:cNvPr id="38" name="Shape 36"/>
-          <p:cNvSpPr/>
-          <p:nvPr/>
-        </p:nvSpPr>
-        <p:spPr>
-          <a:xfrm>
-            <a:off x="3293146" y="4169664"/>
+          <p:cNvPr id="39" name="Shape 37"/>
+          <p:cNvSpPr/>
+          <p:nvPr/>
+        </p:nvSpPr>
+        <p:spPr>
+          <a:xfrm>
+            <a:off x="6062472" y="4169664"/>
             <a:ext cx="685800" cy="475488"/>
           </a:xfrm>
           <a:prstGeom prst="rect">
@@ -27869,13 +26798,13 @@
       </p:sp>
       <p:sp>
         <p:nvSpPr>
-          <p:cNvPr id="39" name="Text 37"/>
-          <p:cNvSpPr/>
-          <p:nvPr/>
-        </p:nvSpPr>
-        <p:spPr>
-          <a:xfrm>
-            <a:off x="3293146" y="4169664"/>
+          <p:cNvPr id="40" name="Text 38"/>
+          <p:cNvSpPr/>
+          <p:nvPr/>
+        </p:nvSpPr>
+        <p:spPr>
+          <a:xfrm>
+            <a:off x="6062472" y="4169664"/>
             <a:ext cx="685800" cy="475488"/>
           </a:xfrm>
           <a:prstGeom prst="rect">
@@ -27900,7 +26829,7 @@
                 <a:ea typeface="Trebuchet MS" pitchFamily="34" charset="-122"/>
                 <a:cs typeface="Trebuchet MS" pitchFamily="34" charset="-120"/>
               </a:rPr>
-              <a:t>ea</a:t>
+              <a:t>i</a:t>
             </a:r>
             <a:endParaRPr lang="en-US" sz="900" dirty="0"/>
           </a:p>
@@ -27908,13 +26837,13 @@
       </p:sp>
       <p:sp>
         <p:nvSpPr>
-          <p:cNvPr id="40" name="Shape 38"/>
-          <p:cNvSpPr/>
-          <p:nvPr/>
-        </p:nvSpPr>
-        <p:spPr>
-          <a:xfrm>
-            <a:off x="4331643" y="4169664"/>
+          <p:cNvPr id="41" name="Shape 39"/>
+          <p:cNvSpPr/>
+          <p:nvPr/>
+        </p:nvSpPr>
+        <p:spPr>
+          <a:xfrm>
+            <a:off x="7274052" y="4169664"/>
             <a:ext cx="685800" cy="475488"/>
           </a:xfrm>
           <a:prstGeom prst="rect">
@@ -27935,13 +26864,13 @@
       </p:sp>
       <p:sp>
         <p:nvSpPr>
-          <p:cNvPr id="41" name="Text 39"/>
-          <p:cNvSpPr/>
-          <p:nvPr/>
-        </p:nvSpPr>
-        <p:spPr>
-          <a:xfrm>
-            <a:off x="4331643" y="4169664"/>
+          <p:cNvPr id="42" name="Text 40"/>
+          <p:cNvSpPr/>
+          <p:nvPr/>
+        </p:nvSpPr>
+        <p:spPr>
+          <a:xfrm>
+            <a:off x="7274052" y="4169664"/>
             <a:ext cx="685800" cy="475488"/>
           </a:xfrm>
           <a:prstGeom prst="rect">
@@ -27966,205 +26895,7 @@
                 <a:ea typeface="Trebuchet MS" pitchFamily="34" charset="-122"/>
                 <a:cs typeface="Trebuchet MS" pitchFamily="34" charset="-120"/>
               </a:rPr>
-              <a:t>ch</a:t>
-            </a:r>
-            <a:endParaRPr lang="en-US" sz="900" dirty="0"/>
-          </a:p>
-        </p:txBody>
-      </p:sp>
-      <p:sp>
-        <p:nvSpPr>
-          <p:cNvPr id="42" name="Shape 40"/>
-          <p:cNvSpPr/>
-          <p:nvPr/>
-        </p:nvSpPr>
-        <p:spPr>
-          <a:xfrm>
-            <a:off x="5370141" y="4169664"/>
-            <a:ext cx="685800" cy="475488"/>
-          </a:xfrm>
-          <a:prstGeom prst="rect">
-            <a:avLst>
-              <a:gd name="adj" fmla="val 7692"/>
-            </a:avLst>
-          </a:prstGeom>
-          <a:solidFill>
-            <a:srgbClr val="FFFFFF"/>
-          </a:solidFill>
-          <a:ln w="12700">
-            <a:solidFill>
-              <a:srgbClr val="DB2777"/>
-            </a:solidFill>
-            <a:prstDash val="solid"/>
-          </a:ln>
-        </p:spPr>
-      </p:sp>
-      <p:sp>
-        <p:nvSpPr>
-          <p:cNvPr id="43" name="Text 41"/>
-          <p:cNvSpPr/>
-          <p:nvPr/>
-        </p:nvSpPr>
-        <p:spPr>
-          <a:xfrm>
-            <a:off x="5370141" y="4169664"/>
-            <a:ext cx="685800" cy="475488"/>
-          </a:xfrm>
-          <a:prstGeom prst="rect">
-            <a:avLst/>
-          </a:prstGeom>
-          <a:noFill/>
-          <a:ln/>
-        </p:spPr>
-        <p:txBody>
-          <a:bodyPr wrap="square" lIns="0" tIns="0" rIns="0" bIns="0" rtlCol="0" anchor="ctr"/>
-          <a:lstStyle/>
-          <a:p>
-            <a:pPr algn="ctr" indent="0" marL="0">
-              <a:buNone/>
-            </a:pPr>
-            <a:r>
-              <a:rPr lang="en-US" sz="900" b="1" dirty="0">
-                <a:solidFill>
-                  <a:srgbClr val="9D174D"/>
-                </a:solidFill>
-                <a:latin typeface="Trebuchet MS" pitchFamily="34" charset="0"/>
-                <a:ea typeface="Trebuchet MS" pitchFamily="34" charset="-122"/>
-                <a:cs typeface="Trebuchet MS" pitchFamily="34" charset="-120"/>
-              </a:rPr>
-              <a:t>a</a:t>
-            </a:r>
-            <a:endParaRPr lang="en-US" sz="900" dirty="0"/>
-          </a:p>
-        </p:txBody>
-      </p:sp>
-      <p:sp>
-        <p:nvSpPr>
-          <p:cNvPr id="44" name="Shape 42"/>
-          <p:cNvSpPr/>
-          <p:nvPr/>
-        </p:nvSpPr>
-        <p:spPr>
-          <a:xfrm>
-            <a:off x="6408638" y="4169664"/>
-            <a:ext cx="685800" cy="475488"/>
-          </a:xfrm>
-          <a:prstGeom prst="rect">
-            <a:avLst>
-              <a:gd name="adj" fmla="val 7692"/>
-            </a:avLst>
-          </a:prstGeom>
-          <a:solidFill>
-            <a:srgbClr val="FFFFFF"/>
-          </a:solidFill>
-          <a:ln w="12700">
-            <a:solidFill>
-              <a:srgbClr val="DB2777"/>
-            </a:solidFill>
-            <a:prstDash val="solid"/>
-          </a:ln>
-        </p:spPr>
-      </p:sp>
-      <p:sp>
-        <p:nvSpPr>
-          <p:cNvPr id="45" name="Text 43"/>
-          <p:cNvSpPr/>
-          <p:nvPr/>
-        </p:nvSpPr>
-        <p:spPr>
-          <a:xfrm>
-            <a:off x="6408638" y="4169664"/>
-            <a:ext cx="685800" cy="475488"/>
-          </a:xfrm>
-          <a:prstGeom prst="rect">
-            <a:avLst/>
-          </a:prstGeom>
-          <a:noFill/>
-          <a:ln/>
-        </p:spPr>
-        <p:txBody>
-          <a:bodyPr wrap="square" lIns="0" tIns="0" rIns="0" bIns="0" rtlCol="0" anchor="ctr"/>
-          <a:lstStyle/>
-          <a:p>
-            <a:pPr algn="ctr" indent="0" marL="0">
-              <a:buNone/>
-            </a:pPr>
-            <a:r>
-              <a:rPr lang="en-US" sz="900" b="1" dirty="0">
-                <a:solidFill>
-                  <a:srgbClr val="9D174D"/>
-                </a:solidFill>
-                <a:latin typeface="Trebuchet MS" pitchFamily="34" charset="0"/>
-                <a:ea typeface="Trebuchet MS" pitchFamily="34" charset="-122"/>
-                <a:cs typeface="Trebuchet MS" pitchFamily="34" charset="-120"/>
-              </a:rPr>
-              <a:t>b</a:t>
-            </a:r>
-            <a:endParaRPr lang="en-US" sz="900" dirty="0"/>
-          </a:p>
-        </p:txBody>
-      </p:sp>
-      <p:sp>
-        <p:nvSpPr>
-          <p:cNvPr id="46" name="Shape 44"/>
-          <p:cNvSpPr/>
-          <p:nvPr/>
-        </p:nvSpPr>
-        <p:spPr>
-          <a:xfrm>
-            <a:off x="7447135" y="4169664"/>
-            <a:ext cx="685800" cy="475488"/>
-          </a:xfrm>
-          <a:prstGeom prst="rect">
-            <a:avLst>
-              <a:gd name="adj" fmla="val 7692"/>
-            </a:avLst>
-          </a:prstGeom>
-          <a:solidFill>
-            <a:srgbClr val="FFFFFF"/>
-          </a:solidFill>
-          <a:ln w="12700">
-            <a:solidFill>
-              <a:srgbClr val="DB2777"/>
-            </a:solidFill>
-            <a:prstDash val="solid"/>
-          </a:ln>
-        </p:spPr>
-      </p:sp>
-      <p:sp>
-        <p:nvSpPr>
-          <p:cNvPr id="47" name="Text 45"/>
-          <p:cNvSpPr/>
-          <p:nvPr/>
-        </p:nvSpPr>
-        <p:spPr>
-          <a:xfrm>
-            <a:off x="7447135" y="4169664"/>
-            <a:ext cx="685800" cy="475488"/>
-          </a:xfrm>
-          <a:prstGeom prst="rect">
-            <a:avLst/>
-          </a:prstGeom>
-          <a:noFill/>
-          <a:ln/>
-        </p:spPr>
-        <p:txBody>
-          <a:bodyPr wrap="square" lIns="0" tIns="0" rIns="0" bIns="0" rtlCol="0" anchor="ctr"/>
-          <a:lstStyle/>
-          <a:p>
-            <a:pPr algn="ctr" indent="0" marL="0">
-              <a:buNone/>
-            </a:pPr>
-            <a:r>
-              <a:rPr lang="en-US" sz="900" b="1" dirty="0">
-                <a:solidFill>
-                  <a:srgbClr val="9D174D"/>
-                </a:solidFill>
-                <a:latin typeface="Trebuchet MS" pitchFamily="34" charset="0"/>
-                <a:ea typeface="Trebuchet MS" pitchFamily="34" charset="-122"/>
-                <a:cs typeface="Trebuchet MS" pitchFamily="34" charset="-120"/>
-              </a:rPr>
-              <a:t>le</a:t>
+              <a:t>ng</a:t>
             </a:r>
             <a:endParaRPr lang="en-US" sz="900" dirty="0"/>
           </a:p>
@@ -28456,7 +27187,7 @@
                 <a:ea typeface="Calibri" pitchFamily="34" charset="-122"/>
                 <a:cs typeface="Calibri" pitchFamily="34" charset="-120"/>
               </a:rPr>
-              <a:t>Word Labs  •  wordlabs.app  •  Root: 'teach' = to show or instruct</a:t>
+              <a:t>Word Labs  •  wordlabs.app  •  Root: 'teach' = to show someone how to do something</a:t>
             </a:r>
             <a:endParaRPr lang="en-US" sz="800" dirty="0"/>
           </a:p>
@@ -29283,7 +28014,7 @@
                 <a:ea typeface="Calibri" pitchFamily="34" charset="-122"/>
                 <a:cs typeface="Calibri" pitchFamily="34" charset="-120"/>
               </a:rPr>
-              <a:t>Word Labs  •  wordlabs.app  •  Root: 'teach' = to show or instruct</a:t>
+              <a:t>Word Labs  •  wordlabs.app  •  Root: 'teach' = to show someone how to do something</a:t>
             </a:r>
             <a:endParaRPr lang="en-US" sz="800" dirty="0"/>
           </a:p>
@@ -29600,7 +28331,7 @@
                 <a:ea typeface="Calibri" pitchFamily="34" charset="-122"/>
                 <a:cs typeface="Calibri" pitchFamily="34" charset="-120"/>
               </a:rPr>
-              <a:t>to show or instruct</a:t>
+              <a:t>to show someone how to do something</a:t>
             </a:r>
             <a:endParaRPr lang="en-US" sz="850" dirty="0"/>
           </a:p>
@@ -29712,7 +28443,7 @@
                 <a:ea typeface="Calibri" pitchFamily="34" charset="-122"/>
                 <a:cs typeface="Calibri" pitchFamily="34" charset="-120"/>
               </a:rPr>
-              <a:t>ongoing action</a:t>
+              <a:t>happening now</a:t>
             </a:r>
             <a:endParaRPr lang="en-US" sz="850" dirty="0"/>
           </a:p>
@@ -29824,7 +28555,7 @@
                 <a:ea typeface="Calibri" pitchFamily="34" charset="-122"/>
                 <a:cs typeface="Calibri" pitchFamily="34" charset="-120"/>
               </a:rPr>
-              <a:t>more than one</a:t>
+              <a:t>plural or present tense</a:t>
             </a:r>
             <a:endParaRPr lang="en-US" sz="850" dirty="0"/>
           </a:p>
@@ -30380,7 +29111,7 @@
                 <a:ea typeface="Calibri" pitchFamily="34" charset="-122"/>
                 <a:cs typeface="Calibri" pitchFamily="34" charset="-120"/>
               </a:rPr>
-              <a:t>Word Labs  •  wordlabs.app  •  Root: 'teach' = to show or instruct</a:t>
+              <a:t>Word Labs  •  wordlabs.app  •  Root: 'teach' = to show someone how to do something</a:t>
             </a:r>
             <a:endParaRPr lang="en-US" sz="800" dirty="0"/>
           </a:p>
@@ -30697,7 +29428,7 @@
                 <a:ea typeface="Calibri" pitchFamily="34" charset="-122"/>
                 <a:cs typeface="Calibri" pitchFamily="34" charset="-120"/>
               </a:rPr>
-              <a:t>to show or instruct</a:t>
+              <a:t>to show someone how to do something</a:t>
             </a:r>
             <a:endParaRPr lang="en-US" sz="850" dirty="0"/>
           </a:p>
@@ -30809,7 +29540,7 @@
                 <a:ea typeface="Calibri" pitchFamily="34" charset="-122"/>
                 <a:cs typeface="Calibri" pitchFamily="34" charset="-120"/>
               </a:rPr>
-              <a:t>ongoing action</a:t>
+              <a:t>happening now</a:t>
             </a:r>
             <a:endParaRPr lang="en-US" sz="850" dirty="0"/>
           </a:p>
@@ -30921,7 +29652,7 @@
                 <a:ea typeface="Calibri" pitchFamily="34" charset="-122"/>
                 <a:cs typeface="Calibri" pitchFamily="34" charset="-120"/>
               </a:rPr>
-              <a:t>more than one</a:t>
+              <a:t>plural or present tense</a:t>
             </a:r>
             <a:endParaRPr lang="en-US" sz="850" dirty="0"/>
           </a:p>
@@ -31609,7 +30340,7 @@
                 <a:ea typeface="Calibri" pitchFamily="34" charset="-122"/>
                 <a:cs typeface="Calibri" pitchFamily="34" charset="-120"/>
               </a:rPr>
-              <a:t>Word Labs  •  wordlabs.app  •  Root: 'teach' = to show or instruct</a:t>
+              <a:t>Word Labs  •  wordlabs.app  •  Root: 'teach' = to show someone how to do something</a:t>
             </a:r>
             <a:endParaRPr lang="en-US" sz="800" dirty="0"/>
           </a:p>
@@ -31926,7 +30657,7 @@
                 <a:ea typeface="Calibri" pitchFamily="34" charset="-122"/>
                 <a:cs typeface="Calibri" pitchFamily="34" charset="-120"/>
               </a:rPr>
-              <a:t>to show or instruct</a:t>
+              <a:t>to show someone how to do something</a:t>
             </a:r>
             <a:endParaRPr lang="en-US" sz="850" dirty="0"/>
           </a:p>
@@ -32038,7 +30769,7 @@
                 <a:ea typeface="Calibri" pitchFamily="34" charset="-122"/>
                 <a:cs typeface="Calibri" pitchFamily="34" charset="-120"/>
               </a:rPr>
-              <a:t>ongoing action</a:t>
+              <a:t>happening now</a:t>
             </a:r>
             <a:endParaRPr lang="en-US" sz="850" dirty="0"/>
           </a:p>
@@ -32150,7 +30881,7 @@
                 <a:ea typeface="Calibri" pitchFamily="34" charset="-122"/>
                 <a:cs typeface="Calibri" pitchFamily="34" charset="-120"/>
               </a:rPr>
-              <a:t>more than one</a:t>
+              <a:t>plural or present tense</a:t>
             </a:r>
             <a:endParaRPr lang="en-US" sz="850" dirty="0"/>
           </a:p>
@@ -33195,7 +31926,7 @@
                 <a:ea typeface="Calibri" pitchFamily="34" charset="-122"/>
                 <a:cs typeface="Calibri" pitchFamily="34" charset="-120"/>
               </a:rPr>
-              <a:t>Word Labs  •  wordlabs.app  •  Root: 'teach' = to show or instruct</a:t>
+              <a:t>Word Labs  •  wordlabs.app  •  Root: 'teach' = to show someone how to do something</a:t>
             </a:r>
             <a:endParaRPr lang="en-US" sz="800" dirty="0"/>
           </a:p>
@@ -34364,7 +33095,7 @@
                 <a:ea typeface="Calibri" pitchFamily="34" charset="-122"/>
                 <a:cs typeface="Calibri" pitchFamily="34" charset="-120"/>
               </a:rPr>
-              <a:t>Word Labs  •  wordlabs.app  •  Root: 'teach' = to show or instruct</a:t>
+              <a:t>Word Labs  •  wordlabs.app  •  Root: 'teach' = to show someone how to do something</a:t>
             </a:r>
             <a:endParaRPr lang="en-US" sz="800" dirty="0"/>
           </a:p>
@@ -34814,7 +33545,7 @@
             <a:avLst/>
           </a:prstGeom>
           <a:solidFill>
-            <a:srgbClr val="DDD6FE"/>
+            <a:srgbClr val="F1F5F9"/>
           </a:solidFill>
           <a:ln w="12700">
             <a:solidFill>
@@ -34826,14 +33557,64 @@
       </p:sp>
       <p:sp>
         <p:nvSpPr>
-          <p:cNvPr id="24" name="Text 22"/>
-          <p:cNvSpPr/>
-          <p:nvPr/>
-        </p:nvSpPr>
-        <p:spPr>
-          <a:xfrm>
-            <a:off x="365760" y="1984248"/>
-            <a:ext cx="2468880" cy="402336"/>
+          <p:cNvPr id="24" name="Shape 22"/>
+          <p:cNvSpPr/>
+          <p:nvPr/>
+        </p:nvSpPr>
+        <p:spPr>
+          <a:xfrm>
+            <a:off x="2971800" y="1984248"/>
+            <a:ext cx="2834640" cy="402336"/>
+          </a:xfrm>
+          <a:prstGeom prst="rect">
+            <a:avLst/>
+          </a:prstGeom>
+          <a:solidFill>
+            <a:srgbClr val="F1F5F9"/>
+          </a:solidFill>
+          <a:ln w="12700">
+            <a:solidFill>
+              <a:srgbClr val="E2E8F0"/>
+            </a:solidFill>
+            <a:prstDash val="solid"/>
+          </a:ln>
+        </p:spPr>
+      </p:sp>
+      <p:sp>
+        <p:nvSpPr>
+          <p:cNvPr id="25" name="Shape 23"/>
+          <p:cNvSpPr/>
+          <p:nvPr/>
+        </p:nvSpPr>
+        <p:spPr>
+          <a:xfrm>
+            <a:off x="5943600" y="1984248"/>
+            <a:ext cx="2834640" cy="402336"/>
+          </a:xfrm>
+          <a:prstGeom prst="rect">
+            <a:avLst/>
+          </a:prstGeom>
+          <a:solidFill>
+            <a:srgbClr val="FCE7F3"/>
+          </a:solidFill>
+          <a:ln w="12700">
+            <a:solidFill>
+              <a:srgbClr val="E2E8F0"/>
+            </a:solidFill>
+            <a:prstDash val="solid"/>
+          </a:ln>
+        </p:spPr>
+      </p:sp>
+      <p:sp>
+        <p:nvSpPr>
+          <p:cNvPr id="26" name="Text 24"/>
+          <p:cNvSpPr/>
+          <p:nvPr/>
+        </p:nvSpPr>
+        <p:spPr>
+          <a:xfrm>
+            <a:off x="5943600" y="1984248"/>
+            <a:ext cx="2834640" cy="402336"/>
           </a:xfrm>
           <a:prstGeom prst="rect">
             <a:avLst/>
@@ -34851,13 +33632,13 @@
             <a:r>
               <a:rPr lang="en-US" sz="1300" b="1" dirty="0">
                 <a:solidFill>
-                  <a:srgbClr val="4C1D95"/>
+                  <a:srgbClr val="9D174D"/>
                 </a:solidFill>
                 <a:latin typeface="Trebuchet MS" pitchFamily="34" charset="0"/>
                 <a:ea typeface="Trebuchet MS" pitchFamily="34" charset="-122"/>
                 <a:cs typeface="Trebuchet MS" pitchFamily="34" charset="-120"/>
               </a:rPr>
-              <a:t>un-</a:t>
+              <a:t>-es</a:t>
             </a:r>
             <a:endParaRPr lang="en-US" sz="1300" dirty="0"/>
           </a:p>
@@ -34865,20 +33646,45 @@
       </p:sp>
       <p:sp>
         <p:nvSpPr>
-          <p:cNvPr id="25" name="Shape 23"/>
-          <p:cNvSpPr/>
-          <p:nvPr/>
-        </p:nvSpPr>
-        <p:spPr>
-          <a:xfrm>
-            <a:off x="2971800" y="1984248"/>
+          <p:cNvPr id="27" name="Shape 25"/>
+          <p:cNvSpPr/>
+          <p:nvPr/>
+        </p:nvSpPr>
+        <p:spPr>
+          <a:xfrm>
+            <a:off x="365760" y="2404872"/>
+            <a:ext cx="2468880" cy="402336"/>
+          </a:xfrm>
+          <a:prstGeom prst="rect">
+            <a:avLst/>
+          </a:prstGeom>
+          <a:solidFill>
+            <a:srgbClr val="F8FAFC"/>
+          </a:solidFill>
+          <a:ln w="12700">
+            <a:solidFill>
+              <a:srgbClr val="E2E8F0"/>
+            </a:solidFill>
+            <a:prstDash val="solid"/>
+          </a:ln>
+        </p:spPr>
+      </p:sp>
+      <p:sp>
+        <p:nvSpPr>
+          <p:cNvPr id="28" name="Shape 26"/>
+          <p:cNvSpPr/>
+          <p:nvPr/>
+        </p:nvSpPr>
+        <p:spPr>
+          <a:xfrm>
+            <a:off x="2971800" y="2404872"/>
             <a:ext cx="2834640" cy="402336"/>
           </a:xfrm>
           <a:prstGeom prst="rect">
             <a:avLst/>
           </a:prstGeom>
           <a:solidFill>
-            <a:srgbClr val="F1F5F9"/>
+            <a:srgbClr val="F8FAFC"/>
           </a:solidFill>
           <a:ln w="12700">
             <a:solidFill>
@@ -34890,13 +33696,13 @@
       </p:sp>
       <p:sp>
         <p:nvSpPr>
-          <p:cNvPr id="26" name="Shape 24"/>
-          <p:cNvSpPr/>
-          <p:nvPr/>
-        </p:nvSpPr>
-        <p:spPr>
-          <a:xfrm>
-            <a:off x="5943600" y="1984248"/>
+          <p:cNvPr id="29" name="Shape 27"/>
+          <p:cNvSpPr/>
+          <p:nvPr/>
+        </p:nvSpPr>
+        <p:spPr>
+          <a:xfrm>
+            <a:off x="5943600" y="2404872"/>
             <a:ext cx="2834640" cy="402336"/>
           </a:xfrm>
           <a:prstGeom prst="rect">
@@ -34915,13 +33721,13 @@
       </p:sp>
       <p:sp>
         <p:nvSpPr>
-          <p:cNvPr id="27" name="Text 25"/>
-          <p:cNvSpPr/>
-          <p:nvPr/>
-        </p:nvSpPr>
-        <p:spPr>
-          <a:xfrm>
-            <a:off x="5943600" y="1984248"/>
+          <p:cNvPr id="30" name="Text 28"/>
+          <p:cNvSpPr/>
+          <p:nvPr/>
+        </p:nvSpPr>
+        <p:spPr>
+          <a:xfrm>
+            <a:off x="5943600" y="2404872"/>
             <a:ext cx="2834640" cy="402336"/>
           </a:xfrm>
           <a:prstGeom prst="rect">
@@ -34954,39 +33760,14 @@
       </p:sp>
       <p:sp>
         <p:nvSpPr>
-          <p:cNvPr id="28" name="Shape 26"/>
-          <p:cNvSpPr/>
-          <p:nvPr/>
-        </p:nvSpPr>
-        <p:spPr>
-          <a:xfrm>
-            <a:off x="365760" y="2404872"/>
-            <a:ext cx="2468880" cy="402336"/>
-          </a:xfrm>
-          <a:prstGeom prst="rect">
-            <a:avLst/>
-          </a:prstGeom>
-          <a:solidFill>
-            <a:srgbClr val="DDD6FE"/>
-          </a:solidFill>
-          <a:ln w="12700">
-            <a:solidFill>
-              <a:srgbClr val="E2E8F0"/>
-            </a:solidFill>
-            <a:prstDash val="solid"/>
-          </a:ln>
-        </p:spPr>
-      </p:sp>
-      <p:sp>
-        <p:nvSpPr>
-          <p:cNvPr id="29" name="Text 27"/>
-          <p:cNvSpPr/>
-          <p:nvPr/>
-        </p:nvSpPr>
-        <p:spPr>
-          <a:xfrm>
-            <a:off x="365760" y="2404872"/>
-            <a:ext cx="2468880" cy="402336"/>
+          <p:cNvPr id="31" name="Text 29"/>
+          <p:cNvSpPr/>
+          <p:nvPr/>
+        </p:nvSpPr>
+        <p:spPr>
+          <a:xfrm>
+            <a:off x="365760" y="3611880"/>
+            <a:ext cx="1828800" cy="347472"/>
           </a:xfrm>
           <a:prstGeom prst="rect">
             <a:avLst/>
@@ -34998,84 +33779,61 @@
           <a:bodyPr wrap="square" lIns="0" tIns="0" rIns="0" bIns="0" rtlCol="0" anchor="ctr"/>
           <a:lstStyle/>
           <a:p>
-            <a:pPr algn="ctr" indent="0" marL="0">
-              <a:buNone/>
-            </a:pPr>
-            <a:r>
-              <a:rPr lang="en-US" sz="1300" b="1" dirty="0">
-                <a:solidFill>
-                  <a:srgbClr val="4C1D95"/>
+            <a:pPr algn="l" indent="0" marL="0">
+              <a:buNone/>
+            </a:pPr>
+            <a:r>
+              <a:rPr lang="en-US" sz="1200" b="1" dirty="0">
+                <a:solidFill>
+                  <a:srgbClr val="0F172A"/>
                 </a:solidFill>
                 <a:latin typeface="Trebuchet MS" pitchFamily="34" charset="0"/>
                 <a:ea typeface="Trebuchet MS" pitchFamily="34" charset="-122"/>
                 <a:cs typeface="Trebuchet MS" pitchFamily="34" charset="-120"/>
               </a:rPr>
-              <a:t>mis-</a:t>
-            </a:r>
-            <a:endParaRPr lang="en-US" sz="1300" dirty="0"/>
-          </a:p>
-        </p:txBody>
-      </p:sp>
-      <p:sp>
-        <p:nvSpPr>
-          <p:cNvPr id="30" name="Shape 28"/>
-          <p:cNvSpPr/>
-          <p:nvPr/>
-        </p:nvSpPr>
-        <p:spPr>
-          <a:xfrm>
-            <a:off x="2971800" y="2404872"/>
-            <a:ext cx="2834640" cy="402336"/>
-          </a:xfrm>
-          <a:prstGeom prst="rect">
-            <a:avLst/>
-          </a:prstGeom>
-          <a:solidFill>
-            <a:srgbClr val="F8FAFC"/>
-          </a:solidFill>
-          <a:ln w="12700">
-            <a:solidFill>
-              <a:srgbClr val="E2E8F0"/>
-            </a:solidFill>
-            <a:prstDash val="solid"/>
-          </a:ln>
-        </p:spPr>
-      </p:sp>
-      <p:sp>
-        <p:nvSpPr>
-          <p:cNvPr id="31" name="Shape 29"/>
-          <p:cNvSpPr/>
-          <p:nvPr/>
-        </p:nvSpPr>
-        <p:spPr>
-          <a:xfrm>
-            <a:off x="5943600" y="2404872"/>
-            <a:ext cx="2834640" cy="402336"/>
-          </a:xfrm>
-          <a:prstGeom prst="rect">
-            <a:avLst/>
-          </a:prstGeom>
-          <a:solidFill>
-            <a:srgbClr val="FCE7F3"/>
-          </a:solidFill>
-          <a:ln w="12700">
-            <a:solidFill>
-              <a:srgbClr val="E2E8F0"/>
-            </a:solidFill>
-            <a:prstDash val="solid"/>
-          </a:ln>
-        </p:spPr>
-      </p:sp>
-      <p:sp>
-        <p:nvSpPr>
-          <p:cNvPr id="32" name="Text 30"/>
-          <p:cNvSpPr/>
-          <p:nvPr/>
-        </p:nvSpPr>
-        <p:spPr>
-          <a:xfrm>
-            <a:off x="5943600" y="2404872"/>
-            <a:ext cx="2834640" cy="402336"/>
+              <a:t>Sample words:</a:t>
+            </a:r>
+            <a:endParaRPr lang="en-US" sz="1200" dirty="0"/>
+          </a:p>
+        </p:txBody>
+      </p:sp>
+      <p:sp>
+        <p:nvSpPr>
+          <p:cNvPr id="32" name="Shape 30"/>
+          <p:cNvSpPr/>
+          <p:nvPr/>
+        </p:nvSpPr>
+        <p:spPr>
+          <a:xfrm>
+            <a:off x="365760" y="4023360"/>
+            <a:ext cx="2011680" cy="402336"/>
+          </a:xfrm>
+          <a:prstGeom prst="rect">
+            <a:avLst>
+              <a:gd name="adj" fmla="val 13636"/>
+            </a:avLst>
+          </a:prstGeom>
+          <a:solidFill>
+            <a:srgbClr val="EEF2FF"/>
+          </a:solidFill>
+          <a:ln w="12700">
+            <a:solidFill>
+              <a:srgbClr val="6366F1"/>
+            </a:solidFill>
+            <a:prstDash val="solid"/>
+          </a:ln>
+        </p:spPr>
+      </p:sp>
+      <p:sp>
+        <p:nvSpPr>
+          <p:cNvPr id="33" name="Text 31"/>
+          <p:cNvSpPr/>
+          <p:nvPr/>
+        </p:nvSpPr>
+        <p:spPr>
+          <a:xfrm>
+            <a:off x="365760" y="4023360"/>
+            <a:ext cx="2011680" cy="402336"/>
           </a:xfrm>
           <a:prstGeom prst="rect">
             <a:avLst/>
@@ -35091,55 +33849,57 @@
               <a:buNone/>
             </a:pPr>
             <a:r>
-              <a:rPr lang="en-US" sz="1300" b="1" dirty="0">
-                <a:solidFill>
-                  <a:srgbClr val="9D174D"/>
+              <a:rPr lang="en-US" sz="1200" b="1" dirty="0">
+                <a:solidFill>
+                  <a:srgbClr val="4338CA"/>
                 </a:solidFill>
                 <a:latin typeface="Trebuchet MS" pitchFamily="34" charset="0"/>
                 <a:ea typeface="Trebuchet MS" pitchFamily="34" charset="-122"/>
                 <a:cs typeface="Trebuchet MS" pitchFamily="34" charset="-120"/>
               </a:rPr>
-              <a:t>-able</a:t>
-            </a:r>
-            <a:endParaRPr lang="en-US" sz="1300" dirty="0"/>
-          </a:p>
-        </p:txBody>
-      </p:sp>
-      <p:sp>
-        <p:nvSpPr>
-          <p:cNvPr id="33" name="Shape 31"/>
-          <p:cNvSpPr/>
-          <p:nvPr/>
-        </p:nvSpPr>
-        <p:spPr>
-          <a:xfrm>
-            <a:off x="365760" y="2825496"/>
-            <a:ext cx="2468880" cy="402336"/>
-          </a:xfrm>
-          <a:prstGeom prst="rect">
-            <a:avLst/>
-          </a:prstGeom>
-          <a:solidFill>
-            <a:srgbClr val="DDD6FE"/>
-          </a:solidFill>
-          <a:ln w="12700">
-            <a:solidFill>
-              <a:srgbClr val="E2E8F0"/>
-            </a:solidFill>
-            <a:prstDash val="solid"/>
-          </a:ln>
-        </p:spPr>
-      </p:sp>
-      <p:sp>
-        <p:nvSpPr>
-          <p:cNvPr id="34" name="Text 32"/>
-          <p:cNvSpPr/>
-          <p:nvPr/>
-        </p:nvSpPr>
-        <p:spPr>
-          <a:xfrm>
-            <a:off x="365760" y="2825496"/>
-            <a:ext cx="2468880" cy="402336"/>
+              <a:t>teach</a:t>
+            </a:r>
+            <a:endParaRPr lang="en-US" sz="1200" dirty="0"/>
+          </a:p>
+        </p:txBody>
+      </p:sp>
+      <p:sp>
+        <p:nvSpPr>
+          <p:cNvPr id="34" name="Shape 32"/>
+          <p:cNvSpPr/>
+          <p:nvPr/>
+        </p:nvSpPr>
+        <p:spPr>
+          <a:xfrm>
+            <a:off x="2542032" y="4023360"/>
+            <a:ext cx="2011680" cy="402336"/>
+          </a:xfrm>
+          <a:prstGeom prst="rect">
+            <a:avLst>
+              <a:gd name="adj" fmla="val 13636"/>
+            </a:avLst>
+          </a:prstGeom>
+          <a:solidFill>
+            <a:srgbClr val="EEF2FF"/>
+          </a:solidFill>
+          <a:ln w="12700">
+            <a:solidFill>
+              <a:srgbClr val="6366F1"/>
+            </a:solidFill>
+            <a:prstDash val="solid"/>
+          </a:ln>
+        </p:spPr>
+      </p:sp>
+      <p:sp>
+        <p:nvSpPr>
+          <p:cNvPr id="35" name="Text 33"/>
+          <p:cNvSpPr/>
+          <p:nvPr/>
+        </p:nvSpPr>
+        <p:spPr>
+          <a:xfrm>
+            <a:off x="2542032" y="4023360"/>
+            <a:ext cx="2011680" cy="402336"/>
           </a:xfrm>
           <a:prstGeom prst="rect">
             <a:avLst/>
@@ -35155,824 +33915,15 @@
               <a:buNone/>
             </a:pPr>
             <a:r>
-              <a:rPr lang="en-US" sz="1300" b="1" dirty="0">
-                <a:solidFill>
-                  <a:srgbClr val="4C1D95"/>
+              <a:rPr lang="en-US" sz="1200" b="1" dirty="0">
+                <a:solidFill>
+                  <a:srgbClr val="4338CA"/>
                 </a:solidFill>
                 <a:latin typeface="Trebuchet MS" pitchFamily="34" charset="0"/>
                 <a:ea typeface="Trebuchet MS" pitchFamily="34" charset="-122"/>
                 <a:cs typeface="Trebuchet MS" pitchFamily="34" charset="-120"/>
               </a:rPr>
-              <a:t>out-</a:t>
-            </a:r>
-            <a:endParaRPr lang="en-US" sz="1300" dirty="0"/>
-          </a:p>
-        </p:txBody>
-      </p:sp>
-      <p:sp>
-        <p:nvSpPr>
-          <p:cNvPr id="35" name="Shape 33"/>
-          <p:cNvSpPr/>
-          <p:nvPr/>
-        </p:nvSpPr>
-        <p:spPr>
-          <a:xfrm>
-            <a:off x="2971800" y="2825496"/>
-            <a:ext cx="2834640" cy="402336"/>
-          </a:xfrm>
-          <a:prstGeom prst="rect">
-            <a:avLst/>
-          </a:prstGeom>
-          <a:solidFill>
-            <a:srgbClr val="F1F5F9"/>
-          </a:solidFill>
-          <a:ln w="12700">
-            <a:solidFill>
-              <a:srgbClr val="E2E8F0"/>
-            </a:solidFill>
-            <a:prstDash val="solid"/>
-          </a:ln>
-        </p:spPr>
-      </p:sp>
-      <p:sp>
-        <p:nvSpPr>
-          <p:cNvPr id="36" name="Shape 34"/>
-          <p:cNvSpPr/>
-          <p:nvPr/>
-        </p:nvSpPr>
-        <p:spPr>
-          <a:xfrm>
-            <a:off x="5943600" y="2825496"/>
-            <a:ext cx="2834640" cy="402336"/>
-          </a:xfrm>
-          <a:prstGeom prst="rect">
-            <a:avLst/>
-          </a:prstGeom>
-          <a:solidFill>
-            <a:srgbClr val="FCE7F3"/>
-          </a:solidFill>
-          <a:ln w="12700">
-            <a:solidFill>
-              <a:srgbClr val="E2E8F0"/>
-            </a:solidFill>
-            <a:prstDash val="solid"/>
-          </a:ln>
-        </p:spPr>
-      </p:sp>
-      <p:sp>
-        <p:nvSpPr>
-          <p:cNvPr id="37" name="Text 35"/>
-          <p:cNvSpPr/>
-          <p:nvPr/>
-        </p:nvSpPr>
-        <p:spPr>
-          <a:xfrm>
-            <a:off x="5943600" y="2825496"/>
-            <a:ext cx="2834640" cy="402336"/>
-          </a:xfrm>
-          <a:prstGeom prst="rect">
-            <a:avLst/>
-          </a:prstGeom>
-          <a:noFill/>
-          <a:ln/>
-        </p:spPr>
-        <p:txBody>
-          <a:bodyPr wrap="square" lIns="0" tIns="0" rIns="0" bIns="0" rtlCol="0" anchor="ctr"/>
-          <a:lstStyle/>
-          <a:p>
-            <a:pPr algn="ctr" indent="0" marL="0">
-              <a:buNone/>
-            </a:pPr>
-            <a:r>
-              <a:rPr lang="en-US" sz="1300" b="1" dirty="0">
-                <a:solidFill>
-                  <a:srgbClr val="9D174D"/>
-                </a:solidFill>
-                <a:latin typeface="Trebuchet MS" pitchFamily="34" charset="0"/>
-                <a:ea typeface="Trebuchet MS" pitchFamily="34" charset="-122"/>
-                <a:cs typeface="Trebuchet MS" pitchFamily="34" charset="-120"/>
-              </a:rPr>
-              <a:t>-ers</a:t>
-            </a:r>
-            <a:endParaRPr lang="en-US" sz="1300" dirty="0"/>
-          </a:p>
-        </p:txBody>
-      </p:sp>
-      <p:sp>
-        <p:nvSpPr>
-          <p:cNvPr id="38" name="Shape 36"/>
-          <p:cNvSpPr/>
-          <p:nvPr/>
-        </p:nvSpPr>
-        <p:spPr>
-          <a:xfrm>
-            <a:off x="365760" y="3246120"/>
-            <a:ext cx="2468880" cy="402336"/>
-          </a:xfrm>
-          <a:prstGeom prst="rect">
-            <a:avLst/>
-          </a:prstGeom>
-          <a:solidFill>
-            <a:srgbClr val="DDD6FE"/>
-          </a:solidFill>
-          <a:ln w="12700">
-            <a:solidFill>
-              <a:srgbClr val="E2E8F0"/>
-            </a:solidFill>
-            <a:prstDash val="solid"/>
-          </a:ln>
-        </p:spPr>
-      </p:sp>
-      <p:sp>
-        <p:nvSpPr>
-          <p:cNvPr id="39" name="Text 37"/>
-          <p:cNvSpPr/>
-          <p:nvPr/>
-        </p:nvSpPr>
-        <p:spPr>
-          <a:xfrm>
-            <a:off x="365760" y="3246120"/>
-            <a:ext cx="2468880" cy="402336"/>
-          </a:xfrm>
-          <a:prstGeom prst="rect">
-            <a:avLst/>
-          </a:prstGeom>
-          <a:noFill/>
-          <a:ln/>
-        </p:spPr>
-        <p:txBody>
-          <a:bodyPr wrap="square" lIns="0" tIns="0" rIns="0" bIns="0" rtlCol="0" anchor="ctr"/>
-          <a:lstStyle/>
-          <a:p>
-            <a:pPr algn="ctr" indent="0" marL="0">
-              <a:buNone/>
-            </a:pPr>
-            <a:r>
-              <a:rPr lang="en-US" sz="1300" b="1" dirty="0">
-                <a:solidFill>
-                  <a:srgbClr val="4C1D95"/>
-                </a:solidFill>
-                <a:latin typeface="Trebuchet MS" pitchFamily="34" charset="0"/>
-                <a:ea typeface="Trebuchet MS" pitchFamily="34" charset="-122"/>
-                <a:cs typeface="Trebuchet MS" pitchFamily="34" charset="-120"/>
-              </a:rPr>
-              <a:t>co-</a:t>
-            </a:r>
-            <a:endParaRPr lang="en-US" sz="1300" dirty="0"/>
-          </a:p>
-        </p:txBody>
-      </p:sp>
-      <p:sp>
-        <p:nvSpPr>
-          <p:cNvPr id="40" name="Shape 38"/>
-          <p:cNvSpPr/>
-          <p:nvPr/>
-        </p:nvSpPr>
-        <p:spPr>
-          <a:xfrm>
-            <a:off x="2971800" y="3246120"/>
-            <a:ext cx="2834640" cy="402336"/>
-          </a:xfrm>
-          <a:prstGeom prst="rect">
-            <a:avLst/>
-          </a:prstGeom>
-          <a:solidFill>
-            <a:srgbClr val="F8FAFC"/>
-          </a:solidFill>
-          <a:ln w="12700">
-            <a:solidFill>
-              <a:srgbClr val="E2E8F0"/>
-            </a:solidFill>
-            <a:prstDash val="solid"/>
-          </a:ln>
-        </p:spPr>
-      </p:sp>
-      <p:sp>
-        <p:nvSpPr>
-          <p:cNvPr id="41" name="Shape 39"/>
-          <p:cNvSpPr/>
-          <p:nvPr/>
-        </p:nvSpPr>
-        <p:spPr>
-          <a:xfrm>
-            <a:off x="5943600" y="3246120"/>
-            <a:ext cx="2834640" cy="402336"/>
-          </a:xfrm>
-          <a:prstGeom prst="rect">
-            <a:avLst/>
-          </a:prstGeom>
-          <a:solidFill>
-            <a:srgbClr val="FCE7F3"/>
-          </a:solidFill>
-          <a:ln w="12700">
-            <a:solidFill>
-              <a:srgbClr val="E2E8F0"/>
-            </a:solidFill>
-            <a:prstDash val="solid"/>
-          </a:ln>
-        </p:spPr>
-      </p:sp>
-      <p:sp>
-        <p:nvSpPr>
-          <p:cNvPr id="42" name="Text 40"/>
-          <p:cNvSpPr/>
-          <p:nvPr/>
-        </p:nvSpPr>
-        <p:spPr>
-          <a:xfrm>
-            <a:off x="5943600" y="3246120"/>
-            <a:ext cx="2834640" cy="402336"/>
-          </a:xfrm>
-          <a:prstGeom prst="rect">
-            <a:avLst/>
-          </a:prstGeom>
-          <a:noFill/>
-          <a:ln/>
-        </p:spPr>
-        <p:txBody>
-          <a:bodyPr wrap="square" lIns="0" tIns="0" rIns="0" bIns="0" rtlCol="0" anchor="ctr"/>
-          <a:lstStyle/>
-          <a:p>
-            <a:pPr algn="ctr" indent="0" marL="0">
-              <a:buNone/>
-            </a:pPr>
-            <a:r>
-              <a:rPr lang="en-US" sz="1300" b="1" dirty="0">
-                <a:solidFill>
-                  <a:srgbClr val="9D174D"/>
-                </a:solidFill>
-                <a:latin typeface="Trebuchet MS" pitchFamily="34" charset="0"/>
-                <a:ea typeface="Trebuchet MS" pitchFamily="34" charset="-122"/>
-                <a:cs typeface="Trebuchet MS" pitchFamily="34" charset="-120"/>
-              </a:rPr>
-              <a:t>-ings</a:t>
-            </a:r>
-            <a:endParaRPr lang="en-US" sz="1300" dirty="0"/>
-          </a:p>
-        </p:txBody>
-      </p:sp>
-      <p:sp>
-        <p:nvSpPr>
-          <p:cNvPr id="43" name="Text 41"/>
-          <p:cNvSpPr/>
-          <p:nvPr/>
-        </p:nvSpPr>
-        <p:spPr>
-          <a:xfrm>
-            <a:off x="365760" y="3611880"/>
-            <a:ext cx="1828800" cy="347472"/>
-          </a:xfrm>
-          <a:prstGeom prst="rect">
-            <a:avLst/>
-          </a:prstGeom>
-          <a:noFill/>
-          <a:ln/>
-        </p:spPr>
-        <p:txBody>
-          <a:bodyPr wrap="square" lIns="0" tIns="0" rIns="0" bIns="0" rtlCol="0" anchor="ctr"/>
-          <a:lstStyle/>
-          <a:p>
-            <a:pPr algn="l" indent="0" marL="0">
-              <a:buNone/>
-            </a:pPr>
-            <a:r>
-              <a:rPr lang="en-US" sz="1200" b="1" dirty="0">
-                <a:solidFill>
-                  <a:srgbClr val="0F172A"/>
-                </a:solidFill>
-                <a:latin typeface="Trebuchet MS" pitchFamily="34" charset="0"/>
-                <a:ea typeface="Trebuchet MS" pitchFamily="34" charset="-122"/>
-                <a:cs typeface="Trebuchet MS" pitchFamily="34" charset="-120"/>
-              </a:rPr>
-              <a:t>Sample words:</a:t>
-            </a:r>
-            <a:endParaRPr lang="en-US" sz="1200" dirty="0"/>
-          </a:p>
-        </p:txBody>
-      </p:sp>
-      <p:sp>
-        <p:nvSpPr>
-          <p:cNvPr id="44" name="Shape 42"/>
-          <p:cNvSpPr/>
-          <p:nvPr/>
-        </p:nvSpPr>
-        <p:spPr>
-          <a:xfrm>
-            <a:off x="365760" y="4023360"/>
-            <a:ext cx="2011680" cy="402336"/>
-          </a:xfrm>
-          <a:prstGeom prst="rect">
-            <a:avLst>
-              <a:gd name="adj" fmla="val 13636"/>
-            </a:avLst>
-          </a:prstGeom>
-          <a:solidFill>
-            <a:srgbClr val="EEF2FF"/>
-          </a:solidFill>
-          <a:ln w="12700">
-            <a:solidFill>
-              <a:srgbClr val="6366F1"/>
-            </a:solidFill>
-            <a:prstDash val="solid"/>
-          </a:ln>
-        </p:spPr>
-      </p:sp>
-      <p:sp>
-        <p:nvSpPr>
-          <p:cNvPr id="45" name="Text 43"/>
-          <p:cNvSpPr/>
-          <p:nvPr/>
-        </p:nvSpPr>
-        <p:spPr>
-          <a:xfrm>
-            <a:off x="365760" y="4023360"/>
-            <a:ext cx="2011680" cy="402336"/>
-          </a:xfrm>
-          <a:prstGeom prst="rect">
-            <a:avLst/>
-          </a:prstGeom>
-          <a:noFill/>
-          <a:ln/>
-        </p:spPr>
-        <p:txBody>
-          <a:bodyPr wrap="square" lIns="0" tIns="0" rIns="0" bIns="0" rtlCol="0" anchor="ctr"/>
-          <a:lstStyle/>
-          <a:p>
-            <a:pPr algn="ctr" indent="0" marL="0">
-              <a:buNone/>
-            </a:pPr>
-            <a:r>
-              <a:rPr lang="en-US" sz="1200" b="1" dirty="0">
-                <a:solidFill>
-                  <a:srgbClr val="4338CA"/>
-                </a:solidFill>
-                <a:latin typeface="Trebuchet MS" pitchFamily="34" charset="0"/>
-                <a:ea typeface="Trebuchet MS" pitchFamily="34" charset="-122"/>
-                <a:cs typeface="Trebuchet MS" pitchFamily="34" charset="-120"/>
-              </a:rPr>
-              <a:t>teacher</a:t>
-            </a:r>
-            <a:endParaRPr lang="en-US" sz="1200" dirty="0"/>
-          </a:p>
-        </p:txBody>
-      </p:sp>
-      <p:sp>
-        <p:nvSpPr>
-          <p:cNvPr id="46" name="Shape 44"/>
-          <p:cNvSpPr/>
-          <p:nvPr/>
-        </p:nvSpPr>
-        <p:spPr>
-          <a:xfrm>
-            <a:off x="2542032" y="4023360"/>
-            <a:ext cx="2011680" cy="402336"/>
-          </a:xfrm>
-          <a:prstGeom prst="rect">
-            <a:avLst>
-              <a:gd name="adj" fmla="val 13636"/>
-            </a:avLst>
-          </a:prstGeom>
-          <a:solidFill>
-            <a:srgbClr val="EEF2FF"/>
-          </a:solidFill>
-          <a:ln w="12700">
-            <a:solidFill>
-              <a:srgbClr val="6366F1"/>
-            </a:solidFill>
-            <a:prstDash val="solid"/>
-          </a:ln>
-        </p:spPr>
-      </p:sp>
-      <p:sp>
-        <p:nvSpPr>
-          <p:cNvPr id="47" name="Text 45"/>
-          <p:cNvSpPr/>
-          <p:nvPr/>
-        </p:nvSpPr>
-        <p:spPr>
-          <a:xfrm>
-            <a:off x="2542032" y="4023360"/>
-            <a:ext cx="2011680" cy="402336"/>
-          </a:xfrm>
-          <a:prstGeom prst="rect">
-            <a:avLst/>
-          </a:prstGeom>
-          <a:noFill/>
-          <a:ln/>
-        </p:spPr>
-        <p:txBody>
-          <a:bodyPr wrap="square" lIns="0" tIns="0" rIns="0" bIns="0" rtlCol="0" anchor="ctr"/>
-          <a:lstStyle/>
-          <a:p>
-            <a:pPr algn="ctr" indent="0" marL="0">
-              <a:buNone/>
-            </a:pPr>
-            <a:r>
-              <a:rPr lang="en-US" sz="1200" b="1" dirty="0">
-                <a:solidFill>
-                  <a:srgbClr val="4338CA"/>
-                </a:solidFill>
-                <a:latin typeface="Trebuchet MS" pitchFamily="34" charset="0"/>
-                <a:ea typeface="Trebuchet MS" pitchFamily="34" charset="-122"/>
-                <a:cs typeface="Trebuchet MS" pitchFamily="34" charset="-120"/>
-              </a:rPr>
-              <a:t>teaching</a:t>
-            </a:r>
-            <a:endParaRPr lang="en-US" sz="1200" dirty="0"/>
-          </a:p>
-        </p:txBody>
-      </p:sp>
-      <p:sp>
-        <p:nvSpPr>
-          <p:cNvPr id="48" name="Shape 46"/>
-          <p:cNvSpPr/>
-          <p:nvPr/>
-        </p:nvSpPr>
-        <p:spPr>
-          <a:xfrm>
-            <a:off x="4718304" y="4023360"/>
-            <a:ext cx="2011680" cy="402336"/>
-          </a:xfrm>
-          <a:prstGeom prst="rect">
-            <a:avLst>
-              <a:gd name="adj" fmla="val 13636"/>
-            </a:avLst>
-          </a:prstGeom>
-          <a:solidFill>
-            <a:srgbClr val="EEF2FF"/>
-          </a:solidFill>
-          <a:ln w="12700">
-            <a:solidFill>
-              <a:srgbClr val="6366F1"/>
-            </a:solidFill>
-            <a:prstDash val="solid"/>
-          </a:ln>
-        </p:spPr>
-      </p:sp>
-      <p:sp>
-        <p:nvSpPr>
-          <p:cNvPr id="49" name="Text 47"/>
-          <p:cNvSpPr/>
-          <p:nvPr/>
-        </p:nvSpPr>
-        <p:spPr>
-          <a:xfrm>
-            <a:off x="4718304" y="4023360"/>
-            <a:ext cx="2011680" cy="402336"/>
-          </a:xfrm>
-          <a:prstGeom prst="rect">
-            <a:avLst/>
-          </a:prstGeom>
-          <a:noFill/>
-          <a:ln/>
-        </p:spPr>
-        <p:txBody>
-          <a:bodyPr wrap="square" lIns="0" tIns="0" rIns="0" bIns="0" rtlCol="0" anchor="ctr"/>
-          <a:lstStyle/>
-          <a:p>
-            <a:pPr algn="ctr" indent="0" marL="0">
-              <a:buNone/>
-            </a:pPr>
-            <a:r>
-              <a:rPr lang="en-US" sz="1200" b="1" dirty="0">
-                <a:solidFill>
-                  <a:srgbClr val="4338CA"/>
-                </a:solidFill>
-                <a:latin typeface="Trebuchet MS" pitchFamily="34" charset="0"/>
-                <a:ea typeface="Trebuchet MS" pitchFamily="34" charset="-122"/>
-                <a:cs typeface="Trebuchet MS" pitchFamily="34" charset="-120"/>
-              </a:rPr>
-              <a:t>teachers</a:t>
-            </a:r>
-            <a:endParaRPr lang="en-US" sz="1200" dirty="0"/>
-          </a:p>
-        </p:txBody>
-      </p:sp>
-      <p:sp>
-        <p:nvSpPr>
-          <p:cNvPr id="50" name="Shape 48"/>
-          <p:cNvSpPr/>
-          <p:nvPr/>
-        </p:nvSpPr>
-        <p:spPr>
-          <a:xfrm>
-            <a:off x="6894576" y="4023360"/>
-            <a:ext cx="2011680" cy="402336"/>
-          </a:xfrm>
-          <a:prstGeom prst="rect">
-            <a:avLst>
-              <a:gd name="adj" fmla="val 13636"/>
-            </a:avLst>
-          </a:prstGeom>
-          <a:solidFill>
-            <a:srgbClr val="EEF2FF"/>
-          </a:solidFill>
-          <a:ln w="12700">
-            <a:solidFill>
-              <a:srgbClr val="6366F1"/>
-            </a:solidFill>
-            <a:prstDash val="solid"/>
-          </a:ln>
-        </p:spPr>
-      </p:sp>
-      <p:sp>
-        <p:nvSpPr>
-          <p:cNvPr id="51" name="Text 49"/>
-          <p:cNvSpPr/>
-          <p:nvPr/>
-        </p:nvSpPr>
-        <p:spPr>
-          <a:xfrm>
-            <a:off x="6894576" y="4023360"/>
-            <a:ext cx="2011680" cy="402336"/>
-          </a:xfrm>
-          <a:prstGeom prst="rect">
-            <a:avLst/>
-          </a:prstGeom>
-          <a:noFill/>
-          <a:ln/>
-        </p:spPr>
-        <p:txBody>
-          <a:bodyPr wrap="square" lIns="0" tIns="0" rIns="0" bIns="0" rtlCol="0" anchor="ctr"/>
-          <a:lstStyle/>
-          <a:p>
-            <a:pPr algn="ctr" indent="0" marL="0">
-              <a:buNone/>
-            </a:pPr>
-            <a:r>
-              <a:rPr lang="en-US" sz="1200" b="1" dirty="0">
-                <a:solidFill>
-                  <a:srgbClr val="4338CA"/>
-                </a:solidFill>
-                <a:latin typeface="Trebuchet MS" pitchFamily="34" charset="0"/>
-                <a:ea typeface="Trebuchet MS" pitchFamily="34" charset="-122"/>
-                <a:cs typeface="Trebuchet MS" pitchFamily="34" charset="-120"/>
-              </a:rPr>
               <a:t>reteach</a:t>
-            </a:r>
-            <a:endParaRPr lang="en-US" sz="1200" dirty="0"/>
-          </a:p>
-        </p:txBody>
-      </p:sp>
-      <p:sp>
-        <p:nvSpPr>
-          <p:cNvPr id="52" name="Shape 50"/>
-          <p:cNvSpPr/>
-          <p:nvPr/>
-        </p:nvSpPr>
-        <p:spPr>
-          <a:xfrm>
-            <a:off x="365760" y="4498848"/>
-            <a:ext cx="2011680" cy="402336"/>
-          </a:xfrm>
-          <a:prstGeom prst="rect">
-            <a:avLst>
-              <a:gd name="adj" fmla="val 13636"/>
-            </a:avLst>
-          </a:prstGeom>
-          <a:solidFill>
-            <a:srgbClr val="EEF2FF"/>
-          </a:solidFill>
-          <a:ln w="12700">
-            <a:solidFill>
-              <a:srgbClr val="6366F1"/>
-            </a:solidFill>
-            <a:prstDash val="solid"/>
-          </a:ln>
-        </p:spPr>
-      </p:sp>
-      <p:sp>
-        <p:nvSpPr>
-          <p:cNvPr id="53" name="Text 51"/>
-          <p:cNvSpPr/>
-          <p:nvPr/>
-        </p:nvSpPr>
-        <p:spPr>
-          <a:xfrm>
-            <a:off x="365760" y="4498848"/>
-            <a:ext cx="2011680" cy="402336"/>
-          </a:xfrm>
-          <a:prstGeom prst="rect">
-            <a:avLst/>
-          </a:prstGeom>
-          <a:noFill/>
-          <a:ln/>
-        </p:spPr>
-        <p:txBody>
-          <a:bodyPr wrap="square" lIns="0" tIns="0" rIns="0" bIns="0" rtlCol="0" anchor="ctr"/>
-          <a:lstStyle/>
-          <a:p>
-            <a:pPr algn="ctr" indent="0" marL="0">
-              <a:buNone/>
-            </a:pPr>
-            <a:r>
-              <a:rPr lang="en-US" sz="1200" b="1" dirty="0">
-                <a:solidFill>
-                  <a:srgbClr val="4338CA"/>
-                </a:solidFill>
-                <a:latin typeface="Trebuchet MS" pitchFamily="34" charset="0"/>
-                <a:ea typeface="Trebuchet MS" pitchFamily="34" charset="-122"/>
-                <a:cs typeface="Trebuchet MS" pitchFamily="34" charset="-120"/>
-              </a:rPr>
-              <a:t>teachings</a:t>
-            </a:r>
-            <a:endParaRPr lang="en-US" sz="1200" dirty="0"/>
-          </a:p>
-        </p:txBody>
-      </p:sp>
-      <p:sp>
-        <p:nvSpPr>
-          <p:cNvPr id="54" name="Shape 52"/>
-          <p:cNvSpPr/>
-          <p:nvPr/>
-        </p:nvSpPr>
-        <p:spPr>
-          <a:xfrm>
-            <a:off x="2542032" y="4498848"/>
-            <a:ext cx="2011680" cy="402336"/>
-          </a:xfrm>
-          <a:prstGeom prst="rect">
-            <a:avLst>
-              <a:gd name="adj" fmla="val 13636"/>
-            </a:avLst>
-          </a:prstGeom>
-          <a:solidFill>
-            <a:srgbClr val="EEF2FF"/>
-          </a:solidFill>
-          <a:ln w="12700">
-            <a:solidFill>
-              <a:srgbClr val="6366F1"/>
-            </a:solidFill>
-            <a:prstDash val="solid"/>
-          </a:ln>
-        </p:spPr>
-      </p:sp>
-      <p:sp>
-        <p:nvSpPr>
-          <p:cNvPr id="55" name="Text 53"/>
-          <p:cNvSpPr/>
-          <p:nvPr/>
-        </p:nvSpPr>
-        <p:spPr>
-          <a:xfrm>
-            <a:off x="2542032" y="4498848"/>
-            <a:ext cx="2011680" cy="402336"/>
-          </a:xfrm>
-          <a:prstGeom prst="rect">
-            <a:avLst/>
-          </a:prstGeom>
-          <a:noFill/>
-          <a:ln/>
-        </p:spPr>
-        <p:txBody>
-          <a:bodyPr wrap="square" lIns="0" tIns="0" rIns="0" bIns="0" rtlCol="0" anchor="ctr"/>
-          <a:lstStyle/>
-          <a:p>
-            <a:pPr algn="ctr" indent="0" marL="0">
-              <a:buNone/>
-            </a:pPr>
-            <a:r>
-              <a:rPr lang="en-US" sz="1200" b="1" dirty="0">
-                <a:solidFill>
-                  <a:srgbClr val="4338CA"/>
-                </a:solidFill>
-                <a:latin typeface="Trebuchet MS" pitchFamily="34" charset="0"/>
-                <a:ea typeface="Trebuchet MS" pitchFamily="34" charset="-122"/>
-                <a:cs typeface="Trebuchet MS" pitchFamily="34" charset="-120"/>
-              </a:rPr>
-              <a:t>teachable</a:t>
-            </a:r>
-            <a:endParaRPr lang="en-US" sz="1200" dirty="0"/>
-          </a:p>
-        </p:txBody>
-      </p:sp>
-      <p:sp>
-        <p:nvSpPr>
-          <p:cNvPr id="56" name="Shape 54"/>
-          <p:cNvSpPr/>
-          <p:nvPr/>
-        </p:nvSpPr>
-        <p:spPr>
-          <a:xfrm>
-            <a:off x="4718304" y="4498848"/>
-            <a:ext cx="2011680" cy="402336"/>
-          </a:xfrm>
-          <a:prstGeom prst="rect">
-            <a:avLst>
-              <a:gd name="adj" fmla="val 13636"/>
-            </a:avLst>
-          </a:prstGeom>
-          <a:solidFill>
-            <a:srgbClr val="EEF2FF"/>
-          </a:solidFill>
-          <a:ln w="12700">
-            <a:solidFill>
-              <a:srgbClr val="6366F1"/>
-            </a:solidFill>
-            <a:prstDash val="solid"/>
-          </a:ln>
-        </p:spPr>
-      </p:sp>
-      <p:sp>
-        <p:nvSpPr>
-          <p:cNvPr id="57" name="Text 55"/>
-          <p:cNvSpPr/>
-          <p:nvPr/>
-        </p:nvSpPr>
-        <p:spPr>
-          <a:xfrm>
-            <a:off x="4718304" y="4498848"/>
-            <a:ext cx="2011680" cy="402336"/>
-          </a:xfrm>
-          <a:prstGeom prst="rect">
-            <a:avLst/>
-          </a:prstGeom>
-          <a:noFill/>
-          <a:ln/>
-        </p:spPr>
-        <p:txBody>
-          <a:bodyPr wrap="square" lIns="0" tIns="0" rIns="0" bIns="0" rtlCol="0" anchor="ctr"/>
-          <a:lstStyle/>
-          <a:p>
-            <a:pPr algn="ctr" indent="0" marL="0">
-              <a:buNone/>
-            </a:pPr>
-            <a:r>
-              <a:rPr lang="en-US" sz="1200" b="1" dirty="0">
-                <a:solidFill>
-                  <a:srgbClr val="4338CA"/>
-                </a:solidFill>
-                <a:latin typeface="Trebuchet MS" pitchFamily="34" charset="0"/>
-                <a:ea typeface="Trebuchet MS" pitchFamily="34" charset="-122"/>
-                <a:cs typeface="Trebuchet MS" pitchFamily="34" charset="-120"/>
-              </a:rPr>
-              <a:t>coteacher</a:t>
-            </a:r>
-            <a:endParaRPr lang="en-US" sz="1200" dirty="0"/>
-          </a:p>
-        </p:txBody>
-      </p:sp>
-      <p:sp>
-        <p:nvSpPr>
-          <p:cNvPr id="58" name="Shape 56"/>
-          <p:cNvSpPr/>
-          <p:nvPr/>
-        </p:nvSpPr>
-        <p:spPr>
-          <a:xfrm>
-            <a:off x="6894576" y="4498848"/>
-            <a:ext cx="2011680" cy="402336"/>
-          </a:xfrm>
-          <a:prstGeom prst="rect">
-            <a:avLst>
-              <a:gd name="adj" fmla="val 13636"/>
-            </a:avLst>
-          </a:prstGeom>
-          <a:solidFill>
-            <a:srgbClr val="EEF2FF"/>
-          </a:solidFill>
-          <a:ln w="12700">
-            <a:solidFill>
-              <a:srgbClr val="6366F1"/>
-            </a:solidFill>
-            <a:prstDash val="solid"/>
-          </a:ln>
-        </p:spPr>
-      </p:sp>
-      <p:sp>
-        <p:nvSpPr>
-          <p:cNvPr id="59" name="Text 57"/>
-          <p:cNvSpPr/>
-          <p:nvPr/>
-        </p:nvSpPr>
-        <p:spPr>
-          <a:xfrm>
-            <a:off x="6894576" y="4498848"/>
-            <a:ext cx="2011680" cy="402336"/>
-          </a:xfrm>
-          <a:prstGeom prst="rect">
-            <a:avLst/>
-          </a:prstGeom>
-          <a:noFill/>
-          <a:ln/>
-        </p:spPr>
-        <p:txBody>
-          <a:bodyPr wrap="square" lIns="0" tIns="0" rIns="0" bIns="0" rtlCol="0" anchor="ctr"/>
-          <a:lstStyle/>
-          <a:p>
-            <a:pPr algn="ctr" indent="0" marL="0">
-              <a:buNone/>
-            </a:pPr>
-            <a:r>
-              <a:rPr lang="en-US" sz="1200" b="1" dirty="0">
-                <a:solidFill>
-                  <a:srgbClr val="4338CA"/>
-                </a:solidFill>
-                <a:latin typeface="Trebuchet MS" pitchFamily="34" charset="0"/>
-                <a:ea typeface="Trebuchet MS" pitchFamily="34" charset="-122"/>
-                <a:cs typeface="Trebuchet MS" pitchFamily="34" charset="-120"/>
-              </a:rPr>
-              <a:t>misteach</a:t>
             </a:r>
             <a:endParaRPr lang="en-US" sz="1200" dirty="0"/>
           </a:p>
@@ -36264,7 +34215,7 @@
                 <a:ea typeface="Calibri" pitchFamily="34" charset="-122"/>
                 <a:cs typeface="Calibri" pitchFamily="34" charset="-120"/>
               </a:rPr>
-              <a:t>Word Labs  •  wordlabs.app  •  Root: 'teach' = to show or instruct</a:t>
+              <a:t>Word Labs  •  wordlabs.app  •  Root: 'teach' = to show someone how to do something</a:t>
             </a:r>
             <a:endParaRPr lang="en-US" sz="800" dirty="0"/>
           </a:p>
@@ -36428,7 +34379,7 @@
                 <a:ea typeface="Calibri" pitchFamily="34" charset="-122"/>
                 <a:cs typeface="Calibri" pitchFamily="34" charset="-120"/>
               </a:rPr>
-              <a:t>The core part of a word carrying its basic meaning. For example, 'teach' means 'to show or instruct'.</a:t>
+              <a:t>The core part of a word carrying its basic meaning. For example, 'teach' means 'to show someone how to do something'.</a:t>
             </a:r>
             <a:endParaRPr lang="en-US" sz="1350" dirty="0"/>
           </a:p>
@@ -37048,7 +34999,7 @@
                 <a:ea typeface="Calibri" pitchFamily="34" charset="-122"/>
                 <a:cs typeface="Calibri" pitchFamily="34" charset="-120"/>
               </a:rPr>
-              <a:t>Word Labs  •  wordlabs.app  •  Root: 'teach' = to show or instruct</a:t>
+              <a:t>Word Labs  •  wordlabs.app  •  Root: 'teach' = to show someone how to do something</a:t>
             </a:r>
             <a:endParaRPr lang="en-US" sz="800" dirty="0"/>
           </a:p>
@@ -37160,7 +35111,7 @@
                 <a:ea typeface="Calibri" pitchFamily="34" charset="-122"/>
                 <a:cs typeface="Calibri" pitchFamily="34" charset="-120"/>
               </a:rPr>
-              <a:t>1.  'Reteach' means to teach something again.</a:t>
+              <a:t>1.  'teach' means 'to travel somewhere quickly'.</a:t>
             </a:r>
             <a:endParaRPr lang="en-US" sz="1300" dirty="0"/>
           </a:p>
@@ -37183,11 +35134,11 @@
             </a:avLst>
           </a:prstGeom>
           <a:solidFill>
-            <a:srgbClr val="DCFCE7"/>
-          </a:solidFill>
-          <a:ln w="12700">
-            <a:solidFill>
-              <a:srgbClr val="16A34A"/>
+            <a:srgbClr val="FEE2E2"/>
+          </a:solidFill>
+          <a:ln w="12700">
+            <a:solidFill>
+              <a:srgbClr val="DC2626"/>
             </a:solidFill>
             <a:prstDash val="solid"/>
           </a:ln>
@@ -37220,13 +35171,13 @@
             <a:r>
               <a:rPr lang="en-US" sz="1100" b="1" dirty="0">
                 <a:solidFill>
-                  <a:srgbClr val="16A34A"/>
+                  <a:srgbClr val="DC2626"/>
                 </a:solidFill>
                 <a:latin typeface="Trebuchet MS" pitchFamily="34" charset="0"/>
                 <a:ea typeface="Trebuchet MS" pitchFamily="34" charset="-122"/>
                 <a:cs typeface="Trebuchet MS" pitchFamily="34" charset="-120"/>
               </a:rPr>
-              <a:t>TRUE</a:t>
+              <a:t>FALSE</a:t>
             </a:r>
             <a:endParaRPr lang="en-US" sz="1100" dirty="0"/>
           </a:p>
@@ -37299,7 +35250,7 @@
                 <a:ea typeface="Calibri" pitchFamily="34" charset="-122"/>
                 <a:cs typeface="Calibri" pitchFamily="34" charset="-120"/>
               </a:rPr>
-              <a:t>2.  The root 'teach' comes from the Latin language.</a:t>
+              <a:t>2.  'reteach' means 'to teach something again, usually because it wasn't understood'.</a:t>
             </a:r>
             <a:endParaRPr lang="en-US" sz="1300" dirty="0"/>
           </a:p>
@@ -37322,11 +35273,11 @@
             </a:avLst>
           </a:prstGeom>
           <a:solidFill>
-            <a:srgbClr val="FEE2E2"/>
-          </a:solidFill>
-          <a:ln w="12700">
-            <a:solidFill>
-              <a:srgbClr val="DC2626"/>
+            <a:srgbClr val="DCFCE7"/>
+          </a:solidFill>
+          <a:ln w="12700">
+            <a:solidFill>
+              <a:srgbClr val="16A34A"/>
             </a:solidFill>
             <a:prstDash val="solid"/>
           </a:ln>
@@ -37359,13 +35310,13 @@
             <a:r>
               <a:rPr lang="en-US" sz="1100" b="1" dirty="0">
                 <a:solidFill>
-                  <a:srgbClr val="DC2626"/>
+                  <a:srgbClr val="16A34A"/>
                 </a:solidFill>
                 <a:latin typeface="Trebuchet MS" pitchFamily="34" charset="0"/>
                 <a:ea typeface="Trebuchet MS" pitchFamily="34" charset="-122"/>
                 <a:cs typeface="Trebuchet MS" pitchFamily="34" charset="-120"/>
               </a:rPr>
-              <a:t>FALSE</a:t>
+              <a:t>TRUE</a:t>
             </a:r>
             <a:endParaRPr lang="en-US" sz="1100" dirty="0"/>
           </a:p>
@@ -37438,7 +35389,7 @@
                 <a:ea typeface="Calibri" pitchFamily="34" charset="-122"/>
                 <a:cs typeface="Calibri" pitchFamily="34" charset="-120"/>
               </a:rPr>
-              <a:t>3.  The word 'teaching' has no suffix added to the root 'teach'.</a:t>
+              <a:t>3.  'reteach' means 'to learn something completely new'.</a:t>
             </a:r>
             <a:endParaRPr lang="en-US" sz="1300" dirty="0"/>
           </a:p>
@@ -37577,7 +35528,7 @@
                 <a:ea typeface="Calibri" pitchFamily="34" charset="-122"/>
                 <a:cs typeface="Calibri" pitchFamily="34" charset="-120"/>
               </a:rPr>
-              <a:t>4.  Adding '-able' to 'teach' makes the word 'teachable', meaning able to be taught.</a:t>
+              <a:t>4.  'teach' means 'to help someone learn something'.</a:t>
             </a:r>
             <a:endParaRPr lang="en-US" sz="1300" dirty="0"/>
           </a:p>
@@ -37716,7 +35667,7 @@
                 <a:ea typeface="Calibri" pitchFamily="34" charset="-122"/>
                 <a:cs typeface="Calibri" pitchFamily="34" charset="-120"/>
               </a:rPr>
-              <a:t>5.  The word 'teacher' contains the root 'teach' plus the suffix '-er'.</a:t>
+              <a:t>5.  'teach' means 'to show someone how to do something'.</a:t>
             </a:r>
             <a:endParaRPr lang="en-US" sz="1300" dirty="0"/>
           </a:p>
@@ -38074,7 +36025,7 @@
                 <a:ea typeface="Calibri" pitchFamily="34" charset="-122"/>
                 <a:cs typeface="Calibri" pitchFamily="34" charset="-120"/>
               </a:rPr>
-              <a:t>Word Labs  •  wordlabs.app  •  Root: 'teach' = to show or instruct</a:t>
+              <a:t>Word Labs  •  wordlabs.app  •  Root: 'teach' = to show someone how to do something</a:t>
             </a:r>
             <a:endParaRPr lang="en-US" sz="800" dirty="0"/>
           </a:p>
@@ -38211,7 +36162,7 @@
                 <a:ea typeface="Trebuchet MS" pitchFamily="34" charset="-122"/>
                 <a:cs typeface="Trebuchet MS" pitchFamily="34" charset="-120"/>
               </a:rPr>
-              <a:t>to show or instruct</a:t>
+              <a:t>to show someone how to do something</a:t>
             </a:r>
             <a:endParaRPr lang="en-US" sz="2000" dirty="0"/>
           </a:p>
@@ -38250,7 +36201,7 @@
                 <a:ea typeface="Calibri" pitchFamily="34" charset="-122"/>
                 <a:cs typeface="Calibri" pitchFamily="34" charset="-120"/>
               </a:rPr>
-              <a:t>Origin: Old English: tæcan</a:t>
+              <a:t>Origin: Anglo-Saxon (Old English) root</a:t>
             </a:r>
             <a:endParaRPr lang="en-US" sz="1100" dirty="0"/>
           </a:p>
@@ -38355,7 +36306,7 @@
                 <a:ea typeface="Trebuchet MS" pitchFamily="34" charset="-122"/>
                 <a:cs typeface="Trebuchet MS" pitchFamily="34" charset="-120"/>
               </a:rPr>
-              <a:t>teacher</a:t>
+              <a:t>teach</a:t>
             </a:r>
             <a:endParaRPr lang="en-US" sz="1300" dirty="0"/>
           </a:p>
@@ -38421,337 +36372,7 @@
                 <a:ea typeface="Trebuchet MS" pitchFamily="34" charset="-122"/>
                 <a:cs typeface="Trebuchet MS" pitchFamily="34" charset="-120"/>
               </a:rPr>
-              <a:t>teaching</a:t>
-            </a:r>
-            <a:endParaRPr lang="en-US" sz="1300" dirty="0"/>
-          </a:p>
-        </p:txBody>
-      </p:sp>
-      <p:sp>
-        <p:nvSpPr>
-          <p:cNvPr id="20" name="Shape 18"/>
-          <p:cNvSpPr/>
-          <p:nvPr/>
-        </p:nvSpPr>
-        <p:spPr>
-          <a:xfrm>
-            <a:off x="4663440" y="2743200"/>
-            <a:ext cx="2011680" cy="502920"/>
-          </a:xfrm>
-          <a:prstGeom prst="rect">
-            <a:avLst>
-              <a:gd name="adj" fmla="val 14545"/>
-            </a:avLst>
-          </a:prstGeom>
-          <a:solidFill>
-            <a:srgbClr val="EEF2FF"/>
-          </a:solidFill>
-          <a:ln w="12700">
-            <a:solidFill>
-              <a:srgbClr val="6366F1"/>
-            </a:solidFill>
-            <a:prstDash val="solid"/>
-          </a:ln>
-        </p:spPr>
-      </p:sp>
-      <p:sp>
-        <p:nvSpPr>
-          <p:cNvPr id="21" name="Text 19"/>
-          <p:cNvSpPr/>
-          <p:nvPr/>
-        </p:nvSpPr>
-        <p:spPr>
-          <a:xfrm>
-            <a:off x="4663440" y="2743200"/>
-            <a:ext cx="2011680" cy="502920"/>
-          </a:xfrm>
-          <a:prstGeom prst="rect">
-            <a:avLst/>
-          </a:prstGeom>
-          <a:noFill/>
-          <a:ln/>
-        </p:spPr>
-        <p:txBody>
-          <a:bodyPr wrap="square" lIns="0" tIns="0" rIns="0" bIns="0" rtlCol="0" anchor="ctr"/>
-          <a:lstStyle/>
-          <a:p>
-            <a:pPr algn="ctr" indent="0" marL="0">
-              <a:buNone/>
-            </a:pPr>
-            <a:r>
-              <a:rPr lang="en-US" sz="1300" b="1" dirty="0">
-                <a:solidFill>
-                  <a:srgbClr val="4338CA"/>
-                </a:solidFill>
-                <a:latin typeface="Trebuchet MS" pitchFamily="34" charset="0"/>
-                <a:ea typeface="Trebuchet MS" pitchFamily="34" charset="-122"/>
-                <a:cs typeface="Trebuchet MS" pitchFamily="34" charset="-120"/>
-              </a:rPr>
-              <a:t>teachers</a:t>
-            </a:r>
-            <a:endParaRPr lang="en-US" sz="1300" dirty="0"/>
-          </a:p>
-        </p:txBody>
-      </p:sp>
-      <p:sp>
-        <p:nvSpPr>
-          <p:cNvPr id="22" name="Shape 20"/>
-          <p:cNvSpPr/>
-          <p:nvPr/>
-        </p:nvSpPr>
-        <p:spPr>
-          <a:xfrm>
-            <a:off x="6812280" y="2743200"/>
-            <a:ext cx="2011680" cy="502920"/>
-          </a:xfrm>
-          <a:prstGeom prst="rect">
-            <a:avLst>
-              <a:gd name="adj" fmla="val 14545"/>
-            </a:avLst>
-          </a:prstGeom>
-          <a:solidFill>
-            <a:srgbClr val="EEF2FF"/>
-          </a:solidFill>
-          <a:ln w="12700">
-            <a:solidFill>
-              <a:srgbClr val="6366F1"/>
-            </a:solidFill>
-            <a:prstDash val="solid"/>
-          </a:ln>
-        </p:spPr>
-      </p:sp>
-      <p:sp>
-        <p:nvSpPr>
-          <p:cNvPr id="23" name="Text 21"/>
-          <p:cNvSpPr/>
-          <p:nvPr/>
-        </p:nvSpPr>
-        <p:spPr>
-          <a:xfrm>
-            <a:off x="6812280" y="2743200"/>
-            <a:ext cx="2011680" cy="502920"/>
-          </a:xfrm>
-          <a:prstGeom prst="rect">
-            <a:avLst/>
-          </a:prstGeom>
-          <a:noFill/>
-          <a:ln/>
-        </p:spPr>
-        <p:txBody>
-          <a:bodyPr wrap="square" lIns="0" tIns="0" rIns="0" bIns="0" rtlCol="0" anchor="ctr"/>
-          <a:lstStyle/>
-          <a:p>
-            <a:pPr algn="ctr" indent="0" marL="0">
-              <a:buNone/>
-            </a:pPr>
-            <a:r>
-              <a:rPr lang="en-US" sz="1300" b="1" dirty="0">
-                <a:solidFill>
-                  <a:srgbClr val="4338CA"/>
-                </a:solidFill>
-                <a:latin typeface="Trebuchet MS" pitchFamily="34" charset="0"/>
-                <a:ea typeface="Trebuchet MS" pitchFamily="34" charset="-122"/>
-                <a:cs typeface="Trebuchet MS" pitchFamily="34" charset="-120"/>
-              </a:rPr>
               <a:t>reteach</a:t>
-            </a:r>
-            <a:endParaRPr lang="en-US" sz="1300" dirty="0"/>
-          </a:p>
-        </p:txBody>
-      </p:sp>
-      <p:sp>
-        <p:nvSpPr>
-          <p:cNvPr id="24" name="Shape 22"/>
-          <p:cNvSpPr/>
-          <p:nvPr/>
-        </p:nvSpPr>
-        <p:spPr>
-          <a:xfrm>
-            <a:off x="365760" y="3401568"/>
-            <a:ext cx="2011680" cy="502920"/>
-          </a:xfrm>
-          <a:prstGeom prst="rect">
-            <a:avLst>
-              <a:gd name="adj" fmla="val 14545"/>
-            </a:avLst>
-          </a:prstGeom>
-          <a:solidFill>
-            <a:srgbClr val="EEF2FF"/>
-          </a:solidFill>
-          <a:ln w="12700">
-            <a:solidFill>
-              <a:srgbClr val="6366F1"/>
-            </a:solidFill>
-            <a:prstDash val="solid"/>
-          </a:ln>
-        </p:spPr>
-      </p:sp>
-      <p:sp>
-        <p:nvSpPr>
-          <p:cNvPr id="25" name="Text 23"/>
-          <p:cNvSpPr/>
-          <p:nvPr/>
-        </p:nvSpPr>
-        <p:spPr>
-          <a:xfrm>
-            <a:off x="365760" y="3401568"/>
-            <a:ext cx="2011680" cy="502920"/>
-          </a:xfrm>
-          <a:prstGeom prst="rect">
-            <a:avLst/>
-          </a:prstGeom>
-          <a:noFill/>
-          <a:ln/>
-        </p:spPr>
-        <p:txBody>
-          <a:bodyPr wrap="square" lIns="0" tIns="0" rIns="0" bIns="0" rtlCol="0" anchor="ctr"/>
-          <a:lstStyle/>
-          <a:p>
-            <a:pPr algn="ctr" indent="0" marL="0">
-              <a:buNone/>
-            </a:pPr>
-            <a:r>
-              <a:rPr lang="en-US" sz="1300" b="1" dirty="0">
-                <a:solidFill>
-                  <a:srgbClr val="4338CA"/>
-                </a:solidFill>
-                <a:latin typeface="Trebuchet MS" pitchFamily="34" charset="0"/>
-                <a:ea typeface="Trebuchet MS" pitchFamily="34" charset="-122"/>
-                <a:cs typeface="Trebuchet MS" pitchFamily="34" charset="-120"/>
-              </a:rPr>
-              <a:t>teachings</a:t>
-            </a:r>
-            <a:endParaRPr lang="en-US" sz="1300" dirty="0"/>
-          </a:p>
-        </p:txBody>
-      </p:sp>
-      <p:sp>
-        <p:nvSpPr>
-          <p:cNvPr id="26" name="Shape 24"/>
-          <p:cNvSpPr/>
-          <p:nvPr/>
-        </p:nvSpPr>
-        <p:spPr>
-          <a:xfrm>
-            <a:off x="2514600" y="3401568"/>
-            <a:ext cx="2011680" cy="502920"/>
-          </a:xfrm>
-          <a:prstGeom prst="rect">
-            <a:avLst>
-              <a:gd name="adj" fmla="val 14545"/>
-            </a:avLst>
-          </a:prstGeom>
-          <a:solidFill>
-            <a:srgbClr val="EEF2FF"/>
-          </a:solidFill>
-          <a:ln w="12700">
-            <a:solidFill>
-              <a:srgbClr val="6366F1"/>
-            </a:solidFill>
-            <a:prstDash val="solid"/>
-          </a:ln>
-        </p:spPr>
-      </p:sp>
-      <p:sp>
-        <p:nvSpPr>
-          <p:cNvPr id="27" name="Text 25"/>
-          <p:cNvSpPr/>
-          <p:nvPr/>
-        </p:nvSpPr>
-        <p:spPr>
-          <a:xfrm>
-            <a:off x="2514600" y="3401568"/>
-            <a:ext cx="2011680" cy="502920"/>
-          </a:xfrm>
-          <a:prstGeom prst="rect">
-            <a:avLst/>
-          </a:prstGeom>
-          <a:noFill/>
-          <a:ln/>
-        </p:spPr>
-        <p:txBody>
-          <a:bodyPr wrap="square" lIns="0" tIns="0" rIns="0" bIns="0" rtlCol="0" anchor="ctr"/>
-          <a:lstStyle/>
-          <a:p>
-            <a:pPr algn="ctr" indent="0" marL="0">
-              <a:buNone/>
-            </a:pPr>
-            <a:r>
-              <a:rPr lang="en-US" sz="1300" b="1" dirty="0">
-                <a:solidFill>
-                  <a:srgbClr val="4338CA"/>
-                </a:solidFill>
-                <a:latin typeface="Trebuchet MS" pitchFamily="34" charset="0"/>
-                <a:ea typeface="Trebuchet MS" pitchFamily="34" charset="-122"/>
-                <a:cs typeface="Trebuchet MS" pitchFamily="34" charset="-120"/>
-              </a:rPr>
-              <a:t>teachable</a:t>
-            </a:r>
-            <a:endParaRPr lang="en-US" sz="1300" dirty="0"/>
-          </a:p>
-        </p:txBody>
-      </p:sp>
-      <p:sp>
-        <p:nvSpPr>
-          <p:cNvPr id="28" name="Shape 26"/>
-          <p:cNvSpPr/>
-          <p:nvPr/>
-        </p:nvSpPr>
-        <p:spPr>
-          <a:xfrm>
-            <a:off x="4663440" y="3401568"/>
-            <a:ext cx="2011680" cy="502920"/>
-          </a:xfrm>
-          <a:prstGeom prst="rect">
-            <a:avLst>
-              <a:gd name="adj" fmla="val 14545"/>
-            </a:avLst>
-          </a:prstGeom>
-          <a:solidFill>
-            <a:srgbClr val="EEF2FF"/>
-          </a:solidFill>
-          <a:ln w="12700">
-            <a:solidFill>
-              <a:srgbClr val="6366F1"/>
-            </a:solidFill>
-            <a:prstDash val="solid"/>
-          </a:ln>
-        </p:spPr>
-      </p:sp>
-      <p:sp>
-        <p:nvSpPr>
-          <p:cNvPr id="29" name="Text 27"/>
-          <p:cNvSpPr/>
-          <p:nvPr/>
-        </p:nvSpPr>
-        <p:spPr>
-          <a:xfrm>
-            <a:off x="4663440" y="3401568"/>
-            <a:ext cx="2011680" cy="502920"/>
-          </a:xfrm>
-          <a:prstGeom prst="rect">
-            <a:avLst/>
-          </a:prstGeom>
-          <a:noFill/>
-          <a:ln/>
-        </p:spPr>
-        <p:txBody>
-          <a:bodyPr wrap="square" lIns="0" tIns="0" rIns="0" bIns="0" rtlCol="0" anchor="ctr"/>
-          <a:lstStyle/>
-          <a:p>
-            <a:pPr algn="ctr" indent="0" marL="0">
-              <a:buNone/>
-            </a:pPr>
-            <a:r>
-              <a:rPr lang="en-US" sz="1300" b="1" dirty="0">
-                <a:solidFill>
-                  <a:srgbClr val="4338CA"/>
-                </a:solidFill>
-                <a:latin typeface="Trebuchet MS" pitchFamily="34" charset="0"/>
-                <a:ea typeface="Trebuchet MS" pitchFamily="34" charset="-122"/>
-                <a:cs typeface="Trebuchet MS" pitchFamily="34" charset="-120"/>
-              </a:rPr>
-              <a:t>coteacher</a:t>
             </a:r>
             <a:endParaRPr lang="en-US" sz="1300" dirty="0"/>
           </a:p>
@@ -39043,7 +36664,7 @@
                 <a:ea typeface="Calibri" pitchFamily="34" charset="-122"/>
                 <a:cs typeface="Calibri" pitchFamily="34" charset="-120"/>
               </a:rPr>
-              <a:t>Word Labs  •  wordlabs.app  •  Root: 'teach' = to show or instruct</a:t>
+              <a:t>Word Labs  •  wordlabs.app  •  Root: 'teach' = to show someone how to do something</a:t>
             </a:r>
             <a:endParaRPr lang="en-US" sz="800" dirty="0"/>
           </a:p>
@@ -39493,7 +37114,7 @@
             <a:avLst/>
           </a:prstGeom>
           <a:solidFill>
-            <a:srgbClr val="DDD6FE"/>
+            <a:srgbClr val="F1F5F9"/>
           </a:solidFill>
           <a:ln w="12700">
             <a:solidFill>
@@ -39505,18 +37126,68 @@
       </p:sp>
       <p:sp>
         <p:nvSpPr>
-          <p:cNvPr id="24" name="Text 22"/>
-          <p:cNvSpPr/>
-          <p:nvPr/>
-        </p:nvSpPr>
-        <p:spPr>
-          <a:xfrm>
-            <a:off x="640080" y="2212848"/>
+          <p:cNvPr id="24" name="Shape 22"/>
+          <p:cNvSpPr/>
+          <p:nvPr/>
+        </p:nvSpPr>
+        <p:spPr>
+          <a:xfrm>
+            <a:off x="3291840" y="2212848"/>
+            <a:ext cx="1645920" cy="420624"/>
+          </a:xfrm>
+          <a:prstGeom prst="rect">
+            <a:avLst/>
+          </a:prstGeom>
+          <a:solidFill>
+            <a:srgbClr val="F1F5F9"/>
+          </a:solidFill>
+          <a:ln w="12700">
+            <a:solidFill>
+              <a:srgbClr val="E5E7EB"/>
+            </a:solidFill>
+            <a:prstDash val="solid"/>
+          </a:ln>
+        </p:spPr>
+      </p:sp>
+      <p:sp>
+        <p:nvSpPr>
+          <p:cNvPr id="25" name="Shape 23"/>
+          <p:cNvSpPr/>
+          <p:nvPr/>
+        </p:nvSpPr>
+        <p:spPr>
+          <a:xfrm>
+            <a:off x="5943600" y="2212848"/>
             <a:ext cx="1463040" cy="420624"/>
           </a:xfrm>
           <a:prstGeom prst="rect">
             <a:avLst/>
           </a:prstGeom>
+          <a:solidFill>
+            <a:srgbClr val="FCE7F3"/>
+          </a:solidFill>
+          <a:ln w="12700">
+            <a:solidFill>
+              <a:srgbClr val="E5E7EB"/>
+            </a:solidFill>
+            <a:prstDash val="solid"/>
+          </a:ln>
+        </p:spPr>
+      </p:sp>
+      <p:sp>
+        <p:nvSpPr>
+          <p:cNvPr id="26" name="Text 24"/>
+          <p:cNvSpPr/>
+          <p:nvPr/>
+        </p:nvSpPr>
+        <p:spPr>
+          <a:xfrm>
+            <a:off x="5943600" y="2212848"/>
+            <a:ext cx="1463040" cy="420624"/>
+          </a:xfrm>
+          <a:prstGeom prst="rect">
+            <a:avLst/>
+          </a:prstGeom>
           <a:noFill/>
           <a:ln/>
         </p:spPr>
@@ -39530,13 +37201,13 @@
             <a:r>
               <a:rPr lang="en-US" sz="1300" b="1" dirty="0">
                 <a:solidFill>
-                  <a:srgbClr val="4C1D95"/>
+                  <a:srgbClr val="9D174D"/>
                 </a:solidFill>
                 <a:latin typeface="Trebuchet MS" pitchFamily="34" charset="0"/>
                 <a:ea typeface="Trebuchet MS" pitchFamily="34" charset="-122"/>
                 <a:cs typeface="Trebuchet MS" pitchFamily="34" charset="-120"/>
               </a:rPr>
-              <a:t>un-</a:t>
+              <a:t>-es</a:t>
             </a:r>
             <a:endParaRPr lang="en-US" sz="1300" dirty="0"/>
           </a:p>
@@ -39544,20 +37215,45 @@
       </p:sp>
       <p:sp>
         <p:nvSpPr>
-          <p:cNvPr id="25" name="Shape 23"/>
-          <p:cNvSpPr/>
-          <p:nvPr/>
-        </p:nvSpPr>
-        <p:spPr>
-          <a:xfrm>
-            <a:off x="3291840" y="2212848"/>
+          <p:cNvPr id="27" name="Shape 25"/>
+          <p:cNvSpPr/>
+          <p:nvPr/>
+        </p:nvSpPr>
+        <p:spPr>
+          <a:xfrm>
+            <a:off x="640080" y="2670048"/>
+            <a:ext cx="1463040" cy="420624"/>
+          </a:xfrm>
+          <a:prstGeom prst="rect">
+            <a:avLst/>
+          </a:prstGeom>
+          <a:solidFill>
+            <a:srgbClr val="F8FAFC"/>
+          </a:solidFill>
+          <a:ln w="12700">
+            <a:solidFill>
+              <a:srgbClr val="E5E7EB"/>
+            </a:solidFill>
+            <a:prstDash val="solid"/>
+          </a:ln>
+        </p:spPr>
+      </p:sp>
+      <p:sp>
+        <p:nvSpPr>
+          <p:cNvPr id="28" name="Shape 26"/>
+          <p:cNvSpPr/>
+          <p:nvPr/>
+        </p:nvSpPr>
+        <p:spPr>
+          <a:xfrm>
+            <a:off x="3291840" y="2670048"/>
             <a:ext cx="1645920" cy="420624"/>
           </a:xfrm>
           <a:prstGeom prst="rect">
             <a:avLst/>
           </a:prstGeom>
           <a:solidFill>
-            <a:srgbClr val="F1F5F9"/>
+            <a:srgbClr val="F8FAFC"/>
           </a:solidFill>
           <a:ln w="12700">
             <a:solidFill>
@@ -39569,13 +37265,13 @@
       </p:sp>
       <p:sp>
         <p:nvSpPr>
-          <p:cNvPr id="26" name="Shape 24"/>
-          <p:cNvSpPr/>
-          <p:nvPr/>
-        </p:nvSpPr>
-        <p:spPr>
-          <a:xfrm>
-            <a:off x="5943600" y="2212848"/>
+          <p:cNvPr id="29" name="Shape 27"/>
+          <p:cNvSpPr/>
+          <p:nvPr/>
+        </p:nvSpPr>
+        <p:spPr>
+          <a:xfrm>
+            <a:off x="5943600" y="2670048"/>
             <a:ext cx="1463040" cy="420624"/>
           </a:xfrm>
           <a:prstGeom prst="rect">
@@ -39594,13 +37290,13 @@
       </p:sp>
       <p:sp>
         <p:nvSpPr>
-          <p:cNvPr id="27" name="Text 25"/>
-          <p:cNvSpPr/>
-          <p:nvPr/>
-        </p:nvSpPr>
-        <p:spPr>
-          <a:xfrm>
-            <a:off x="5943600" y="2212848"/>
+          <p:cNvPr id="30" name="Text 28"/>
+          <p:cNvSpPr/>
+          <p:nvPr/>
+        </p:nvSpPr>
+        <p:spPr>
+          <a:xfrm>
+            <a:off x="5943600" y="2670048"/>
             <a:ext cx="1463040" cy="420624"/>
           </a:xfrm>
           <a:prstGeom prst="rect">
@@ -39633,472 +37329,13 @@
       </p:sp>
       <p:sp>
         <p:nvSpPr>
-          <p:cNvPr id="28" name="Shape 26"/>
-          <p:cNvSpPr/>
-          <p:nvPr/>
-        </p:nvSpPr>
-        <p:spPr>
-          <a:xfrm>
-            <a:off x="640080" y="2670048"/>
-            <a:ext cx="1463040" cy="420624"/>
-          </a:xfrm>
-          <a:prstGeom prst="rect">
-            <a:avLst/>
-          </a:prstGeom>
-          <a:solidFill>
-            <a:srgbClr val="DDD6FE"/>
-          </a:solidFill>
-          <a:ln w="12700">
-            <a:solidFill>
-              <a:srgbClr val="E5E7EB"/>
-            </a:solidFill>
-            <a:prstDash val="solid"/>
-          </a:ln>
-        </p:spPr>
-      </p:sp>
-      <p:sp>
-        <p:nvSpPr>
-          <p:cNvPr id="29" name="Text 27"/>
-          <p:cNvSpPr/>
-          <p:nvPr/>
-        </p:nvSpPr>
-        <p:spPr>
-          <a:xfrm>
-            <a:off x="640080" y="2670048"/>
-            <a:ext cx="1463040" cy="420624"/>
-          </a:xfrm>
-          <a:prstGeom prst="rect">
-            <a:avLst/>
-          </a:prstGeom>
-          <a:noFill/>
-          <a:ln/>
-        </p:spPr>
-        <p:txBody>
-          <a:bodyPr wrap="square" lIns="0" tIns="0" rIns="0" bIns="0" rtlCol="0" anchor="ctr"/>
-          <a:lstStyle/>
-          <a:p>
-            <a:pPr algn="ctr" indent="0" marL="0">
-              <a:buNone/>
-            </a:pPr>
-            <a:r>
-              <a:rPr lang="en-US" sz="1300" b="1" dirty="0">
-                <a:solidFill>
-                  <a:srgbClr val="4C1D95"/>
-                </a:solidFill>
-                <a:latin typeface="Trebuchet MS" pitchFamily="34" charset="0"/>
-                <a:ea typeface="Trebuchet MS" pitchFamily="34" charset="-122"/>
-                <a:cs typeface="Trebuchet MS" pitchFamily="34" charset="-120"/>
-              </a:rPr>
-              <a:t>mis-</a:t>
-            </a:r>
-            <a:endParaRPr lang="en-US" sz="1300" dirty="0"/>
-          </a:p>
-        </p:txBody>
-      </p:sp>
-      <p:sp>
-        <p:nvSpPr>
-          <p:cNvPr id="30" name="Shape 28"/>
-          <p:cNvSpPr/>
-          <p:nvPr/>
-        </p:nvSpPr>
-        <p:spPr>
-          <a:xfrm>
-            <a:off x="3291840" y="2670048"/>
-            <a:ext cx="1645920" cy="420624"/>
-          </a:xfrm>
-          <a:prstGeom prst="rect">
-            <a:avLst/>
-          </a:prstGeom>
-          <a:solidFill>
-            <a:srgbClr val="F8FAFC"/>
-          </a:solidFill>
-          <a:ln w="12700">
-            <a:solidFill>
-              <a:srgbClr val="E5E7EB"/>
-            </a:solidFill>
-            <a:prstDash val="solid"/>
-          </a:ln>
-        </p:spPr>
-      </p:sp>
-      <p:sp>
-        <p:nvSpPr>
-          <p:cNvPr id="31" name="Shape 29"/>
-          <p:cNvSpPr/>
-          <p:nvPr/>
-        </p:nvSpPr>
-        <p:spPr>
-          <a:xfrm>
-            <a:off x="5943600" y="2670048"/>
-            <a:ext cx="1463040" cy="420624"/>
-          </a:xfrm>
-          <a:prstGeom prst="rect">
-            <a:avLst/>
-          </a:prstGeom>
-          <a:solidFill>
-            <a:srgbClr val="FCE7F3"/>
-          </a:solidFill>
-          <a:ln w="12700">
-            <a:solidFill>
-              <a:srgbClr val="E5E7EB"/>
-            </a:solidFill>
-            <a:prstDash val="solid"/>
-          </a:ln>
-        </p:spPr>
-      </p:sp>
-      <p:sp>
-        <p:nvSpPr>
-          <p:cNvPr id="32" name="Text 30"/>
-          <p:cNvSpPr/>
-          <p:nvPr/>
-        </p:nvSpPr>
-        <p:spPr>
-          <a:xfrm>
-            <a:off x="5943600" y="2670048"/>
-            <a:ext cx="1463040" cy="420624"/>
-          </a:xfrm>
-          <a:prstGeom prst="rect">
-            <a:avLst/>
-          </a:prstGeom>
-          <a:noFill/>
-          <a:ln/>
-        </p:spPr>
-        <p:txBody>
-          <a:bodyPr wrap="square" lIns="0" tIns="0" rIns="0" bIns="0" rtlCol="0" anchor="ctr"/>
-          <a:lstStyle/>
-          <a:p>
-            <a:pPr algn="ctr" indent="0" marL="0">
-              <a:buNone/>
-            </a:pPr>
-            <a:r>
-              <a:rPr lang="en-US" sz="1300" b="1" dirty="0">
-                <a:solidFill>
-                  <a:srgbClr val="9D174D"/>
-                </a:solidFill>
-                <a:latin typeface="Trebuchet MS" pitchFamily="34" charset="0"/>
-                <a:ea typeface="Trebuchet MS" pitchFamily="34" charset="-122"/>
-                <a:cs typeface="Trebuchet MS" pitchFamily="34" charset="-120"/>
-              </a:rPr>
-              <a:t>-able</a:t>
-            </a:r>
-            <a:endParaRPr lang="en-US" sz="1300" dirty="0"/>
-          </a:p>
-        </p:txBody>
-      </p:sp>
-      <p:sp>
-        <p:nvSpPr>
-          <p:cNvPr id="33" name="Shape 31"/>
-          <p:cNvSpPr/>
-          <p:nvPr/>
-        </p:nvSpPr>
-        <p:spPr>
-          <a:xfrm>
-            <a:off x="640080" y="3127248"/>
-            <a:ext cx="1463040" cy="420624"/>
-          </a:xfrm>
-          <a:prstGeom prst="rect">
-            <a:avLst/>
-          </a:prstGeom>
-          <a:solidFill>
-            <a:srgbClr val="DDD6FE"/>
-          </a:solidFill>
-          <a:ln w="12700">
-            <a:solidFill>
-              <a:srgbClr val="E5E7EB"/>
-            </a:solidFill>
-            <a:prstDash val="solid"/>
-          </a:ln>
-        </p:spPr>
-      </p:sp>
-      <p:sp>
-        <p:nvSpPr>
-          <p:cNvPr id="34" name="Text 32"/>
-          <p:cNvSpPr/>
-          <p:nvPr/>
-        </p:nvSpPr>
-        <p:spPr>
-          <a:xfrm>
-            <a:off x="640080" y="3127248"/>
-            <a:ext cx="1463040" cy="420624"/>
-          </a:xfrm>
-          <a:prstGeom prst="rect">
-            <a:avLst/>
-          </a:prstGeom>
-          <a:noFill/>
-          <a:ln/>
-        </p:spPr>
-        <p:txBody>
-          <a:bodyPr wrap="square" lIns="0" tIns="0" rIns="0" bIns="0" rtlCol="0" anchor="ctr"/>
-          <a:lstStyle/>
-          <a:p>
-            <a:pPr algn="ctr" indent="0" marL="0">
-              <a:buNone/>
-            </a:pPr>
-            <a:r>
-              <a:rPr lang="en-US" sz="1300" b="1" dirty="0">
-                <a:solidFill>
-                  <a:srgbClr val="4C1D95"/>
-                </a:solidFill>
-                <a:latin typeface="Trebuchet MS" pitchFamily="34" charset="0"/>
-                <a:ea typeface="Trebuchet MS" pitchFamily="34" charset="-122"/>
-                <a:cs typeface="Trebuchet MS" pitchFamily="34" charset="-120"/>
-              </a:rPr>
-              <a:t>out-</a:t>
-            </a:r>
-            <a:endParaRPr lang="en-US" sz="1300" dirty="0"/>
-          </a:p>
-        </p:txBody>
-      </p:sp>
-      <p:sp>
-        <p:nvSpPr>
-          <p:cNvPr id="35" name="Shape 33"/>
-          <p:cNvSpPr/>
-          <p:nvPr/>
-        </p:nvSpPr>
-        <p:spPr>
-          <a:xfrm>
-            <a:off x="3291840" y="3127248"/>
-            <a:ext cx="1645920" cy="420624"/>
-          </a:xfrm>
-          <a:prstGeom prst="rect">
-            <a:avLst/>
-          </a:prstGeom>
-          <a:solidFill>
-            <a:srgbClr val="F1F5F9"/>
-          </a:solidFill>
-          <a:ln w="12700">
-            <a:solidFill>
-              <a:srgbClr val="E5E7EB"/>
-            </a:solidFill>
-            <a:prstDash val="solid"/>
-          </a:ln>
-        </p:spPr>
-      </p:sp>
-      <p:sp>
-        <p:nvSpPr>
-          <p:cNvPr id="36" name="Shape 34"/>
-          <p:cNvSpPr/>
-          <p:nvPr/>
-        </p:nvSpPr>
-        <p:spPr>
-          <a:xfrm>
-            <a:off x="5943600" y="3127248"/>
-            <a:ext cx="1463040" cy="420624"/>
-          </a:xfrm>
-          <a:prstGeom prst="rect">
-            <a:avLst/>
-          </a:prstGeom>
-          <a:solidFill>
-            <a:srgbClr val="FCE7F3"/>
-          </a:solidFill>
-          <a:ln w="12700">
-            <a:solidFill>
-              <a:srgbClr val="E5E7EB"/>
-            </a:solidFill>
-            <a:prstDash val="solid"/>
-          </a:ln>
-        </p:spPr>
-      </p:sp>
-      <p:sp>
-        <p:nvSpPr>
-          <p:cNvPr id="37" name="Text 35"/>
-          <p:cNvSpPr/>
-          <p:nvPr/>
-        </p:nvSpPr>
-        <p:spPr>
-          <a:xfrm>
-            <a:off x="5943600" y="3127248"/>
-            <a:ext cx="1463040" cy="420624"/>
-          </a:xfrm>
-          <a:prstGeom prst="rect">
-            <a:avLst/>
-          </a:prstGeom>
-          <a:noFill/>
-          <a:ln/>
-        </p:spPr>
-        <p:txBody>
-          <a:bodyPr wrap="square" lIns="0" tIns="0" rIns="0" bIns="0" rtlCol="0" anchor="ctr"/>
-          <a:lstStyle/>
-          <a:p>
-            <a:pPr algn="ctr" indent="0" marL="0">
-              <a:buNone/>
-            </a:pPr>
-            <a:r>
-              <a:rPr lang="en-US" sz="1300" b="1" dirty="0">
-                <a:solidFill>
-                  <a:srgbClr val="9D174D"/>
-                </a:solidFill>
-                <a:latin typeface="Trebuchet MS" pitchFamily="34" charset="0"/>
-                <a:ea typeface="Trebuchet MS" pitchFamily="34" charset="-122"/>
-                <a:cs typeface="Trebuchet MS" pitchFamily="34" charset="-120"/>
-              </a:rPr>
-              <a:t>-ers</a:t>
-            </a:r>
-            <a:endParaRPr lang="en-US" sz="1300" dirty="0"/>
-          </a:p>
-        </p:txBody>
-      </p:sp>
-      <p:sp>
-        <p:nvSpPr>
-          <p:cNvPr id="38" name="Shape 36"/>
-          <p:cNvSpPr/>
-          <p:nvPr/>
-        </p:nvSpPr>
-        <p:spPr>
-          <a:xfrm>
-            <a:off x="640080" y="3584448"/>
-            <a:ext cx="1463040" cy="420624"/>
-          </a:xfrm>
-          <a:prstGeom prst="rect">
-            <a:avLst/>
-          </a:prstGeom>
-          <a:solidFill>
-            <a:srgbClr val="DDD6FE"/>
-          </a:solidFill>
-          <a:ln w="12700">
-            <a:solidFill>
-              <a:srgbClr val="E5E7EB"/>
-            </a:solidFill>
-            <a:prstDash val="solid"/>
-          </a:ln>
-        </p:spPr>
-      </p:sp>
-      <p:sp>
-        <p:nvSpPr>
-          <p:cNvPr id="39" name="Text 37"/>
-          <p:cNvSpPr/>
-          <p:nvPr/>
-        </p:nvSpPr>
-        <p:spPr>
-          <a:xfrm>
-            <a:off x="640080" y="3584448"/>
-            <a:ext cx="1463040" cy="420624"/>
-          </a:xfrm>
-          <a:prstGeom prst="rect">
-            <a:avLst/>
-          </a:prstGeom>
-          <a:noFill/>
-          <a:ln/>
-        </p:spPr>
-        <p:txBody>
-          <a:bodyPr wrap="square" lIns="0" tIns="0" rIns="0" bIns="0" rtlCol="0" anchor="ctr"/>
-          <a:lstStyle/>
-          <a:p>
-            <a:pPr algn="ctr" indent="0" marL="0">
-              <a:buNone/>
-            </a:pPr>
-            <a:r>
-              <a:rPr lang="en-US" sz="1300" b="1" dirty="0">
-                <a:solidFill>
-                  <a:srgbClr val="4C1D95"/>
-                </a:solidFill>
-                <a:latin typeface="Trebuchet MS" pitchFamily="34" charset="0"/>
-                <a:ea typeface="Trebuchet MS" pitchFamily="34" charset="-122"/>
-                <a:cs typeface="Trebuchet MS" pitchFamily="34" charset="-120"/>
-              </a:rPr>
-              <a:t>co-</a:t>
-            </a:r>
-            <a:endParaRPr lang="en-US" sz="1300" dirty="0"/>
-          </a:p>
-        </p:txBody>
-      </p:sp>
-      <p:sp>
-        <p:nvSpPr>
-          <p:cNvPr id="40" name="Shape 38"/>
-          <p:cNvSpPr/>
-          <p:nvPr/>
-        </p:nvSpPr>
-        <p:spPr>
-          <a:xfrm>
-            <a:off x="3291840" y="3584448"/>
-            <a:ext cx="1645920" cy="420624"/>
-          </a:xfrm>
-          <a:prstGeom prst="rect">
-            <a:avLst/>
-          </a:prstGeom>
-          <a:solidFill>
-            <a:srgbClr val="F8FAFC"/>
-          </a:solidFill>
-          <a:ln w="12700">
-            <a:solidFill>
-              <a:srgbClr val="E5E7EB"/>
-            </a:solidFill>
-            <a:prstDash val="solid"/>
-          </a:ln>
-        </p:spPr>
-      </p:sp>
-      <p:sp>
-        <p:nvSpPr>
-          <p:cNvPr id="41" name="Shape 39"/>
-          <p:cNvSpPr/>
-          <p:nvPr/>
-        </p:nvSpPr>
-        <p:spPr>
-          <a:xfrm>
-            <a:off x="5943600" y="3584448"/>
-            <a:ext cx="1463040" cy="420624"/>
-          </a:xfrm>
-          <a:prstGeom prst="rect">
-            <a:avLst/>
-          </a:prstGeom>
-          <a:solidFill>
-            <a:srgbClr val="FCE7F3"/>
-          </a:solidFill>
-          <a:ln w="12700">
-            <a:solidFill>
-              <a:srgbClr val="E5E7EB"/>
-            </a:solidFill>
-            <a:prstDash val="solid"/>
-          </a:ln>
-        </p:spPr>
-      </p:sp>
-      <p:sp>
-        <p:nvSpPr>
-          <p:cNvPr id="42" name="Text 40"/>
-          <p:cNvSpPr/>
-          <p:nvPr/>
-        </p:nvSpPr>
-        <p:spPr>
-          <a:xfrm>
-            <a:off x="5943600" y="3584448"/>
-            <a:ext cx="1463040" cy="420624"/>
-          </a:xfrm>
-          <a:prstGeom prst="rect">
-            <a:avLst/>
-          </a:prstGeom>
-          <a:noFill/>
-          <a:ln/>
-        </p:spPr>
-        <p:txBody>
-          <a:bodyPr wrap="square" lIns="0" tIns="0" rIns="0" bIns="0" rtlCol="0" anchor="ctr"/>
-          <a:lstStyle/>
-          <a:p>
-            <a:pPr algn="ctr" indent="0" marL="0">
-              <a:buNone/>
-            </a:pPr>
-            <a:r>
-              <a:rPr lang="en-US" sz="1300" b="1" dirty="0">
-                <a:solidFill>
-                  <a:srgbClr val="9D174D"/>
-                </a:solidFill>
-                <a:latin typeface="Trebuchet MS" pitchFamily="34" charset="0"/>
-                <a:ea typeface="Trebuchet MS" pitchFamily="34" charset="-122"/>
-                <a:cs typeface="Trebuchet MS" pitchFamily="34" charset="-120"/>
-              </a:rPr>
-              <a:t>-ings</a:t>
-            </a:r>
-            <a:endParaRPr lang="en-US" sz="1300" dirty="0"/>
-          </a:p>
-        </p:txBody>
-      </p:sp>
-      <p:sp>
-        <p:nvSpPr>
-          <p:cNvPr id="43" name="Text 41"/>
-          <p:cNvSpPr/>
-          <p:nvPr/>
-        </p:nvSpPr>
-        <p:spPr>
-          <a:xfrm>
-            <a:off x="365760" y="4178808"/>
+          <p:cNvPr id="31" name="Text 29"/>
+          <p:cNvSpPr/>
+          <p:nvPr/>
+        </p:nvSpPr>
+        <p:spPr>
+          <a:xfrm>
+            <a:off x="365760" y="3264408"/>
             <a:ext cx="1097280" cy="420624"/>
           </a:xfrm>
           <a:prstGeom prst="rect">
@@ -40131,13 +37368,13 @@
       </p:sp>
       <p:sp>
         <p:nvSpPr>
-          <p:cNvPr id="44" name="Shape 42"/>
-          <p:cNvSpPr/>
-          <p:nvPr/>
-        </p:nvSpPr>
-        <p:spPr>
-          <a:xfrm>
-            <a:off x="1508760" y="4178808"/>
+          <p:cNvPr id="32" name="Shape 30"/>
+          <p:cNvSpPr/>
+          <p:nvPr/>
+        </p:nvSpPr>
+        <p:spPr>
+          <a:xfrm>
+            <a:off x="1508760" y="3264408"/>
             <a:ext cx="822960" cy="420624"/>
           </a:xfrm>
           <a:prstGeom prst="rect">
@@ -40165,13 +37402,13 @@
       </p:sp>
       <p:sp>
         <p:nvSpPr>
-          <p:cNvPr id="45" name="Text 43"/>
-          <p:cNvSpPr/>
-          <p:nvPr/>
-        </p:nvSpPr>
-        <p:spPr>
-          <a:xfrm>
-            <a:off x="1508760" y="4178808"/>
+          <p:cNvPr id="33" name="Text 31"/>
+          <p:cNvSpPr/>
+          <p:nvPr/>
+        </p:nvSpPr>
+        <p:spPr>
+          <a:xfrm>
+            <a:off x="1508760" y="3264408"/>
             <a:ext cx="822960" cy="420624"/>
           </a:xfrm>
           <a:prstGeom prst="rect">
@@ -40204,13 +37441,13 @@
       </p:sp>
       <p:sp>
         <p:nvSpPr>
-          <p:cNvPr id="46" name="Text 44"/>
-          <p:cNvSpPr/>
-          <p:nvPr/>
-        </p:nvSpPr>
-        <p:spPr>
-          <a:xfrm>
-            <a:off x="2359152" y="4178808"/>
+          <p:cNvPr id="34" name="Text 32"/>
+          <p:cNvSpPr/>
+          <p:nvPr/>
+        </p:nvSpPr>
+        <p:spPr>
+          <a:xfrm>
+            <a:off x="2359152" y="3264408"/>
             <a:ext cx="320040" cy="420624"/>
           </a:xfrm>
           <a:prstGeom prst="rect">
@@ -40243,13 +37480,13 @@
       </p:sp>
       <p:sp>
         <p:nvSpPr>
-          <p:cNvPr id="47" name="Shape 45"/>
-          <p:cNvSpPr/>
-          <p:nvPr/>
-        </p:nvSpPr>
-        <p:spPr>
-          <a:xfrm>
-            <a:off x="2706624" y="4178808"/>
+          <p:cNvPr id="35" name="Shape 33"/>
+          <p:cNvSpPr/>
+          <p:nvPr/>
+        </p:nvSpPr>
+        <p:spPr>
+          <a:xfrm>
+            <a:off x="2706624" y="3264408"/>
             <a:ext cx="1389888" cy="420624"/>
           </a:xfrm>
           <a:prstGeom prst="rect">
@@ -40277,13 +37514,13 @@
       </p:sp>
       <p:sp>
         <p:nvSpPr>
-          <p:cNvPr id="48" name="Text 46"/>
-          <p:cNvSpPr/>
-          <p:nvPr/>
-        </p:nvSpPr>
-        <p:spPr>
-          <a:xfrm>
-            <a:off x="2706624" y="4178808"/>
+          <p:cNvPr id="36" name="Text 34"/>
+          <p:cNvSpPr/>
+          <p:nvPr/>
+        </p:nvSpPr>
+        <p:spPr>
+          <a:xfrm>
+            <a:off x="2706624" y="3264408"/>
             <a:ext cx="1389888" cy="420624"/>
           </a:xfrm>
           <a:prstGeom prst="rect">
@@ -40316,13 +37553,13 @@
       </p:sp>
       <p:sp>
         <p:nvSpPr>
-          <p:cNvPr id="49" name="Text 47"/>
-          <p:cNvSpPr/>
-          <p:nvPr/>
-        </p:nvSpPr>
-        <p:spPr>
-          <a:xfrm>
-            <a:off x="4123944" y="4178808"/>
+          <p:cNvPr id="37" name="Text 35"/>
+          <p:cNvSpPr/>
+          <p:nvPr/>
+        </p:nvSpPr>
+        <p:spPr>
+          <a:xfrm>
+            <a:off x="4123944" y="3264408"/>
             <a:ext cx="320040" cy="420624"/>
           </a:xfrm>
           <a:prstGeom prst="rect">
@@ -40355,13 +37592,13 @@
       </p:sp>
       <p:sp>
         <p:nvSpPr>
-          <p:cNvPr id="50" name="Shape 48"/>
-          <p:cNvSpPr/>
-          <p:nvPr/>
-        </p:nvSpPr>
-        <p:spPr>
-          <a:xfrm>
-            <a:off x="4471416" y="4178808"/>
+          <p:cNvPr id="38" name="Shape 36"/>
+          <p:cNvSpPr/>
+          <p:nvPr/>
+        </p:nvSpPr>
+        <p:spPr>
+          <a:xfrm>
+            <a:off x="4471416" y="3264408"/>
             <a:ext cx="822960" cy="420624"/>
           </a:xfrm>
           <a:prstGeom prst="rect">
@@ -40389,13 +37626,13 @@
       </p:sp>
       <p:sp>
         <p:nvSpPr>
-          <p:cNvPr id="51" name="Text 49"/>
-          <p:cNvSpPr/>
-          <p:nvPr/>
-        </p:nvSpPr>
-        <p:spPr>
-          <a:xfrm>
-            <a:off x="4471416" y="4178808"/>
+          <p:cNvPr id="39" name="Text 37"/>
+          <p:cNvSpPr/>
+          <p:nvPr/>
+        </p:nvSpPr>
+        <p:spPr>
+          <a:xfrm>
+            <a:off x="4471416" y="3264408"/>
             <a:ext cx="822960" cy="420624"/>
           </a:xfrm>
           <a:prstGeom prst="rect">
@@ -40428,13 +37665,13 @@
       </p:sp>
       <p:sp>
         <p:nvSpPr>
-          <p:cNvPr id="52" name="Text 50"/>
-          <p:cNvSpPr/>
-          <p:nvPr/>
-        </p:nvSpPr>
-        <p:spPr>
-          <a:xfrm>
-            <a:off x="5367528" y="4178808"/>
+          <p:cNvPr id="40" name="Text 38"/>
+          <p:cNvSpPr/>
+          <p:nvPr/>
+        </p:nvSpPr>
+        <p:spPr>
+          <a:xfrm>
+            <a:off x="5367528" y="3264408"/>
             <a:ext cx="365760" cy="420624"/>
           </a:xfrm>
           <a:prstGeom prst="rect">
@@ -40467,13 +37704,13 @@
       </p:sp>
       <p:sp>
         <p:nvSpPr>
-          <p:cNvPr id="53" name="Shape 51"/>
-          <p:cNvSpPr/>
-          <p:nvPr/>
-        </p:nvSpPr>
-        <p:spPr>
-          <a:xfrm>
-            <a:off x="5779008" y="4178808"/>
+          <p:cNvPr id="41" name="Shape 39"/>
+          <p:cNvSpPr/>
+          <p:nvPr/>
+        </p:nvSpPr>
+        <p:spPr>
+          <a:xfrm>
+            <a:off x="5779008" y="3264408"/>
             <a:ext cx="2194560" cy="420624"/>
           </a:xfrm>
           <a:prstGeom prst="rect">
@@ -40494,13 +37731,13 @@
       </p:sp>
       <p:sp>
         <p:nvSpPr>
-          <p:cNvPr id="54" name="Text 52"/>
-          <p:cNvSpPr/>
-          <p:nvPr/>
-        </p:nvSpPr>
-        <p:spPr>
-          <a:xfrm>
-            <a:off x="5779008" y="4178808"/>
+          <p:cNvPr id="42" name="Text 40"/>
+          <p:cNvSpPr/>
+          <p:nvPr/>
+        </p:nvSpPr>
+        <p:spPr>
+          <a:xfrm>
+            <a:off x="5779008" y="3264408"/>
             <a:ext cx="2194560" cy="420624"/>
           </a:xfrm>
           <a:prstGeom prst="rect">
@@ -40525,7 +37762,7 @@
                 <a:ea typeface="Trebuchet MS" pitchFamily="34" charset="-122"/>
                 <a:cs typeface="Trebuchet MS" pitchFamily="34" charset="-120"/>
               </a:rPr>
-              <a:t>teacher</a:t>
+              <a:t>teach</a:t>
             </a:r>
             <a:endParaRPr lang="en-US" sz="1400" dirty="0"/>
           </a:p>
@@ -40817,7 +38054,7 @@
                 <a:ea typeface="Calibri" pitchFamily="34" charset="-122"/>
                 <a:cs typeface="Calibri" pitchFamily="34" charset="-120"/>
               </a:rPr>
-              <a:t>Word Labs  •  wordlabs.app  •  Root: 'teach' = to show or instruct</a:t>
+              <a:t>Word Labs  •  wordlabs.app  •  Root: 'teach' = to show someone how to do something</a:t>
             </a:r>
             <a:endParaRPr lang="en-US" sz="800" dirty="0"/>
           </a:p>
@@ -40929,7 +38166,7 @@
                 <a:ea typeface="Trebuchet MS" pitchFamily="34" charset="-122"/>
                 <a:cs typeface="Trebuchet MS" pitchFamily="34" charset="-120"/>
               </a:rPr>
-              <a:t>teacher</a:t>
+              <a:t>teach</a:t>
             </a:r>
             <a:endParaRPr lang="en-US" sz="1200" dirty="0"/>
           </a:p>
@@ -40995,7 +38232,7 @@
                 <a:ea typeface="Calibri" pitchFamily="34" charset="-122"/>
                 <a:cs typeface="Calibri" pitchFamily="34" charset="-120"/>
               </a:rPr>
-              <a:t>A person whose job is to help others learn new things.</a:t>
+              <a:t>to help someone learn something</a:t>
             </a:r>
             <a:endParaRPr lang="en-US" sz="1200" dirty="0"/>
           </a:p>
@@ -41068,7 +38305,7 @@
                 <a:ea typeface="Trebuchet MS" pitchFamily="34" charset="-122"/>
                 <a:cs typeface="Trebuchet MS" pitchFamily="34" charset="-120"/>
               </a:rPr>
-              <a:t>teaching</a:t>
+              <a:t>reteach</a:t>
             </a:r>
             <a:endParaRPr lang="en-US" sz="1200" dirty="0"/>
           </a:p>
@@ -41134,702 +38371,7 @@
                 <a:ea typeface="Calibri" pitchFamily="34" charset="-122"/>
                 <a:cs typeface="Calibri" pitchFamily="34" charset="-120"/>
               </a:rPr>
-              <a:t>More than one person whose job is to help others learn.</a:t>
-            </a:r>
-            <a:endParaRPr lang="en-US" sz="1200" dirty="0"/>
-          </a:p>
-        </p:txBody>
-      </p:sp>
-      <p:sp>
-        <p:nvSpPr>
-          <p:cNvPr id="19" name="Shape 17"/>
-          <p:cNvSpPr/>
-          <p:nvPr/>
-        </p:nvSpPr>
-        <p:spPr>
-          <a:xfrm>
-            <a:off x="365760" y="2249424"/>
-            <a:ext cx="2011680" cy="457200"/>
-          </a:xfrm>
-          <a:prstGeom prst="rect">
-            <a:avLst>
-              <a:gd name="adj" fmla="val 12000"/>
-            </a:avLst>
-          </a:prstGeom>
-          <a:solidFill>
-            <a:srgbClr val="EEF2FF"/>
-          </a:solidFill>
-          <a:ln w="12700">
-            <a:solidFill>
-              <a:srgbClr val="6366F1"/>
-            </a:solidFill>
-            <a:prstDash val="solid"/>
-          </a:ln>
-          <a:effectLst>
-            <a:outerShdw sx="100000" sy="100000" kx="0" ky="0" algn="bl" rotWithShape="0" blurRad="101600" dist="38100" dir="8100000">
-              <a:srgbClr val="000000">
-                <a:alpha val="12000"/>
-              </a:srgbClr>
-            </a:outerShdw>
-          </a:effectLst>
-        </p:spPr>
-      </p:sp>
-      <p:sp>
-        <p:nvSpPr>
-          <p:cNvPr id="20" name="Text 18"/>
-          <p:cNvSpPr/>
-          <p:nvPr/>
-        </p:nvSpPr>
-        <p:spPr>
-          <a:xfrm>
-            <a:off x="365760" y="2249424"/>
-            <a:ext cx="2011680" cy="457200"/>
-          </a:xfrm>
-          <a:prstGeom prst="rect">
-            <a:avLst/>
-          </a:prstGeom>
-          <a:noFill/>
-          <a:ln/>
-        </p:spPr>
-        <p:txBody>
-          <a:bodyPr wrap="square" lIns="0" tIns="0" rIns="0" bIns="0" rtlCol="0" anchor="ctr"/>
-          <a:lstStyle/>
-          <a:p>
-            <a:pPr algn="ctr" indent="0" marL="0">
-              <a:buNone/>
-            </a:pPr>
-            <a:r>
-              <a:rPr lang="en-US" sz="1200" b="1" dirty="0">
-                <a:solidFill>
-                  <a:srgbClr val="4338CA"/>
-                </a:solidFill>
-                <a:latin typeface="Trebuchet MS" pitchFamily="34" charset="0"/>
-                <a:ea typeface="Trebuchet MS" pitchFamily="34" charset="-122"/>
-                <a:cs typeface="Trebuchet MS" pitchFamily="34" charset="-120"/>
-              </a:rPr>
-              <a:t>teachers</a:t>
-            </a:r>
-            <a:endParaRPr lang="en-US" sz="1200" dirty="0"/>
-          </a:p>
-        </p:txBody>
-      </p:sp>
-      <p:sp>
-        <p:nvSpPr>
-          <p:cNvPr id="21" name="Shape 19"/>
-          <p:cNvSpPr/>
-          <p:nvPr/>
-        </p:nvSpPr>
-        <p:spPr>
-          <a:xfrm>
-            <a:off x="2514600" y="2249424"/>
-            <a:ext cx="6263640" cy="457200"/>
-          </a:xfrm>
-          <a:prstGeom prst="rect">
-            <a:avLst>
-              <a:gd name="adj" fmla="val 12000"/>
-            </a:avLst>
-          </a:prstGeom>
-          <a:solidFill>
-            <a:srgbClr val="F8FAFC"/>
-          </a:solidFill>
-          <a:ln w="12700">
-            <a:solidFill>
-              <a:srgbClr val="E2E8F0"/>
-            </a:solidFill>
-            <a:prstDash val="solid"/>
-          </a:ln>
-        </p:spPr>
-      </p:sp>
-      <p:sp>
-        <p:nvSpPr>
-          <p:cNvPr id="22" name="Text 20"/>
-          <p:cNvSpPr/>
-          <p:nvPr/>
-        </p:nvSpPr>
-        <p:spPr>
-          <a:xfrm>
-            <a:off x="2651760" y="2249424"/>
-            <a:ext cx="6035040" cy="457200"/>
-          </a:xfrm>
-          <a:prstGeom prst="rect">
-            <a:avLst/>
-          </a:prstGeom>
-          <a:noFill/>
-          <a:ln/>
-        </p:spPr>
-        <p:txBody>
-          <a:bodyPr wrap="square" rtlCol="0" anchor="ctr"/>
-          <a:lstStyle/>
-          <a:p>
-            <a:pPr algn="l" indent="0" marL="0">
-              <a:buNone/>
-            </a:pPr>
-            <a:r>
-              <a:rPr lang="en-US" sz="1200" dirty="0">
-                <a:solidFill>
-                  <a:srgbClr val="0F172A"/>
-                </a:solidFill>
-                <a:latin typeface="Calibri" pitchFamily="34" charset="0"/>
-                <a:ea typeface="Calibri" pitchFamily="34" charset="-122"/>
-                <a:cs typeface="Calibri" pitchFamily="34" charset="-120"/>
-              </a:rPr>
-              <a:t>Able to be taught; describes someone who is willing and ready to learn.</a:t>
-            </a:r>
-            <a:endParaRPr lang="en-US" sz="1200" dirty="0"/>
-          </a:p>
-        </p:txBody>
-      </p:sp>
-      <p:sp>
-        <p:nvSpPr>
-          <p:cNvPr id="23" name="Shape 21"/>
-          <p:cNvSpPr/>
-          <p:nvPr/>
-        </p:nvSpPr>
-        <p:spPr>
-          <a:xfrm>
-            <a:off x="365760" y="2779776"/>
-            <a:ext cx="2011680" cy="457200"/>
-          </a:xfrm>
-          <a:prstGeom prst="rect">
-            <a:avLst>
-              <a:gd name="adj" fmla="val 12000"/>
-            </a:avLst>
-          </a:prstGeom>
-          <a:solidFill>
-            <a:srgbClr val="EEF2FF"/>
-          </a:solidFill>
-          <a:ln w="12700">
-            <a:solidFill>
-              <a:srgbClr val="6366F1"/>
-            </a:solidFill>
-            <a:prstDash val="solid"/>
-          </a:ln>
-          <a:effectLst>
-            <a:outerShdw sx="100000" sy="100000" kx="0" ky="0" algn="bl" rotWithShape="0" blurRad="101600" dist="38100" dir="8100000">
-              <a:srgbClr val="000000">
-                <a:alpha val="12000"/>
-              </a:srgbClr>
-            </a:outerShdw>
-          </a:effectLst>
-        </p:spPr>
-      </p:sp>
-      <p:sp>
-        <p:nvSpPr>
-          <p:cNvPr id="24" name="Text 22"/>
-          <p:cNvSpPr/>
-          <p:nvPr/>
-        </p:nvSpPr>
-        <p:spPr>
-          <a:xfrm>
-            <a:off x="365760" y="2779776"/>
-            <a:ext cx="2011680" cy="457200"/>
-          </a:xfrm>
-          <a:prstGeom prst="rect">
-            <a:avLst/>
-          </a:prstGeom>
-          <a:noFill/>
-          <a:ln/>
-        </p:spPr>
-        <p:txBody>
-          <a:bodyPr wrap="square" lIns="0" tIns="0" rIns="0" bIns="0" rtlCol="0" anchor="ctr"/>
-          <a:lstStyle/>
-          <a:p>
-            <a:pPr algn="ctr" indent="0" marL="0">
-              <a:buNone/>
-            </a:pPr>
-            <a:r>
-              <a:rPr lang="en-US" sz="1200" b="1" dirty="0">
-                <a:solidFill>
-                  <a:srgbClr val="4338CA"/>
-                </a:solidFill>
-                <a:latin typeface="Trebuchet MS" pitchFamily="34" charset="0"/>
-                <a:ea typeface="Trebuchet MS" pitchFamily="34" charset="-122"/>
-                <a:cs typeface="Trebuchet MS" pitchFamily="34" charset="-120"/>
-              </a:rPr>
-              <a:t>reteach</a:t>
-            </a:r>
-            <a:endParaRPr lang="en-US" sz="1200" dirty="0"/>
-          </a:p>
-        </p:txBody>
-      </p:sp>
-      <p:sp>
-        <p:nvSpPr>
-          <p:cNvPr id="25" name="Shape 23"/>
-          <p:cNvSpPr/>
-          <p:nvPr/>
-        </p:nvSpPr>
-        <p:spPr>
-          <a:xfrm>
-            <a:off x="2514600" y="2779776"/>
-            <a:ext cx="6263640" cy="457200"/>
-          </a:xfrm>
-          <a:prstGeom prst="rect">
-            <a:avLst>
-              <a:gd name="adj" fmla="val 12000"/>
-            </a:avLst>
-          </a:prstGeom>
-          <a:solidFill>
-            <a:srgbClr val="F8FAFC"/>
-          </a:solidFill>
-          <a:ln w="12700">
-            <a:solidFill>
-              <a:srgbClr val="E2E8F0"/>
-            </a:solidFill>
-            <a:prstDash val="solid"/>
-          </a:ln>
-        </p:spPr>
-      </p:sp>
-      <p:sp>
-        <p:nvSpPr>
-          <p:cNvPr id="26" name="Text 24"/>
-          <p:cNvSpPr/>
-          <p:nvPr/>
-        </p:nvSpPr>
-        <p:spPr>
-          <a:xfrm>
-            <a:off x="2651760" y="2779776"/>
-            <a:ext cx="6035040" cy="457200"/>
-          </a:xfrm>
-          <a:prstGeom prst="rect">
-            <a:avLst/>
-          </a:prstGeom>
-          <a:noFill/>
-          <a:ln/>
-        </p:spPr>
-        <p:txBody>
-          <a:bodyPr wrap="square" rtlCol="0" anchor="ctr"/>
-          <a:lstStyle/>
-          <a:p>
-            <a:pPr algn="l" indent="0" marL="0">
-              <a:buNone/>
-            </a:pPr>
-            <a:r>
-              <a:rPr lang="en-US" sz="1200" dirty="0">
-                <a:solidFill>
-                  <a:srgbClr val="0F172A"/>
-                </a:solidFill>
-                <a:latin typeface="Calibri" pitchFamily="34" charset="0"/>
-                <a:ea typeface="Calibri" pitchFamily="34" charset="-122"/>
-                <a:cs typeface="Calibri" pitchFamily="34" charset="-120"/>
-              </a:rPr>
-              <a:t>To teach something again, often because it wasn't understood the first time.</a:t>
-            </a:r>
-            <a:endParaRPr lang="en-US" sz="1200" dirty="0"/>
-          </a:p>
-        </p:txBody>
-      </p:sp>
-      <p:sp>
-        <p:nvSpPr>
-          <p:cNvPr id="27" name="Shape 25"/>
-          <p:cNvSpPr/>
-          <p:nvPr/>
-        </p:nvSpPr>
-        <p:spPr>
-          <a:xfrm>
-            <a:off x="365760" y="3310128"/>
-            <a:ext cx="2011680" cy="457200"/>
-          </a:xfrm>
-          <a:prstGeom prst="rect">
-            <a:avLst>
-              <a:gd name="adj" fmla="val 12000"/>
-            </a:avLst>
-          </a:prstGeom>
-          <a:solidFill>
-            <a:srgbClr val="EEF2FF"/>
-          </a:solidFill>
-          <a:ln w="12700">
-            <a:solidFill>
-              <a:srgbClr val="6366F1"/>
-            </a:solidFill>
-            <a:prstDash val="solid"/>
-          </a:ln>
-          <a:effectLst>
-            <a:outerShdw sx="100000" sy="100000" kx="0" ky="0" algn="bl" rotWithShape="0" blurRad="101600" dist="38100" dir="8100000">
-              <a:srgbClr val="000000">
-                <a:alpha val="12000"/>
-              </a:srgbClr>
-            </a:outerShdw>
-          </a:effectLst>
-        </p:spPr>
-      </p:sp>
-      <p:sp>
-        <p:nvSpPr>
-          <p:cNvPr id="28" name="Text 26"/>
-          <p:cNvSpPr/>
-          <p:nvPr/>
-        </p:nvSpPr>
-        <p:spPr>
-          <a:xfrm>
-            <a:off x="365760" y="3310128"/>
-            <a:ext cx="2011680" cy="457200"/>
-          </a:xfrm>
-          <a:prstGeom prst="rect">
-            <a:avLst/>
-          </a:prstGeom>
-          <a:noFill/>
-          <a:ln/>
-        </p:spPr>
-        <p:txBody>
-          <a:bodyPr wrap="square" lIns="0" tIns="0" rIns="0" bIns="0" rtlCol="0" anchor="ctr"/>
-          <a:lstStyle/>
-          <a:p>
-            <a:pPr algn="ctr" indent="0" marL="0">
-              <a:buNone/>
-            </a:pPr>
-            <a:r>
-              <a:rPr lang="en-US" sz="1200" b="1" dirty="0">
-                <a:solidFill>
-                  <a:srgbClr val="4338CA"/>
-                </a:solidFill>
-                <a:latin typeface="Trebuchet MS" pitchFamily="34" charset="0"/>
-                <a:ea typeface="Trebuchet MS" pitchFamily="34" charset="-122"/>
-                <a:cs typeface="Trebuchet MS" pitchFamily="34" charset="-120"/>
-              </a:rPr>
-              <a:t>teachings</a:t>
-            </a:r>
-            <a:endParaRPr lang="en-US" sz="1200" dirty="0"/>
-          </a:p>
-        </p:txBody>
-      </p:sp>
-      <p:sp>
-        <p:nvSpPr>
-          <p:cNvPr id="29" name="Shape 27"/>
-          <p:cNvSpPr/>
-          <p:nvPr/>
-        </p:nvSpPr>
-        <p:spPr>
-          <a:xfrm>
-            <a:off x="2514600" y="3310128"/>
-            <a:ext cx="6263640" cy="457200"/>
-          </a:xfrm>
-          <a:prstGeom prst="rect">
-            <a:avLst>
-              <a:gd name="adj" fmla="val 12000"/>
-            </a:avLst>
-          </a:prstGeom>
-          <a:solidFill>
-            <a:srgbClr val="F8FAFC"/>
-          </a:solidFill>
-          <a:ln w="12700">
-            <a:solidFill>
-              <a:srgbClr val="E2E8F0"/>
-            </a:solidFill>
-            <a:prstDash val="solid"/>
-          </a:ln>
-        </p:spPr>
-      </p:sp>
-      <p:sp>
-        <p:nvSpPr>
-          <p:cNvPr id="30" name="Text 28"/>
-          <p:cNvSpPr/>
-          <p:nvPr/>
-        </p:nvSpPr>
-        <p:spPr>
-          <a:xfrm>
-            <a:off x="2651760" y="3310128"/>
-            <a:ext cx="6035040" cy="457200"/>
-          </a:xfrm>
-          <a:prstGeom prst="rect">
-            <a:avLst/>
-          </a:prstGeom>
-          <a:noFill/>
-          <a:ln/>
-        </p:spPr>
-        <p:txBody>
-          <a:bodyPr wrap="square" rtlCol="0" anchor="ctr"/>
-          <a:lstStyle/>
-          <a:p>
-            <a:pPr algn="l" indent="0" marL="0">
-              <a:buNone/>
-            </a:pPr>
-            <a:r>
-              <a:rPr lang="en-US" sz="1200" dirty="0">
-                <a:solidFill>
-                  <a:srgbClr val="0F172A"/>
-                </a:solidFill>
-                <a:latin typeface="Calibri" pitchFamily="34" charset="0"/>
-                <a:ea typeface="Calibri" pitchFamily="34" charset="-122"/>
-                <a:cs typeface="Calibri" pitchFamily="34" charset="-120"/>
-              </a:rPr>
-              <a:t>The ideas or lessons that someone has passed on to others.</a:t>
-            </a:r>
-            <a:endParaRPr lang="en-US" sz="1200" dirty="0"/>
-          </a:p>
-        </p:txBody>
-      </p:sp>
-      <p:sp>
-        <p:nvSpPr>
-          <p:cNvPr id="31" name="Shape 29"/>
-          <p:cNvSpPr/>
-          <p:nvPr/>
-        </p:nvSpPr>
-        <p:spPr>
-          <a:xfrm>
-            <a:off x="365760" y="3840480"/>
-            <a:ext cx="2011680" cy="457200"/>
-          </a:xfrm>
-          <a:prstGeom prst="rect">
-            <a:avLst>
-              <a:gd name="adj" fmla="val 12000"/>
-            </a:avLst>
-          </a:prstGeom>
-          <a:solidFill>
-            <a:srgbClr val="EEF2FF"/>
-          </a:solidFill>
-          <a:ln w="12700">
-            <a:solidFill>
-              <a:srgbClr val="6366F1"/>
-            </a:solidFill>
-            <a:prstDash val="solid"/>
-          </a:ln>
-          <a:effectLst>
-            <a:outerShdw sx="100000" sy="100000" kx="0" ky="0" algn="bl" rotWithShape="0" blurRad="101600" dist="38100" dir="8100000">
-              <a:srgbClr val="000000">
-                <a:alpha val="12000"/>
-              </a:srgbClr>
-            </a:outerShdw>
-          </a:effectLst>
-        </p:spPr>
-      </p:sp>
-      <p:sp>
-        <p:nvSpPr>
-          <p:cNvPr id="32" name="Text 30"/>
-          <p:cNvSpPr/>
-          <p:nvPr/>
-        </p:nvSpPr>
-        <p:spPr>
-          <a:xfrm>
-            <a:off x="365760" y="3840480"/>
-            <a:ext cx="2011680" cy="457200"/>
-          </a:xfrm>
-          <a:prstGeom prst="rect">
-            <a:avLst/>
-          </a:prstGeom>
-          <a:noFill/>
-          <a:ln/>
-        </p:spPr>
-        <p:txBody>
-          <a:bodyPr wrap="square" lIns="0" tIns="0" rIns="0" bIns="0" rtlCol="0" anchor="ctr"/>
-          <a:lstStyle/>
-          <a:p>
-            <a:pPr algn="ctr" indent="0" marL="0">
-              <a:buNone/>
-            </a:pPr>
-            <a:r>
-              <a:rPr lang="en-US" sz="1200" b="1" dirty="0">
-                <a:solidFill>
-                  <a:srgbClr val="4338CA"/>
-                </a:solidFill>
-                <a:latin typeface="Trebuchet MS" pitchFamily="34" charset="0"/>
-                <a:ea typeface="Trebuchet MS" pitchFamily="34" charset="-122"/>
-                <a:cs typeface="Trebuchet MS" pitchFamily="34" charset="-120"/>
-              </a:rPr>
-              <a:t>teachable</a:t>
-            </a:r>
-            <a:endParaRPr lang="en-US" sz="1200" dirty="0"/>
-          </a:p>
-        </p:txBody>
-      </p:sp>
-      <p:sp>
-        <p:nvSpPr>
-          <p:cNvPr id="33" name="Shape 31"/>
-          <p:cNvSpPr/>
-          <p:nvPr/>
-        </p:nvSpPr>
-        <p:spPr>
-          <a:xfrm>
-            <a:off x="2514600" y="3840480"/>
-            <a:ext cx="6263640" cy="457200"/>
-          </a:xfrm>
-          <a:prstGeom prst="rect">
-            <a:avLst>
-              <a:gd name="adj" fmla="val 12000"/>
-            </a:avLst>
-          </a:prstGeom>
-          <a:solidFill>
-            <a:srgbClr val="F8FAFC"/>
-          </a:solidFill>
-          <a:ln w="12700">
-            <a:solidFill>
-              <a:srgbClr val="E2E8F0"/>
-            </a:solidFill>
-            <a:prstDash val="solid"/>
-          </a:ln>
-        </p:spPr>
-      </p:sp>
-      <p:sp>
-        <p:nvSpPr>
-          <p:cNvPr id="34" name="Text 32"/>
-          <p:cNvSpPr/>
-          <p:nvPr/>
-        </p:nvSpPr>
-        <p:spPr>
-          <a:xfrm>
-            <a:off x="2651760" y="3840480"/>
-            <a:ext cx="6035040" cy="457200"/>
-          </a:xfrm>
-          <a:prstGeom prst="rect">
-            <a:avLst/>
-          </a:prstGeom>
-          <a:noFill/>
-          <a:ln/>
-        </p:spPr>
-        <p:txBody>
-          <a:bodyPr wrap="square" rtlCol="0" anchor="ctr"/>
-          <a:lstStyle/>
-          <a:p>
-            <a:pPr algn="l" indent="0" marL="0">
-              <a:buNone/>
-            </a:pPr>
-            <a:r>
-              <a:rPr lang="en-US" sz="1200" dirty="0">
-                <a:solidFill>
-                  <a:srgbClr val="0F172A"/>
-                </a:solidFill>
-                <a:latin typeface="Calibri" pitchFamily="34" charset="0"/>
-                <a:ea typeface="Calibri" pitchFamily="34" charset="-122"/>
-                <a:cs typeface="Calibri" pitchFamily="34" charset="-120"/>
-              </a:rPr>
-              <a:t>A person who teaches a class together with another teacher.</a:t>
-            </a:r>
-            <a:endParaRPr lang="en-US" sz="1200" dirty="0"/>
-          </a:p>
-        </p:txBody>
-      </p:sp>
-      <p:sp>
-        <p:nvSpPr>
-          <p:cNvPr id="35" name="Shape 33"/>
-          <p:cNvSpPr/>
-          <p:nvPr/>
-        </p:nvSpPr>
-        <p:spPr>
-          <a:xfrm>
-            <a:off x="365760" y="4370832"/>
-            <a:ext cx="2011680" cy="457200"/>
-          </a:xfrm>
-          <a:prstGeom prst="rect">
-            <a:avLst>
-              <a:gd name="adj" fmla="val 12000"/>
-            </a:avLst>
-          </a:prstGeom>
-          <a:solidFill>
-            <a:srgbClr val="EEF2FF"/>
-          </a:solidFill>
-          <a:ln w="12700">
-            <a:solidFill>
-              <a:srgbClr val="6366F1"/>
-            </a:solidFill>
-            <a:prstDash val="solid"/>
-          </a:ln>
-          <a:effectLst>
-            <a:outerShdw sx="100000" sy="100000" kx="0" ky="0" algn="bl" rotWithShape="0" blurRad="101600" dist="38100" dir="8100000">
-              <a:srgbClr val="000000">
-                <a:alpha val="12000"/>
-              </a:srgbClr>
-            </a:outerShdw>
-          </a:effectLst>
-        </p:spPr>
-      </p:sp>
-      <p:sp>
-        <p:nvSpPr>
-          <p:cNvPr id="36" name="Text 34"/>
-          <p:cNvSpPr/>
-          <p:nvPr/>
-        </p:nvSpPr>
-        <p:spPr>
-          <a:xfrm>
-            <a:off x="365760" y="4370832"/>
-            <a:ext cx="2011680" cy="457200"/>
-          </a:xfrm>
-          <a:prstGeom prst="rect">
-            <a:avLst/>
-          </a:prstGeom>
-          <a:noFill/>
-          <a:ln/>
-        </p:spPr>
-        <p:txBody>
-          <a:bodyPr wrap="square" lIns="0" tIns="0" rIns="0" bIns="0" rtlCol="0" anchor="ctr"/>
-          <a:lstStyle/>
-          <a:p>
-            <a:pPr algn="ctr" indent="0" marL="0">
-              <a:buNone/>
-            </a:pPr>
-            <a:r>
-              <a:rPr lang="en-US" sz="1200" b="1" dirty="0">
-                <a:solidFill>
-                  <a:srgbClr val="4338CA"/>
-                </a:solidFill>
-                <a:latin typeface="Trebuchet MS" pitchFamily="34" charset="0"/>
-                <a:ea typeface="Trebuchet MS" pitchFamily="34" charset="-122"/>
-                <a:cs typeface="Trebuchet MS" pitchFamily="34" charset="-120"/>
-              </a:rPr>
-              <a:t>coteacher</a:t>
-            </a:r>
-            <a:endParaRPr lang="en-US" sz="1200" dirty="0"/>
-          </a:p>
-        </p:txBody>
-      </p:sp>
-      <p:sp>
-        <p:nvSpPr>
-          <p:cNvPr id="37" name="Shape 35"/>
-          <p:cNvSpPr/>
-          <p:nvPr/>
-        </p:nvSpPr>
-        <p:spPr>
-          <a:xfrm>
-            <a:off x="2514600" y="4370832"/>
-            <a:ext cx="6263640" cy="457200"/>
-          </a:xfrm>
-          <a:prstGeom prst="rect">
-            <a:avLst>
-              <a:gd name="adj" fmla="val 12000"/>
-            </a:avLst>
-          </a:prstGeom>
-          <a:solidFill>
-            <a:srgbClr val="F8FAFC"/>
-          </a:solidFill>
-          <a:ln w="12700">
-            <a:solidFill>
-              <a:srgbClr val="E2E8F0"/>
-            </a:solidFill>
-            <a:prstDash val="solid"/>
-          </a:ln>
-        </p:spPr>
-      </p:sp>
-      <p:sp>
-        <p:nvSpPr>
-          <p:cNvPr id="38" name="Text 36"/>
-          <p:cNvSpPr/>
-          <p:nvPr/>
-        </p:nvSpPr>
-        <p:spPr>
-          <a:xfrm>
-            <a:off x="2651760" y="4370832"/>
-            <a:ext cx="6035040" cy="457200"/>
-          </a:xfrm>
-          <a:prstGeom prst="rect">
-            <a:avLst/>
-          </a:prstGeom>
-          <a:noFill/>
-          <a:ln/>
-        </p:spPr>
-        <p:txBody>
-          <a:bodyPr wrap="square" rtlCol="0" anchor="ctr"/>
-          <a:lstStyle/>
-          <a:p>
-            <a:pPr algn="l" indent="0" marL="0">
-              <a:buNone/>
-            </a:pPr>
-            <a:r>
-              <a:rPr lang="en-US" sz="1200" dirty="0">
-                <a:solidFill>
-                  <a:srgbClr val="0F172A"/>
-                </a:solidFill>
-                <a:latin typeface="Calibri" pitchFamily="34" charset="0"/>
-                <a:ea typeface="Calibri" pitchFamily="34" charset="-122"/>
-                <a:cs typeface="Calibri" pitchFamily="34" charset="-120"/>
-              </a:rPr>
-              <a:t>The act of giving lessons or helping someone learn.</a:t>
+              <a:t>to teach something again, usually because it wasn't understood</a:t>
             </a:r>
             <a:endParaRPr lang="en-US" sz="1200" dirty="0"/>
           </a:p>
@@ -42121,7 +38663,7 @@
                 <a:ea typeface="Calibri" pitchFamily="34" charset="-122"/>
                 <a:cs typeface="Calibri" pitchFamily="34" charset="-120"/>
               </a:rPr>
-              <a:t>Word Labs  •  wordlabs.app  •  Root: 'teach' = to show or instruct</a:t>
+              <a:t>Word Labs  •  wordlabs.app  •  Root: 'teach' = to show someone how to do something</a:t>
             </a:r>
             <a:endParaRPr lang="en-US" sz="800" dirty="0"/>
           </a:p>
@@ -42324,7 +38866,7 @@
                 <a:ea typeface="Calibri" pitchFamily="34" charset="-122"/>
                 <a:cs typeface="Calibri" pitchFamily="34" charset="-120"/>
               </a:rPr>
-              <a:t>Our teacher explained how to solve the maths problem step by step.</a:t>
+              <a:t>My favourite teacher will teach us maths today.</a:t>
             </a:r>
             <a:endParaRPr lang="en-US" sz="1500" dirty="0"/>
           </a:p>
@@ -42488,7 +39030,7 @@
                 <a:ea typeface="Calibri" pitchFamily="34" charset="-122"/>
                 <a:cs typeface="Calibri" pitchFamily="34" charset="-120"/>
               </a:rPr>
-              <a:t>The teachings of that famous scientist changed the way people understood the world.</a:t>
+              <a:t>The teacher had to reteach fractions because so many pupils were confused.</a:t>
             </a:r>
             <a:endParaRPr lang="en-US" sz="1500" dirty="0"/>
           </a:p>
@@ -42652,7 +39194,7 @@
                 <a:ea typeface="Calibri" pitchFamily="34" charset="-122"/>
                 <a:cs typeface="Calibri" pitchFamily="34" charset="-120"/>
               </a:rPr>
-              <a:t>She found the new student to be very teachable and eager to learn.</a:t>
+              <a:t>Our teacher explained the maths problem clearly.</a:t>
             </a:r>
             <a:endParaRPr lang="en-US" sz="1500" dirty="0"/>
           </a:p>
